--- a/doc/EWP V3 Saga Implementation.pptx
+++ b/doc/EWP V3 Saga Implementation.pptx
@@ -5,7 +5,15 @@
     <p:sldMasterId id="2147483648" r:id="rId1"/>
   </p:sldMasterIdLst>
   <p:sldIdLst>
-    <p:sldId id="256" r:id="rId2"/>
+    <p:sldId id="258" r:id="rId2"/>
+    <p:sldId id="260" r:id="rId3"/>
+    <p:sldId id="261" r:id="rId4"/>
+    <p:sldId id="262" r:id="rId5"/>
+    <p:sldId id="263" r:id="rId6"/>
+    <p:sldId id="264" r:id="rId7"/>
+    <p:sldId id="265" r:id="rId8"/>
+    <p:sldId id="266" r:id="rId9"/>
+    <p:sldId id="267" r:id="rId10"/>
   </p:sldIdLst>
   <p:sldSz cx="12192000" cy="6858000"/>
   <p:notesSz cx="6858000" cy="9144000"/>
@@ -104,6 +112,11 @@
       </a:defRPr>
     </a:lvl9pPr>
   </p:defaultTextStyle>
+  <p:extLst>
+    <p:ext uri="{EFAFB233-063F-42B5-8137-9DF3F51BA10A}">
+      <p15:sldGuideLst xmlns:p15="http://schemas.microsoft.com/office/powerpoint/2012/main"/>
+    </p:ext>
+  </p:extLst>
 </p:presentation>
 </file>
 
@@ -256,7 +269,7 @@
           <a:p>
             <a:fld id="{40EC051C-301A-4C05-BB7C-609F0D3C8F39}" type="datetimeFigureOut">
               <a:rPr lang="en-IN" smtClean="0"/>
-              <a:t>09-10-2026</a:t>
+              <a:t>10-10-2026</a:t>
             </a:fld>
             <a:endParaRPr lang="en-IN"/>
           </a:p>
@@ -330,6 +343,295 @@
 </file>
 
 <file path=ppt/slideLayouts/slideLayout10.xml><?xml version="1.0" encoding="utf-8"?>
+<p:sldLayout xmlns:a="http://schemas.openxmlformats.org/drawingml/2006/main" xmlns:r="http://schemas.openxmlformats.org/officeDocument/2006/relationships" xmlns:p="http://schemas.openxmlformats.org/presentationml/2006/main" type="picTx" preserve="1">
+  <p:cSld name="Picture with Caption">
+    <p:spTree>
+      <p:nvGrpSpPr>
+        <p:cNvPr id="1" name=""/>
+        <p:cNvGrpSpPr/>
+        <p:nvPr/>
+      </p:nvGrpSpPr>
+      <p:grpSpPr>
+        <a:xfrm>
+          <a:off x="0" y="0"/>
+          <a:ext cx="0" cy="0"/>
+          <a:chOff x="0" y="0"/>
+          <a:chExt cx="0" cy="0"/>
+        </a:xfrm>
+      </p:grpSpPr>
+      <p:sp>
+        <p:nvSpPr>
+          <p:cNvPr id="2" name="Title 1">
+            <a:extLst>
+              <a:ext uri="{FF2B5EF4-FFF2-40B4-BE49-F238E27FC236}">
+                <a16:creationId xmlns:a16="http://schemas.microsoft.com/office/drawing/2014/main" id="{0045B226-990E-5EA5-58F4-3E183A4713D7}"/>
+              </a:ext>
+            </a:extLst>
+          </p:cNvPr>
+          <p:cNvSpPr>
+            <a:spLocks noGrp="1"/>
+          </p:cNvSpPr>
+          <p:nvPr>
+            <p:ph type="title"/>
+          </p:nvPr>
+        </p:nvSpPr>
+        <p:spPr>
+          <a:xfrm>
+            <a:off x="839788" y="457200"/>
+            <a:ext cx="3932237" cy="1600200"/>
+          </a:xfrm>
+        </p:spPr>
+        <p:txBody>
+          <a:bodyPr anchor="b"/>
+          <a:lstStyle>
+            <a:lvl1pPr>
+              <a:defRPr sz="3200"/>
+            </a:lvl1pPr>
+          </a:lstStyle>
+          <a:p>
+            <a:r>
+              <a:rPr lang="en-US"/>
+              <a:t>Click to edit Master title style</a:t>
+            </a:r>
+            <a:endParaRPr lang="en-IN"/>
+          </a:p>
+        </p:txBody>
+      </p:sp>
+      <p:sp>
+        <p:nvSpPr>
+          <p:cNvPr id="3" name="Picture Placeholder 2">
+            <a:extLst>
+              <a:ext uri="{FF2B5EF4-FFF2-40B4-BE49-F238E27FC236}">
+                <a16:creationId xmlns:a16="http://schemas.microsoft.com/office/drawing/2014/main" id="{C20416BB-F28D-EDEB-624C-1619E11D1A38}"/>
+              </a:ext>
+            </a:extLst>
+          </p:cNvPr>
+          <p:cNvSpPr>
+            <a:spLocks noGrp="1" noChangeAspect="1"/>
+          </p:cNvSpPr>
+          <p:nvPr>
+            <p:ph type="pic" idx="1"/>
+          </p:nvPr>
+        </p:nvSpPr>
+        <p:spPr>
+          <a:xfrm>
+            <a:off x="5183188" y="987425"/>
+            <a:ext cx="6172200" cy="4873625"/>
+          </a:xfrm>
+        </p:spPr>
+        <p:txBody>
+          <a:bodyPr/>
+          <a:lstStyle>
+            <a:lvl1pPr marL="0" indent="0">
+              <a:buNone/>
+              <a:defRPr sz="3200"/>
+            </a:lvl1pPr>
+            <a:lvl2pPr marL="457200" indent="0">
+              <a:buNone/>
+              <a:defRPr sz="2800"/>
+            </a:lvl2pPr>
+            <a:lvl3pPr marL="914400" indent="0">
+              <a:buNone/>
+              <a:defRPr sz="2400"/>
+            </a:lvl3pPr>
+            <a:lvl4pPr marL="1371600" indent="0">
+              <a:buNone/>
+              <a:defRPr sz="2000"/>
+            </a:lvl4pPr>
+            <a:lvl5pPr marL="1828800" indent="0">
+              <a:buNone/>
+              <a:defRPr sz="2000"/>
+            </a:lvl5pPr>
+            <a:lvl6pPr marL="2286000" indent="0">
+              <a:buNone/>
+              <a:defRPr sz="2000"/>
+            </a:lvl6pPr>
+            <a:lvl7pPr marL="2743200" indent="0">
+              <a:buNone/>
+              <a:defRPr sz="2000"/>
+            </a:lvl7pPr>
+            <a:lvl8pPr marL="3200400" indent="0">
+              <a:buNone/>
+              <a:defRPr sz="2000"/>
+            </a:lvl8pPr>
+            <a:lvl9pPr marL="3657600" indent="0">
+              <a:buNone/>
+              <a:defRPr sz="2000"/>
+            </a:lvl9pPr>
+          </a:lstStyle>
+          <a:p>
+            <a:endParaRPr lang="en-IN"/>
+          </a:p>
+        </p:txBody>
+      </p:sp>
+      <p:sp>
+        <p:nvSpPr>
+          <p:cNvPr id="4" name="Text Placeholder 3">
+            <a:extLst>
+              <a:ext uri="{FF2B5EF4-FFF2-40B4-BE49-F238E27FC236}">
+                <a16:creationId xmlns:a16="http://schemas.microsoft.com/office/drawing/2014/main" id="{B1CB8F1C-80FF-F76B-B76A-240E09644937}"/>
+              </a:ext>
+            </a:extLst>
+          </p:cNvPr>
+          <p:cNvSpPr>
+            <a:spLocks noGrp="1"/>
+          </p:cNvSpPr>
+          <p:nvPr>
+            <p:ph type="body" sz="half" idx="2"/>
+          </p:nvPr>
+        </p:nvSpPr>
+        <p:spPr>
+          <a:xfrm>
+            <a:off x="839788" y="2057400"/>
+            <a:ext cx="3932237" cy="3811588"/>
+          </a:xfrm>
+        </p:spPr>
+        <p:txBody>
+          <a:bodyPr/>
+          <a:lstStyle>
+            <a:lvl1pPr marL="0" indent="0">
+              <a:buNone/>
+              <a:defRPr sz="1600"/>
+            </a:lvl1pPr>
+            <a:lvl2pPr marL="457200" indent="0">
+              <a:buNone/>
+              <a:defRPr sz="1400"/>
+            </a:lvl2pPr>
+            <a:lvl3pPr marL="914400" indent="0">
+              <a:buNone/>
+              <a:defRPr sz="1200"/>
+            </a:lvl3pPr>
+            <a:lvl4pPr marL="1371600" indent="0">
+              <a:buNone/>
+              <a:defRPr sz="1000"/>
+            </a:lvl4pPr>
+            <a:lvl5pPr marL="1828800" indent="0">
+              <a:buNone/>
+              <a:defRPr sz="1000"/>
+            </a:lvl5pPr>
+            <a:lvl6pPr marL="2286000" indent="0">
+              <a:buNone/>
+              <a:defRPr sz="1000"/>
+            </a:lvl6pPr>
+            <a:lvl7pPr marL="2743200" indent="0">
+              <a:buNone/>
+              <a:defRPr sz="1000"/>
+            </a:lvl7pPr>
+            <a:lvl8pPr marL="3200400" indent="0">
+              <a:buNone/>
+              <a:defRPr sz="1000"/>
+            </a:lvl8pPr>
+            <a:lvl9pPr marL="3657600" indent="0">
+              <a:buNone/>
+              <a:defRPr sz="1000"/>
+            </a:lvl9pPr>
+          </a:lstStyle>
+          <a:p>
+            <a:pPr lvl="0"/>
+            <a:r>
+              <a:rPr lang="en-US"/>
+              <a:t>Click to edit Master text styles</a:t>
+            </a:r>
+          </a:p>
+        </p:txBody>
+      </p:sp>
+      <p:sp>
+        <p:nvSpPr>
+          <p:cNvPr id="5" name="Date Placeholder 4">
+            <a:extLst>
+              <a:ext uri="{FF2B5EF4-FFF2-40B4-BE49-F238E27FC236}">
+                <a16:creationId xmlns:a16="http://schemas.microsoft.com/office/drawing/2014/main" id="{498588EA-BFD7-E5DE-CED1-22D00A812D40}"/>
+              </a:ext>
+            </a:extLst>
+          </p:cNvPr>
+          <p:cNvSpPr>
+            <a:spLocks noGrp="1"/>
+          </p:cNvSpPr>
+          <p:nvPr>
+            <p:ph type="dt" sz="half" idx="10"/>
+          </p:nvPr>
+        </p:nvSpPr>
+        <p:spPr/>
+        <p:txBody>
+          <a:bodyPr/>
+          <a:lstStyle/>
+          <a:p>
+            <a:fld id="{40EC051C-301A-4C05-BB7C-609F0D3C8F39}" type="datetimeFigureOut">
+              <a:rPr lang="en-IN" smtClean="0"/>
+              <a:t>10-10-2026</a:t>
+            </a:fld>
+            <a:endParaRPr lang="en-IN"/>
+          </a:p>
+        </p:txBody>
+      </p:sp>
+      <p:sp>
+        <p:nvSpPr>
+          <p:cNvPr id="6" name="Footer Placeholder 5">
+            <a:extLst>
+              <a:ext uri="{FF2B5EF4-FFF2-40B4-BE49-F238E27FC236}">
+                <a16:creationId xmlns:a16="http://schemas.microsoft.com/office/drawing/2014/main" id="{E5DCA7B3-CFBB-E0F5-6F2F-2C0B5D05EE3C}"/>
+              </a:ext>
+            </a:extLst>
+          </p:cNvPr>
+          <p:cNvSpPr>
+            <a:spLocks noGrp="1"/>
+          </p:cNvSpPr>
+          <p:nvPr>
+            <p:ph type="ftr" sz="quarter" idx="11"/>
+          </p:nvPr>
+        </p:nvSpPr>
+        <p:spPr/>
+        <p:txBody>
+          <a:bodyPr/>
+          <a:lstStyle/>
+          <a:p>
+            <a:endParaRPr lang="en-IN"/>
+          </a:p>
+        </p:txBody>
+      </p:sp>
+      <p:sp>
+        <p:nvSpPr>
+          <p:cNvPr id="7" name="Slide Number Placeholder 6">
+            <a:extLst>
+              <a:ext uri="{FF2B5EF4-FFF2-40B4-BE49-F238E27FC236}">
+                <a16:creationId xmlns:a16="http://schemas.microsoft.com/office/drawing/2014/main" id="{98479C50-C5B4-8663-2602-75942D3B5A27}"/>
+              </a:ext>
+            </a:extLst>
+          </p:cNvPr>
+          <p:cNvSpPr>
+            <a:spLocks noGrp="1"/>
+          </p:cNvSpPr>
+          <p:nvPr>
+            <p:ph type="sldNum" sz="quarter" idx="12"/>
+          </p:nvPr>
+        </p:nvSpPr>
+        <p:spPr/>
+        <p:txBody>
+          <a:bodyPr/>
+          <a:lstStyle/>
+          <a:p>
+            <a:fld id="{A0025D24-38F0-449E-81DE-AE3BE376B933}" type="slidenum">
+              <a:rPr lang="en-IN" smtClean="0"/>
+              <a:t>‹#›</a:t>
+            </a:fld>
+            <a:endParaRPr lang="en-IN"/>
+          </a:p>
+        </p:txBody>
+      </p:sp>
+    </p:spTree>
+    <p:extLst>
+      <p:ext uri="{BB962C8B-B14F-4D97-AF65-F5344CB8AC3E}">
+        <p14:creationId xmlns:p14="http://schemas.microsoft.com/office/powerpoint/2010/main" val="12776519"/>
+      </p:ext>
+    </p:extLst>
+  </p:cSld>
+  <p:clrMapOvr>
+    <a:masterClrMapping/>
+  </p:clrMapOvr>
+</p:sldLayout>
+</file>
+
+<file path=ppt/slideLayouts/slideLayout11.xml><?xml version="1.0" encoding="utf-8"?>
 <p:sldLayout xmlns:a="http://schemas.openxmlformats.org/drawingml/2006/main" xmlns:r="http://schemas.openxmlformats.org/officeDocument/2006/relationships" xmlns:p="http://schemas.openxmlformats.org/presentationml/2006/main" type="vertTx" preserve="1">
   <p:cSld name="Title and Vertical Text">
     <p:spTree>
@@ -456,7 +758,7 @@
           <a:p>
             <a:fld id="{40EC051C-301A-4C05-BB7C-609F0D3C8F39}" type="datetimeFigureOut">
               <a:rPr lang="en-IN" smtClean="0"/>
-              <a:t>09-10-2026</a:t>
+              <a:t>10-10-2026</a:t>
             </a:fld>
             <a:endParaRPr lang="en-IN"/>
           </a:p>
@@ -529,7 +831,7 @@
 </p:sldLayout>
 </file>
 
-<file path=ppt/slideLayouts/slideLayout11.xml><?xml version="1.0" encoding="utf-8"?>
+<file path=ppt/slideLayouts/slideLayout12.xml><?xml version="1.0" encoding="utf-8"?>
 <p:sldLayout xmlns:a="http://schemas.openxmlformats.org/drawingml/2006/main" xmlns:r="http://schemas.openxmlformats.org/officeDocument/2006/relationships" xmlns:p="http://schemas.openxmlformats.org/presentationml/2006/main" type="vertTitleAndTx" preserve="1">
   <p:cSld name="Vertical Title and Text">
     <p:spTree>
@@ -666,7 +968,7 @@
           <a:p>
             <a:fld id="{40EC051C-301A-4C05-BB7C-609F0D3C8F39}" type="datetimeFigureOut">
               <a:rPr lang="en-IN" smtClean="0"/>
-              <a:t>09-10-2026</a:t>
+              <a:t>10-10-2026</a:t>
             </a:fld>
             <a:endParaRPr lang="en-IN"/>
           </a:p>
@@ -866,7 +1168,7 @@
           <a:p>
             <a:fld id="{40EC051C-301A-4C05-BB7C-609F0D3C8F39}" type="datetimeFigureOut">
               <a:rPr lang="en-IN" smtClean="0"/>
-              <a:t>09-10-2026</a:t>
+              <a:t>10-10-2026</a:t>
             </a:fld>
             <a:endParaRPr lang="en-IN"/>
           </a:p>
@@ -1142,7 +1444,7 @@
           <a:p>
             <a:fld id="{40EC051C-301A-4C05-BB7C-609F0D3C8F39}" type="datetimeFigureOut">
               <a:rPr lang="en-IN" smtClean="0"/>
-              <a:t>09-10-2026</a:t>
+              <a:t>10-10-2026</a:t>
             </a:fld>
             <a:endParaRPr lang="en-IN"/>
           </a:p>
@@ -1410,7 +1712,7 @@
           <a:p>
             <a:fld id="{40EC051C-301A-4C05-BB7C-609F0D3C8F39}" type="datetimeFigureOut">
               <a:rPr lang="en-IN" smtClean="0"/>
-              <a:t>09-10-2026</a:t>
+              <a:t>10-10-2026</a:t>
             </a:fld>
             <a:endParaRPr lang="en-IN"/>
           </a:p>
@@ -1825,7 +2127,7 @@
           <a:p>
             <a:fld id="{40EC051C-301A-4C05-BB7C-609F0D3C8F39}" type="datetimeFigureOut">
               <a:rPr lang="en-IN" smtClean="0"/>
-              <a:t>09-10-2026</a:t>
+              <a:t>10-10-2026</a:t>
             </a:fld>
             <a:endParaRPr lang="en-IN"/>
           </a:p>
@@ -1967,7 +2269,7 @@
           <a:p>
             <a:fld id="{40EC051C-301A-4C05-BB7C-609F0D3C8F39}" type="datetimeFigureOut">
               <a:rPr lang="en-IN" smtClean="0"/>
-              <a:t>09-10-2026</a:t>
+              <a:t>10-10-2026</a:t>
             </a:fld>
             <a:endParaRPr lang="en-IN"/>
           </a:p>
@@ -2041,6 +2343,176 @@
 </file>
 
 <file path=ppt/slideLayouts/slideLayout7.xml><?xml version="1.0" encoding="utf-8"?>
+<p:sldLayout xmlns:a="http://schemas.openxmlformats.org/drawingml/2006/main" xmlns:r="http://schemas.openxmlformats.org/officeDocument/2006/relationships" xmlns:p="http://schemas.openxmlformats.org/presentationml/2006/main" type="titleOnly" preserve="1">
+  <p:cSld name="1_Title Only">
+    <p:bg>
+      <p:bgPr>
+        <a:solidFill>
+          <a:srgbClr val="000032"/>
+        </a:solidFill>
+        <a:effectLst/>
+      </p:bgPr>
+    </p:bg>
+    <p:spTree>
+      <p:nvGrpSpPr>
+        <p:cNvPr id="1" name=""/>
+        <p:cNvGrpSpPr/>
+        <p:nvPr/>
+      </p:nvGrpSpPr>
+      <p:grpSpPr>
+        <a:xfrm>
+          <a:off x="0" y="0"/>
+          <a:ext cx="0" cy="0"/>
+          <a:chOff x="0" y="0"/>
+          <a:chExt cx="0" cy="0"/>
+        </a:xfrm>
+      </p:grpSpPr>
+      <p:sp>
+        <p:nvSpPr>
+          <p:cNvPr id="2" name="Title 1">
+            <a:extLst>
+              <a:ext uri="{FF2B5EF4-FFF2-40B4-BE49-F238E27FC236}">
+                <a16:creationId xmlns:a16="http://schemas.microsoft.com/office/drawing/2014/main" id="{DE4DE40B-C974-9105-7F5F-2ADA0D324211}"/>
+              </a:ext>
+            </a:extLst>
+          </p:cNvPr>
+          <p:cNvSpPr>
+            <a:spLocks noGrp="1"/>
+          </p:cNvSpPr>
+          <p:nvPr>
+            <p:ph type="title"/>
+          </p:nvPr>
+        </p:nvSpPr>
+        <p:spPr>
+          <a:xfrm>
+            <a:off x="232682" y="2698750"/>
+            <a:ext cx="11726635" cy="1325563"/>
+          </a:xfrm>
+        </p:spPr>
+        <p:txBody>
+          <a:bodyPr/>
+          <a:lstStyle>
+            <a:lvl1pPr>
+              <a:defRPr>
+                <a:solidFill>
+                  <a:schemeClr val="accent1"/>
+                </a:solidFill>
+                <a:effectLst>
+                  <a:outerShdw blurRad="38100" dist="38100" dir="2700000" algn="tl">
+                    <a:srgbClr val="000000">
+                      <a:alpha val="43137"/>
+                    </a:srgbClr>
+                  </a:outerShdw>
+                </a:effectLst>
+              </a:defRPr>
+            </a:lvl1pPr>
+          </a:lstStyle>
+          <a:p>
+            <a:r>
+              <a:rPr lang="en-US" dirty="0"/>
+              <a:t>Click to edit Master title style</a:t>
+            </a:r>
+            <a:endParaRPr lang="en-IN" dirty="0"/>
+          </a:p>
+        </p:txBody>
+      </p:sp>
+      <p:sp>
+        <p:nvSpPr>
+          <p:cNvPr id="3" name="Date Placeholder 2">
+            <a:extLst>
+              <a:ext uri="{FF2B5EF4-FFF2-40B4-BE49-F238E27FC236}">
+                <a16:creationId xmlns:a16="http://schemas.microsoft.com/office/drawing/2014/main" id="{806E1FF2-42FE-FDA5-F4C0-5CC9812024EE}"/>
+              </a:ext>
+            </a:extLst>
+          </p:cNvPr>
+          <p:cNvSpPr>
+            <a:spLocks noGrp="1"/>
+          </p:cNvSpPr>
+          <p:nvPr>
+            <p:ph type="dt" sz="half" idx="10"/>
+          </p:nvPr>
+        </p:nvSpPr>
+        <p:spPr/>
+        <p:txBody>
+          <a:bodyPr/>
+          <a:lstStyle/>
+          <a:p>
+            <a:fld id="{40EC051C-301A-4C05-BB7C-609F0D3C8F39}" type="datetimeFigureOut">
+              <a:rPr lang="en-IN" smtClean="0"/>
+              <a:t>10-10-2026</a:t>
+            </a:fld>
+            <a:endParaRPr lang="en-IN"/>
+          </a:p>
+        </p:txBody>
+      </p:sp>
+      <p:sp>
+        <p:nvSpPr>
+          <p:cNvPr id="4" name="Footer Placeholder 3">
+            <a:extLst>
+              <a:ext uri="{FF2B5EF4-FFF2-40B4-BE49-F238E27FC236}">
+                <a16:creationId xmlns:a16="http://schemas.microsoft.com/office/drawing/2014/main" id="{1EF500B7-BD8E-1880-1DA2-D39692B8BF03}"/>
+              </a:ext>
+            </a:extLst>
+          </p:cNvPr>
+          <p:cNvSpPr>
+            <a:spLocks noGrp="1"/>
+          </p:cNvSpPr>
+          <p:nvPr>
+            <p:ph type="ftr" sz="quarter" idx="11"/>
+          </p:nvPr>
+        </p:nvSpPr>
+        <p:spPr/>
+        <p:txBody>
+          <a:bodyPr/>
+          <a:lstStyle/>
+          <a:p>
+            <a:endParaRPr lang="en-IN"/>
+          </a:p>
+        </p:txBody>
+      </p:sp>
+      <p:sp>
+        <p:nvSpPr>
+          <p:cNvPr id="5" name="Slide Number Placeholder 4">
+            <a:extLst>
+              <a:ext uri="{FF2B5EF4-FFF2-40B4-BE49-F238E27FC236}">
+                <a16:creationId xmlns:a16="http://schemas.microsoft.com/office/drawing/2014/main" id="{19540BBD-1FB5-A212-9240-6BF4D08FA48D}"/>
+              </a:ext>
+            </a:extLst>
+          </p:cNvPr>
+          <p:cNvSpPr>
+            <a:spLocks noGrp="1"/>
+          </p:cNvSpPr>
+          <p:nvPr>
+            <p:ph type="sldNum" sz="quarter" idx="12"/>
+          </p:nvPr>
+        </p:nvSpPr>
+        <p:spPr/>
+        <p:txBody>
+          <a:bodyPr/>
+          <a:lstStyle/>
+          <a:p>
+            <a:fld id="{A0025D24-38F0-449E-81DE-AE3BE376B933}" type="slidenum">
+              <a:rPr lang="en-IN" smtClean="0"/>
+              <a:t>‹#›</a:t>
+            </a:fld>
+            <a:endParaRPr lang="en-IN"/>
+          </a:p>
+        </p:txBody>
+      </p:sp>
+    </p:spTree>
+    <p:extLst>
+      <p:ext uri="{BB962C8B-B14F-4D97-AF65-F5344CB8AC3E}">
+        <p14:creationId xmlns:p14="http://schemas.microsoft.com/office/powerpoint/2010/main" val="1788138067"/>
+      </p:ext>
+    </p:extLst>
+  </p:cSld>
+  <p:clrMapOvr>
+    <a:masterClrMapping/>
+  </p:clrMapOvr>
+</p:sldLayout>
+</file>
+
+<file path=ppt/slideLayouts/slideLayout8.xml><?xml version="1.0" encoding="utf-8"?>
 <p:sldLayout xmlns:a="http://schemas.openxmlformats.org/drawingml/2006/main" xmlns:r="http://schemas.openxmlformats.org/officeDocument/2006/relationships" xmlns:p="http://schemas.openxmlformats.org/presentationml/2006/main" type="blank" preserve="1">
   <p:cSld name="Blank">
     <p:spTree>
@@ -2080,7 +2552,7 @@
           <a:p>
             <a:fld id="{40EC051C-301A-4C05-BB7C-609F0D3C8F39}" type="datetimeFigureOut">
               <a:rPr lang="en-IN" smtClean="0"/>
-              <a:t>09-10-2026</a:t>
+              <a:t>10-10-2026</a:t>
             </a:fld>
             <a:endParaRPr lang="en-IN"/>
           </a:p>
@@ -2153,7 +2625,7 @@
 </p:sldLayout>
 </file>
 
-<file path=ppt/slideLayouts/slideLayout8.xml><?xml version="1.0" encoding="utf-8"?>
+<file path=ppt/slideLayouts/slideLayout9.xml><?xml version="1.0" encoding="utf-8"?>
 <p:sldLayout xmlns:a="http://schemas.openxmlformats.org/drawingml/2006/main" xmlns:r="http://schemas.openxmlformats.org/officeDocument/2006/relationships" xmlns:p="http://schemas.openxmlformats.org/presentationml/2006/main" type="objTx" preserve="1">
   <p:cSld name="Content with Caption">
     <p:spTree>
@@ -2393,7 +2865,7 @@
           <a:p>
             <a:fld id="{40EC051C-301A-4C05-BB7C-609F0D3C8F39}" type="datetimeFigureOut">
               <a:rPr lang="en-IN" smtClean="0"/>
-              <a:t>09-10-2026</a:t>
+              <a:t>10-10-2026</a:t>
             </a:fld>
             <a:endParaRPr lang="en-IN"/>
           </a:p>
@@ -2457,295 +2929,6 @@
     <p:extLst>
       <p:ext uri="{BB962C8B-B14F-4D97-AF65-F5344CB8AC3E}">
         <p14:creationId xmlns:p14="http://schemas.microsoft.com/office/powerpoint/2010/main" val="3998950285"/>
-      </p:ext>
-    </p:extLst>
-  </p:cSld>
-  <p:clrMapOvr>
-    <a:masterClrMapping/>
-  </p:clrMapOvr>
-</p:sldLayout>
-</file>
-
-<file path=ppt/slideLayouts/slideLayout9.xml><?xml version="1.0" encoding="utf-8"?>
-<p:sldLayout xmlns:a="http://schemas.openxmlformats.org/drawingml/2006/main" xmlns:r="http://schemas.openxmlformats.org/officeDocument/2006/relationships" xmlns:p="http://schemas.openxmlformats.org/presentationml/2006/main" type="picTx" preserve="1">
-  <p:cSld name="Picture with Caption">
-    <p:spTree>
-      <p:nvGrpSpPr>
-        <p:cNvPr id="1" name=""/>
-        <p:cNvGrpSpPr/>
-        <p:nvPr/>
-      </p:nvGrpSpPr>
-      <p:grpSpPr>
-        <a:xfrm>
-          <a:off x="0" y="0"/>
-          <a:ext cx="0" cy="0"/>
-          <a:chOff x="0" y="0"/>
-          <a:chExt cx="0" cy="0"/>
-        </a:xfrm>
-      </p:grpSpPr>
-      <p:sp>
-        <p:nvSpPr>
-          <p:cNvPr id="2" name="Title 1">
-            <a:extLst>
-              <a:ext uri="{FF2B5EF4-FFF2-40B4-BE49-F238E27FC236}">
-                <a16:creationId xmlns:a16="http://schemas.microsoft.com/office/drawing/2014/main" id="{0045B226-990E-5EA5-58F4-3E183A4713D7}"/>
-              </a:ext>
-            </a:extLst>
-          </p:cNvPr>
-          <p:cNvSpPr>
-            <a:spLocks noGrp="1"/>
-          </p:cNvSpPr>
-          <p:nvPr>
-            <p:ph type="title"/>
-          </p:nvPr>
-        </p:nvSpPr>
-        <p:spPr>
-          <a:xfrm>
-            <a:off x="839788" y="457200"/>
-            <a:ext cx="3932237" cy="1600200"/>
-          </a:xfrm>
-        </p:spPr>
-        <p:txBody>
-          <a:bodyPr anchor="b"/>
-          <a:lstStyle>
-            <a:lvl1pPr>
-              <a:defRPr sz="3200"/>
-            </a:lvl1pPr>
-          </a:lstStyle>
-          <a:p>
-            <a:r>
-              <a:rPr lang="en-US"/>
-              <a:t>Click to edit Master title style</a:t>
-            </a:r>
-            <a:endParaRPr lang="en-IN"/>
-          </a:p>
-        </p:txBody>
-      </p:sp>
-      <p:sp>
-        <p:nvSpPr>
-          <p:cNvPr id="3" name="Picture Placeholder 2">
-            <a:extLst>
-              <a:ext uri="{FF2B5EF4-FFF2-40B4-BE49-F238E27FC236}">
-                <a16:creationId xmlns:a16="http://schemas.microsoft.com/office/drawing/2014/main" id="{C20416BB-F28D-EDEB-624C-1619E11D1A38}"/>
-              </a:ext>
-            </a:extLst>
-          </p:cNvPr>
-          <p:cNvSpPr>
-            <a:spLocks noGrp="1" noChangeAspect="1"/>
-          </p:cNvSpPr>
-          <p:nvPr>
-            <p:ph type="pic" idx="1"/>
-          </p:nvPr>
-        </p:nvSpPr>
-        <p:spPr>
-          <a:xfrm>
-            <a:off x="5183188" y="987425"/>
-            <a:ext cx="6172200" cy="4873625"/>
-          </a:xfrm>
-        </p:spPr>
-        <p:txBody>
-          <a:bodyPr/>
-          <a:lstStyle>
-            <a:lvl1pPr marL="0" indent="0">
-              <a:buNone/>
-              <a:defRPr sz="3200"/>
-            </a:lvl1pPr>
-            <a:lvl2pPr marL="457200" indent="0">
-              <a:buNone/>
-              <a:defRPr sz="2800"/>
-            </a:lvl2pPr>
-            <a:lvl3pPr marL="914400" indent="0">
-              <a:buNone/>
-              <a:defRPr sz="2400"/>
-            </a:lvl3pPr>
-            <a:lvl4pPr marL="1371600" indent="0">
-              <a:buNone/>
-              <a:defRPr sz="2000"/>
-            </a:lvl4pPr>
-            <a:lvl5pPr marL="1828800" indent="0">
-              <a:buNone/>
-              <a:defRPr sz="2000"/>
-            </a:lvl5pPr>
-            <a:lvl6pPr marL="2286000" indent="0">
-              <a:buNone/>
-              <a:defRPr sz="2000"/>
-            </a:lvl6pPr>
-            <a:lvl7pPr marL="2743200" indent="0">
-              <a:buNone/>
-              <a:defRPr sz="2000"/>
-            </a:lvl7pPr>
-            <a:lvl8pPr marL="3200400" indent="0">
-              <a:buNone/>
-              <a:defRPr sz="2000"/>
-            </a:lvl8pPr>
-            <a:lvl9pPr marL="3657600" indent="0">
-              <a:buNone/>
-              <a:defRPr sz="2000"/>
-            </a:lvl9pPr>
-          </a:lstStyle>
-          <a:p>
-            <a:endParaRPr lang="en-IN"/>
-          </a:p>
-        </p:txBody>
-      </p:sp>
-      <p:sp>
-        <p:nvSpPr>
-          <p:cNvPr id="4" name="Text Placeholder 3">
-            <a:extLst>
-              <a:ext uri="{FF2B5EF4-FFF2-40B4-BE49-F238E27FC236}">
-                <a16:creationId xmlns:a16="http://schemas.microsoft.com/office/drawing/2014/main" id="{B1CB8F1C-80FF-F76B-B76A-240E09644937}"/>
-              </a:ext>
-            </a:extLst>
-          </p:cNvPr>
-          <p:cNvSpPr>
-            <a:spLocks noGrp="1"/>
-          </p:cNvSpPr>
-          <p:nvPr>
-            <p:ph type="body" sz="half" idx="2"/>
-          </p:nvPr>
-        </p:nvSpPr>
-        <p:spPr>
-          <a:xfrm>
-            <a:off x="839788" y="2057400"/>
-            <a:ext cx="3932237" cy="3811588"/>
-          </a:xfrm>
-        </p:spPr>
-        <p:txBody>
-          <a:bodyPr/>
-          <a:lstStyle>
-            <a:lvl1pPr marL="0" indent="0">
-              <a:buNone/>
-              <a:defRPr sz="1600"/>
-            </a:lvl1pPr>
-            <a:lvl2pPr marL="457200" indent="0">
-              <a:buNone/>
-              <a:defRPr sz="1400"/>
-            </a:lvl2pPr>
-            <a:lvl3pPr marL="914400" indent="0">
-              <a:buNone/>
-              <a:defRPr sz="1200"/>
-            </a:lvl3pPr>
-            <a:lvl4pPr marL="1371600" indent="0">
-              <a:buNone/>
-              <a:defRPr sz="1000"/>
-            </a:lvl4pPr>
-            <a:lvl5pPr marL="1828800" indent="0">
-              <a:buNone/>
-              <a:defRPr sz="1000"/>
-            </a:lvl5pPr>
-            <a:lvl6pPr marL="2286000" indent="0">
-              <a:buNone/>
-              <a:defRPr sz="1000"/>
-            </a:lvl6pPr>
-            <a:lvl7pPr marL="2743200" indent="0">
-              <a:buNone/>
-              <a:defRPr sz="1000"/>
-            </a:lvl7pPr>
-            <a:lvl8pPr marL="3200400" indent="0">
-              <a:buNone/>
-              <a:defRPr sz="1000"/>
-            </a:lvl8pPr>
-            <a:lvl9pPr marL="3657600" indent="0">
-              <a:buNone/>
-              <a:defRPr sz="1000"/>
-            </a:lvl9pPr>
-          </a:lstStyle>
-          <a:p>
-            <a:pPr lvl="0"/>
-            <a:r>
-              <a:rPr lang="en-US"/>
-              <a:t>Click to edit Master text styles</a:t>
-            </a:r>
-          </a:p>
-        </p:txBody>
-      </p:sp>
-      <p:sp>
-        <p:nvSpPr>
-          <p:cNvPr id="5" name="Date Placeholder 4">
-            <a:extLst>
-              <a:ext uri="{FF2B5EF4-FFF2-40B4-BE49-F238E27FC236}">
-                <a16:creationId xmlns:a16="http://schemas.microsoft.com/office/drawing/2014/main" id="{498588EA-BFD7-E5DE-CED1-22D00A812D40}"/>
-              </a:ext>
-            </a:extLst>
-          </p:cNvPr>
-          <p:cNvSpPr>
-            <a:spLocks noGrp="1"/>
-          </p:cNvSpPr>
-          <p:nvPr>
-            <p:ph type="dt" sz="half" idx="10"/>
-          </p:nvPr>
-        </p:nvSpPr>
-        <p:spPr/>
-        <p:txBody>
-          <a:bodyPr/>
-          <a:lstStyle/>
-          <a:p>
-            <a:fld id="{40EC051C-301A-4C05-BB7C-609F0D3C8F39}" type="datetimeFigureOut">
-              <a:rPr lang="en-IN" smtClean="0"/>
-              <a:t>09-10-2026</a:t>
-            </a:fld>
-            <a:endParaRPr lang="en-IN"/>
-          </a:p>
-        </p:txBody>
-      </p:sp>
-      <p:sp>
-        <p:nvSpPr>
-          <p:cNvPr id="6" name="Footer Placeholder 5">
-            <a:extLst>
-              <a:ext uri="{FF2B5EF4-FFF2-40B4-BE49-F238E27FC236}">
-                <a16:creationId xmlns:a16="http://schemas.microsoft.com/office/drawing/2014/main" id="{E5DCA7B3-CFBB-E0F5-6F2F-2C0B5D05EE3C}"/>
-              </a:ext>
-            </a:extLst>
-          </p:cNvPr>
-          <p:cNvSpPr>
-            <a:spLocks noGrp="1"/>
-          </p:cNvSpPr>
-          <p:nvPr>
-            <p:ph type="ftr" sz="quarter" idx="11"/>
-          </p:nvPr>
-        </p:nvSpPr>
-        <p:spPr/>
-        <p:txBody>
-          <a:bodyPr/>
-          <a:lstStyle/>
-          <a:p>
-            <a:endParaRPr lang="en-IN"/>
-          </a:p>
-        </p:txBody>
-      </p:sp>
-      <p:sp>
-        <p:nvSpPr>
-          <p:cNvPr id="7" name="Slide Number Placeholder 6">
-            <a:extLst>
-              <a:ext uri="{FF2B5EF4-FFF2-40B4-BE49-F238E27FC236}">
-                <a16:creationId xmlns:a16="http://schemas.microsoft.com/office/drawing/2014/main" id="{98479C50-C5B4-8663-2602-75942D3B5A27}"/>
-              </a:ext>
-            </a:extLst>
-          </p:cNvPr>
-          <p:cNvSpPr>
-            <a:spLocks noGrp="1"/>
-          </p:cNvSpPr>
-          <p:nvPr>
-            <p:ph type="sldNum" sz="quarter" idx="12"/>
-          </p:nvPr>
-        </p:nvSpPr>
-        <p:spPr/>
-        <p:txBody>
-          <a:bodyPr/>
-          <a:lstStyle/>
-          <a:p>
-            <a:fld id="{A0025D24-38F0-449E-81DE-AE3BE376B933}" type="slidenum">
-              <a:rPr lang="en-IN" smtClean="0"/>
-              <a:t>‹#›</a:t>
-            </a:fld>
-            <a:endParaRPr lang="en-IN"/>
-          </a:p>
-        </p:txBody>
-      </p:sp>
-    </p:spTree>
-    <p:extLst>
-      <p:ext uri="{BB962C8B-B14F-4D97-AF65-F5344CB8AC3E}">
-        <p14:creationId xmlns:p14="http://schemas.microsoft.com/office/powerpoint/2010/main" val="12776519"/>
       </p:ext>
     </p:extLst>
   </p:cSld>
@@ -2925,7 +3108,7 @@
           <a:p>
             <a:fld id="{40EC051C-301A-4C05-BB7C-609F0D3C8F39}" type="datetimeFigureOut">
               <a:rPr lang="en-IN" smtClean="0"/>
-              <a:t>09-10-2026</a:t>
+              <a:t>10-10-2026</a:t>
             </a:fld>
             <a:endParaRPr lang="en-IN"/>
           </a:p>
@@ -3036,11 +3219,12 @@
     <p:sldLayoutId id="2147483652" r:id="rId4"/>
     <p:sldLayoutId id="2147483653" r:id="rId5"/>
     <p:sldLayoutId id="2147483654" r:id="rId6"/>
-    <p:sldLayoutId id="2147483655" r:id="rId7"/>
-    <p:sldLayoutId id="2147483656" r:id="rId8"/>
-    <p:sldLayoutId id="2147483657" r:id="rId9"/>
-    <p:sldLayoutId id="2147483658" r:id="rId10"/>
-    <p:sldLayoutId id="2147483659" r:id="rId11"/>
+    <p:sldLayoutId id="2147483660" r:id="rId7"/>
+    <p:sldLayoutId id="2147483655" r:id="rId8"/>
+    <p:sldLayoutId id="2147483656" r:id="rId9"/>
+    <p:sldLayoutId id="2147483657" r:id="rId10"/>
+    <p:sldLayoutId id="2147483658" r:id="rId11"/>
+    <p:sldLayoutId id="2147483659" r:id="rId12"/>
   </p:sldLayoutIdLst>
   <p:txStyles>
     <p:titleStyle>
@@ -3328,6 +3512,83 @@
 <file path=ppt/slides/slide1.xml><?xml version="1.0" encoding="utf-8"?>
 <p:sld xmlns:a="http://schemas.openxmlformats.org/drawingml/2006/main" xmlns:r="http://schemas.openxmlformats.org/officeDocument/2006/relationships" xmlns:p="http://schemas.openxmlformats.org/presentationml/2006/main">
   <p:cSld>
+    <p:bg>
+      <p:bgPr>
+        <a:solidFill>
+          <a:srgbClr val="162B4A"/>
+        </a:solidFill>
+        <a:effectLst/>
+      </p:bgPr>
+    </p:bg>
+    <p:spTree>
+      <p:nvGrpSpPr>
+        <p:cNvPr id="1" name=""/>
+        <p:cNvGrpSpPr/>
+        <p:nvPr/>
+      </p:nvGrpSpPr>
+      <p:grpSpPr>
+        <a:xfrm>
+          <a:off x="0" y="0"/>
+          <a:ext cx="0" cy="0"/>
+          <a:chOff x="0" y="0"/>
+          <a:chExt cx="0" cy="0"/>
+        </a:xfrm>
+      </p:grpSpPr>
+      <p:sp>
+        <p:nvSpPr>
+          <p:cNvPr id="3" name="Title 2">
+            <a:extLst>
+              <a:ext uri="{FF2B5EF4-FFF2-40B4-BE49-F238E27FC236}">
+                <a16:creationId xmlns:a16="http://schemas.microsoft.com/office/drawing/2014/main" id="{DAC7C18F-E745-156E-262B-A3629FAD5BAE}"/>
+              </a:ext>
+            </a:extLst>
+          </p:cNvPr>
+          <p:cNvSpPr>
+            <a:spLocks noGrp="1"/>
+          </p:cNvSpPr>
+          <p:nvPr>
+            <p:ph type="title"/>
+          </p:nvPr>
+        </p:nvSpPr>
+        <p:spPr>
+          <a:noFill/>
+          <a:ln>
+            <a:noFill/>
+          </a:ln>
+        </p:spPr>
+        <p:txBody>
+          <a:bodyPr lIns="320040" anchor="ctr"/>
+          <a:lstStyle/>
+          <a:p>
+            <a:pPr algn="l"/>
+            <a:r>
+              <a:rPr lang="en-IN" sz="3200" b="1" i="0" dirty="0">
+                <a:solidFill>
+                  <a:srgbClr val="FFFFFF"/>
+                </a:solidFill>
+                <a:latin typeface="Aptos Display"/>
+              </a:rPr>
+              <a:t>Customer Onboarding – Writing to API DB</a:t>
+            </a:r>
+          </a:p>
+        </p:txBody>
+      </p:sp>
+    </p:spTree>
+    <p:extLst>
+      <p:ext uri="{BB962C8B-B14F-4D97-AF65-F5344CB8AC3E}">
+        <p14:creationId xmlns:p14="http://schemas.microsoft.com/office/powerpoint/2010/main" val="367470199"/>
+      </p:ext>
+    </p:extLst>
+  </p:cSld>
+  <p:clrMapOvr>
+    <a:masterClrMapping/>
+  </p:clrMapOvr>
+</p:sld>
+</file>
+
+<file path=ppt/slides/slide2.xml><?xml version="1.0" encoding="utf-8"?>
+<p:sld xmlns:a="http://schemas.openxmlformats.org/drawingml/2006/main" xmlns:r="http://schemas.openxmlformats.org/officeDocument/2006/relationships" xmlns:p="http://schemas.openxmlformats.org/presentationml/2006/main">
+  <p:cSld>
     <p:spTree>
       <p:nvGrpSpPr>
         <p:cNvPr id="1" name=""/>
@@ -3861,7 +4122,7 @@
         </p:nvSpPr>
         <p:spPr>
           <a:xfrm>
-            <a:off x="373326" y="1555186"/>
+            <a:off x="373326" y="1529786"/>
             <a:ext cx="8163191" cy="4316447"/>
           </a:xfrm>
           <a:prstGeom prst="roundRect">
@@ -4346,6 +4607,26 @@
             </a:r>
           </a:p>
           <a:p>
+            <a:pPr marL="538163" lvl="2" indent="-79375">
+              <a:lnSpc>
+                <a:spcPct val="150000"/>
+              </a:lnSpc>
+              <a:buFont typeface="Cascadia Code" panose="020B0609020000020004" pitchFamily="49" charset="0"/>
+              <a:buChar char="−"/>
+            </a:pPr>
+            <a:r>
+              <a:rPr lang="en-IN" sz="800" i="1" dirty="0">
+                <a:solidFill>
+                  <a:schemeClr val="tx1"/>
+                </a:solidFill>
+                <a:latin typeface="Cascadia Code" panose="020B0609020000020004" pitchFamily="49" charset="0"/>
+                <a:cs typeface="Cascadia Code" panose="020B0609020000020004" pitchFamily="49" charset="0"/>
+                <a:sym typeface="Wingdings" panose="05000000000000000000" pitchFamily="2" charset="2"/>
+              </a:rPr>
+              <a:t>Hence "Transactional Outbox": no "dual write“</a:t>
+            </a:r>
+          </a:p>
+          <a:p>
             <a:pPr marL="352425" lvl="1" indent="-171450">
               <a:lnSpc>
                 <a:spcPct val="150000"/>
@@ -4362,8 +4643,24 @@
                 <a:cs typeface="Cascadia Code" panose="020B0609020000020004" pitchFamily="49" charset="0"/>
                 <a:sym typeface="Wingdings" panose="05000000000000000000" pitchFamily="2" charset="2"/>
               </a:rPr>
-              <a:t>Hence "Transactional Outbox": no "dual write"</a:t>
-            </a:r>
+              <a:t>Clear domain events list</a:t>
+            </a:r>
+            <a:endParaRPr lang="en-IN" sz="800" i="1" dirty="0">
+              <a:solidFill>
+                <a:schemeClr val="tx1"/>
+              </a:solidFill>
+              <a:latin typeface="Cascadia Code" panose="020B0609020000020004" pitchFamily="49" charset="0"/>
+              <a:cs typeface="Cascadia Code" panose="020B0609020000020004" pitchFamily="49" charset="0"/>
+            </a:endParaRPr>
+          </a:p>
+          <a:p>
+            <a:pPr marL="538163" lvl="2" indent="-79375">
+              <a:lnSpc>
+                <a:spcPct val="150000"/>
+              </a:lnSpc>
+              <a:buFont typeface="Cascadia Code" panose="020B0609020000020004" pitchFamily="49" charset="0"/>
+              <a:buChar char="−"/>
+            </a:pPr>
             <a:endParaRPr lang="en-IN" sz="800" i="1" dirty="0">
               <a:solidFill>
                 <a:schemeClr val="tx1"/>
@@ -4388,8 +4685,8 @@
         </p:nvSpPr>
         <p:spPr>
           <a:xfrm>
-            <a:off x="6099807" y="851302"/>
-            <a:ext cx="2302935" cy="646331"/>
+            <a:off x="5704841" y="916614"/>
+            <a:ext cx="3030642" cy="369332"/>
           </a:xfrm>
           <a:prstGeom prst="rect">
             <a:avLst/>
@@ -4411,7 +4708,17 @@
                 <a:latin typeface="Cascadia Code" panose="020B0609020000020004" pitchFamily="49" charset="0"/>
                 <a:cs typeface="Cascadia Code" panose="020B0609020000020004" pitchFamily="49" charset="0"/>
               </a:rPr>
-              <a:t>HTTP POST</a:t>
+              <a:t>HTTP POST, Auth policy: </a:t>
+            </a:r>
+            <a:r>
+              <a:rPr lang="en-IN" sz="900" b="1" i="1" dirty="0">
+                <a:solidFill>
+                  <a:srgbClr val="C00000"/>
+                </a:solidFill>
+                <a:latin typeface="Cascadia Code" panose="020B0609020000020004" pitchFamily="49" charset="0"/>
+                <a:cs typeface="Cascadia Code" panose="020B0609020000020004" pitchFamily="49" charset="0"/>
+              </a:rPr>
+              <a:t>"CustomerWrite"</a:t>
             </a:r>
           </a:p>
           <a:p>
@@ -4424,43 +4731,7 @@
                 <a:latin typeface="Cascadia Code" panose="020B0609020000020004" pitchFamily="49" charset="0"/>
                 <a:cs typeface="Cascadia Code" panose="020B0609020000020004" pitchFamily="49" charset="0"/>
               </a:rPr>
-              <a:t>Auth policy: </a:t>
-            </a:r>
-            <a:r>
-              <a:rPr lang="en-IN" sz="900" b="1" i="1" dirty="0">
-                <a:solidFill>
-                  <a:srgbClr val="C00000"/>
-                </a:solidFill>
-                <a:latin typeface="Cascadia Code" panose="020B0609020000020004" pitchFamily="49" charset="0"/>
-                <a:cs typeface="Cascadia Code" panose="020B0609020000020004" pitchFamily="49" charset="0"/>
-              </a:rPr>
-              <a:t>"CustomerWrite"</a:t>
-            </a:r>
-          </a:p>
-          <a:p>
-            <a:pPr marL="171450" indent="-171450">
-              <a:buFont typeface="Arial" panose="020B0604020202020204" pitchFamily="34" charset="0"/>
-              <a:buChar char="•"/>
-            </a:pPr>
-            <a:r>
-              <a:rPr lang="en-IN" sz="900" i="1" dirty="0">
-                <a:latin typeface="Cascadia Code" panose="020B0609020000020004" pitchFamily="49" charset="0"/>
-                <a:cs typeface="Cascadia Code" panose="020B0609020000020004" pitchFamily="49" charset="0"/>
-              </a:rPr>
-              <a:t>Uses DDD</a:t>
-            </a:r>
-          </a:p>
-          <a:p>
-            <a:pPr marL="171450" indent="-171450">
-              <a:buFont typeface="Arial" panose="020B0604020202020204" pitchFamily="34" charset="0"/>
-              <a:buChar char="•"/>
-            </a:pPr>
-            <a:r>
-              <a:rPr lang="en-IN" sz="900" i="1" dirty="0">
-                <a:latin typeface="Cascadia Code" panose="020B0609020000020004" pitchFamily="49" charset="0"/>
-                <a:cs typeface="Cascadia Code" panose="020B0609020000020004" pitchFamily="49" charset="0"/>
-              </a:rPr>
-              <a:t>Uses a CQRS Command Handler</a:t>
+              <a:t>Uses DDD, CQRS Command Handler</a:t>
             </a:r>
           </a:p>
         </p:txBody>
@@ -4479,7 +4750,7 @@
         </p:nvSpPr>
         <p:spPr>
           <a:xfrm>
-            <a:off x="536995" y="2485671"/>
+            <a:off x="536995" y="2460271"/>
             <a:ext cx="7769587" cy="1286055"/>
           </a:xfrm>
           <a:prstGeom prst="roundRect">
@@ -4676,57 +4947,6 @@
               <a:cs typeface="Cascadia Code" panose="020B0609020000020004" pitchFamily="49" charset="0"/>
               <a:sym typeface="Wingdings" panose="05000000000000000000" pitchFamily="2" charset="2"/>
             </a:endParaRPr>
-          </a:p>
-        </p:txBody>
-      </p:sp>
-      <p:sp>
-        <p:nvSpPr>
-          <p:cNvPr id="25" name="Title 24">
-            <a:extLst>
-              <a:ext uri="{FF2B5EF4-FFF2-40B4-BE49-F238E27FC236}">
-                <a16:creationId xmlns:a16="http://schemas.microsoft.com/office/drawing/2014/main" id="{9A1531E9-6EED-B81B-5A9D-D3837A6804D8}"/>
-              </a:ext>
-            </a:extLst>
-          </p:cNvPr>
-          <p:cNvSpPr>
-            <a:spLocks noGrp="1"/>
-          </p:cNvSpPr>
-          <p:nvPr>
-            <p:ph type="title"/>
-          </p:nvPr>
-        </p:nvSpPr>
-        <p:spPr>
-          <a:xfrm>
-            <a:off x="133350" y="131074"/>
-            <a:ext cx="11912600" cy="460968"/>
-          </a:xfrm>
-        </p:spPr>
-        <p:txBody>
-          <a:bodyPr>
-            <a:noAutofit/>
-          </a:bodyPr>
-          <a:lstStyle/>
-          <a:p>
-            <a:r>
-              <a:rPr lang="en-IN" sz="2800" b="1" dirty="0">
-                <a:solidFill>
-                  <a:schemeClr val="accent5">
-                    <a:lumMod val="75000"/>
-                  </a:schemeClr>
-                </a:solidFill>
-                <a:effectLst>
-                  <a:outerShdw blurRad="38100" dist="38100" dir="2700000" algn="tl">
-                    <a:srgbClr val="000000">
-                      <a:alpha val="43137"/>
-                    </a:srgbClr>
-                  </a:outerShdw>
-                </a:effectLst>
-                <a:latin typeface="Calibri Light" panose="020F0302020204030204" pitchFamily="34" charset="0"/>
-                <a:ea typeface="Calibri Light" panose="020F0302020204030204" pitchFamily="34" charset="0"/>
-                <a:cs typeface="Calibri Light" panose="020F0302020204030204" pitchFamily="34" charset="0"/>
-              </a:rPr>
-              <a:t>Writing Customer, Address, Outbox records to CO DB</a:t>
-            </a:r>
           </a:p>
         </p:txBody>
       </p:sp>
@@ -5235,10 +5455,8413 @@
           </a:p>
         </p:txBody>
       </p:sp>
+      <p:sp>
+        <p:nvSpPr>
+          <p:cNvPr id="4" name="Title 24">
+            <a:extLst>
+              <a:ext uri="{FF2B5EF4-FFF2-40B4-BE49-F238E27FC236}">
+                <a16:creationId xmlns:a16="http://schemas.microsoft.com/office/drawing/2014/main" id="{B2B2391D-C9E2-5F70-AE81-0DE920D38E60}"/>
+              </a:ext>
+            </a:extLst>
+          </p:cNvPr>
+          <p:cNvSpPr>
+            <a:spLocks noGrp="1"/>
+          </p:cNvSpPr>
+          <p:nvPr>
+            <p:ph type="title"/>
+          </p:nvPr>
+        </p:nvSpPr>
+        <p:spPr>
+          <a:xfrm>
+            <a:off x="133350" y="131074"/>
+            <a:ext cx="11912600" cy="460968"/>
+          </a:xfrm>
+          <a:noFill/>
+          <a:ln>
+            <a:noFill/>
+          </a:ln>
+        </p:spPr>
+        <p:txBody>
+          <a:bodyPr lIns="36576" tIns="18288">
+            <a:noAutofit/>
+          </a:bodyPr>
+          <a:lstStyle/>
+          <a:p>
+            <a:r>
+              <a:rPr lang="en-IN" sz="2500" b="1" i="0" dirty="0">
+                <a:solidFill>
+                  <a:srgbClr val="162B4A"/>
+                </a:solidFill>
+                <a:effectLst>
+                  <a:outerShdw blurRad="38100" dist="38100" dir="2700000" algn="tl">
+                    <a:srgbClr val="000000">
+                      <a:alpha val="43137"/>
+                    </a:srgbClr>
+                  </a:outerShdw>
+                </a:effectLst>
+                <a:latin typeface="Aptos Display" panose="020F0302020204030204" pitchFamily="34" charset="0"/>
+                <a:ea typeface="Calibri Light" panose="020F0302020204030204" pitchFamily="34" charset="0"/>
+                <a:cs typeface="Calibri Light" panose="020F0302020204030204" pitchFamily="34" charset="0"/>
+              </a:rPr>
+              <a:t>Writing Customer, Address, Outbox records to CO DB</a:t>
+            </a:r>
+          </a:p>
+        </p:txBody>
+      </p:sp>
     </p:spTree>
     <p:extLst>
       <p:ext uri="{BB962C8B-B14F-4D97-AF65-F5344CB8AC3E}">
-        <p14:creationId xmlns:p14="http://schemas.microsoft.com/office/powerpoint/2010/main" val="1606319807"/>
+        <p14:creationId xmlns:p14="http://schemas.microsoft.com/office/powerpoint/2010/main" val="1405715886"/>
+      </p:ext>
+    </p:extLst>
+  </p:cSld>
+  <p:clrMapOvr>
+    <a:masterClrMapping/>
+  </p:clrMapOvr>
+</p:sld>
+</file>
+
+<file path=ppt/slides/slide3.xml><?xml version="1.0" encoding="utf-8"?>
+<p:sld xmlns:a="http://schemas.openxmlformats.org/drawingml/2006/main" xmlns:r="http://schemas.openxmlformats.org/officeDocument/2006/relationships" xmlns:p="http://schemas.openxmlformats.org/presentationml/2006/main">
+  <p:cSld>
+    <p:spTree>
+      <p:nvGrpSpPr>
+        <p:cNvPr id="1" name=""/>
+        <p:cNvGrpSpPr/>
+        <p:nvPr/>
+      </p:nvGrpSpPr>
+      <p:grpSpPr>
+        <a:xfrm>
+          <a:off x="0" y="0"/>
+          <a:ext cx="0" cy="0"/>
+          <a:chOff x="0" y="0"/>
+          <a:chExt cx="0" cy="0"/>
+        </a:xfrm>
+      </p:grpSpPr>
+      <p:sp>
+        <p:nvSpPr>
+          <p:cNvPr id="22" name="Rectangle: Rounded Corners 21">
+            <a:extLst>
+              <a:ext uri="{FF2B5EF4-FFF2-40B4-BE49-F238E27FC236}">
+                <a16:creationId xmlns:a16="http://schemas.microsoft.com/office/drawing/2014/main" id="{153ACFB8-E9A2-68CA-DB0A-8E2CBE34DF2A}"/>
+              </a:ext>
+            </a:extLst>
+          </p:cNvPr>
+          <p:cNvSpPr/>
+          <p:nvPr/>
+        </p:nvSpPr>
+        <p:spPr>
+          <a:xfrm>
+            <a:off x="192243" y="793749"/>
+            <a:ext cx="8543240" cy="5802065"/>
+          </a:xfrm>
+          <a:prstGeom prst="roundRect">
+            <a:avLst>
+              <a:gd name="adj" fmla="val 3483"/>
+            </a:avLst>
+          </a:prstGeom>
+          <a:solidFill>
+            <a:schemeClr val="accent6">
+              <a:lumMod val="20000"/>
+              <a:lumOff val="80000"/>
+            </a:schemeClr>
+          </a:solidFill>
+          <a:ln>
+            <a:noFill/>
+          </a:ln>
+          <a:effectLst>
+            <a:outerShdw blurRad="63500" sx="102000" sy="102000" algn="ctr" rotWithShape="0">
+              <a:prstClr val="black">
+                <a:alpha val="40000"/>
+              </a:prstClr>
+            </a:outerShdw>
+          </a:effectLst>
+        </p:spPr>
+        <p:style>
+          <a:lnRef idx="2">
+            <a:schemeClr val="accent3">
+              <a:shade val="15000"/>
+            </a:schemeClr>
+          </a:lnRef>
+          <a:fillRef idx="1">
+            <a:schemeClr val="accent3"/>
+          </a:fillRef>
+          <a:effectRef idx="0">
+            <a:schemeClr val="accent3"/>
+          </a:effectRef>
+          <a:fontRef idx="minor">
+            <a:schemeClr val="lt1"/>
+          </a:fontRef>
+        </p:style>
+        <p:txBody>
+          <a:bodyPr rtlCol="0" anchor="t"/>
+          <a:lstStyle/>
+          <a:p>
+            <a:pPr>
+              <a:lnSpc>
+                <a:spcPct val="150000"/>
+              </a:lnSpc>
+            </a:pPr>
+            <a:r>
+              <a:rPr lang="en-IN" sz="1100" b="1" dirty="0">
+                <a:solidFill>
+                  <a:schemeClr val="tx1"/>
+                </a:solidFill>
+                <a:latin typeface="Cascadia Code" panose="020B0609020000020004" pitchFamily="49" charset="0"/>
+                <a:cs typeface="Cascadia Code" panose="020B0609020000020004" pitchFamily="49" charset="0"/>
+              </a:rPr>
+              <a:t>Customer Onboarding</a:t>
+            </a:r>
+            <a:r>
+              <a:rPr lang="en-IN" sz="1100" dirty="0">
+                <a:solidFill>
+                  <a:schemeClr val="tx1"/>
+                </a:solidFill>
+                <a:latin typeface="Cascadia Code" panose="020B0609020000020004" pitchFamily="49" charset="0"/>
+                <a:cs typeface="Cascadia Code" panose="020B0609020000020004" pitchFamily="49" charset="0"/>
+              </a:rPr>
+              <a:t> Microservice API</a:t>
+            </a:r>
+          </a:p>
+          <a:p>
+            <a:pPr>
+              <a:lnSpc>
+                <a:spcPct val="150000"/>
+              </a:lnSpc>
+            </a:pPr>
+            <a:r>
+              <a:rPr lang="en-IN" sz="1000" b="1" dirty="0">
+                <a:solidFill>
+                  <a:schemeClr val="tx1"/>
+                </a:solidFill>
+                <a:effectLst>
+                  <a:outerShdw blurRad="38100" dist="38100" dir="2700000" algn="tl">
+                    <a:srgbClr val="000000">
+                      <a:alpha val="43137"/>
+                    </a:srgbClr>
+                  </a:outerShdw>
+                </a:effectLst>
+                <a:latin typeface="Cascadia Code" panose="020B0609020000020004" pitchFamily="49" charset="0"/>
+                <a:cs typeface="Cascadia Code" panose="020B0609020000020004" pitchFamily="49" charset="0"/>
+              </a:rPr>
+              <a:t>OnboardingApplicationsController</a:t>
+            </a:r>
+            <a:r>
+              <a:rPr lang="en-IN" sz="800" dirty="0">
+                <a:solidFill>
+                  <a:schemeClr val="tx1"/>
+                </a:solidFill>
+                <a:latin typeface="Cascadia Code" panose="020B0609020000020004" pitchFamily="49" charset="0"/>
+                <a:cs typeface="Cascadia Code" panose="020B0609020000020004" pitchFamily="49" charset="0"/>
+              </a:rPr>
+              <a:t>.CreateApplication()</a:t>
+            </a:r>
+            <a:endParaRPr lang="en-IN" sz="800" i="1" dirty="0">
+              <a:solidFill>
+                <a:schemeClr val="tx1"/>
+              </a:solidFill>
+              <a:latin typeface="Cascadia Code" panose="020B0609020000020004" pitchFamily="49" charset="0"/>
+              <a:cs typeface="Cascadia Code" panose="020B0609020000020004" pitchFamily="49" charset="0"/>
+            </a:endParaRPr>
+          </a:p>
+          <a:p>
+            <a:pPr marL="88900" indent="-88900">
+              <a:lnSpc>
+                <a:spcPct val="150000"/>
+              </a:lnSpc>
+              <a:buFont typeface="Arial" panose="020B0604020202020204" pitchFamily="34" charset="0"/>
+              <a:buChar char="•"/>
+            </a:pPr>
+            <a:r>
+              <a:rPr lang="en-US" sz="800" i="1" dirty="0">
+                <a:solidFill>
+                  <a:schemeClr val="tx1"/>
+                </a:solidFill>
+                <a:latin typeface="Cascadia Code" panose="020B0609020000020004" pitchFamily="49" charset="0"/>
+                <a:cs typeface="Cascadia Code" panose="020B0609020000020004" pitchFamily="49" charset="0"/>
+              </a:rPr>
+              <a:t>Check the signed-in agent may manage this customer (branch scope + managing agent); take the acting branch from the token (403 if none)</a:t>
+            </a:r>
+            <a:endParaRPr lang="en-IN" sz="800" i="1" dirty="0">
+              <a:solidFill>
+                <a:schemeClr val="tx1"/>
+              </a:solidFill>
+              <a:latin typeface="Cascadia Code" panose="020B0609020000020004" pitchFamily="49" charset="0"/>
+              <a:cs typeface="Cascadia Code" panose="020B0609020000020004" pitchFamily="49" charset="0"/>
+            </a:endParaRPr>
+          </a:p>
+          <a:p>
+            <a:pPr marL="88900" indent="-88900">
+              <a:lnSpc>
+                <a:spcPct val="150000"/>
+              </a:lnSpc>
+              <a:buFont typeface="Arial" panose="020B0604020202020204" pitchFamily="34" charset="0"/>
+              <a:buChar char="•"/>
+            </a:pPr>
+            <a:r>
+              <a:rPr lang="en-IN" sz="800" i="1" dirty="0">
+                <a:solidFill>
+                  <a:schemeClr val="tx1"/>
+                </a:solidFill>
+                <a:latin typeface="Cascadia Code" panose="020B0609020000020004" pitchFamily="49" charset="0"/>
+                <a:cs typeface="Cascadia Code" panose="020B0609020000020004" pitchFamily="49" charset="0"/>
+              </a:rPr>
+              <a:t>Prepare a CreateOnboardingApplicationCommand </a:t>
+            </a:r>
+            <a:r>
+              <a:rPr lang="en-IN" sz="800" i="1" dirty="0">
+                <a:solidFill>
+                  <a:schemeClr val="tx1"/>
+                </a:solidFill>
+                <a:latin typeface="Cascadia Code" panose="020B0609020000020004" pitchFamily="49" charset="0"/>
+                <a:cs typeface="Cascadia Code" panose="020B0609020000020004" pitchFamily="49" charset="0"/>
+                <a:sym typeface="Wingdings" panose="05000000000000000000" pitchFamily="2" charset="2"/>
+              </a:rPr>
+              <a:t> (branch, customer)</a:t>
+            </a:r>
+          </a:p>
+          <a:p>
+            <a:pPr marL="88900" indent="-88900">
+              <a:lnSpc>
+                <a:spcPct val="150000"/>
+              </a:lnSpc>
+              <a:buFont typeface="Arial" panose="020B0604020202020204" pitchFamily="34" charset="0"/>
+              <a:buChar char="•"/>
+            </a:pPr>
+            <a:endParaRPr lang="en-IN" sz="800" i="1" dirty="0">
+              <a:solidFill>
+                <a:schemeClr val="tx1"/>
+              </a:solidFill>
+              <a:latin typeface="Cascadia Code" panose="020B0609020000020004" pitchFamily="49" charset="0"/>
+              <a:cs typeface="Cascadia Code" panose="020B0609020000020004" pitchFamily="49" charset="0"/>
+            </a:endParaRPr>
+          </a:p>
+          <a:p>
+            <a:pPr>
+              <a:lnSpc>
+                <a:spcPct val="150000"/>
+              </a:lnSpc>
+            </a:pPr>
+            <a:endParaRPr lang="en-IN" sz="800" dirty="0">
+              <a:solidFill>
+                <a:schemeClr val="tx1"/>
+              </a:solidFill>
+              <a:latin typeface="Cascadia Code" panose="020B0609020000020004" pitchFamily="49" charset="0"/>
+              <a:cs typeface="Cascadia Code" panose="020B0609020000020004" pitchFamily="49" charset="0"/>
+            </a:endParaRPr>
+          </a:p>
+          <a:p>
+            <a:pPr>
+              <a:lnSpc>
+                <a:spcPct val="150000"/>
+              </a:lnSpc>
+            </a:pPr>
+            <a:endParaRPr lang="en-IN" sz="800" dirty="0">
+              <a:solidFill>
+                <a:schemeClr val="tx1"/>
+              </a:solidFill>
+              <a:latin typeface="Cascadia Code" panose="020B0609020000020004" pitchFamily="49" charset="0"/>
+              <a:cs typeface="Cascadia Code" panose="020B0609020000020004" pitchFamily="49" charset="0"/>
+            </a:endParaRPr>
+          </a:p>
+          <a:p>
+            <a:pPr>
+              <a:lnSpc>
+                <a:spcPct val="150000"/>
+              </a:lnSpc>
+            </a:pPr>
+            <a:endParaRPr lang="en-IN" sz="800" dirty="0">
+              <a:solidFill>
+                <a:schemeClr val="tx1"/>
+              </a:solidFill>
+              <a:latin typeface="Cascadia Code" panose="020B0609020000020004" pitchFamily="49" charset="0"/>
+              <a:cs typeface="Cascadia Code" panose="020B0609020000020004" pitchFamily="49" charset="0"/>
+            </a:endParaRPr>
+          </a:p>
+          <a:p>
+            <a:pPr>
+              <a:lnSpc>
+                <a:spcPct val="150000"/>
+              </a:lnSpc>
+            </a:pPr>
+            <a:endParaRPr lang="en-IN" sz="800" dirty="0">
+              <a:solidFill>
+                <a:schemeClr val="tx1"/>
+              </a:solidFill>
+              <a:latin typeface="Cascadia Code" panose="020B0609020000020004" pitchFamily="49" charset="0"/>
+              <a:cs typeface="Cascadia Code" panose="020B0609020000020004" pitchFamily="49" charset="0"/>
+            </a:endParaRPr>
+          </a:p>
+          <a:p>
+            <a:pPr>
+              <a:lnSpc>
+                <a:spcPct val="150000"/>
+              </a:lnSpc>
+            </a:pPr>
+            <a:endParaRPr lang="en-IN" sz="800" dirty="0">
+              <a:solidFill>
+                <a:schemeClr val="tx1"/>
+              </a:solidFill>
+              <a:latin typeface="Cascadia Code" panose="020B0609020000020004" pitchFamily="49" charset="0"/>
+              <a:cs typeface="Cascadia Code" panose="020B0609020000020004" pitchFamily="49" charset="0"/>
+            </a:endParaRPr>
+          </a:p>
+          <a:p>
+            <a:pPr>
+              <a:lnSpc>
+                <a:spcPct val="150000"/>
+              </a:lnSpc>
+            </a:pPr>
+            <a:endParaRPr lang="en-IN" sz="800" dirty="0">
+              <a:solidFill>
+                <a:schemeClr val="tx1"/>
+              </a:solidFill>
+              <a:latin typeface="Cascadia Code" panose="020B0609020000020004" pitchFamily="49" charset="0"/>
+              <a:cs typeface="Cascadia Code" panose="020B0609020000020004" pitchFamily="49" charset="0"/>
+            </a:endParaRPr>
+          </a:p>
+          <a:p>
+            <a:pPr>
+              <a:lnSpc>
+                <a:spcPct val="150000"/>
+              </a:lnSpc>
+            </a:pPr>
+            <a:endParaRPr lang="en-IN" sz="800" dirty="0">
+              <a:solidFill>
+                <a:schemeClr val="tx1"/>
+              </a:solidFill>
+              <a:latin typeface="Cascadia Code" panose="020B0609020000020004" pitchFamily="49" charset="0"/>
+              <a:cs typeface="Cascadia Code" panose="020B0609020000020004" pitchFamily="49" charset="0"/>
+            </a:endParaRPr>
+          </a:p>
+          <a:p>
+            <a:pPr>
+              <a:lnSpc>
+                <a:spcPct val="150000"/>
+              </a:lnSpc>
+            </a:pPr>
+            <a:endParaRPr lang="en-IN" sz="800" dirty="0">
+              <a:solidFill>
+                <a:schemeClr val="tx1"/>
+              </a:solidFill>
+              <a:latin typeface="Cascadia Code" panose="020B0609020000020004" pitchFamily="49" charset="0"/>
+              <a:cs typeface="Cascadia Code" panose="020B0609020000020004" pitchFamily="49" charset="0"/>
+            </a:endParaRPr>
+          </a:p>
+          <a:p>
+            <a:pPr>
+              <a:lnSpc>
+                <a:spcPct val="150000"/>
+              </a:lnSpc>
+            </a:pPr>
+            <a:endParaRPr lang="en-IN" sz="800" dirty="0">
+              <a:solidFill>
+                <a:schemeClr val="tx1"/>
+              </a:solidFill>
+              <a:latin typeface="Cascadia Code" panose="020B0609020000020004" pitchFamily="49" charset="0"/>
+              <a:cs typeface="Cascadia Code" panose="020B0609020000020004" pitchFamily="49" charset="0"/>
+            </a:endParaRPr>
+          </a:p>
+          <a:p>
+            <a:pPr>
+              <a:lnSpc>
+                <a:spcPct val="150000"/>
+              </a:lnSpc>
+            </a:pPr>
+            <a:endParaRPr lang="en-IN" sz="800" dirty="0">
+              <a:solidFill>
+                <a:schemeClr val="tx1"/>
+              </a:solidFill>
+              <a:latin typeface="Cascadia Code" panose="020B0609020000020004" pitchFamily="49" charset="0"/>
+              <a:cs typeface="Cascadia Code" panose="020B0609020000020004" pitchFamily="49" charset="0"/>
+            </a:endParaRPr>
+          </a:p>
+          <a:p>
+            <a:pPr>
+              <a:lnSpc>
+                <a:spcPct val="150000"/>
+              </a:lnSpc>
+            </a:pPr>
+            <a:endParaRPr lang="en-IN" sz="800" dirty="0">
+              <a:solidFill>
+                <a:schemeClr val="tx1"/>
+              </a:solidFill>
+              <a:latin typeface="Cascadia Code" panose="020B0609020000020004" pitchFamily="49" charset="0"/>
+              <a:cs typeface="Cascadia Code" panose="020B0609020000020004" pitchFamily="49" charset="0"/>
+            </a:endParaRPr>
+          </a:p>
+          <a:p>
+            <a:pPr>
+              <a:lnSpc>
+                <a:spcPct val="150000"/>
+              </a:lnSpc>
+            </a:pPr>
+            <a:endParaRPr lang="en-IN" sz="800" dirty="0">
+              <a:solidFill>
+                <a:schemeClr val="tx1"/>
+              </a:solidFill>
+              <a:latin typeface="Cascadia Code" panose="020B0609020000020004" pitchFamily="49" charset="0"/>
+              <a:cs typeface="Cascadia Code" panose="020B0609020000020004" pitchFamily="49" charset="0"/>
+            </a:endParaRPr>
+          </a:p>
+          <a:p>
+            <a:pPr>
+              <a:lnSpc>
+                <a:spcPct val="150000"/>
+              </a:lnSpc>
+            </a:pPr>
+            <a:endParaRPr lang="en-IN" sz="800" dirty="0">
+              <a:solidFill>
+                <a:schemeClr val="tx1"/>
+              </a:solidFill>
+              <a:latin typeface="Cascadia Code" panose="020B0609020000020004" pitchFamily="49" charset="0"/>
+              <a:cs typeface="Cascadia Code" panose="020B0609020000020004" pitchFamily="49" charset="0"/>
+            </a:endParaRPr>
+          </a:p>
+          <a:p>
+            <a:pPr>
+              <a:lnSpc>
+                <a:spcPct val="150000"/>
+              </a:lnSpc>
+            </a:pPr>
+            <a:endParaRPr lang="en-IN" sz="800" dirty="0">
+              <a:solidFill>
+                <a:schemeClr val="tx1"/>
+              </a:solidFill>
+              <a:latin typeface="Cascadia Code" panose="020B0609020000020004" pitchFamily="49" charset="0"/>
+              <a:cs typeface="Cascadia Code" panose="020B0609020000020004" pitchFamily="49" charset="0"/>
+            </a:endParaRPr>
+          </a:p>
+          <a:p>
+            <a:pPr>
+              <a:lnSpc>
+                <a:spcPct val="150000"/>
+              </a:lnSpc>
+            </a:pPr>
+            <a:endParaRPr lang="en-IN" sz="800" dirty="0">
+              <a:solidFill>
+                <a:schemeClr val="tx1"/>
+              </a:solidFill>
+              <a:latin typeface="Cascadia Code" panose="020B0609020000020004" pitchFamily="49" charset="0"/>
+              <a:cs typeface="Cascadia Code" panose="020B0609020000020004" pitchFamily="49" charset="0"/>
+            </a:endParaRPr>
+          </a:p>
+          <a:p>
+            <a:pPr>
+              <a:lnSpc>
+                <a:spcPct val="150000"/>
+              </a:lnSpc>
+            </a:pPr>
+            <a:endParaRPr lang="en-IN" sz="800" dirty="0">
+              <a:solidFill>
+                <a:schemeClr val="tx1"/>
+              </a:solidFill>
+              <a:latin typeface="Cascadia Code" panose="020B0609020000020004" pitchFamily="49" charset="0"/>
+              <a:cs typeface="Cascadia Code" panose="020B0609020000020004" pitchFamily="49" charset="0"/>
+            </a:endParaRPr>
+          </a:p>
+          <a:p>
+            <a:pPr>
+              <a:lnSpc>
+                <a:spcPct val="150000"/>
+              </a:lnSpc>
+            </a:pPr>
+            <a:endParaRPr lang="en-IN" sz="800" dirty="0">
+              <a:solidFill>
+                <a:schemeClr val="tx1"/>
+              </a:solidFill>
+              <a:latin typeface="Cascadia Code" panose="020B0609020000020004" pitchFamily="49" charset="0"/>
+              <a:cs typeface="Cascadia Code" panose="020B0609020000020004" pitchFamily="49" charset="0"/>
+            </a:endParaRPr>
+          </a:p>
+          <a:p>
+            <a:pPr>
+              <a:lnSpc>
+                <a:spcPct val="150000"/>
+              </a:lnSpc>
+            </a:pPr>
+            <a:endParaRPr lang="en-IN" sz="800" dirty="0">
+              <a:solidFill>
+                <a:schemeClr val="tx1"/>
+              </a:solidFill>
+              <a:latin typeface="Cascadia Code" panose="020B0609020000020004" pitchFamily="49" charset="0"/>
+              <a:cs typeface="Cascadia Code" panose="020B0609020000020004" pitchFamily="49" charset="0"/>
+            </a:endParaRPr>
+          </a:p>
+          <a:p>
+            <a:pPr>
+              <a:lnSpc>
+                <a:spcPct val="150000"/>
+              </a:lnSpc>
+            </a:pPr>
+            <a:endParaRPr lang="en-IN" sz="800" dirty="0">
+              <a:solidFill>
+                <a:schemeClr val="tx1"/>
+              </a:solidFill>
+              <a:latin typeface="Cascadia Code" panose="020B0609020000020004" pitchFamily="49" charset="0"/>
+              <a:cs typeface="Cascadia Code" panose="020B0609020000020004" pitchFamily="49" charset="0"/>
+            </a:endParaRPr>
+          </a:p>
+          <a:p>
+            <a:pPr>
+              <a:lnSpc>
+                <a:spcPct val="150000"/>
+              </a:lnSpc>
+            </a:pPr>
+            <a:endParaRPr lang="en-IN" sz="800" dirty="0">
+              <a:solidFill>
+                <a:schemeClr val="tx1"/>
+              </a:solidFill>
+              <a:latin typeface="Cascadia Code" panose="020B0609020000020004" pitchFamily="49" charset="0"/>
+              <a:cs typeface="Cascadia Code" panose="020B0609020000020004" pitchFamily="49" charset="0"/>
+            </a:endParaRPr>
+          </a:p>
+          <a:p>
+            <a:pPr>
+              <a:lnSpc>
+                <a:spcPct val="150000"/>
+              </a:lnSpc>
+            </a:pPr>
+            <a:endParaRPr lang="en-IN" sz="800" dirty="0">
+              <a:solidFill>
+                <a:schemeClr val="tx1"/>
+              </a:solidFill>
+              <a:latin typeface="Cascadia Code" panose="020B0609020000020004" pitchFamily="49" charset="0"/>
+              <a:cs typeface="Cascadia Code" panose="020B0609020000020004" pitchFamily="49" charset="0"/>
+            </a:endParaRPr>
+          </a:p>
+          <a:p>
+            <a:pPr>
+              <a:lnSpc>
+                <a:spcPct val="150000"/>
+              </a:lnSpc>
+            </a:pPr>
+            <a:endParaRPr lang="en-IN" sz="800" dirty="0">
+              <a:solidFill>
+                <a:schemeClr val="tx1"/>
+              </a:solidFill>
+              <a:latin typeface="Cascadia Code" panose="020B0609020000020004" pitchFamily="49" charset="0"/>
+              <a:cs typeface="Cascadia Code" panose="020B0609020000020004" pitchFamily="49" charset="0"/>
+            </a:endParaRPr>
+          </a:p>
+          <a:p>
+            <a:pPr>
+              <a:lnSpc>
+                <a:spcPct val="150000"/>
+              </a:lnSpc>
+            </a:pPr>
+            <a:endParaRPr lang="en-IN" sz="800" dirty="0">
+              <a:solidFill>
+                <a:schemeClr val="tx1"/>
+              </a:solidFill>
+              <a:latin typeface="Cascadia Code" panose="020B0609020000020004" pitchFamily="49" charset="0"/>
+              <a:cs typeface="Cascadia Code" panose="020B0609020000020004" pitchFamily="49" charset="0"/>
+            </a:endParaRPr>
+          </a:p>
+          <a:p>
+            <a:pPr>
+              <a:lnSpc>
+                <a:spcPct val="150000"/>
+              </a:lnSpc>
+            </a:pPr>
+            <a:endParaRPr lang="en-IN" sz="800" dirty="0">
+              <a:solidFill>
+                <a:schemeClr val="tx1"/>
+              </a:solidFill>
+              <a:latin typeface="Cascadia Code" panose="020B0609020000020004" pitchFamily="49" charset="0"/>
+              <a:cs typeface="Cascadia Code" panose="020B0609020000020004" pitchFamily="49" charset="0"/>
+            </a:endParaRPr>
+          </a:p>
+          <a:p>
+            <a:pPr marL="88900" indent="-88900">
+              <a:lnSpc>
+                <a:spcPct val="150000"/>
+              </a:lnSpc>
+              <a:buFont typeface="Arial" panose="020B0604020202020204" pitchFamily="34" charset="0"/>
+              <a:buChar char="•"/>
+            </a:pPr>
+            <a:r>
+              <a:rPr lang="en-IN" sz="800" i="1" dirty="0">
+                <a:solidFill>
+                  <a:schemeClr val="tx1"/>
+                </a:solidFill>
+                <a:latin typeface="Cascadia Code" panose="020B0609020000020004" pitchFamily="49" charset="0"/>
+                <a:cs typeface="Cascadia Code" panose="020B0609020000020004" pitchFamily="49" charset="0"/>
+              </a:rPr>
+              <a:t>Return </a:t>
+            </a:r>
+            <a:r>
+              <a:rPr lang="en-IN" sz="800" b="1" i="1" dirty="0">
+                <a:solidFill>
+                  <a:schemeClr val="tx1"/>
+                </a:solidFill>
+                <a:latin typeface="Cascadia Code" panose="020B0609020000020004" pitchFamily="49" charset="0"/>
+                <a:cs typeface="Cascadia Code" panose="020B0609020000020004" pitchFamily="49" charset="0"/>
+              </a:rPr>
+              <a:t>201 - Created</a:t>
+            </a:r>
+            <a:endParaRPr lang="en-IN" sz="1100" dirty="0">
+              <a:solidFill>
+                <a:schemeClr val="tx1"/>
+              </a:solidFill>
+            </a:endParaRPr>
+          </a:p>
+        </p:txBody>
+      </p:sp>
+      <p:sp>
+        <p:nvSpPr>
+          <p:cNvPr id="11" name="Rectangle: Rounded Corners 10">
+            <a:extLst>
+              <a:ext uri="{FF2B5EF4-FFF2-40B4-BE49-F238E27FC236}">
+                <a16:creationId xmlns:a16="http://schemas.microsoft.com/office/drawing/2014/main" id="{665FDC8A-53CB-89A7-1F36-ACB2CBCB1B97}"/>
+              </a:ext>
+            </a:extLst>
+          </p:cNvPr>
+          <p:cNvSpPr/>
+          <p:nvPr/>
+        </p:nvSpPr>
+        <p:spPr>
+          <a:xfrm>
+            <a:off x="373326" y="1812909"/>
+            <a:ext cx="8163191" cy="4467439"/>
+          </a:xfrm>
+          <a:prstGeom prst="roundRect">
+            <a:avLst>
+              <a:gd name="adj" fmla="val 2616"/>
+            </a:avLst>
+          </a:prstGeom>
+          <a:solidFill>
+            <a:schemeClr val="accent5">
+              <a:lumMod val="40000"/>
+              <a:lumOff val="60000"/>
+            </a:schemeClr>
+          </a:solidFill>
+          <a:ln>
+            <a:noFill/>
+          </a:ln>
+          <a:effectLst>
+            <a:outerShdw blurRad="63500" sx="102000" sy="102000" algn="ctr" rotWithShape="0">
+              <a:prstClr val="black">
+                <a:alpha val="40000"/>
+              </a:prstClr>
+            </a:outerShdw>
+          </a:effectLst>
+        </p:spPr>
+        <p:style>
+          <a:lnRef idx="2">
+            <a:schemeClr val="accent5">
+              <a:shade val="15000"/>
+            </a:schemeClr>
+          </a:lnRef>
+          <a:fillRef idx="1">
+            <a:schemeClr val="accent5"/>
+          </a:fillRef>
+          <a:effectRef idx="0">
+            <a:schemeClr val="accent5"/>
+          </a:effectRef>
+          <a:fontRef idx="minor">
+            <a:schemeClr val="lt1"/>
+          </a:fontRef>
+        </p:style>
+        <p:txBody>
+          <a:bodyPr rtlCol="0" anchor="t"/>
+          <a:lstStyle/>
+          <a:p>
+            <a:pPr>
+              <a:lnSpc>
+                <a:spcPct val="150000"/>
+              </a:lnSpc>
+            </a:pPr>
+            <a:r>
+              <a:rPr lang="en-IN" sz="1000" b="1" dirty="0">
+                <a:solidFill>
+                  <a:schemeClr val="tx1"/>
+                </a:solidFill>
+                <a:latin typeface="Cascadia Code" panose="020B0609020000020004" pitchFamily="49" charset="0"/>
+                <a:cs typeface="Cascadia Code" panose="020B0609020000020004" pitchFamily="49" charset="0"/>
+              </a:rPr>
+              <a:t>CQRS</a:t>
+            </a:r>
+          </a:p>
+          <a:p>
+            <a:pPr>
+              <a:lnSpc>
+                <a:spcPct val="150000"/>
+              </a:lnSpc>
+            </a:pPr>
+            <a:r>
+              <a:rPr lang="en-IN" sz="1000" b="1" dirty="0">
+                <a:solidFill>
+                  <a:schemeClr val="tx1"/>
+                </a:solidFill>
+                <a:effectLst>
+                  <a:outerShdw blurRad="38100" dist="38100" dir="2700000" algn="tl">
+                    <a:srgbClr val="000000">
+                      <a:alpha val="43137"/>
+                    </a:srgbClr>
+                  </a:outerShdw>
+                </a:effectLst>
+                <a:latin typeface="Cascadia Code" panose="020B0609020000020004" pitchFamily="49" charset="0"/>
+                <a:cs typeface="Cascadia Code" panose="020B0609020000020004" pitchFamily="49" charset="0"/>
+              </a:rPr>
+              <a:t>CreateOnboardingApplicationCommandHandler</a:t>
+            </a:r>
+            <a:r>
+              <a:rPr lang="en-IN" sz="800" dirty="0">
+                <a:solidFill>
+                  <a:schemeClr val="tx1"/>
+                </a:solidFill>
+                <a:latin typeface="Cascadia Code" panose="020B0609020000020004" pitchFamily="49" charset="0"/>
+                <a:cs typeface="Cascadia Code" panose="020B0609020000020004" pitchFamily="49" charset="0"/>
+              </a:rPr>
+              <a:t>.HandleAsync ()</a:t>
+            </a:r>
+            <a:endParaRPr lang="en-IN" sz="400" dirty="0">
+              <a:solidFill>
+                <a:schemeClr val="tx1"/>
+              </a:solidFill>
+              <a:latin typeface="Cascadia Code" panose="020B0609020000020004" pitchFamily="49" charset="0"/>
+              <a:cs typeface="Cascadia Code" panose="020B0609020000020004" pitchFamily="49" charset="0"/>
+            </a:endParaRPr>
+          </a:p>
+          <a:p>
+            <a:pPr marL="88900" indent="-88900">
+              <a:lnSpc>
+                <a:spcPct val="150000"/>
+              </a:lnSpc>
+              <a:buFont typeface="Arial" panose="020B0604020202020204" pitchFamily="34" charset="0"/>
+              <a:buChar char="•"/>
+            </a:pPr>
+            <a:r>
+              <a:rPr lang="en-US" sz="800" b="1" i="1" dirty="0">
+                <a:solidFill>
+                  <a:schemeClr val="tx1"/>
+                </a:solidFill>
+                <a:latin typeface="Cascadia Code" panose="020B0609020000020004" pitchFamily="49" charset="0"/>
+                <a:cs typeface="Cascadia Code" panose="020B0609020000020004" pitchFamily="49" charset="0"/>
+                <a:sym typeface="Wingdings" panose="05000000000000000000" pitchFamily="2" charset="2"/>
+              </a:rPr>
+              <a:t>Idempotency handling</a:t>
+            </a:r>
+            <a:r>
+              <a:rPr lang="en-US" sz="800" i="1" dirty="0">
+                <a:solidFill>
+                  <a:schemeClr val="tx1"/>
+                </a:solidFill>
+                <a:latin typeface="Cascadia Code" panose="020B0609020000020004" pitchFamily="49" charset="0"/>
+                <a:cs typeface="Cascadia Code" panose="020B0609020000020004" pitchFamily="49" charset="0"/>
+                <a:sym typeface="Wingdings" panose="05000000000000000000" pitchFamily="2" charset="2"/>
+              </a:rPr>
+              <a:t>: If a draft OnboardingApplication is there in repository, just return it.</a:t>
+            </a:r>
+          </a:p>
+          <a:p>
+            <a:pPr marL="88900" indent="-88900">
+              <a:lnSpc>
+                <a:spcPct val="150000"/>
+              </a:lnSpc>
+              <a:buFont typeface="Arial" panose="020B0604020202020204" pitchFamily="34" charset="0"/>
+              <a:buChar char="•"/>
+            </a:pPr>
+            <a:r>
+              <a:rPr lang="en-US" sz="800" i="1" dirty="0">
+                <a:solidFill>
+                  <a:schemeClr val="tx1"/>
+                </a:solidFill>
+                <a:latin typeface="Cascadia Code" panose="020B0609020000020004" pitchFamily="49" charset="0"/>
+                <a:cs typeface="Cascadia Code" panose="020B0609020000020004" pitchFamily="49" charset="0"/>
+              </a:rPr>
+              <a:t>customer.StartOnboarding(): domain rule (</a:t>
+            </a:r>
+            <a:r>
+              <a:rPr lang="en-US" sz="800" b="1" i="1" dirty="0">
+                <a:solidFill>
+                  <a:schemeClr val="tx1"/>
+                </a:solidFill>
+                <a:latin typeface="Cascadia Code" panose="020B0609020000020004" pitchFamily="49" charset="0"/>
+                <a:cs typeface="Cascadia Code" panose="020B0609020000020004" pitchFamily="49" charset="0"/>
+              </a:rPr>
+              <a:t>aggregate invariant</a:t>
+            </a:r>
+            <a:r>
+              <a:rPr lang="en-US" sz="800" i="1" dirty="0">
+                <a:solidFill>
+                  <a:schemeClr val="tx1"/>
+                </a:solidFill>
+                <a:latin typeface="Cascadia Code" panose="020B0609020000020004" pitchFamily="49" charset="0"/>
+                <a:cs typeface="Cascadia Code" panose="020B0609020000020004" pitchFamily="49" charset="0"/>
+              </a:rPr>
+              <a:t>), only a PROSPECT may start onboarding, otherwise refused; if allowed, status → ONBOARDING and CustomerStatusChangedDomainEvent is raised.</a:t>
+            </a:r>
+          </a:p>
+          <a:p>
+            <a:pPr marL="88900" indent="-88900">
+              <a:lnSpc>
+                <a:spcPct val="150000"/>
+              </a:lnSpc>
+              <a:buFont typeface="Arial" panose="020B0604020202020204" pitchFamily="34" charset="0"/>
+              <a:buChar char="•"/>
+            </a:pPr>
+            <a:r>
+              <a:rPr lang="en-US" sz="800" i="1" dirty="0">
+                <a:solidFill>
+                  <a:schemeClr val="tx1"/>
+                </a:solidFill>
+                <a:latin typeface="Cascadia Code" panose="020B0609020000020004" pitchFamily="49" charset="0"/>
+                <a:cs typeface="Cascadia Code" panose="020B0609020000020004" pitchFamily="49" charset="0"/>
+              </a:rPr>
+              <a:t>Gets the next sequence number for the OnboardingApplication Number</a:t>
+            </a:r>
+            <a:r>
+              <a:rPr lang="en-IN" sz="800" i="1" dirty="0">
+                <a:solidFill>
+                  <a:schemeClr val="tx1"/>
+                </a:solidFill>
+                <a:latin typeface="Cascadia Code" panose="020B0609020000020004" pitchFamily="49" charset="0"/>
+                <a:cs typeface="Cascadia Code" panose="020B0609020000020004" pitchFamily="49" charset="0"/>
+              </a:rPr>
+              <a:t> (this is different from ID of the OnboardingApplication)</a:t>
+            </a:r>
+          </a:p>
+          <a:p>
+            <a:pPr marL="88900" indent="-88900">
+              <a:lnSpc>
+                <a:spcPct val="150000"/>
+              </a:lnSpc>
+              <a:buFont typeface="Arial" panose="020B0604020202020204" pitchFamily="34" charset="0"/>
+              <a:buChar char="•"/>
+            </a:pPr>
+            <a:endParaRPr lang="en-IN" sz="800" i="1" dirty="0">
+              <a:solidFill>
+                <a:schemeClr val="tx1"/>
+              </a:solidFill>
+              <a:latin typeface="Cascadia Code" panose="020B0609020000020004" pitchFamily="49" charset="0"/>
+              <a:cs typeface="Cascadia Code" panose="020B0609020000020004" pitchFamily="49" charset="0"/>
+            </a:endParaRPr>
+          </a:p>
+          <a:p>
+            <a:pPr marL="88900" indent="-88900">
+              <a:lnSpc>
+                <a:spcPct val="150000"/>
+              </a:lnSpc>
+              <a:buFont typeface="Arial" panose="020B0604020202020204" pitchFamily="34" charset="0"/>
+              <a:buChar char="•"/>
+            </a:pPr>
+            <a:endParaRPr lang="en-IN" sz="800" i="1" dirty="0">
+              <a:solidFill>
+                <a:schemeClr val="tx1"/>
+              </a:solidFill>
+              <a:latin typeface="Cascadia Code" panose="020B0609020000020004" pitchFamily="49" charset="0"/>
+              <a:cs typeface="Cascadia Code" panose="020B0609020000020004" pitchFamily="49" charset="0"/>
+            </a:endParaRPr>
+          </a:p>
+          <a:p>
+            <a:pPr marL="88900" indent="-88900">
+              <a:lnSpc>
+                <a:spcPct val="150000"/>
+              </a:lnSpc>
+              <a:buFont typeface="Arial" panose="020B0604020202020204" pitchFamily="34" charset="0"/>
+              <a:buChar char="•"/>
+            </a:pPr>
+            <a:endParaRPr lang="en-IN" sz="800" i="1" dirty="0">
+              <a:solidFill>
+                <a:schemeClr val="tx1"/>
+              </a:solidFill>
+              <a:latin typeface="Cascadia Code" panose="020B0609020000020004" pitchFamily="49" charset="0"/>
+              <a:cs typeface="Cascadia Code" panose="020B0609020000020004" pitchFamily="49" charset="0"/>
+            </a:endParaRPr>
+          </a:p>
+          <a:p>
+            <a:pPr marL="88900" indent="-88900">
+              <a:lnSpc>
+                <a:spcPct val="150000"/>
+              </a:lnSpc>
+              <a:buFont typeface="Arial" panose="020B0604020202020204" pitchFamily="34" charset="0"/>
+              <a:buChar char="•"/>
+            </a:pPr>
+            <a:endParaRPr lang="en-IN" sz="800" i="1" dirty="0">
+              <a:solidFill>
+                <a:schemeClr val="tx1"/>
+              </a:solidFill>
+              <a:latin typeface="Cascadia Code" panose="020B0609020000020004" pitchFamily="49" charset="0"/>
+              <a:cs typeface="Cascadia Code" panose="020B0609020000020004" pitchFamily="49" charset="0"/>
+            </a:endParaRPr>
+          </a:p>
+          <a:p>
+            <a:pPr marL="88900" indent="-88900">
+              <a:lnSpc>
+                <a:spcPct val="150000"/>
+              </a:lnSpc>
+              <a:buFont typeface="Arial" panose="020B0604020202020204" pitchFamily="34" charset="0"/>
+              <a:buChar char="•"/>
+            </a:pPr>
+            <a:endParaRPr lang="en-IN" sz="800" i="1" dirty="0">
+              <a:solidFill>
+                <a:schemeClr val="tx1"/>
+              </a:solidFill>
+              <a:latin typeface="Cascadia Code" panose="020B0609020000020004" pitchFamily="49" charset="0"/>
+              <a:cs typeface="Cascadia Code" panose="020B0609020000020004" pitchFamily="49" charset="0"/>
+            </a:endParaRPr>
+          </a:p>
+          <a:p>
+            <a:pPr marL="88900" indent="-88900">
+              <a:lnSpc>
+                <a:spcPct val="150000"/>
+              </a:lnSpc>
+              <a:buFont typeface="Arial" panose="020B0604020202020204" pitchFamily="34" charset="0"/>
+              <a:buChar char="•"/>
+            </a:pPr>
+            <a:endParaRPr lang="en-IN" sz="800" i="1" dirty="0">
+              <a:solidFill>
+                <a:schemeClr val="tx1"/>
+              </a:solidFill>
+              <a:latin typeface="Cascadia Code" panose="020B0609020000020004" pitchFamily="49" charset="0"/>
+              <a:cs typeface="Cascadia Code" panose="020B0609020000020004" pitchFamily="49" charset="0"/>
+            </a:endParaRPr>
+          </a:p>
+          <a:p>
+            <a:pPr marL="88900" indent="-88900">
+              <a:lnSpc>
+                <a:spcPct val="150000"/>
+              </a:lnSpc>
+              <a:buFont typeface="Arial" panose="020B0604020202020204" pitchFamily="34" charset="0"/>
+              <a:buChar char="•"/>
+            </a:pPr>
+            <a:r>
+              <a:rPr lang="en-US" sz="800" i="1" dirty="0">
+                <a:solidFill>
+                  <a:schemeClr val="tx1"/>
+                </a:solidFill>
+                <a:latin typeface="Cascadia Code" panose="020B0609020000020004" pitchFamily="49" charset="0"/>
+                <a:cs typeface="Cascadia Code" panose="020B0609020000020004" pitchFamily="49" charset="0"/>
+                <a:sym typeface="Wingdings" panose="05000000000000000000" pitchFamily="2" charset="2"/>
+              </a:rPr>
+              <a:t>Repository: track the new application; the customer (loaded above) is already tracked.</a:t>
+            </a:r>
+            <a:endParaRPr lang="en-IN" sz="800" i="1" dirty="0">
+              <a:solidFill>
+                <a:schemeClr val="tx1"/>
+              </a:solidFill>
+              <a:latin typeface="Cascadia Code" panose="020B0609020000020004" pitchFamily="49" charset="0"/>
+              <a:cs typeface="Cascadia Code" panose="020B0609020000020004" pitchFamily="49" charset="0"/>
+              <a:sym typeface="Wingdings" panose="05000000000000000000" pitchFamily="2" charset="2"/>
+            </a:endParaRPr>
+          </a:p>
+          <a:p>
+            <a:pPr marL="88900" indent="-88900">
+              <a:lnSpc>
+                <a:spcPct val="150000"/>
+              </a:lnSpc>
+              <a:buFont typeface="Arial" panose="020B0604020202020204" pitchFamily="34" charset="0"/>
+              <a:buChar char="•"/>
+            </a:pPr>
+            <a:r>
+              <a:rPr lang="en-IN" sz="800" i="1" dirty="0">
+                <a:solidFill>
+                  <a:schemeClr val="tx1"/>
+                </a:solidFill>
+                <a:latin typeface="Cascadia Code" panose="020B0609020000020004" pitchFamily="49" charset="0"/>
+                <a:cs typeface="Cascadia Code" panose="020B0609020000020004" pitchFamily="49" charset="0"/>
+                <a:sym typeface="Wingdings" panose="05000000000000000000" pitchFamily="2" charset="2"/>
+              </a:rPr>
+              <a:t>EF Core (Unit Of Work Implementation):</a:t>
+            </a:r>
+          </a:p>
+          <a:p>
+            <a:pPr marL="352425" lvl="1" indent="-171450">
+              <a:lnSpc>
+                <a:spcPct val="150000"/>
+              </a:lnSpc>
+              <a:buFont typeface="Courier New" panose="02070309020205020404" pitchFamily="49" charset="0"/>
+              <a:buChar char="o"/>
+            </a:pPr>
+            <a:r>
+              <a:rPr lang="en-IN" sz="800" i="1" dirty="0">
+                <a:solidFill>
+                  <a:schemeClr val="tx1"/>
+                </a:solidFill>
+                <a:latin typeface="Cascadia Code" panose="020B0609020000020004" pitchFamily="49" charset="0"/>
+                <a:cs typeface="Cascadia Code" panose="020B0609020000020004" pitchFamily="49" charset="0"/>
+                <a:sym typeface="Wingdings" panose="05000000000000000000" pitchFamily="2" charset="2"/>
+              </a:rPr>
+              <a:t>Collect the domain events (Note: this currently has only the status changed event of Customer aggregate)</a:t>
+            </a:r>
+          </a:p>
+          <a:p>
+            <a:pPr marL="352425" lvl="1" indent="-171450">
+              <a:lnSpc>
+                <a:spcPct val="150000"/>
+              </a:lnSpc>
+              <a:buFont typeface="Courier New" panose="02070309020205020404" pitchFamily="49" charset="0"/>
+              <a:buChar char="o"/>
+            </a:pPr>
+            <a:r>
+              <a:rPr lang="en-IN" sz="800" b="1" i="1" dirty="0">
+                <a:solidFill>
+                  <a:schemeClr val="tx1"/>
+                </a:solidFill>
+                <a:latin typeface="Cascadia Code" panose="020B0609020000020004" pitchFamily="49" charset="0"/>
+                <a:cs typeface="Cascadia Code" panose="020B0609020000020004" pitchFamily="49" charset="0"/>
+                <a:sym typeface="Wingdings" panose="05000000000000000000" pitchFamily="2" charset="2"/>
+              </a:rPr>
+              <a:t>Begin a transaction</a:t>
+            </a:r>
+          </a:p>
+          <a:p>
+            <a:pPr marL="352425" lvl="1" indent="-171450">
+              <a:lnSpc>
+                <a:spcPct val="150000"/>
+              </a:lnSpc>
+              <a:buFont typeface="Courier New" panose="02070309020205020404" pitchFamily="49" charset="0"/>
+              <a:buChar char="o"/>
+            </a:pPr>
+            <a:r>
+              <a:rPr lang="en-US" sz="800" i="1" dirty="0">
+                <a:solidFill>
+                  <a:schemeClr val="tx1"/>
+                </a:solidFill>
+                <a:latin typeface="Cascadia Code" panose="020B0609020000020004" pitchFamily="49" charset="0"/>
+                <a:cs typeface="Cascadia Code" panose="020B0609020000020004" pitchFamily="49" charset="0"/>
+                <a:sym typeface="Wingdings" panose="05000000000000000000" pitchFamily="2" charset="2"/>
+              </a:rPr>
+              <a:t>Save: the application is inserted (its ID generated by the database) and the customer updated</a:t>
+            </a:r>
+            <a:endParaRPr lang="en-IN" sz="800" i="1" dirty="0">
+              <a:solidFill>
+                <a:schemeClr val="tx1"/>
+              </a:solidFill>
+              <a:latin typeface="Cascadia Code" panose="020B0609020000020004" pitchFamily="49" charset="0"/>
+              <a:cs typeface="Cascadia Code" panose="020B0609020000020004" pitchFamily="49" charset="0"/>
+              <a:sym typeface="Wingdings" panose="05000000000000000000" pitchFamily="2" charset="2"/>
+            </a:endParaRPr>
+          </a:p>
+          <a:p>
+            <a:pPr marL="352425" lvl="1" indent="-171450">
+              <a:lnSpc>
+                <a:spcPct val="150000"/>
+              </a:lnSpc>
+              <a:buFont typeface="Courier New" panose="02070309020205020404" pitchFamily="49" charset="0"/>
+              <a:buChar char="o"/>
+            </a:pPr>
+            <a:r>
+              <a:rPr lang="en-IN" sz="800" i="1" dirty="0">
+                <a:solidFill>
+                  <a:schemeClr val="tx1"/>
+                </a:solidFill>
+                <a:latin typeface="Cascadia Code" panose="020B0609020000020004" pitchFamily="49" charset="0"/>
+                <a:cs typeface="Cascadia Code" panose="020B0609020000020004" pitchFamily="49" charset="0"/>
+                <a:sym typeface="Wingdings" panose="05000000000000000000" pitchFamily="2" charset="2"/>
+              </a:rPr>
+              <a:t>Iterate through domain events</a:t>
+            </a:r>
+          </a:p>
+          <a:p>
+            <a:pPr marL="538163" lvl="2" indent="-79375">
+              <a:lnSpc>
+                <a:spcPct val="150000"/>
+              </a:lnSpc>
+              <a:buFont typeface="Cascadia Code" panose="020B0609020000020004" pitchFamily="49" charset="0"/>
+              <a:buChar char="−"/>
+            </a:pPr>
+            <a:r>
+              <a:rPr lang="en-IN" sz="800" i="1" dirty="0">
+                <a:solidFill>
+                  <a:schemeClr val="tx1"/>
+                </a:solidFill>
+                <a:latin typeface="Cascadia Code" panose="020B0609020000020004" pitchFamily="49" charset="0"/>
+                <a:cs typeface="Cascadia Code" panose="020B0609020000020004" pitchFamily="49" charset="0"/>
+                <a:sym typeface="Wingdings" panose="05000000000000000000" pitchFamily="2" charset="2"/>
+              </a:rPr>
+              <a:t>Map domain event  Integration event  to a new “Outbox” row with Workflow ID, Correlation ID and Causation ID, Initiator</a:t>
+            </a:r>
+          </a:p>
+          <a:p>
+            <a:pPr marL="538163" lvl="2" indent="-79375">
+              <a:lnSpc>
+                <a:spcPct val="150000"/>
+              </a:lnSpc>
+              <a:buFont typeface="Cascadia Code" panose="020B0609020000020004" pitchFamily="49" charset="0"/>
+              <a:buChar char="−"/>
+            </a:pPr>
+            <a:r>
+              <a:rPr lang="en-IN" sz="800" i="1" dirty="0">
+                <a:solidFill>
+                  <a:schemeClr val="tx1"/>
+                </a:solidFill>
+                <a:latin typeface="Cascadia Code" panose="020B0609020000020004" pitchFamily="49" charset="0"/>
+                <a:cs typeface="Cascadia Code" panose="020B0609020000020004" pitchFamily="49" charset="0"/>
+                <a:sym typeface="Wingdings" panose="05000000000000000000" pitchFamily="2" charset="2"/>
+              </a:rPr>
+              <a:t>Order of “Outbox” rows is important – written one row at a time</a:t>
+            </a:r>
+          </a:p>
+          <a:p>
+            <a:pPr marL="352425" lvl="1" indent="-171450">
+              <a:lnSpc>
+                <a:spcPct val="150000"/>
+              </a:lnSpc>
+              <a:buFont typeface="Courier New" panose="02070309020205020404" pitchFamily="49" charset="0"/>
+              <a:buChar char="o"/>
+            </a:pPr>
+            <a:r>
+              <a:rPr lang="en-IN" sz="800" b="1" i="1" dirty="0">
+                <a:solidFill>
+                  <a:schemeClr val="tx1"/>
+                </a:solidFill>
+                <a:latin typeface="Cascadia Code" panose="020B0609020000020004" pitchFamily="49" charset="0"/>
+                <a:cs typeface="Cascadia Code" panose="020B0609020000020004" pitchFamily="49" charset="0"/>
+                <a:sym typeface="Wingdings" panose="05000000000000000000" pitchFamily="2" charset="2"/>
+              </a:rPr>
+              <a:t>Commit the transaction</a:t>
+            </a:r>
+            <a:r>
+              <a:rPr lang="en-IN" sz="800" i="1" dirty="0">
+                <a:solidFill>
+                  <a:schemeClr val="tx1"/>
+                </a:solidFill>
+                <a:latin typeface="Cascadia Code" panose="020B0609020000020004" pitchFamily="49" charset="0"/>
+                <a:cs typeface="Cascadia Code" panose="020B0609020000020004" pitchFamily="49" charset="0"/>
+                <a:sym typeface="Wingdings" panose="05000000000000000000" pitchFamily="2" charset="2"/>
+              </a:rPr>
+              <a:t> – OnboardingApplication (created), Customer (updated), and outbox records are together committed</a:t>
+            </a:r>
+          </a:p>
+          <a:p>
+            <a:pPr marL="538163" lvl="2" indent="-79375">
+              <a:lnSpc>
+                <a:spcPct val="150000"/>
+              </a:lnSpc>
+              <a:buFont typeface="Cascadia Code" panose="020B0609020000020004" pitchFamily="49" charset="0"/>
+              <a:buChar char="−"/>
+            </a:pPr>
+            <a:r>
+              <a:rPr lang="en-IN" sz="800" i="1" dirty="0">
+                <a:solidFill>
+                  <a:schemeClr val="tx1"/>
+                </a:solidFill>
+                <a:latin typeface="Cascadia Code" panose="020B0609020000020004" pitchFamily="49" charset="0"/>
+                <a:cs typeface="Cascadia Code" panose="020B0609020000020004" pitchFamily="49" charset="0"/>
+                <a:sym typeface="Wingdings" panose="05000000000000000000" pitchFamily="2" charset="2"/>
+              </a:rPr>
+              <a:t>Hence "Transactional Outbox": no "dual write"</a:t>
+            </a:r>
+          </a:p>
+          <a:p>
+            <a:pPr marL="352425" lvl="1" indent="-171450">
+              <a:lnSpc>
+                <a:spcPct val="150000"/>
+              </a:lnSpc>
+              <a:buFont typeface="Courier New" panose="02070309020205020404" pitchFamily="49" charset="0"/>
+              <a:buChar char="o"/>
+            </a:pPr>
+            <a:r>
+              <a:rPr lang="en-IN" sz="800" i="1" dirty="0">
+                <a:solidFill>
+                  <a:schemeClr val="tx1"/>
+                </a:solidFill>
+                <a:latin typeface="Cascadia Code" panose="020B0609020000020004" pitchFamily="49" charset="0"/>
+                <a:cs typeface="Cascadia Code" panose="020B0609020000020004" pitchFamily="49" charset="0"/>
+                <a:sym typeface="Wingdings" panose="05000000000000000000" pitchFamily="2" charset="2"/>
+              </a:rPr>
+              <a:t>Clear domain events list</a:t>
+            </a:r>
+            <a:endParaRPr lang="en-IN" sz="800" i="1" dirty="0">
+              <a:solidFill>
+                <a:schemeClr val="tx1"/>
+              </a:solidFill>
+              <a:latin typeface="Cascadia Code" panose="020B0609020000020004" pitchFamily="49" charset="0"/>
+              <a:cs typeface="Cascadia Code" panose="020B0609020000020004" pitchFamily="49" charset="0"/>
+            </a:endParaRPr>
+          </a:p>
+        </p:txBody>
+      </p:sp>
+      <p:sp>
+        <p:nvSpPr>
+          <p:cNvPr id="20" name="TextBox 19">
+            <a:extLst>
+              <a:ext uri="{FF2B5EF4-FFF2-40B4-BE49-F238E27FC236}">
+                <a16:creationId xmlns:a16="http://schemas.microsoft.com/office/drawing/2014/main" id="{D434BD28-047B-7E6E-C22F-8B49D7F99A81}"/>
+              </a:ext>
+            </a:extLst>
+          </p:cNvPr>
+          <p:cNvSpPr txBox="1"/>
+          <p:nvPr/>
+        </p:nvSpPr>
+        <p:spPr>
+          <a:xfrm>
+            <a:off x="5584372" y="917669"/>
+            <a:ext cx="3151112" cy="369332"/>
+          </a:xfrm>
+          <a:prstGeom prst="rect">
+            <a:avLst/>
+          </a:prstGeom>
+          <a:noFill/>
+        </p:spPr>
+        <p:txBody>
+          <a:bodyPr wrap="square" rtlCol="0">
+            <a:spAutoFit/>
+          </a:bodyPr>
+          <a:lstStyle/>
+          <a:p>
+            <a:pPr marL="171450" indent="-171450">
+              <a:buFont typeface="Arial" panose="020B0604020202020204" pitchFamily="34" charset="0"/>
+              <a:buChar char="•"/>
+            </a:pPr>
+            <a:r>
+              <a:rPr lang="en-IN" sz="900" i="1" dirty="0">
+                <a:latin typeface="Cascadia Code" panose="020B0609020000020004" pitchFamily="49" charset="0"/>
+                <a:cs typeface="Cascadia Code" panose="020B0609020000020004" pitchFamily="49" charset="0"/>
+              </a:rPr>
+              <a:t>HTTP POST, Auth policy: </a:t>
+            </a:r>
+            <a:r>
+              <a:rPr lang="en-IN" sz="900" b="1" i="1" dirty="0">
+                <a:solidFill>
+                  <a:srgbClr val="C00000"/>
+                </a:solidFill>
+                <a:latin typeface="Cascadia Code" panose="020B0609020000020004" pitchFamily="49" charset="0"/>
+                <a:cs typeface="Cascadia Code" panose="020B0609020000020004" pitchFamily="49" charset="0"/>
+              </a:rPr>
+              <a:t>"OnboardingWrite"</a:t>
+            </a:r>
+          </a:p>
+          <a:p>
+            <a:pPr marL="171450" indent="-171450">
+              <a:buFont typeface="Arial" panose="020B0604020202020204" pitchFamily="34" charset="0"/>
+              <a:buChar char="•"/>
+            </a:pPr>
+            <a:r>
+              <a:rPr lang="en-IN" sz="900" i="1" dirty="0">
+                <a:latin typeface="Cascadia Code" panose="020B0609020000020004" pitchFamily="49" charset="0"/>
+                <a:cs typeface="Cascadia Code" panose="020B0609020000020004" pitchFamily="49" charset="0"/>
+              </a:rPr>
+              <a:t>Uses DDD, CQRS Command Handler</a:t>
+            </a:r>
+          </a:p>
+        </p:txBody>
+      </p:sp>
+      <p:sp>
+        <p:nvSpPr>
+          <p:cNvPr id="21" name="Rectangle: Rounded Corners 20">
+            <a:extLst>
+              <a:ext uri="{FF2B5EF4-FFF2-40B4-BE49-F238E27FC236}">
+                <a16:creationId xmlns:a16="http://schemas.microsoft.com/office/drawing/2014/main" id="{FD0884D3-B47D-51D1-6B0A-02D10BBB93EA}"/>
+              </a:ext>
+            </a:extLst>
+          </p:cNvPr>
+          <p:cNvSpPr/>
+          <p:nvPr/>
+        </p:nvSpPr>
+        <p:spPr>
+          <a:xfrm>
+            <a:off x="536995" y="3148973"/>
+            <a:ext cx="7809614" cy="986220"/>
+          </a:xfrm>
+          <a:prstGeom prst="roundRect">
+            <a:avLst>
+              <a:gd name="adj" fmla="val 9293"/>
+            </a:avLst>
+          </a:prstGeom>
+          <a:solidFill>
+            <a:schemeClr val="accent2">
+              <a:lumMod val="20000"/>
+              <a:lumOff val="80000"/>
+            </a:schemeClr>
+          </a:solidFill>
+          <a:ln>
+            <a:noFill/>
+          </a:ln>
+          <a:effectLst>
+            <a:outerShdw blurRad="63500" sx="102000" sy="102000" algn="ctr" rotWithShape="0">
+              <a:prstClr val="black">
+                <a:alpha val="40000"/>
+              </a:prstClr>
+            </a:outerShdw>
+          </a:effectLst>
+        </p:spPr>
+        <p:style>
+          <a:lnRef idx="2">
+            <a:schemeClr val="accent5">
+              <a:shade val="15000"/>
+            </a:schemeClr>
+          </a:lnRef>
+          <a:fillRef idx="1">
+            <a:schemeClr val="accent5"/>
+          </a:fillRef>
+          <a:effectRef idx="0">
+            <a:schemeClr val="accent5"/>
+          </a:effectRef>
+          <a:fontRef idx="minor">
+            <a:schemeClr val="lt1"/>
+          </a:fontRef>
+        </p:style>
+        <p:txBody>
+          <a:bodyPr rtlCol="0" anchor="t"/>
+          <a:lstStyle/>
+          <a:p>
+            <a:pPr>
+              <a:lnSpc>
+                <a:spcPct val="150000"/>
+              </a:lnSpc>
+            </a:pPr>
+            <a:r>
+              <a:rPr lang="en-IN" sz="1000" b="1" dirty="0">
+                <a:solidFill>
+                  <a:schemeClr val="tx1"/>
+                </a:solidFill>
+                <a:latin typeface="Cascadia Code" panose="020B0609020000020004" pitchFamily="49" charset="0"/>
+                <a:cs typeface="Cascadia Code" panose="020B0609020000020004" pitchFamily="49" charset="0"/>
+              </a:rPr>
+              <a:t>Domain Driven Design</a:t>
+            </a:r>
+          </a:p>
+          <a:p>
+            <a:pPr>
+              <a:lnSpc>
+                <a:spcPct val="150000"/>
+              </a:lnSpc>
+            </a:pPr>
+            <a:r>
+              <a:rPr lang="en-IN" sz="1000" b="1" dirty="0">
+                <a:solidFill>
+                  <a:schemeClr val="tx1"/>
+                </a:solidFill>
+                <a:effectLst>
+                  <a:outerShdw blurRad="38100" dist="38100" dir="2700000" algn="tl">
+                    <a:srgbClr val="000000">
+                      <a:alpha val="43137"/>
+                    </a:srgbClr>
+                  </a:outerShdw>
+                </a:effectLst>
+                <a:latin typeface="Cascadia Code" panose="020B0609020000020004" pitchFamily="49" charset="0"/>
+                <a:cs typeface="Cascadia Code" panose="020B0609020000020004" pitchFamily="49" charset="0"/>
+              </a:rPr>
+              <a:t>OnboardingApplication</a:t>
+            </a:r>
+            <a:r>
+              <a:rPr lang="en-IN" sz="800" dirty="0">
+                <a:solidFill>
+                  <a:schemeClr val="tx1"/>
+                </a:solidFill>
+                <a:latin typeface="Cascadia Code" panose="020B0609020000020004" pitchFamily="49" charset="0"/>
+                <a:cs typeface="Cascadia Code" panose="020B0609020000020004" pitchFamily="49" charset="0"/>
+              </a:rPr>
+              <a:t>.Create ()</a:t>
+            </a:r>
+          </a:p>
+          <a:p>
+            <a:pPr indent="-277812">
+              <a:lnSpc>
+                <a:spcPct val="150000"/>
+              </a:lnSpc>
+            </a:pPr>
+            <a:endParaRPr lang="en-IN" sz="400" dirty="0">
+              <a:solidFill>
+                <a:schemeClr val="tx1"/>
+              </a:solidFill>
+              <a:latin typeface="Cascadia Code" panose="020B0609020000020004" pitchFamily="49" charset="0"/>
+              <a:cs typeface="Cascadia Code" panose="020B0609020000020004" pitchFamily="49" charset="0"/>
+            </a:endParaRPr>
+          </a:p>
+          <a:p>
+            <a:pPr marL="88900" lvl="1" indent="-88900">
+              <a:lnSpc>
+                <a:spcPct val="150000"/>
+              </a:lnSpc>
+              <a:buFont typeface="Arial" panose="020B0604020202020204" pitchFamily="34" charset="0"/>
+              <a:buChar char="•"/>
+            </a:pPr>
+            <a:r>
+              <a:rPr lang="en-IN" sz="800" i="1" dirty="0">
+                <a:solidFill>
+                  <a:schemeClr val="tx1"/>
+                </a:solidFill>
+                <a:latin typeface="Cascadia Code" panose="020B0609020000020004" pitchFamily="49" charset="0"/>
+                <a:cs typeface="Cascadia Code" panose="020B0609020000020004" pitchFamily="49" charset="0"/>
+              </a:rPr>
+              <a:t>Builds itself from value-objects </a:t>
+            </a:r>
+            <a:r>
+              <a:rPr lang="en-IN" sz="800" i="1" dirty="0">
+                <a:solidFill>
+                  <a:schemeClr val="tx1"/>
+                </a:solidFill>
+                <a:latin typeface="Cascadia Code" panose="020B0609020000020004" pitchFamily="49" charset="0"/>
+                <a:cs typeface="Cascadia Code" panose="020B0609020000020004" pitchFamily="49" charset="0"/>
+                <a:sym typeface="Wingdings" panose="05000000000000000000" pitchFamily="2" charset="2"/>
+              </a:rPr>
+              <a:t> ApplicationNumber.Issue(), BranchCode.Create(), etc.</a:t>
+            </a:r>
+          </a:p>
+          <a:p>
+            <a:pPr marL="88900" lvl="1" indent="-88900">
+              <a:lnSpc>
+                <a:spcPct val="150000"/>
+              </a:lnSpc>
+              <a:buFont typeface="Arial" panose="020B0604020202020204" pitchFamily="34" charset="0"/>
+              <a:buChar char="•"/>
+            </a:pPr>
+            <a:r>
+              <a:rPr lang="en-US" sz="800" i="1" dirty="0">
+                <a:solidFill>
+                  <a:schemeClr val="tx1"/>
+                </a:solidFill>
+                <a:latin typeface="Cascadia Code" panose="020B0609020000020004" pitchFamily="49" charset="0"/>
+                <a:cs typeface="Cascadia Code" panose="020B0609020000020004" pitchFamily="49" charset="0"/>
+                <a:sym typeface="Wingdings" panose="05000000000000000000" pitchFamily="2" charset="2"/>
+              </a:rPr>
+              <a:t>No domain-events are raised at this stage; the OnboardingApplication is just a draft.</a:t>
+            </a:r>
+            <a:endParaRPr lang="en-IN" sz="800" i="1" dirty="0">
+              <a:solidFill>
+                <a:schemeClr val="tx1"/>
+              </a:solidFill>
+              <a:latin typeface="Cascadia Code" panose="020B0609020000020004" pitchFamily="49" charset="0"/>
+              <a:cs typeface="Cascadia Code" panose="020B0609020000020004" pitchFamily="49" charset="0"/>
+              <a:sym typeface="Wingdings" panose="05000000000000000000" pitchFamily="2" charset="2"/>
+            </a:endParaRPr>
+          </a:p>
+        </p:txBody>
+      </p:sp>
+      <p:sp>
+        <p:nvSpPr>
+          <p:cNvPr id="26" name="Rectangle: Rounded Corners 25">
+            <a:extLst>
+              <a:ext uri="{FF2B5EF4-FFF2-40B4-BE49-F238E27FC236}">
+                <a16:creationId xmlns:a16="http://schemas.microsoft.com/office/drawing/2014/main" id="{AC1628E6-9EDF-78DE-A10A-9708E56E5DF2}"/>
+              </a:ext>
+            </a:extLst>
+          </p:cNvPr>
+          <p:cNvSpPr/>
+          <p:nvPr/>
+        </p:nvSpPr>
+        <p:spPr>
+          <a:xfrm>
+            <a:off x="8953127" y="2852467"/>
+            <a:ext cx="3012390" cy="3487662"/>
+          </a:xfrm>
+          <a:prstGeom prst="roundRect">
+            <a:avLst>
+              <a:gd name="adj" fmla="val 4865"/>
+            </a:avLst>
+          </a:prstGeom>
+          <a:solidFill>
+            <a:schemeClr val="accent6">
+              <a:lumMod val="20000"/>
+              <a:lumOff val="80000"/>
+            </a:schemeClr>
+          </a:solidFill>
+          <a:ln>
+            <a:noFill/>
+          </a:ln>
+          <a:effectLst>
+            <a:outerShdw blurRad="63500" sx="102000" sy="102000" algn="ctr" rotWithShape="0">
+              <a:prstClr val="black">
+                <a:alpha val="40000"/>
+              </a:prstClr>
+            </a:outerShdw>
+          </a:effectLst>
+        </p:spPr>
+        <p:style>
+          <a:lnRef idx="2">
+            <a:schemeClr val="accent3">
+              <a:shade val="15000"/>
+            </a:schemeClr>
+          </a:lnRef>
+          <a:fillRef idx="1">
+            <a:schemeClr val="accent3"/>
+          </a:fillRef>
+          <a:effectRef idx="0">
+            <a:schemeClr val="accent3"/>
+          </a:effectRef>
+          <a:fontRef idx="minor">
+            <a:schemeClr val="lt1"/>
+          </a:fontRef>
+        </p:style>
+        <p:txBody>
+          <a:bodyPr rtlCol="0" anchor="t"/>
+          <a:lstStyle/>
+          <a:p>
+            <a:pPr>
+              <a:lnSpc>
+                <a:spcPct val="150000"/>
+              </a:lnSpc>
+            </a:pPr>
+            <a:r>
+              <a:rPr lang="en-IN" sz="900" b="1" u="sng" dirty="0">
+                <a:solidFill>
+                  <a:schemeClr val="tx1"/>
+                </a:solidFill>
+                <a:latin typeface="Cascadia Code" panose="020B0609020000020004" pitchFamily="49" charset="0"/>
+                <a:cs typeface="Cascadia Code" panose="020B0609020000020004" pitchFamily="49" charset="0"/>
+              </a:rPr>
+              <a:t>Architectural Patterns</a:t>
+            </a:r>
+            <a:r>
+              <a:rPr lang="en-IN" sz="900" b="1" dirty="0">
+                <a:solidFill>
+                  <a:schemeClr val="tx1"/>
+                </a:solidFill>
+                <a:latin typeface="Cascadia Code" panose="020B0609020000020004" pitchFamily="49" charset="0"/>
+                <a:cs typeface="Cascadia Code" panose="020B0609020000020004" pitchFamily="49" charset="0"/>
+              </a:rPr>
+              <a:t>:</a:t>
+            </a:r>
+          </a:p>
+          <a:p>
+            <a:pPr>
+              <a:lnSpc>
+                <a:spcPct val="150000"/>
+              </a:lnSpc>
+            </a:pPr>
+            <a:endParaRPr lang="en-IN" sz="900" b="1" dirty="0">
+              <a:solidFill>
+                <a:schemeClr val="tx1"/>
+              </a:solidFill>
+              <a:latin typeface="Cascadia Code" panose="020B0609020000020004" pitchFamily="49" charset="0"/>
+              <a:cs typeface="Cascadia Code" panose="020B0609020000020004" pitchFamily="49" charset="0"/>
+            </a:endParaRPr>
+          </a:p>
+          <a:p>
+            <a:pPr marL="228600" indent="-228600">
+              <a:lnSpc>
+                <a:spcPct val="150000"/>
+              </a:lnSpc>
+              <a:buAutoNum type="arabicPeriod"/>
+            </a:pPr>
+            <a:r>
+              <a:rPr lang="en-IN" sz="900" dirty="0">
+                <a:solidFill>
+                  <a:schemeClr val="tx1"/>
+                </a:solidFill>
+                <a:latin typeface="Cascadia Code" panose="020B0609020000020004" pitchFamily="49" charset="0"/>
+                <a:cs typeface="Cascadia Code" panose="020B0609020000020004" pitchFamily="49" charset="0"/>
+              </a:rPr>
+              <a:t>Transactional Outbox Pattern</a:t>
+            </a:r>
+          </a:p>
+          <a:p>
+            <a:pPr marL="228600" indent="-228600">
+              <a:lnSpc>
+                <a:spcPct val="150000"/>
+              </a:lnSpc>
+              <a:buAutoNum type="arabicPeriod"/>
+            </a:pPr>
+            <a:r>
+              <a:rPr lang="en-IN" sz="900" dirty="0">
+                <a:solidFill>
+                  <a:schemeClr val="tx1"/>
+                </a:solidFill>
+                <a:latin typeface="Cascadia Code" panose="020B0609020000020004" pitchFamily="49" charset="0"/>
+                <a:cs typeface="Cascadia Code" panose="020B0609020000020004" pitchFamily="49" charset="0"/>
+              </a:rPr>
+              <a:t>ABAC + ReBAC Authorization Pattern</a:t>
+            </a:r>
+          </a:p>
+          <a:p>
+            <a:pPr marL="228600" indent="-228600">
+              <a:lnSpc>
+                <a:spcPct val="150000"/>
+              </a:lnSpc>
+              <a:buAutoNum type="arabicPeriod"/>
+            </a:pPr>
+            <a:r>
+              <a:rPr lang="en-IN" sz="900" dirty="0">
+                <a:solidFill>
+                  <a:schemeClr val="tx1"/>
+                </a:solidFill>
+                <a:latin typeface="Cascadia Code" panose="020B0609020000020004" pitchFamily="49" charset="0"/>
+                <a:cs typeface="Cascadia Code" panose="020B0609020000020004" pitchFamily="49" charset="0"/>
+              </a:rPr>
+              <a:t>CQRS Pattern</a:t>
+            </a:r>
+          </a:p>
+          <a:p>
+            <a:pPr marL="228600" indent="-228600">
+              <a:lnSpc>
+                <a:spcPct val="150000"/>
+              </a:lnSpc>
+              <a:buAutoNum type="arabicPeriod"/>
+            </a:pPr>
+            <a:r>
+              <a:rPr lang="en-IN" sz="900" dirty="0">
+                <a:solidFill>
+                  <a:schemeClr val="tx1"/>
+                </a:solidFill>
+                <a:latin typeface="Cascadia Code" panose="020B0609020000020004" pitchFamily="49" charset="0"/>
+                <a:cs typeface="Cascadia Code" panose="020B0609020000020004" pitchFamily="49" charset="0"/>
+              </a:rPr>
+              <a:t>DDD Patterns (Aggregate, VO, etc.)</a:t>
+            </a:r>
+          </a:p>
+          <a:p>
+            <a:pPr marL="228600" indent="-228600">
+              <a:lnSpc>
+                <a:spcPct val="150000"/>
+              </a:lnSpc>
+              <a:buAutoNum type="arabicPeriod"/>
+            </a:pPr>
+            <a:r>
+              <a:rPr lang="en-IN" sz="900" dirty="0">
+                <a:solidFill>
+                  <a:schemeClr val="tx1"/>
+                </a:solidFill>
+                <a:latin typeface="Cascadia Code" panose="020B0609020000020004" pitchFamily="49" charset="0"/>
+                <a:cs typeface="Cascadia Code" panose="020B0609020000020004" pitchFamily="49" charset="0"/>
+              </a:rPr>
+              <a:t>Deferred Domain-event Dispatch Pattern</a:t>
+            </a:r>
+          </a:p>
+          <a:p>
+            <a:pPr marL="228600" indent="-228600">
+              <a:lnSpc>
+                <a:spcPct val="150000"/>
+              </a:lnSpc>
+              <a:buAutoNum type="arabicPeriod"/>
+            </a:pPr>
+            <a:r>
+              <a:rPr lang="en-IN" sz="900" dirty="0">
+                <a:solidFill>
+                  <a:schemeClr val="tx1"/>
+                </a:solidFill>
+                <a:latin typeface="Cascadia Code" panose="020B0609020000020004" pitchFamily="49" charset="0"/>
+                <a:cs typeface="Cascadia Code" panose="020B0609020000020004" pitchFamily="49" charset="0"/>
+              </a:rPr>
+              <a:t>Domain event </a:t>
+            </a:r>
+            <a:r>
+              <a:rPr lang="en-IN" sz="900" dirty="0">
+                <a:solidFill>
+                  <a:schemeClr val="tx1"/>
+                </a:solidFill>
+                <a:latin typeface="Cascadia Code" panose="020B0609020000020004" pitchFamily="49" charset="0"/>
+                <a:cs typeface="Cascadia Code" panose="020B0609020000020004" pitchFamily="49" charset="0"/>
+                <a:sym typeface="Wingdings" panose="05000000000000000000" pitchFamily="2" charset="2"/>
+              </a:rPr>
+              <a:t> Integration Event Pattern</a:t>
+            </a:r>
+            <a:endParaRPr lang="en-IN" sz="900" dirty="0">
+              <a:solidFill>
+                <a:schemeClr val="tx1"/>
+              </a:solidFill>
+              <a:latin typeface="Cascadia Code" panose="020B0609020000020004" pitchFamily="49" charset="0"/>
+              <a:cs typeface="Cascadia Code" panose="020B0609020000020004" pitchFamily="49" charset="0"/>
+            </a:endParaRPr>
+          </a:p>
+          <a:p>
+            <a:pPr marL="228600" indent="-228600">
+              <a:lnSpc>
+                <a:spcPct val="150000"/>
+              </a:lnSpc>
+              <a:buAutoNum type="arabicPeriod"/>
+            </a:pPr>
+            <a:r>
+              <a:rPr lang="en-IN" sz="900" dirty="0">
+                <a:solidFill>
+                  <a:schemeClr val="tx1"/>
+                </a:solidFill>
+                <a:latin typeface="Cascadia Code" panose="020B0609020000020004" pitchFamily="49" charset="0"/>
+                <a:cs typeface="Cascadia Code" panose="020B0609020000020004" pitchFamily="49" charset="0"/>
+              </a:rPr>
+              <a:t>Idempotent Command Pattern</a:t>
+            </a:r>
+          </a:p>
+          <a:p>
+            <a:pPr marL="228600" indent="-228600">
+              <a:lnSpc>
+                <a:spcPct val="150000"/>
+              </a:lnSpc>
+              <a:buAutoNum type="arabicPeriod"/>
+            </a:pPr>
+            <a:r>
+              <a:rPr lang="en-IN" sz="900" dirty="0">
+                <a:solidFill>
+                  <a:schemeClr val="tx1"/>
+                </a:solidFill>
+                <a:latin typeface="Cascadia Code" panose="020B0609020000020004" pitchFamily="49" charset="0"/>
+                <a:cs typeface="Cascadia Code" panose="020B0609020000020004" pitchFamily="49" charset="0"/>
+              </a:rPr>
+              <a:t>Repository Pattern</a:t>
+            </a:r>
+          </a:p>
+          <a:p>
+            <a:pPr marL="228600" indent="-228600">
+              <a:lnSpc>
+                <a:spcPct val="150000"/>
+              </a:lnSpc>
+              <a:buAutoNum type="arabicPeriod"/>
+            </a:pPr>
+            <a:r>
+              <a:rPr lang="en-IN" sz="900" dirty="0">
+                <a:solidFill>
+                  <a:schemeClr val="tx1"/>
+                </a:solidFill>
+                <a:latin typeface="Cascadia Code" panose="020B0609020000020004" pitchFamily="49" charset="0"/>
+                <a:cs typeface="Cascadia Code" panose="020B0609020000020004" pitchFamily="49" charset="0"/>
+              </a:rPr>
+              <a:t>Unit of Work Pattern</a:t>
+            </a:r>
+          </a:p>
+          <a:p>
+            <a:pPr marL="228600" indent="-228600">
+              <a:lnSpc>
+                <a:spcPct val="150000"/>
+              </a:lnSpc>
+              <a:buAutoNum type="arabicPeriod"/>
+            </a:pPr>
+            <a:r>
+              <a:rPr lang="en-IN" sz="900" dirty="0">
+                <a:solidFill>
+                  <a:schemeClr val="tx1"/>
+                </a:solidFill>
+                <a:latin typeface="Cascadia Code" panose="020B0609020000020004" pitchFamily="49" charset="0"/>
+                <a:cs typeface="Cascadia Code" panose="020B0609020000020004" pitchFamily="49" charset="0"/>
+              </a:rPr>
+              <a:t>Correlation Identifier Pattern</a:t>
+            </a:r>
+          </a:p>
+          <a:p>
+            <a:pPr marL="228600" indent="-228600">
+              <a:lnSpc>
+                <a:spcPct val="150000"/>
+              </a:lnSpc>
+              <a:buAutoNum type="arabicPeriod"/>
+            </a:pPr>
+            <a:r>
+              <a:rPr lang="en-IN" sz="900" dirty="0">
+                <a:solidFill>
+                  <a:schemeClr val="tx1"/>
+                </a:solidFill>
+                <a:latin typeface="Cascadia Code" panose="020B0609020000020004" pitchFamily="49" charset="0"/>
+                <a:cs typeface="Cascadia Code" panose="020B0609020000020004" pitchFamily="49" charset="0"/>
+              </a:rPr>
+              <a:t>Surrogate Key + Business Key Pattern</a:t>
+            </a:r>
+          </a:p>
+          <a:p>
+            <a:pPr marL="228600" indent="-228600">
+              <a:lnSpc>
+                <a:spcPct val="150000"/>
+              </a:lnSpc>
+              <a:buAutoNum type="arabicPeriod"/>
+            </a:pPr>
+            <a:r>
+              <a:rPr lang="en-IN" sz="900" dirty="0">
+                <a:solidFill>
+                  <a:schemeClr val="tx1"/>
+                </a:solidFill>
+                <a:latin typeface="Cascadia Code" panose="020B0609020000020004" pitchFamily="49" charset="0"/>
+                <a:cs typeface="Cascadia Code" panose="020B0609020000020004" pitchFamily="49" charset="0"/>
+              </a:rPr>
+              <a:t>Policy-based Authorization Pattern</a:t>
+            </a:r>
+          </a:p>
+          <a:p>
+            <a:pPr marL="228600" indent="-228600">
+              <a:lnSpc>
+                <a:spcPct val="150000"/>
+              </a:lnSpc>
+              <a:buAutoNum type="arabicPeriod"/>
+            </a:pPr>
+            <a:endParaRPr lang="en-IN" sz="900" dirty="0">
+              <a:solidFill>
+                <a:schemeClr val="tx1"/>
+              </a:solidFill>
+              <a:latin typeface="Cascadia Code" panose="020B0609020000020004" pitchFamily="49" charset="0"/>
+              <a:cs typeface="Cascadia Code" panose="020B0609020000020004" pitchFamily="49" charset="0"/>
+            </a:endParaRPr>
+          </a:p>
+        </p:txBody>
+      </p:sp>
+      <p:sp>
+        <p:nvSpPr>
+          <p:cNvPr id="27" name="Rectangle: Rounded Corners 26">
+            <a:extLst>
+              <a:ext uri="{FF2B5EF4-FFF2-40B4-BE49-F238E27FC236}">
+                <a16:creationId xmlns:a16="http://schemas.microsoft.com/office/drawing/2014/main" id="{E29B5B23-BF3B-C7A2-4039-4C74A2578C8F}"/>
+              </a:ext>
+            </a:extLst>
+          </p:cNvPr>
+          <p:cNvSpPr/>
+          <p:nvPr/>
+        </p:nvSpPr>
+        <p:spPr>
+          <a:xfrm>
+            <a:off x="8953127" y="1038485"/>
+            <a:ext cx="3012390" cy="1619250"/>
+          </a:xfrm>
+          <a:prstGeom prst="roundRect">
+            <a:avLst>
+              <a:gd name="adj" fmla="val 7957"/>
+            </a:avLst>
+          </a:prstGeom>
+          <a:solidFill>
+            <a:schemeClr val="accent6">
+              <a:lumMod val="20000"/>
+              <a:lumOff val="80000"/>
+            </a:schemeClr>
+          </a:solidFill>
+          <a:ln>
+            <a:noFill/>
+          </a:ln>
+          <a:effectLst>
+            <a:outerShdw blurRad="63500" sx="102000" sy="102000" algn="ctr" rotWithShape="0">
+              <a:prstClr val="black">
+                <a:alpha val="40000"/>
+              </a:prstClr>
+            </a:outerShdw>
+          </a:effectLst>
+        </p:spPr>
+        <p:style>
+          <a:lnRef idx="2">
+            <a:schemeClr val="accent3">
+              <a:shade val="15000"/>
+            </a:schemeClr>
+          </a:lnRef>
+          <a:fillRef idx="1">
+            <a:schemeClr val="accent3"/>
+          </a:fillRef>
+          <a:effectRef idx="0">
+            <a:schemeClr val="accent3"/>
+          </a:effectRef>
+          <a:fontRef idx="minor">
+            <a:schemeClr val="lt1"/>
+          </a:fontRef>
+        </p:style>
+        <p:txBody>
+          <a:bodyPr rtlCol="0" anchor="t"/>
+          <a:lstStyle/>
+          <a:p>
+            <a:pPr>
+              <a:lnSpc>
+                <a:spcPct val="150000"/>
+              </a:lnSpc>
+            </a:pPr>
+            <a:r>
+              <a:rPr lang="en-IN" sz="900" b="1" u="sng" dirty="0">
+                <a:solidFill>
+                  <a:schemeClr val="tx1"/>
+                </a:solidFill>
+                <a:latin typeface="Cascadia Code" panose="020B0609020000020004" pitchFamily="49" charset="0"/>
+                <a:cs typeface="Cascadia Code" panose="020B0609020000020004" pitchFamily="49" charset="0"/>
+              </a:rPr>
+              <a:t>Architectural Components</a:t>
+            </a:r>
+            <a:r>
+              <a:rPr lang="en-IN" sz="900" b="1" dirty="0">
+                <a:solidFill>
+                  <a:schemeClr val="tx1"/>
+                </a:solidFill>
+                <a:latin typeface="Cascadia Code" panose="020B0609020000020004" pitchFamily="49" charset="0"/>
+                <a:cs typeface="Cascadia Code" panose="020B0609020000020004" pitchFamily="49" charset="0"/>
+              </a:rPr>
+              <a:t>:</a:t>
+            </a:r>
+          </a:p>
+          <a:p>
+            <a:pPr>
+              <a:lnSpc>
+                <a:spcPct val="150000"/>
+              </a:lnSpc>
+            </a:pPr>
+            <a:endParaRPr lang="en-IN" sz="900" b="1" dirty="0">
+              <a:solidFill>
+                <a:schemeClr val="tx1"/>
+              </a:solidFill>
+              <a:latin typeface="Cascadia Code" panose="020B0609020000020004" pitchFamily="49" charset="0"/>
+              <a:cs typeface="Cascadia Code" panose="020B0609020000020004" pitchFamily="49" charset="0"/>
+            </a:endParaRPr>
+          </a:p>
+          <a:p>
+            <a:pPr marL="228600" indent="-228600">
+              <a:lnSpc>
+                <a:spcPct val="150000"/>
+              </a:lnSpc>
+              <a:buAutoNum type="arabicPeriod"/>
+            </a:pPr>
+            <a:r>
+              <a:rPr lang="en-IN" sz="900" dirty="0">
+                <a:solidFill>
+                  <a:schemeClr val="tx1"/>
+                </a:solidFill>
+                <a:latin typeface="Cascadia Code" panose="020B0609020000020004" pitchFamily="49" charset="0"/>
+                <a:cs typeface="Cascadia Code" panose="020B0609020000020004" pitchFamily="49" charset="0"/>
+              </a:rPr>
+              <a:t>Microservice API Controller</a:t>
+            </a:r>
+          </a:p>
+          <a:p>
+            <a:pPr marL="228600" indent="-228600">
+              <a:lnSpc>
+                <a:spcPct val="150000"/>
+              </a:lnSpc>
+              <a:buAutoNum type="arabicPeriod"/>
+            </a:pPr>
+            <a:r>
+              <a:rPr lang="en-IN" sz="900" dirty="0">
+                <a:solidFill>
+                  <a:schemeClr val="tx1"/>
+                </a:solidFill>
+                <a:latin typeface="Cascadia Code" panose="020B0609020000020004" pitchFamily="49" charset="0"/>
+                <a:cs typeface="Cascadia Code" panose="020B0609020000020004" pitchFamily="49" charset="0"/>
+              </a:rPr>
+              <a:t>Command Handler (CQRS)</a:t>
+            </a:r>
+          </a:p>
+          <a:p>
+            <a:pPr marL="228600" indent="-228600">
+              <a:lnSpc>
+                <a:spcPct val="150000"/>
+              </a:lnSpc>
+              <a:buAutoNum type="arabicPeriod"/>
+            </a:pPr>
+            <a:r>
+              <a:rPr lang="en-IN" sz="900" dirty="0">
+                <a:solidFill>
+                  <a:schemeClr val="tx1"/>
+                </a:solidFill>
+                <a:latin typeface="Cascadia Code" panose="020B0609020000020004" pitchFamily="49" charset="0"/>
+                <a:cs typeface="Cascadia Code" panose="020B0609020000020004" pitchFamily="49" charset="0"/>
+              </a:rPr>
+              <a:t>Aggregate (DDD)</a:t>
+            </a:r>
+          </a:p>
+          <a:p>
+            <a:pPr marL="228600" indent="-228600">
+              <a:lnSpc>
+                <a:spcPct val="150000"/>
+              </a:lnSpc>
+              <a:buAutoNum type="arabicPeriod"/>
+            </a:pPr>
+            <a:r>
+              <a:rPr lang="en-IN" sz="900" dirty="0">
+                <a:solidFill>
+                  <a:schemeClr val="tx1"/>
+                </a:solidFill>
+                <a:latin typeface="Cascadia Code" panose="020B0609020000020004" pitchFamily="49" charset="0"/>
+                <a:cs typeface="Cascadia Code" panose="020B0609020000020004" pitchFamily="49" charset="0"/>
+              </a:rPr>
+              <a:t>Repository (EF Core DbContext)</a:t>
+            </a:r>
+          </a:p>
+          <a:p>
+            <a:pPr marL="228600" indent="-228600">
+              <a:lnSpc>
+                <a:spcPct val="150000"/>
+              </a:lnSpc>
+              <a:buAutoNum type="arabicPeriod"/>
+            </a:pPr>
+            <a:r>
+              <a:rPr lang="en-IN" sz="900" dirty="0">
+                <a:solidFill>
+                  <a:schemeClr val="tx1"/>
+                </a:solidFill>
+                <a:latin typeface="Cascadia Code" panose="020B0609020000020004" pitchFamily="49" charset="0"/>
+                <a:cs typeface="Cascadia Code" panose="020B0609020000020004" pitchFamily="49" charset="0"/>
+              </a:rPr>
+              <a:t>Unit of Work (EF Core DbContext)</a:t>
+            </a:r>
+          </a:p>
+        </p:txBody>
+      </p:sp>
+      <p:sp>
+        <p:nvSpPr>
+          <p:cNvPr id="4" name="Title 24">
+            <a:extLst>
+              <a:ext uri="{FF2B5EF4-FFF2-40B4-BE49-F238E27FC236}">
+                <a16:creationId xmlns:a16="http://schemas.microsoft.com/office/drawing/2014/main" id="{48236EB0-0833-BA84-D8A2-A5C38962B09A}"/>
+              </a:ext>
+            </a:extLst>
+          </p:cNvPr>
+          <p:cNvSpPr>
+            <a:spLocks noGrp="1"/>
+          </p:cNvSpPr>
+          <p:nvPr>
+            <p:ph type="title"/>
+          </p:nvPr>
+        </p:nvSpPr>
+        <p:spPr>
+          <a:xfrm>
+            <a:off x="133350" y="131074"/>
+            <a:ext cx="11912600" cy="460968"/>
+          </a:xfrm>
+          <a:noFill/>
+          <a:ln>
+            <a:noFill/>
+          </a:ln>
+        </p:spPr>
+        <p:txBody>
+          <a:bodyPr lIns="36576" tIns="18288">
+            <a:noAutofit/>
+          </a:bodyPr>
+          <a:lstStyle/>
+          <a:p>
+            <a:r>
+              <a:rPr lang="en-IN" sz="2500" b="1" i="0" dirty="0">
+                <a:solidFill>
+                  <a:srgbClr val="162B4A"/>
+                </a:solidFill>
+                <a:effectLst>
+                  <a:outerShdw blurRad="38100" dist="38100" dir="2700000" algn="tl">
+                    <a:srgbClr val="000000">
+                      <a:alpha val="43137"/>
+                    </a:srgbClr>
+                  </a:outerShdw>
+                </a:effectLst>
+                <a:latin typeface="Aptos Display" panose="020F0302020204030204" pitchFamily="34" charset="0"/>
+                <a:ea typeface="Calibri Light" panose="020F0302020204030204" pitchFamily="34" charset="0"/>
+                <a:cs typeface="Calibri Light" panose="020F0302020204030204" pitchFamily="34" charset="0"/>
+              </a:rPr>
+              <a:t>Creating OnboardingApplication , Outbox records to CO DB</a:t>
+            </a:r>
+          </a:p>
+        </p:txBody>
+      </p:sp>
+    </p:spTree>
+    <p:extLst>
+      <p:ext uri="{BB962C8B-B14F-4D97-AF65-F5344CB8AC3E}">
+        <p14:creationId xmlns:p14="http://schemas.microsoft.com/office/powerpoint/2010/main" val="2530743948"/>
+      </p:ext>
+    </p:extLst>
+  </p:cSld>
+  <p:clrMapOvr>
+    <a:masterClrMapping/>
+  </p:clrMapOvr>
+</p:sld>
+</file>
+
+<file path=ppt/slides/slide4.xml><?xml version="1.0" encoding="utf-8"?>
+<p:sld xmlns:a="http://schemas.openxmlformats.org/drawingml/2006/main" xmlns:r="http://schemas.openxmlformats.org/officeDocument/2006/relationships" xmlns:p="http://schemas.openxmlformats.org/presentationml/2006/main">
+  <p:cSld>
+    <p:spTree>
+      <p:nvGrpSpPr>
+        <p:cNvPr id="1" name="">
+          <a:extLst>
+            <a:ext uri="{FF2B5EF4-FFF2-40B4-BE49-F238E27FC236}">
+              <a16:creationId xmlns:a16="http://schemas.microsoft.com/office/drawing/2014/main" id="{64ED7C26-042E-1CBD-978F-73E7649BFDAE}"/>
+            </a:ext>
+          </a:extLst>
+        </p:cNvPr>
+        <p:cNvGrpSpPr/>
+        <p:nvPr/>
+      </p:nvGrpSpPr>
+      <p:grpSpPr>
+        <a:xfrm>
+          <a:off x="0" y="0"/>
+          <a:ext cx="0" cy="0"/>
+          <a:chOff x="0" y="0"/>
+          <a:chExt cx="0" cy="0"/>
+        </a:xfrm>
+      </p:grpSpPr>
+      <p:sp>
+        <p:nvSpPr>
+          <p:cNvPr id="22" name="Rectangle: Rounded Corners 21">
+            <a:extLst>
+              <a:ext uri="{FF2B5EF4-FFF2-40B4-BE49-F238E27FC236}">
+                <a16:creationId xmlns:a16="http://schemas.microsoft.com/office/drawing/2014/main" id="{6EA73D49-D765-FA89-D225-56DC1956785B}"/>
+              </a:ext>
+            </a:extLst>
+          </p:cNvPr>
+          <p:cNvSpPr/>
+          <p:nvPr/>
+        </p:nvSpPr>
+        <p:spPr>
+          <a:xfrm>
+            <a:off x="192243" y="895349"/>
+            <a:ext cx="8543240" cy="5607051"/>
+          </a:xfrm>
+          <a:prstGeom prst="roundRect">
+            <a:avLst>
+              <a:gd name="adj" fmla="val 3483"/>
+            </a:avLst>
+          </a:prstGeom>
+          <a:solidFill>
+            <a:schemeClr val="accent6">
+              <a:lumMod val="20000"/>
+              <a:lumOff val="80000"/>
+            </a:schemeClr>
+          </a:solidFill>
+          <a:ln>
+            <a:noFill/>
+          </a:ln>
+          <a:effectLst>
+            <a:outerShdw blurRad="63500" sx="102000" sy="102000" algn="ctr" rotWithShape="0">
+              <a:prstClr val="black">
+                <a:alpha val="40000"/>
+              </a:prstClr>
+            </a:outerShdw>
+          </a:effectLst>
+        </p:spPr>
+        <p:style>
+          <a:lnRef idx="2">
+            <a:schemeClr val="accent3">
+              <a:shade val="15000"/>
+            </a:schemeClr>
+          </a:lnRef>
+          <a:fillRef idx="1">
+            <a:schemeClr val="accent3"/>
+          </a:fillRef>
+          <a:effectRef idx="0">
+            <a:schemeClr val="accent3"/>
+          </a:effectRef>
+          <a:fontRef idx="minor">
+            <a:schemeClr val="lt1"/>
+          </a:fontRef>
+        </p:style>
+        <p:txBody>
+          <a:bodyPr rtlCol="0" anchor="t"/>
+          <a:lstStyle/>
+          <a:p>
+            <a:pPr>
+              <a:lnSpc>
+                <a:spcPct val="150000"/>
+              </a:lnSpc>
+            </a:pPr>
+            <a:r>
+              <a:rPr lang="en-IN" sz="1100" b="1" dirty="0">
+                <a:solidFill>
+                  <a:schemeClr val="tx1"/>
+                </a:solidFill>
+                <a:latin typeface="Cascadia Code" panose="020B0609020000020004" pitchFamily="49" charset="0"/>
+                <a:cs typeface="Cascadia Code" panose="020B0609020000020004" pitchFamily="49" charset="0"/>
+              </a:rPr>
+              <a:t>Customer Onboarding</a:t>
+            </a:r>
+            <a:r>
+              <a:rPr lang="en-IN" sz="1100" dirty="0">
+                <a:solidFill>
+                  <a:schemeClr val="tx1"/>
+                </a:solidFill>
+                <a:latin typeface="Cascadia Code" panose="020B0609020000020004" pitchFamily="49" charset="0"/>
+                <a:cs typeface="Cascadia Code" panose="020B0609020000020004" pitchFamily="49" charset="0"/>
+              </a:rPr>
+              <a:t> Microservice API</a:t>
+            </a:r>
+          </a:p>
+          <a:p>
+            <a:pPr>
+              <a:lnSpc>
+                <a:spcPct val="150000"/>
+              </a:lnSpc>
+            </a:pPr>
+            <a:r>
+              <a:rPr lang="en-IN" sz="1000" b="1" dirty="0">
+                <a:solidFill>
+                  <a:schemeClr val="tx1"/>
+                </a:solidFill>
+                <a:effectLst>
+                  <a:outerShdw blurRad="38100" dist="38100" dir="2700000" algn="tl">
+                    <a:srgbClr val="000000">
+                      <a:alpha val="43137"/>
+                    </a:srgbClr>
+                  </a:outerShdw>
+                </a:effectLst>
+                <a:latin typeface="Cascadia Code" panose="020B0609020000020004" pitchFamily="49" charset="0"/>
+                <a:cs typeface="Cascadia Code" panose="020B0609020000020004" pitchFamily="49" charset="0"/>
+              </a:rPr>
+              <a:t>OnboardingApplicationsController</a:t>
+            </a:r>
+            <a:r>
+              <a:rPr lang="en-IN" sz="800" dirty="0">
+                <a:solidFill>
+                  <a:schemeClr val="tx1"/>
+                </a:solidFill>
+                <a:latin typeface="Cascadia Code" panose="020B0609020000020004" pitchFamily="49" charset="0"/>
+                <a:cs typeface="Cascadia Code" panose="020B0609020000020004" pitchFamily="49" charset="0"/>
+              </a:rPr>
+              <a:t>.SubmitApplication()</a:t>
+            </a:r>
+            <a:endParaRPr lang="en-IN" sz="800" i="1" dirty="0">
+              <a:solidFill>
+                <a:schemeClr val="tx1"/>
+              </a:solidFill>
+              <a:latin typeface="Cascadia Code" panose="020B0609020000020004" pitchFamily="49" charset="0"/>
+              <a:cs typeface="Cascadia Code" panose="020B0609020000020004" pitchFamily="49" charset="0"/>
+            </a:endParaRPr>
+          </a:p>
+          <a:p>
+            <a:pPr marL="88900" indent="-88900">
+              <a:lnSpc>
+                <a:spcPct val="150000"/>
+              </a:lnSpc>
+              <a:buFont typeface="Arial" panose="020B0604020202020204" pitchFamily="34" charset="0"/>
+              <a:buChar char="•"/>
+            </a:pPr>
+            <a:r>
+              <a:rPr lang="en-US" sz="800" i="1" dirty="0">
+                <a:solidFill>
+                  <a:schemeClr val="tx1"/>
+                </a:solidFill>
+                <a:latin typeface="Cascadia Code" panose="020B0609020000020004" pitchFamily="49" charset="0"/>
+                <a:cs typeface="Cascadia Code" panose="020B0609020000020004" pitchFamily="49" charset="0"/>
+              </a:rPr>
+              <a:t>Check the signed-in agent may manage this onboarding application (branch scope + managing agent)</a:t>
+            </a:r>
+            <a:endParaRPr lang="en-IN" sz="800" i="1" dirty="0">
+              <a:solidFill>
+                <a:schemeClr val="tx1"/>
+              </a:solidFill>
+              <a:latin typeface="Cascadia Code" panose="020B0609020000020004" pitchFamily="49" charset="0"/>
+              <a:cs typeface="Cascadia Code" panose="020B0609020000020004" pitchFamily="49" charset="0"/>
+            </a:endParaRPr>
+          </a:p>
+          <a:p>
+            <a:pPr marL="88900" indent="-88900">
+              <a:lnSpc>
+                <a:spcPct val="150000"/>
+              </a:lnSpc>
+              <a:buFont typeface="Arial" panose="020B0604020202020204" pitchFamily="34" charset="0"/>
+              <a:buChar char="•"/>
+            </a:pPr>
+            <a:r>
+              <a:rPr lang="en-IN" sz="800" i="1" dirty="0">
+                <a:solidFill>
+                  <a:schemeClr val="tx1"/>
+                </a:solidFill>
+                <a:latin typeface="Cascadia Code" panose="020B0609020000020004" pitchFamily="49" charset="0"/>
+                <a:cs typeface="Cascadia Code" panose="020B0609020000020004" pitchFamily="49" charset="0"/>
+              </a:rPr>
+              <a:t>Prepare a SubmitOnboardingApplicationCommand </a:t>
+            </a:r>
+            <a:r>
+              <a:rPr lang="en-IN" sz="800" i="1" dirty="0">
+                <a:solidFill>
+                  <a:schemeClr val="tx1"/>
+                </a:solidFill>
+                <a:latin typeface="Cascadia Code" panose="020B0609020000020004" pitchFamily="49" charset="0"/>
+                <a:cs typeface="Cascadia Code" panose="020B0609020000020004" pitchFamily="49" charset="0"/>
+                <a:sym typeface="Wingdings" panose="05000000000000000000" pitchFamily="2" charset="2"/>
+              </a:rPr>
+              <a:t> (onboarding application ID, expected version, Evidence documents)</a:t>
+            </a:r>
+          </a:p>
+          <a:p>
+            <a:pPr marL="88900" indent="-88900">
+              <a:lnSpc>
+                <a:spcPct val="150000"/>
+              </a:lnSpc>
+              <a:buFont typeface="Arial" panose="020B0604020202020204" pitchFamily="34" charset="0"/>
+              <a:buChar char="•"/>
+            </a:pPr>
+            <a:endParaRPr lang="en-IN" sz="800" i="1" dirty="0">
+              <a:solidFill>
+                <a:schemeClr val="tx1"/>
+              </a:solidFill>
+              <a:latin typeface="Cascadia Code" panose="020B0609020000020004" pitchFamily="49" charset="0"/>
+              <a:cs typeface="Cascadia Code" panose="020B0609020000020004" pitchFamily="49" charset="0"/>
+            </a:endParaRPr>
+          </a:p>
+          <a:p>
+            <a:pPr>
+              <a:lnSpc>
+                <a:spcPct val="150000"/>
+              </a:lnSpc>
+            </a:pPr>
+            <a:endParaRPr lang="en-IN" sz="800" dirty="0">
+              <a:solidFill>
+                <a:schemeClr val="tx1"/>
+              </a:solidFill>
+              <a:latin typeface="Cascadia Code" panose="020B0609020000020004" pitchFamily="49" charset="0"/>
+              <a:cs typeface="Cascadia Code" panose="020B0609020000020004" pitchFamily="49" charset="0"/>
+            </a:endParaRPr>
+          </a:p>
+          <a:p>
+            <a:pPr>
+              <a:lnSpc>
+                <a:spcPct val="150000"/>
+              </a:lnSpc>
+            </a:pPr>
+            <a:endParaRPr lang="en-IN" sz="800" dirty="0">
+              <a:solidFill>
+                <a:schemeClr val="tx1"/>
+              </a:solidFill>
+              <a:latin typeface="Cascadia Code" panose="020B0609020000020004" pitchFamily="49" charset="0"/>
+              <a:cs typeface="Cascadia Code" panose="020B0609020000020004" pitchFamily="49" charset="0"/>
+            </a:endParaRPr>
+          </a:p>
+          <a:p>
+            <a:pPr>
+              <a:lnSpc>
+                <a:spcPct val="150000"/>
+              </a:lnSpc>
+            </a:pPr>
+            <a:endParaRPr lang="en-IN" sz="800" dirty="0">
+              <a:solidFill>
+                <a:schemeClr val="tx1"/>
+              </a:solidFill>
+              <a:latin typeface="Cascadia Code" panose="020B0609020000020004" pitchFamily="49" charset="0"/>
+              <a:cs typeface="Cascadia Code" panose="020B0609020000020004" pitchFamily="49" charset="0"/>
+            </a:endParaRPr>
+          </a:p>
+          <a:p>
+            <a:pPr>
+              <a:lnSpc>
+                <a:spcPct val="150000"/>
+              </a:lnSpc>
+            </a:pPr>
+            <a:endParaRPr lang="en-IN" sz="800" dirty="0">
+              <a:solidFill>
+                <a:schemeClr val="tx1"/>
+              </a:solidFill>
+              <a:latin typeface="Cascadia Code" panose="020B0609020000020004" pitchFamily="49" charset="0"/>
+              <a:cs typeface="Cascadia Code" panose="020B0609020000020004" pitchFamily="49" charset="0"/>
+            </a:endParaRPr>
+          </a:p>
+          <a:p>
+            <a:pPr>
+              <a:lnSpc>
+                <a:spcPct val="150000"/>
+              </a:lnSpc>
+            </a:pPr>
+            <a:endParaRPr lang="en-IN" sz="800" dirty="0">
+              <a:solidFill>
+                <a:schemeClr val="tx1"/>
+              </a:solidFill>
+              <a:latin typeface="Cascadia Code" panose="020B0609020000020004" pitchFamily="49" charset="0"/>
+              <a:cs typeface="Cascadia Code" panose="020B0609020000020004" pitchFamily="49" charset="0"/>
+            </a:endParaRPr>
+          </a:p>
+          <a:p>
+            <a:pPr>
+              <a:lnSpc>
+                <a:spcPct val="150000"/>
+              </a:lnSpc>
+            </a:pPr>
+            <a:endParaRPr lang="en-IN" sz="800" dirty="0">
+              <a:solidFill>
+                <a:schemeClr val="tx1"/>
+              </a:solidFill>
+              <a:latin typeface="Cascadia Code" panose="020B0609020000020004" pitchFamily="49" charset="0"/>
+              <a:cs typeface="Cascadia Code" panose="020B0609020000020004" pitchFamily="49" charset="0"/>
+            </a:endParaRPr>
+          </a:p>
+          <a:p>
+            <a:pPr>
+              <a:lnSpc>
+                <a:spcPct val="150000"/>
+              </a:lnSpc>
+            </a:pPr>
+            <a:endParaRPr lang="en-IN" sz="800" dirty="0">
+              <a:solidFill>
+                <a:schemeClr val="tx1"/>
+              </a:solidFill>
+              <a:latin typeface="Cascadia Code" panose="020B0609020000020004" pitchFamily="49" charset="0"/>
+              <a:cs typeface="Cascadia Code" panose="020B0609020000020004" pitchFamily="49" charset="0"/>
+            </a:endParaRPr>
+          </a:p>
+          <a:p>
+            <a:pPr>
+              <a:lnSpc>
+                <a:spcPct val="150000"/>
+              </a:lnSpc>
+            </a:pPr>
+            <a:endParaRPr lang="en-IN" sz="800" dirty="0">
+              <a:solidFill>
+                <a:schemeClr val="tx1"/>
+              </a:solidFill>
+              <a:latin typeface="Cascadia Code" panose="020B0609020000020004" pitchFamily="49" charset="0"/>
+              <a:cs typeface="Cascadia Code" panose="020B0609020000020004" pitchFamily="49" charset="0"/>
+            </a:endParaRPr>
+          </a:p>
+          <a:p>
+            <a:pPr>
+              <a:lnSpc>
+                <a:spcPct val="150000"/>
+              </a:lnSpc>
+            </a:pPr>
+            <a:endParaRPr lang="en-IN" sz="800" dirty="0">
+              <a:solidFill>
+                <a:schemeClr val="tx1"/>
+              </a:solidFill>
+              <a:latin typeface="Cascadia Code" panose="020B0609020000020004" pitchFamily="49" charset="0"/>
+              <a:cs typeface="Cascadia Code" panose="020B0609020000020004" pitchFamily="49" charset="0"/>
+            </a:endParaRPr>
+          </a:p>
+          <a:p>
+            <a:pPr>
+              <a:lnSpc>
+                <a:spcPct val="150000"/>
+              </a:lnSpc>
+            </a:pPr>
+            <a:endParaRPr lang="en-IN" sz="800" dirty="0">
+              <a:solidFill>
+                <a:schemeClr val="tx1"/>
+              </a:solidFill>
+              <a:latin typeface="Cascadia Code" panose="020B0609020000020004" pitchFamily="49" charset="0"/>
+              <a:cs typeface="Cascadia Code" panose="020B0609020000020004" pitchFamily="49" charset="0"/>
+            </a:endParaRPr>
+          </a:p>
+          <a:p>
+            <a:pPr>
+              <a:lnSpc>
+                <a:spcPct val="150000"/>
+              </a:lnSpc>
+            </a:pPr>
+            <a:endParaRPr lang="en-IN" sz="800" dirty="0">
+              <a:solidFill>
+                <a:schemeClr val="tx1"/>
+              </a:solidFill>
+              <a:latin typeface="Cascadia Code" panose="020B0609020000020004" pitchFamily="49" charset="0"/>
+              <a:cs typeface="Cascadia Code" panose="020B0609020000020004" pitchFamily="49" charset="0"/>
+            </a:endParaRPr>
+          </a:p>
+          <a:p>
+            <a:pPr>
+              <a:lnSpc>
+                <a:spcPct val="150000"/>
+              </a:lnSpc>
+            </a:pPr>
+            <a:endParaRPr lang="en-IN" sz="800" dirty="0">
+              <a:solidFill>
+                <a:schemeClr val="tx1"/>
+              </a:solidFill>
+              <a:latin typeface="Cascadia Code" panose="020B0609020000020004" pitchFamily="49" charset="0"/>
+              <a:cs typeface="Cascadia Code" panose="020B0609020000020004" pitchFamily="49" charset="0"/>
+            </a:endParaRPr>
+          </a:p>
+          <a:p>
+            <a:pPr>
+              <a:lnSpc>
+                <a:spcPct val="150000"/>
+              </a:lnSpc>
+            </a:pPr>
+            <a:endParaRPr lang="en-IN" sz="800" dirty="0">
+              <a:solidFill>
+                <a:schemeClr val="tx1"/>
+              </a:solidFill>
+              <a:latin typeface="Cascadia Code" panose="020B0609020000020004" pitchFamily="49" charset="0"/>
+              <a:cs typeface="Cascadia Code" panose="020B0609020000020004" pitchFamily="49" charset="0"/>
+            </a:endParaRPr>
+          </a:p>
+          <a:p>
+            <a:pPr>
+              <a:lnSpc>
+                <a:spcPct val="150000"/>
+              </a:lnSpc>
+            </a:pPr>
+            <a:endParaRPr lang="en-IN" sz="800" dirty="0">
+              <a:solidFill>
+                <a:schemeClr val="tx1"/>
+              </a:solidFill>
+              <a:latin typeface="Cascadia Code" panose="020B0609020000020004" pitchFamily="49" charset="0"/>
+              <a:cs typeface="Cascadia Code" panose="020B0609020000020004" pitchFamily="49" charset="0"/>
+            </a:endParaRPr>
+          </a:p>
+          <a:p>
+            <a:pPr>
+              <a:lnSpc>
+                <a:spcPct val="150000"/>
+              </a:lnSpc>
+            </a:pPr>
+            <a:endParaRPr lang="en-IN" sz="800" dirty="0">
+              <a:solidFill>
+                <a:schemeClr val="tx1"/>
+              </a:solidFill>
+              <a:latin typeface="Cascadia Code" panose="020B0609020000020004" pitchFamily="49" charset="0"/>
+              <a:cs typeface="Cascadia Code" panose="020B0609020000020004" pitchFamily="49" charset="0"/>
+            </a:endParaRPr>
+          </a:p>
+          <a:p>
+            <a:pPr>
+              <a:lnSpc>
+                <a:spcPct val="150000"/>
+              </a:lnSpc>
+            </a:pPr>
+            <a:endParaRPr lang="en-IN" sz="800" dirty="0">
+              <a:solidFill>
+                <a:schemeClr val="tx1"/>
+              </a:solidFill>
+              <a:latin typeface="Cascadia Code" panose="020B0609020000020004" pitchFamily="49" charset="0"/>
+              <a:cs typeface="Cascadia Code" panose="020B0609020000020004" pitchFamily="49" charset="0"/>
+            </a:endParaRPr>
+          </a:p>
+          <a:p>
+            <a:pPr>
+              <a:lnSpc>
+                <a:spcPct val="150000"/>
+              </a:lnSpc>
+            </a:pPr>
+            <a:endParaRPr lang="en-IN" sz="800" dirty="0">
+              <a:solidFill>
+                <a:schemeClr val="tx1"/>
+              </a:solidFill>
+              <a:latin typeface="Cascadia Code" panose="020B0609020000020004" pitchFamily="49" charset="0"/>
+              <a:cs typeface="Cascadia Code" panose="020B0609020000020004" pitchFamily="49" charset="0"/>
+            </a:endParaRPr>
+          </a:p>
+          <a:p>
+            <a:pPr>
+              <a:lnSpc>
+                <a:spcPct val="150000"/>
+              </a:lnSpc>
+            </a:pPr>
+            <a:endParaRPr lang="en-IN" sz="800" dirty="0">
+              <a:solidFill>
+                <a:schemeClr val="tx1"/>
+              </a:solidFill>
+              <a:latin typeface="Cascadia Code" panose="020B0609020000020004" pitchFamily="49" charset="0"/>
+              <a:cs typeface="Cascadia Code" panose="020B0609020000020004" pitchFamily="49" charset="0"/>
+            </a:endParaRPr>
+          </a:p>
+          <a:p>
+            <a:pPr>
+              <a:lnSpc>
+                <a:spcPct val="150000"/>
+              </a:lnSpc>
+            </a:pPr>
+            <a:endParaRPr lang="en-IN" sz="800" dirty="0">
+              <a:solidFill>
+                <a:schemeClr val="tx1"/>
+              </a:solidFill>
+              <a:latin typeface="Cascadia Code" panose="020B0609020000020004" pitchFamily="49" charset="0"/>
+              <a:cs typeface="Cascadia Code" panose="020B0609020000020004" pitchFamily="49" charset="0"/>
+            </a:endParaRPr>
+          </a:p>
+          <a:p>
+            <a:pPr>
+              <a:lnSpc>
+                <a:spcPct val="150000"/>
+              </a:lnSpc>
+            </a:pPr>
+            <a:endParaRPr lang="en-IN" sz="800" dirty="0">
+              <a:solidFill>
+                <a:schemeClr val="tx1"/>
+              </a:solidFill>
+              <a:latin typeface="Cascadia Code" panose="020B0609020000020004" pitchFamily="49" charset="0"/>
+              <a:cs typeface="Cascadia Code" panose="020B0609020000020004" pitchFamily="49" charset="0"/>
+            </a:endParaRPr>
+          </a:p>
+          <a:p>
+            <a:pPr>
+              <a:lnSpc>
+                <a:spcPct val="150000"/>
+              </a:lnSpc>
+            </a:pPr>
+            <a:endParaRPr lang="en-IN" sz="800" dirty="0">
+              <a:solidFill>
+                <a:schemeClr val="tx1"/>
+              </a:solidFill>
+              <a:latin typeface="Cascadia Code" panose="020B0609020000020004" pitchFamily="49" charset="0"/>
+              <a:cs typeface="Cascadia Code" panose="020B0609020000020004" pitchFamily="49" charset="0"/>
+            </a:endParaRPr>
+          </a:p>
+          <a:p>
+            <a:pPr>
+              <a:lnSpc>
+                <a:spcPct val="150000"/>
+              </a:lnSpc>
+            </a:pPr>
+            <a:endParaRPr lang="en-IN" sz="800" dirty="0">
+              <a:solidFill>
+                <a:schemeClr val="tx1"/>
+              </a:solidFill>
+              <a:latin typeface="Cascadia Code" panose="020B0609020000020004" pitchFamily="49" charset="0"/>
+              <a:cs typeface="Cascadia Code" panose="020B0609020000020004" pitchFamily="49" charset="0"/>
+            </a:endParaRPr>
+          </a:p>
+          <a:p>
+            <a:pPr>
+              <a:lnSpc>
+                <a:spcPct val="150000"/>
+              </a:lnSpc>
+            </a:pPr>
+            <a:endParaRPr lang="en-IN" sz="800" dirty="0">
+              <a:solidFill>
+                <a:schemeClr val="tx1"/>
+              </a:solidFill>
+              <a:latin typeface="Cascadia Code" panose="020B0609020000020004" pitchFamily="49" charset="0"/>
+              <a:cs typeface="Cascadia Code" panose="020B0609020000020004" pitchFamily="49" charset="0"/>
+            </a:endParaRPr>
+          </a:p>
+          <a:p>
+            <a:pPr marL="88900" indent="-88900">
+              <a:lnSpc>
+                <a:spcPct val="150000"/>
+              </a:lnSpc>
+              <a:buFont typeface="Arial" panose="020B0604020202020204" pitchFamily="34" charset="0"/>
+              <a:buChar char="•"/>
+            </a:pPr>
+            <a:r>
+              <a:rPr lang="en-IN" sz="800" i="1" dirty="0">
+                <a:solidFill>
+                  <a:schemeClr val="tx1"/>
+                </a:solidFill>
+                <a:latin typeface="Cascadia Code" panose="020B0609020000020004" pitchFamily="49" charset="0"/>
+                <a:cs typeface="Cascadia Code" panose="020B0609020000020004" pitchFamily="49" charset="0"/>
+              </a:rPr>
+              <a:t>Return </a:t>
+            </a:r>
+            <a:r>
+              <a:rPr lang="en-IN" sz="800" b="1" i="1" dirty="0">
+                <a:solidFill>
+                  <a:schemeClr val="tx1"/>
+                </a:solidFill>
+                <a:latin typeface="Cascadia Code" panose="020B0609020000020004" pitchFamily="49" charset="0"/>
+                <a:cs typeface="Cascadia Code" panose="020B0609020000020004" pitchFamily="49" charset="0"/>
+              </a:rPr>
+              <a:t>204 – No Content</a:t>
+            </a:r>
+            <a:endParaRPr lang="en-IN" sz="1100" dirty="0">
+              <a:solidFill>
+                <a:schemeClr val="tx1"/>
+              </a:solidFill>
+            </a:endParaRPr>
+          </a:p>
+        </p:txBody>
+      </p:sp>
+      <p:sp>
+        <p:nvSpPr>
+          <p:cNvPr id="11" name="Rectangle: Rounded Corners 10">
+            <a:extLst>
+              <a:ext uri="{FF2B5EF4-FFF2-40B4-BE49-F238E27FC236}">
+                <a16:creationId xmlns:a16="http://schemas.microsoft.com/office/drawing/2014/main" id="{D990A3B6-EC76-3679-D9B9-884E9C464532}"/>
+              </a:ext>
+            </a:extLst>
+          </p:cNvPr>
+          <p:cNvSpPr/>
+          <p:nvPr/>
+        </p:nvSpPr>
+        <p:spPr>
+          <a:xfrm>
+            <a:off x="373326" y="1924669"/>
+            <a:ext cx="8163191" cy="4251976"/>
+          </a:xfrm>
+          <a:prstGeom prst="roundRect">
+            <a:avLst>
+              <a:gd name="adj" fmla="val 2616"/>
+            </a:avLst>
+          </a:prstGeom>
+          <a:solidFill>
+            <a:schemeClr val="accent5">
+              <a:lumMod val="40000"/>
+              <a:lumOff val="60000"/>
+            </a:schemeClr>
+          </a:solidFill>
+          <a:ln>
+            <a:noFill/>
+          </a:ln>
+          <a:effectLst>
+            <a:outerShdw blurRad="63500" sx="102000" sy="102000" algn="ctr" rotWithShape="0">
+              <a:prstClr val="black">
+                <a:alpha val="40000"/>
+              </a:prstClr>
+            </a:outerShdw>
+          </a:effectLst>
+        </p:spPr>
+        <p:style>
+          <a:lnRef idx="2">
+            <a:schemeClr val="accent5">
+              <a:shade val="15000"/>
+            </a:schemeClr>
+          </a:lnRef>
+          <a:fillRef idx="1">
+            <a:schemeClr val="accent5"/>
+          </a:fillRef>
+          <a:effectRef idx="0">
+            <a:schemeClr val="accent5"/>
+          </a:effectRef>
+          <a:fontRef idx="minor">
+            <a:schemeClr val="lt1"/>
+          </a:fontRef>
+        </p:style>
+        <p:txBody>
+          <a:bodyPr rtlCol="0" anchor="t"/>
+          <a:lstStyle/>
+          <a:p>
+            <a:pPr>
+              <a:lnSpc>
+                <a:spcPct val="150000"/>
+              </a:lnSpc>
+            </a:pPr>
+            <a:r>
+              <a:rPr lang="en-IN" sz="1000" b="1" dirty="0">
+                <a:solidFill>
+                  <a:schemeClr val="tx1"/>
+                </a:solidFill>
+                <a:latin typeface="Cascadia Code" panose="020B0609020000020004" pitchFamily="49" charset="0"/>
+                <a:cs typeface="Cascadia Code" panose="020B0609020000020004" pitchFamily="49" charset="0"/>
+              </a:rPr>
+              <a:t>CQRS</a:t>
+            </a:r>
+          </a:p>
+          <a:p>
+            <a:pPr>
+              <a:lnSpc>
+                <a:spcPct val="150000"/>
+              </a:lnSpc>
+            </a:pPr>
+            <a:r>
+              <a:rPr lang="en-IN" sz="1000" b="1" dirty="0">
+                <a:solidFill>
+                  <a:schemeClr val="tx1"/>
+                </a:solidFill>
+                <a:effectLst>
+                  <a:outerShdw blurRad="38100" dist="38100" dir="2700000" algn="tl">
+                    <a:srgbClr val="000000">
+                      <a:alpha val="43137"/>
+                    </a:srgbClr>
+                  </a:outerShdw>
+                </a:effectLst>
+                <a:latin typeface="Cascadia Code" panose="020B0609020000020004" pitchFamily="49" charset="0"/>
+                <a:cs typeface="Cascadia Code" panose="020B0609020000020004" pitchFamily="49" charset="0"/>
+              </a:rPr>
+              <a:t>SubmitOnboardingApplicationCommandHandler</a:t>
+            </a:r>
+            <a:r>
+              <a:rPr lang="en-IN" sz="800" dirty="0">
+                <a:solidFill>
+                  <a:schemeClr val="tx1"/>
+                </a:solidFill>
+                <a:latin typeface="Cascadia Code" panose="020B0609020000020004" pitchFamily="49" charset="0"/>
+                <a:cs typeface="Cascadia Code" panose="020B0609020000020004" pitchFamily="49" charset="0"/>
+              </a:rPr>
+              <a:t>.HandleAsync ()</a:t>
+            </a:r>
+            <a:endParaRPr lang="en-IN" sz="400" dirty="0">
+              <a:solidFill>
+                <a:schemeClr val="tx1"/>
+              </a:solidFill>
+              <a:latin typeface="Cascadia Code" panose="020B0609020000020004" pitchFamily="49" charset="0"/>
+              <a:cs typeface="Cascadia Code" panose="020B0609020000020004" pitchFamily="49" charset="0"/>
+            </a:endParaRPr>
+          </a:p>
+          <a:p>
+            <a:pPr marL="88900" indent="-88900">
+              <a:lnSpc>
+                <a:spcPct val="150000"/>
+              </a:lnSpc>
+              <a:buFont typeface="Arial" panose="020B0604020202020204" pitchFamily="34" charset="0"/>
+              <a:buChar char="•"/>
+            </a:pPr>
+            <a:r>
+              <a:rPr lang="en-US" sz="800" i="1" dirty="0">
+                <a:solidFill>
+                  <a:schemeClr val="tx1"/>
+                </a:solidFill>
+                <a:latin typeface="Cascadia Code" panose="020B0609020000020004" pitchFamily="49" charset="0"/>
+                <a:cs typeface="Cascadia Code" panose="020B0609020000020004" pitchFamily="49" charset="0"/>
+              </a:rPr>
+              <a:t>Check if specified Onboarding Application exists; if not flag error</a:t>
+            </a:r>
+          </a:p>
+          <a:p>
+            <a:pPr marL="88900" indent="-88900">
+              <a:lnSpc>
+                <a:spcPct val="150000"/>
+              </a:lnSpc>
+              <a:buFont typeface="Arial" panose="020B0604020202020204" pitchFamily="34" charset="0"/>
+              <a:buChar char="•"/>
+            </a:pPr>
+            <a:r>
+              <a:rPr lang="en-US" sz="800" i="1" dirty="0">
+                <a:solidFill>
+                  <a:schemeClr val="tx1"/>
+                </a:solidFill>
+                <a:latin typeface="Cascadia Code" panose="020B0609020000020004" pitchFamily="49" charset="0"/>
+                <a:cs typeface="Cascadia Code" panose="020B0609020000020004" pitchFamily="49" charset="0"/>
+              </a:rPr>
+              <a:t>Optimistic concurrency: if the application's version ≠ the expected version → 409 Conflict (it changed since it was read)</a:t>
+            </a:r>
+          </a:p>
+          <a:p>
+            <a:pPr marL="88900" indent="-88900">
+              <a:lnSpc>
+                <a:spcPct val="150000"/>
+              </a:lnSpc>
+              <a:buFont typeface="Arial" panose="020B0604020202020204" pitchFamily="34" charset="0"/>
+              <a:buChar char="•"/>
+            </a:pPr>
+            <a:r>
+              <a:rPr lang="en-US" sz="800" i="1" dirty="0">
+                <a:solidFill>
+                  <a:schemeClr val="tx1"/>
+                </a:solidFill>
+                <a:latin typeface="Cascadia Code" panose="020B0609020000020004" pitchFamily="49" charset="0"/>
+                <a:cs typeface="Cascadia Code" panose="020B0609020000020004" pitchFamily="49" charset="0"/>
+              </a:rPr>
+              <a:t>Create Evidence Documents (DDD call) from the persisted Document IDs (obtained by BFF from DM API, now present in command)</a:t>
+            </a:r>
+            <a:endParaRPr lang="en-IN" sz="800" i="1" dirty="0">
+              <a:solidFill>
+                <a:schemeClr val="tx1"/>
+              </a:solidFill>
+              <a:latin typeface="Cascadia Code" panose="020B0609020000020004" pitchFamily="49" charset="0"/>
+              <a:cs typeface="Cascadia Code" panose="020B0609020000020004" pitchFamily="49" charset="0"/>
+            </a:endParaRPr>
+          </a:p>
+          <a:p>
+            <a:pPr marL="88900" indent="-88900">
+              <a:lnSpc>
+                <a:spcPct val="150000"/>
+              </a:lnSpc>
+              <a:buFont typeface="Arial" panose="020B0604020202020204" pitchFamily="34" charset="0"/>
+              <a:buChar char="•"/>
+            </a:pPr>
+            <a:endParaRPr lang="en-IN" sz="800" i="1" dirty="0">
+              <a:solidFill>
+                <a:schemeClr val="tx1"/>
+              </a:solidFill>
+              <a:latin typeface="Cascadia Code" panose="020B0609020000020004" pitchFamily="49" charset="0"/>
+              <a:cs typeface="Cascadia Code" panose="020B0609020000020004" pitchFamily="49" charset="0"/>
+            </a:endParaRPr>
+          </a:p>
+          <a:p>
+            <a:pPr marL="88900" indent="-88900">
+              <a:lnSpc>
+                <a:spcPct val="150000"/>
+              </a:lnSpc>
+              <a:buFont typeface="Arial" panose="020B0604020202020204" pitchFamily="34" charset="0"/>
+              <a:buChar char="•"/>
+            </a:pPr>
+            <a:endParaRPr lang="en-IN" sz="800" i="1" dirty="0">
+              <a:solidFill>
+                <a:schemeClr val="tx1"/>
+              </a:solidFill>
+              <a:latin typeface="Cascadia Code" panose="020B0609020000020004" pitchFamily="49" charset="0"/>
+              <a:cs typeface="Cascadia Code" panose="020B0609020000020004" pitchFamily="49" charset="0"/>
+            </a:endParaRPr>
+          </a:p>
+          <a:p>
+            <a:pPr marL="88900" indent="-88900">
+              <a:lnSpc>
+                <a:spcPct val="150000"/>
+              </a:lnSpc>
+              <a:buFont typeface="Arial" panose="020B0604020202020204" pitchFamily="34" charset="0"/>
+              <a:buChar char="•"/>
+            </a:pPr>
+            <a:endParaRPr lang="en-IN" sz="800" i="1" dirty="0">
+              <a:solidFill>
+                <a:schemeClr val="tx1"/>
+              </a:solidFill>
+              <a:latin typeface="Cascadia Code" panose="020B0609020000020004" pitchFamily="49" charset="0"/>
+              <a:cs typeface="Cascadia Code" panose="020B0609020000020004" pitchFamily="49" charset="0"/>
+            </a:endParaRPr>
+          </a:p>
+          <a:p>
+            <a:pPr marL="88900" indent="-88900">
+              <a:lnSpc>
+                <a:spcPct val="150000"/>
+              </a:lnSpc>
+              <a:buFont typeface="Arial" panose="020B0604020202020204" pitchFamily="34" charset="0"/>
+              <a:buChar char="•"/>
+            </a:pPr>
+            <a:endParaRPr lang="en-IN" sz="800" i="1" dirty="0">
+              <a:solidFill>
+                <a:schemeClr val="tx1"/>
+              </a:solidFill>
+              <a:latin typeface="Cascadia Code" panose="020B0609020000020004" pitchFamily="49" charset="0"/>
+              <a:cs typeface="Cascadia Code" panose="020B0609020000020004" pitchFamily="49" charset="0"/>
+            </a:endParaRPr>
+          </a:p>
+          <a:p>
+            <a:pPr marL="88900" indent="-88900">
+              <a:lnSpc>
+                <a:spcPct val="150000"/>
+              </a:lnSpc>
+              <a:buFont typeface="Arial" panose="020B0604020202020204" pitchFamily="34" charset="0"/>
+              <a:buChar char="•"/>
+            </a:pPr>
+            <a:endParaRPr lang="en-IN" sz="800" i="1" dirty="0">
+              <a:solidFill>
+                <a:schemeClr val="tx1"/>
+              </a:solidFill>
+              <a:latin typeface="Cascadia Code" panose="020B0609020000020004" pitchFamily="49" charset="0"/>
+              <a:cs typeface="Cascadia Code" panose="020B0609020000020004" pitchFamily="49" charset="0"/>
+            </a:endParaRPr>
+          </a:p>
+          <a:p>
+            <a:pPr marL="88900" indent="-88900">
+              <a:lnSpc>
+                <a:spcPct val="150000"/>
+              </a:lnSpc>
+              <a:buFont typeface="Arial" panose="020B0604020202020204" pitchFamily="34" charset="0"/>
+              <a:buChar char="•"/>
+            </a:pPr>
+            <a:endParaRPr lang="en-IN" sz="800" i="1" dirty="0">
+              <a:solidFill>
+                <a:schemeClr val="tx1"/>
+              </a:solidFill>
+              <a:latin typeface="Cascadia Code" panose="020B0609020000020004" pitchFamily="49" charset="0"/>
+              <a:cs typeface="Cascadia Code" panose="020B0609020000020004" pitchFamily="49" charset="0"/>
+            </a:endParaRPr>
+          </a:p>
+          <a:p>
+            <a:pPr marL="88900" indent="-88900">
+              <a:lnSpc>
+                <a:spcPct val="150000"/>
+              </a:lnSpc>
+              <a:buFont typeface="Arial" panose="020B0604020202020204" pitchFamily="34" charset="0"/>
+              <a:buChar char="•"/>
+            </a:pPr>
+            <a:endParaRPr lang="en-IN" sz="800" i="1" dirty="0">
+              <a:solidFill>
+                <a:schemeClr val="tx1"/>
+              </a:solidFill>
+              <a:latin typeface="Cascadia Code" panose="020B0609020000020004" pitchFamily="49" charset="0"/>
+              <a:cs typeface="Cascadia Code" panose="020B0609020000020004" pitchFamily="49" charset="0"/>
+            </a:endParaRPr>
+          </a:p>
+          <a:p>
+            <a:pPr marL="88900" indent="-88900">
+              <a:lnSpc>
+                <a:spcPct val="150000"/>
+              </a:lnSpc>
+              <a:buFont typeface="Arial" panose="020B0604020202020204" pitchFamily="34" charset="0"/>
+              <a:buChar char="•"/>
+            </a:pPr>
+            <a:r>
+              <a:rPr lang="en-IN" sz="800" i="1" dirty="0">
+                <a:solidFill>
+                  <a:schemeClr val="tx1"/>
+                </a:solidFill>
+                <a:latin typeface="Cascadia Code" panose="020B0609020000020004" pitchFamily="49" charset="0"/>
+                <a:cs typeface="Cascadia Code" panose="020B0609020000020004" pitchFamily="49" charset="0"/>
+                <a:sym typeface="Wingdings" panose="05000000000000000000" pitchFamily="2" charset="2"/>
+              </a:rPr>
+              <a:t>EF Core (Unit Of Work Implementation):</a:t>
+            </a:r>
+          </a:p>
+          <a:p>
+            <a:pPr marL="352425" lvl="1" indent="-171450">
+              <a:lnSpc>
+                <a:spcPct val="150000"/>
+              </a:lnSpc>
+              <a:buFont typeface="Courier New" panose="02070309020205020404" pitchFamily="49" charset="0"/>
+              <a:buChar char="o"/>
+            </a:pPr>
+            <a:r>
+              <a:rPr lang="en-IN" sz="800" i="1" dirty="0">
+                <a:solidFill>
+                  <a:schemeClr val="tx1"/>
+                </a:solidFill>
+                <a:latin typeface="Cascadia Code" panose="020B0609020000020004" pitchFamily="49" charset="0"/>
+                <a:cs typeface="Cascadia Code" panose="020B0609020000020004" pitchFamily="49" charset="0"/>
+                <a:sym typeface="Wingdings" panose="05000000000000000000" pitchFamily="2" charset="2"/>
+              </a:rPr>
+              <a:t>Collect the domain events (</a:t>
+            </a:r>
+            <a:r>
+              <a:rPr lang="en-US" sz="800" i="1" dirty="0">
+                <a:solidFill>
+                  <a:schemeClr val="tx1"/>
+                </a:solidFill>
+                <a:latin typeface="Cascadia Code" panose="020B0609020000020004" pitchFamily="49" charset="0"/>
+                <a:cs typeface="Cascadia Code" panose="020B0609020000020004" pitchFamily="49" charset="0"/>
+                <a:sym typeface="Wingdings" panose="05000000000000000000" pitchFamily="2" charset="2"/>
+              </a:rPr>
+              <a:t>the two application events above)</a:t>
+            </a:r>
+            <a:endParaRPr lang="en-IN" sz="800" i="1" dirty="0">
+              <a:solidFill>
+                <a:schemeClr val="tx1"/>
+              </a:solidFill>
+              <a:latin typeface="Cascadia Code" panose="020B0609020000020004" pitchFamily="49" charset="0"/>
+              <a:cs typeface="Cascadia Code" panose="020B0609020000020004" pitchFamily="49" charset="0"/>
+              <a:sym typeface="Wingdings" panose="05000000000000000000" pitchFamily="2" charset="2"/>
+            </a:endParaRPr>
+          </a:p>
+          <a:p>
+            <a:pPr marL="352425" lvl="1" indent="-171450">
+              <a:lnSpc>
+                <a:spcPct val="150000"/>
+              </a:lnSpc>
+              <a:buFont typeface="Courier New" panose="02070309020205020404" pitchFamily="49" charset="0"/>
+              <a:buChar char="o"/>
+            </a:pPr>
+            <a:r>
+              <a:rPr lang="en-IN" sz="800" b="1" i="1" dirty="0">
+                <a:solidFill>
+                  <a:schemeClr val="tx1"/>
+                </a:solidFill>
+                <a:latin typeface="Cascadia Code" panose="020B0609020000020004" pitchFamily="49" charset="0"/>
+                <a:cs typeface="Cascadia Code" panose="020B0609020000020004" pitchFamily="49" charset="0"/>
+                <a:sym typeface="Wingdings" panose="05000000000000000000" pitchFamily="2" charset="2"/>
+              </a:rPr>
+              <a:t>Begin a transaction</a:t>
+            </a:r>
+          </a:p>
+          <a:p>
+            <a:pPr marL="352425" lvl="1" indent="-171450">
+              <a:lnSpc>
+                <a:spcPct val="150000"/>
+              </a:lnSpc>
+              <a:buFont typeface="Courier New" panose="02070309020205020404" pitchFamily="49" charset="0"/>
+              <a:buChar char="o"/>
+            </a:pPr>
+            <a:r>
+              <a:rPr lang="en-US" sz="800" i="1" dirty="0">
+                <a:solidFill>
+                  <a:schemeClr val="tx1"/>
+                </a:solidFill>
+                <a:latin typeface="Cascadia Code" panose="020B0609020000020004" pitchFamily="49" charset="0"/>
+                <a:cs typeface="Cascadia Code" panose="020B0609020000020004" pitchFamily="49" charset="0"/>
+                <a:sym typeface="Wingdings" panose="05000000000000000000" pitchFamily="2" charset="2"/>
+              </a:rPr>
+              <a:t>Save: the application is updated (status SUBMITTED, SubmittedAt) and its evidence-document rows inserted</a:t>
+            </a:r>
+            <a:endParaRPr lang="en-IN" sz="800" i="1" dirty="0">
+              <a:solidFill>
+                <a:schemeClr val="tx1"/>
+              </a:solidFill>
+              <a:latin typeface="Cascadia Code" panose="020B0609020000020004" pitchFamily="49" charset="0"/>
+              <a:cs typeface="Cascadia Code" panose="020B0609020000020004" pitchFamily="49" charset="0"/>
+              <a:sym typeface="Wingdings" panose="05000000000000000000" pitchFamily="2" charset="2"/>
+            </a:endParaRPr>
+          </a:p>
+          <a:p>
+            <a:pPr marL="352425" lvl="1" indent="-171450">
+              <a:lnSpc>
+                <a:spcPct val="150000"/>
+              </a:lnSpc>
+              <a:buFont typeface="Courier New" panose="02070309020205020404" pitchFamily="49" charset="0"/>
+              <a:buChar char="o"/>
+            </a:pPr>
+            <a:r>
+              <a:rPr lang="en-IN" sz="800" i="1" dirty="0">
+                <a:solidFill>
+                  <a:schemeClr val="tx1"/>
+                </a:solidFill>
+                <a:latin typeface="Cascadia Code" panose="020B0609020000020004" pitchFamily="49" charset="0"/>
+                <a:cs typeface="Cascadia Code" panose="020B0609020000020004" pitchFamily="49" charset="0"/>
+                <a:sym typeface="Wingdings" panose="05000000000000000000" pitchFamily="2" charset="2"/>
+              </a:rPr>
+              <a:t>Iterate through domain events</a:t>
+            </a:r>
+          </a:p>
+          <a:p>
+            <a:pPr marL="538163" lvl="2" indent="-79375">
+              <a:lnSpc>
+                <a:spcPct val="150000"/>
+              </a:lnSpc>
+              <a:buFont typeface="Cascadia Code" panose="020B0609020000020004" pitchFamily="49" charset="0"/>
+              <a:buChar char="−"/>
+            </a:pPr>
+            <a:r>
+              <a:rPr lang="en-IN" sz="800" i="1" dirty="0">
+                <a:solidFill>
+                  <a:schemeClr val="tx1"/>
+                </a:solidFill>
+                <a:latin typeface="Cascadia Code" panose="020B0609020000020004" pitchFamily="49" charset="0"/>
+                <a:cs typeface="Cascadia Code" panose="020B0609020000020004" pitchFamily="49" charset="0"/>
+                <a:sym typeface="Wingdings" panose="05000000000000000000" pitchFamily="2" charset="2"/>
+              </a:rPr>
+              <a:t>Map domain event  Integration event  to a new “Outbox” row with Workflow ID, Correlation ID and Causation ID, Initiator</a:t>
+            </a:r>
+          </a:p>
+          <a:p>
+            <a:pPr marL="538163" lvl="2" indent="-79375">
+              <a:lnSpc>
+                <a:spcPct val="150000"/>
+              </a:lnSpc>
+              <a:buFont typeface="Cascadia Code" panose="020B0609020000020004" pitchFamily="49" charset="0"/>
+              <a:buChar char="−"/>
+            </a:pPr>
+            <a:r>
+              <a:rPr lang="en-IN" sz="800" i="1" dirty="0">
+                <a:solidFill>
+                  <a:schemeClr val="tx1"/>
+                </a:solidFill>
+                <a:latin typeface="Cascadia Code" panose="020B0609020000020004" pitchFamily="49" charset="0"/>
+                <a:cs typeface="Cascadia Code" panose="020B0609020000020004" pitchFamily="49" charset="0"/>
+                <a:sym typeface="Wingdings" panose="05000000000000000000" pitchFamily="2" charset="2"/>
+              </a:rPr>
+              <a:t>Order of “Outbox” rows is important – written one row at a time</a:t>
+            </a:r>
+          </a:p>
+          <a:p>
+            <a:pPr marL="352425" lvl="1" indent="-171450">
+              <a:lnSpc>
+                <a:spcPct val="150000"/>
+              </a:lnSpc>
+              <a:buFont typeface="Courier New" panose="02070309020205020404" pitchFamily="49" charset="0"/>
+              <a:buChar char="o"/>
+            </a:pPr>
+            <a:r>
+              <a:rPr lang="en-IN" sz="800" b="1" i="1" dirty="0">
+                <a:solidFill>
+                  <a:schemeClr val="tx1"/>
+                </a:solidFill>
+                <a:latin typeface="Cascadia Code" panose="020B0609020000020004" pitchFamily="49" charset="0"/>
+                <a:cs typeface="Cascadia Code" panose="020B0609020000020004" pitchFamily="49" charset="0"/>
+                <a:sym typeface="Wingdings" panose="05000000000000000000" pitchFamily="2" charset="2"/>
+              </a:rPr>
+              <a:t>Commit the transaction</a:t>
+            </a:r>
+            <a:r>
+              <a:rPr lang="en-IN" sz="800" i="1" dirty="0">
+                <a:solidFill>
+                  <a:schemeClr val="tx1"/>
+                </a:solidFill>
+                <a:latin typeface="Cascadia Code" panose="020B0609020000020004" pitchFamily="49" charset="0"/>
+                <a:cs typeface="Cascadia Code" panose="020B0609020000020004" pitchFamily="49" charset="0"/>
+                <a:sym typeface="Wingdings" panose="05000000000000000000" pitchFamily="2" charset="2"/>
+              </a:rPr>
+              <a:t> – </a:t>
+            </a:r>
+            <a:r>
+              <a:rPr lang="en-US" sz="800" i="1" dirty="0">
+                <a:solidFill>
+                  <a:schemeClr val="tx1"/>
+                </a:solidFill>
+                <a:latin typeface="Cascadia Code" panose="020B0609020000020004" pitchFamily="49" charset="0"/>
+                <a:cs typeface="Cascadia Code" panose="020B0609020000020004" pitchFamily="49" charset="0"/>
+                <a:sym typeface="Wingdings" panose="05000000000000000000" pitchFamily="2" charset="2"/>
+              </a:rPr>
+              <a:t>OnboardingApplication (updated), evidence documents (inserted) and Outbox rows are committed together</a:t>
+            </a:r>
+            <a:endParaRPr lang="en-IN" sz="800" i="1" dirty="0">
+              <a:solidFill>
+                <a:schemeClr val="tx1"/>
+              </a:solidFill>
+              <a:latin typeface="Cascadia Code" panose="020B0609020000020004" pitchFamily="49" charset="0"/>
+              <a:cs typeface="Cascadia Code" panose="020B0609020000020004" pitchFamily="49" charset="0"/>
+              <a:sym typeface="Wingdings" panose="05000000000000000000" pitchFamily="2" charset="2"/>
+            </a:endParaRPr>
+          </a:p>
+          <a:p>
+            <a:pPr marL="538163" lvl="2" indent="-79375">
+              <a:lnSpc>
+                <a:spcPct val="150000"/>
+              </a:lnSpc>
+              <a:buFont typeface="Cascadia Code" panose="020B0609020000020004" pitchFamily="49" charset="0"/>
+              <a:buChar char="−"/>
+            </a:pPr>
+            <a:r>
+              <a:rPr lang="en-IN" sz="800" i="1" dirty="0">
+                <a:solidFill>
+                  <a:schemeClr val="tx1"/>
+                </a:solidFill>
+                <a:latin typeface="Cascadia Code" panose="020B0609020000020004" pitchFamily="49" charset="0"/>
+                <a:cs typeface="Cascadia Code" panose="020B0609020000020004" pitchFamily="49" charset="0"/>
+                <a:sym typeface="Wingdings" panose="05000000000000000000" pitchFamily="2" charset="2"/>
+              </a:rPr>
+              <a:t>Hence "Transactional Outbox": no "dual write"</a:t>
+            </a:r>
+          </a:p>
+          <a:p>
+            <a:pPr marL="352425" lvl="1" indent="-171450">
+              <a:lnSpc>
+                <a:spcPct val="150000"/>
+              </a:lnSpc>
+              <a:buFont typeface="Courier New" panose="02070309020205020404" pitchFamily="49" charset="0"/>
+              <a:buChar char="o"/>
+            </a:pPr>
+            <a:r>
+              <a:rPr lang="en-IN" sz="800" i="1" dirty="0">
+                <a:solidFill>
+                  <a:schemeClr val="tx1"/>
+                </a:solidFill>
+                <a:latin typeface="Cascadia Code" panose="020B0609020000020004" pitchFamily="49" charset="0"/>
+                <a:cs typeface="Cascadia Code" panose="020B0609020000020004" pitchFamily="49" charset="0"/>
+                <a:sym typeface="Wingdings" panose="05000000000000000000" pitchFamily="2" charset="2"/>
+              </a:rPr>
+              <a:t>Clear domain events list</a:t>
+            </a:r>
+            <a:endParaRPr lang="en-IN" sz="800" i="1" dirty="0">
+              <a:solidFill>
+                <a:schemeClr val="tx1"/>
+              </a:solidFill>
+              <a:latin typeface="Cascadia Code" panose="020B0609020000020004" pitchFamily="49" charset="0"/>
+              <a:cs typeface="Cascadia Code" panose="020B0609020000020004" pitchFamily="49" charset="0"/>
+            </a:endParaRPr>
+          </a:p>
+        </p:txBody>
+      </p:sp>
+      <p:sp>
+        <p:nvSpPr>
+          <p:cNvPr id="20" name="TextBox 19">
+            <a:extLst>
+              <a:ext uri="{FF2B5EF4-FFF2-40B4-BE49-F238E27FC236}">
+                <a16:creationId xmlns:a16="http://schemas.microsoft.com/office/drawing/2014/main" id="{D032A13C-DE10-DCAC-B95C-D9A6D18EE60E}"/>
+              </a:ext>
+            </a:extLst>
+          </p:cNvPr>
+          <p:cNvSpPr txBox="1"/>
+          <p:nvPr/>
+        </p:nvSpPr>
+        <p:spPr>
+          <a:xfrm>
+            <a:off x="5544850" y="1034630"/>
+            <a:ext cx="3299455" cy="369332"/>
+          </a:xfrm>
+          <a:prstGeom prst="rect">
+            <a:avLst/>
+          </a:prstGeom>
+          <a:noFill/>
+        </p:spPr>
+        <p:txBody>
+          <a:bodyPr wrap="square" rtlCol="0">
+            <a:spAutoFit/>
+          </a:bodyPr>
+          <a:lstStyle/>
+          <a:p>
+            <a:pPr marL="171450" indent="-171450">
+              <a:buFont typeface="Arial" panose="020B0604020202020204" pitchFamily="34" charset="0"/>
+              <a:buChar char="•"/>
+            </a:pPr>
+            <a:r>
+              <a:rPr lang="en-IN" sz="900" i="1" dirty="0">
+                <a:latin typeface="Cascadia Code" panose="020B0609020000020004" pitchFamily="49" charset="0"/>
+                <a:cs typeface="Cascadia Code" panose="020B0609020000020004" pitchFamily="49" charset="0"/>
+              </a:rPr>
+              <a:t>HTTP POST, Auth policy: </a:t>
+            </a:r>
+            <a:r>
+              <a:rPr lang="en-IN" sz="900" b="1" i="1" dirty="0">
+                <a:solidFill>
+                  <a:srgbClr val="C00000"/>
+                </a:solidFill>
+                <a:latin typeface="Cascadia Code" panose="020B0609020000020004" pitchFamily="49" charset="0"/>
+                <a:cs typeface="Cascadia Code" panose="020B0609020000020004" pitchFamily="49" charset="0"/>
+              </a:rPr>
+              <a:t>"OnboardingWrite"</a:t>
+            </a:r>
+          </a:p>
+          <a:p>
+            <a:pPr marL="171450" indent="-171450">
+              <a:buFont typeface="Arial" panose="020B0604020202020204" pitchFamily="34" charset="0"/>
+              <a:buChar char="•"/>
+            </a:pPr>
+            <a:r>
+              <a:rPr lang="en-IN" sz="900" i="1" dirty="0">
+                <a:latin typeface="Cascadia Code" panose="020B0609020000020004" pitchFamily="49" charset="0"/>
+                <a:cs typeface="Cascadia Code" panose="020B0609020000020004" pitchFamily="49" charset="0"/>
+              </a:rPr>
+              <a:t>Uses DDD, CQRS Command Handler</a:t>
+            </a:r>
+          </a:p>
+        </p:txBody>
+      </p:sp>
+      <p:sp>
+        <p:nvSpPr>
+          <p:cNvPr id="21" name="Rectangle: Rounded Corners 20">
+            <a:extLst>
+              <a:ext uri="{FF2B5EF4-FFF2-40B4-BE49-F238E27FC236}">
+                <a16:creationId xmlns:a16="http://schemas.microsoft.com/office/drawing/2014/main" id="{FB1C2BD7-AA96-EC3A-D846-75906B4FF039}"/>
+              </a:ext>
+            </a:extLst>
+          </p:cNvPr>
+          <p:cNvSpPr/>
+          <p:nvPr/>
+        </p:nvSpPr>
+        <p:spPr>
+          <a:xfrm>
+            <a:off x="536995" y="3047373"/>
+            <a:ext cx="7809614" cy="1201412"/>
+          </a:xfrm>
+          <a:prstGeom prst="roundRect">
+            <a:avLst>
+              <a:gd name="adj" fmla="val 9293"/>
+            </a:avLst>
+          </a:prstGeom>
+          <a:solidFill>
+            <a:schemeClr val="accent2">
+              <a:lumMod val="20000"/>
+              <a:lumOff val="80000"/>
+            </a:schemeClr>
+          </a:solidFill>
+          <a:ln>
+            <a:noFill/>
+          </a:ln>
+          <a:effectLst>
+            <a:outerShdw blurRad="63500" sx="102000" sy="102000" algn="ctr" rotWithShape="0">
+              <a:prstClr val="black">
+                <a:alpha val="40000"/>
+              </a:prstClr>
+            </a:outerShdw>
+          </a:effectLst>
+        </p:spPr>
+        <p:style>
+          <a:lnRef idx="2">
+            <a:schemeClr val="accent5">
+              <a:shade val="15000"/>
+            </a:schemeClr>
+          </a:lnRef>
+          <a:fillRef idx="1">
+            <a:schemeClr val="accent5"/>
+          </a:fillRef>
+          <a:effectRef idx="0">
+            <a:schemeClr val="accent5"/>
+          </a:effectRef>
+          <a:fontRef idx="minor">
+            <a:schemeClr val="lt1"/>
+          </a:fontRef>
+        </p:style>
+        <p:txBody>
+          <a:bodyPr rtlCol="0" anchor="t"/>
+          <a:lstStyle/>
+          <a:p>
+            <a:pPr>
+              <a:lnSpc>
+                <a:spcPct val="150000"/>
+              </a:lnSpc>
+            </a:pPr>
+            <a:r>
+              <a:rPr lang="en-IN" sz="1000" b="1" dirty="0">
+                <a:solidFill>
+                  <a:schemeClr val="tx1"/>
+                </a:solidFill>
+                <a:latin typeface="Cascadia Code" panose="020B0609020000020004" pitchFamily="49" charset="0"/>
+                <a:cs typeface="Cascadia Code" panose="020B0609020000020004" pitchFamily="49" charset="0"/>
+              </a:rPr>
+              <a:t>Domain Driven Design</a:t>
+            </a:r>
+          </a:p>
+          <a:p>
+            <a:pPr>
+              <a:lnSpc>
+                <a:spcPct val="150000"/>
+              </a:lnSpc>
+            </a:pPr>
+            <a:r>
+              <a:rPr lang="en-IN" sz="1000" b="1" dirty="0">
+                <a:solidFill>
+                  <a:schemeClr val="tx1"/>
+                </a:solidFill>
+                <a:effectLst>
+                  <a:outerShdw blurRad="38100" dist="38100" dir="2700000" algn="tl">
+                    <a:srgbClr val="000000">
+                      <a:alpha val="43137"/>
+                    </a:srgbClr>
+                  </a:outerShdw>
+                </a:effectLst>
+                <a:latin typeface="Cascadia Code" panose="020B0609020000020004" pitchFamily="49" charset="0"/>
+                <a:cs typeface="Cascadia Code" panose="020B0609020000020004" pitchFamily="49" charset="0"/>
+              </a:rPr>
+              <a:t>OnboardingApplication</a:t>
+            </a:r>
+            <a:r>
+              <a:rPr lang="en-IN" sz="800" dirty="0">
+                <a:solidFill>
+                  <a:schemeClr val="tx1"/>
+                </a:solidFill>
+                <a:latin typeface="Cascadia Code" panose="020B0609020000020004" pitchFamily="49" charset="0"/>
+                <a:cs typeface="Cascadia Code" panose="020B0609020000020004" pitchFamily="49" charset="0"/>
+              </a:rPr>
+              <a:t>.Submit ()</a:t>
+            </a:r>
+          </a:p>
+          <a:p>
+            <a:pPr indent="-277812">
+              <a:lnSpc>
+                <a:spcPct val="150000"/>
+              </a:lnSpc>
+            </a:pPr>
+            <a:endParaRPr lang="en-IN" sz="400" dirty="0">
+              <a:solidFill>
+                <a:schemeClr val="tx1"/>
+              </a:solidFill>
+              <a:latin typeface="Cascadia Code" panose="020B0609020000020004" pitchFamily="49" charset="0"/>
+              <a:cs typeface="Cascadia Code" panose="020B0609020000020004" pitchFamily="49" charset="0"/>
+            </a:endParaRPr>
+          </a:p>
+          <a:p>
+            <a:pPr marL="88900" lvl="1" indent="-88900">
+              <a:lnSpc>
+                <a:spcPct val="150000"/>
+              </a:lnSpc>
+              <a:buFont typeface="Arial" panose="020B0604020202020204" pitchFamily="34" charset="0"/>
+              <a:buChar char="•"/>
+            </a:pPr>
+            <a:r>
+              <a:rPr lang="en-US" sz="800" i="1" dirty="0">
+                <a:solidFill>
+                  <a:schemeClr val="tx1"/>
+                </a:solidFill>
+                <a:latin typeface="Cascadia Code" panose="020B0609020000020004" pitchFamily="49" charset="0"/>
+                <a:cs typeface="Cascadia Code" panose="020B0609020000020004" pitchFamily="49" charset="0"/>
+              </a:rPr>
+              <a:t>Invariants: status is DRAFT; at least one evidence document; no document listed twice (one of each type is checked earlier, by the BFF)</a:t>
+            </a:r>
+            <a:r>
+              <a:rPr lang="en-IN" sz="800" i="1" dirty="0">
+                <a:solidFill>
+                  <a:schemeClr val="tx1"/>
+                </a:solidFill>
+                <a:latin typeface="Cascadia Code" panose="020B0609020000020004" pitchFamily="49" charset="0"/>
+                <a:cs typeface="Cascadia Code" panose="020B0609020000020004" pitchFamily="49" charset="0"/>
+              </a:rPr>
+              <a:t> </a:t>
+            </a:r>
+            <a:endParaRPr lang="en-IN" sz="800" i="1" dirty="0">
+              <a:solidFill>
+                <a:schemeClr val="tx1"/>
+              </a:solidFill>
+              <a:latin typeface="Cascadia Code" panose="020B0609020000020004" pitchFamily="49" charset="0"/>
+              <a:cs typeface="Cascadia Code" panose="020B0609020000020004" pitchFamily="49" charset="0"/>
+              <a:sym typeface="Wingdings" panose="05000000000000000000" pitchFamily="2" charset="2"/>
+            </a:endParaRPr>
+          </a:p>
+          <a:p>
+            <a:pPr marL="88900" lvl="1" indent="-88900">
+              <a:lnSpc>
+                <a:spcPct val="100000"/>
+              </a:lnSpc>
+              <a:buFont typeface="Arial" panose="020B0604020202020204" pitchFamily="34" charset="0"/>
+              <a:buChar char="•"/>
+            </a:pPr>
+            <a:r>
+              <a:rPr lang="en-US" sz="800" i="1" dirty="0">
+                <a:solidFill>
+                  <a:schemeClr val="tx1"/>
+                </a:solidFill>
+                <a:latin typeface="Cascadia Code" panose="020B0609020000020004" pitchFamily="49" charset="0"/>
+                <a:cs typeface="Cascadia Code" panose="020B0609020000020004" pitchFamily="49" charset="0"/>
+                <a:sym typeface="Wingdings" panose="05000000000000000000" pitchFamily="2" charset="2"/>
+              </a:rPr>
+              <a:t>Raise domain events in order: “</a:t>
+            </a:r>
+            <a:r>
+              <a:rPr lang="en-US" sz="800" b="1" i="1" dirty="0">
+                <a:solidFill>
+                  <a:schemeClr val="tx1"/>
+                </a:solidFill>
+                <a:latin typeface="Cascadia Code" panose="020B0609020000020004" pitchFamily="49" charset="0"/>
+                <a:cs typeface="Cascadia Code" panose="020B0609020000020004" pitchFamily="49" charset="0"/>
+                <a:sym typeface="Wingdings" panose="05000000000000000000" pitchFamily="2" charset="2"/>
+              </a:rPr>
+              <a:t>OnboardingApplicationSubmittedDomainEvent</a:t>
+            </a:r>
+            <a:r>
+              <a:rPr lang="en-US" sz="800" i="1" dirty="0">
+                <a:solidFill>
+                  <a:schemeClr val="tx1"/>
+                </a:solidFill>
+                <a:latin typeface="Cascadia Code" panose="020B0609020000020004" pitchFamily="49" charset="0"/>
+                <a:cs typeface="Cascadia Code" panose="020B0609020000020004" pitchFamily="49" charset="0"/>
+                <a:sym typeface="Wingdings" panose="05000000000000000000" pitchFamily="2" charset="2"/>
+              </a:rPr>
+              <a:t>”, “</a:t>
+            </a:r>
+            <a:r>
+              <a:rPr lang="en-US" sz="800" b="1" i="1" dirty="0">
+                <a:solidFill>
+                  <a:schemeClr val="tx1"/>
+                </a:solidFill>
+                <a:latin typeface="Cascadia Code" panose="020B0609020000020004" pitchFamily="49" charset="0"/>
+                <a:cs typeface="Cascadia Code" panose="020B0609020000020004" pitchFamily="49" charset="0"/>
+                <a:sym typeface="Wingdings" panose="05000000000000000000" pitchFamily="2" charset="2"/>
+              </a:rPr>
+              <a:t>OnboardingApplicationStatusChangedDomainEvent</a:t>
+            </a:r>
+            <a:r>
+              <a:rPr lang="en-US" sz="800" i="1" dirty="0">
+                <a:solidFill>
+                  <a:schemeClr val="tx1"/>
+                </a:solidFill>
+                <a:latin typeface="Cascadia Code" panose="020B0609020000020004" pitchFamily="49" charset="0"/>
+                <a:cs typeface="Cascadia Code" panose="020B0609020000020004" pitchFamily="49" charset="0"/>
+                <a:sym typeface="Wingdings" panose="05000000000000000000" pitchFamily="2" charset="2"/>
+              </a:rPr>
+              <a:t>”</a:t>
+            </a:r>
+            <a:endParaRPr lang="en-IN" sz="800" i="1" dirty="0">
+              <a:solidFill>
+                <a:schemeClr val="tx1"/>
+              </a:solidFill>
+              <a:latin typeface="Cascadia Code" panose="020B0609020000020004" pitchFamily="49" charset="0"/>
+              <a:cs typeface="Cascadia Code" panose="020B0609020000020004" pitchFamily="49" charset="0"/>
+              <a:sym typeface="Wingdings" panose="05000000000000000000" pitchFamily="2" charset="2"/>
+            </a:endParaRPr>
+          </a:p>
+        </p:txBody>
+      </p:sp>
+      <p:sp>
+        <p:nvSpPr>
+          <p:cNvPr id="26" name="Rectangle: Rounded Corners 25">
+            <a:extLst>
+              <a:ext uri="{FF2B5EF4-FFF2-40B4-BE49-F238E27FC236}">
+                <a16:creationId xmlns:a16="http://schemas.microsoft.com/office/drawing/2014/main" id="{72BB6961-B599-69D9-4367-34A20FBD771F}"/>
+              </a:ext>
+            </a:extLst>
+          </p:cNvPr>
+          <p:cNvSpPr/>
+          <p:nvPr/>
+        </p:nvSpPr>
+        <p:spPr>
+          <a:xfrm>
+            <a:off x="8953127" y="2758614"/>
+            <a:ext cx="3012390" cy="3681683"/>
+          </a:xfrm>
+          <a:prstGeom prst="roundRect">
+            <a:avLst>
+              <a:gd name="adj" fmla="val 4865"/>
+            </a:avLst>
+          </a:prstGeom>
+          <a:solidFill>
+            <a:schemeClr val="accent6">
+              <a:lumMod val="20000"/>
+              <a:lumOff val="80000"/>
+            </a:schemeClr>
+          </a:solidFill>
+          <a:ln>
+            <a:noFill/>
+          </a:ln>
+          <a:effectLst>
+            <a:outerShdw blurRad="63500" sx="102000" sy="102000" algn="ctr" rotWithShape="0">
+              <a:prstClr val="black">
+                <a:alpha val="40000"/>
+              </a:prstClr>
+            </a:outerShdw>
+          </a:effectLst>
+        </p:spPr>
+        <p:style>
+          <a:lnRef idx="2">
+            <a:schemeClr val="accent3">
+              <a:shade val="15000"/>
+            </a:schemeClr>
+          </a:lnRef>
+          <a:fillRef idx="1">
+            <a:schemeClr val="accent3"/>
+          </a:fillRef>
+          <a:effectRef idx="0">
+            <a:schemeClr val="accent3"/>
+          </a:effectRef>
+          <a:fontRef idx="minor">
+            <a:schemeClr val="lt1"/>
+          </a:fontRef>
+        </p:style>
+        <p:txBody>
+          <a:bodyPr rtlCol="0" anchor="t"/>
+          <a:lstStyle/>
+          <a:p>
+            <a:pPr>
+              <a:lnSpc>
+                <a:spcPct val="150000"/>
+              </a:lnSpc>
+            </a:pPr>
+            <a:r>
+              <a:rPr lang="en-IN" sz="900" b="1" u="sng" dirty="0">
+                <a:solidFill>
+                  <a:schemeClr val="tx1"/>
+                </a:solidFill>
+                <a:latin typeface="Cascadia Code" panose="020B0609020000020004" pitchFamily="49" charset="0"/>
+                <a:cs typeface="Cascadia Code" panose="020B0609020000020004" pitchFamily="49" charset="0"/>
+              </a:rPr>
+              <a:t>Architectural Patterns</a:t>
+            </a:r>
+            <a:r>
+              <a:rPr lang="en-IN" sz="900" b="1" dirty="0">
+                <a:solidFill>
+                  <a:schemeClr val="tx1"/>
+                </a:solidFill>
+                <a:latin typeface="Cascadia Code" panose="020B0609020000020004" pitchFamily="49" charset="0"/>
+                <a:cs typeface="Cascadia Code" panose="020B0609020000020004" pitchFamily="49" charset="0"/>
+              </a:rPr>
+              <a:t>:</a:t>
+            </a:r>
+          </a:p>
+          <a:p>
+            <a:pPr>
+              <a:lnSpc>
+                <a:spcPct val="150000"/>
+              </a:lnSpc>
+            </a:pPr>
+            <a:endParaRPr lang="en-IN" sz="900" b="1" dirty="0">
+              <a:solidFill>
+                <a:schemeClr val="tx1"/>
+              </a:solidFill>
+              <a:latin typeface="Cascadia Code" panose="020B0609020000020004" pitchFamily="49" charset="0"/>
+              <a:cs typeface="Cascadia Code" panose="020B0609020000020004" pitchFamily="49" charset="0"/>
+            </a:endParaRPr>
+          </a:p>
+          <a:p>
+            <a:pPr marL="228600" indent="-228600">
+              <a:lnSpc>
+                <a:spcPct val="150000"/>
+              </a:lnSpc>
+              <a:buAutoNum type="arabicPeriod"/>
+            </a:pPr>
+            <a:r>
+              <a:rPr lang="en-IN" sz="900" dirty="0">
+                <a:solidFill>
+                  <a:schemeClr val="tx1"/>
+                </a:solidFill>
+                <a:latin typeface="Cascadia Code" panose="020B0609020000020004" pitchFamily="49" charset="0"/>
+                <a:cs typeface="Cascadia Code" panose="020B0609020000020004" pitchFamily="49" charset="0"/>
+              </a:rPr>
+              <a:t>Transactional Outbox Pattern</a:t>
+            </a:r>
+          </a:p>
+          <a:p>
+            <a:pPr marL="228600" indent="-228600">
+              <a:lnSpc>
+                <a:spcPct val="150000"/>
+              </a:lnSpc>
+              <a:buAutoNum type="arabicPeriod"/>
+            </a:pPr>
+            <a:r>
+              <a:rPr lang="en-IN" sz="900" dirty="0">
+                <a:solidFill>
+                  <a:schemeClr val="tx1"/>
+                </a:solidFill>
+                <a:latin typeface="Cascadia Code" panose="020B0609020000020004" pitchFamily="49" charset="0"/>
+                <a:cs typeface="Cascadia Code" panose="020B0609020000020004" pitchFamily="49" charset="0"/>
+              </a:rPr>
+              <a:t>ABAC + ReBAC Authorization Pattern</a:t>
+            </a:r>
+          </a:p>
+          <a:p>
+            <a:pPr marL="228600" indent="-228600">
+              <a:lnSpc>
+                <a:spcPct val="150000"/>
+              </a:lnSpc>
+              <a:buAutoNum type="arabicPeriod"/>
+            </a:pPr>
+            <a:r>
+              <a:rPr lang="en-IN" sz="900" dirty="0">
+                <a:solidFill>
+                  <a:schemeClr val="tx1"/>
+                </a:solidFill>
+                <a:latin typeface="Cascadia Code" panose="020B0609020000020004" pitchFamily="49" charset="0"/>
+                <a:cs typeface="Cascadia Code" panose="020B0609020000020004" pitchFamily="49" charset="0"/>
+              </a:rPr>
+              <a:t>CQRS Pattern</a:t>
+            </a:r>
+          </a:p>
+          <a:p>
+            <a:pPr marL="228600" indent="-228600">
+              <a:lnSpc>
+                <a:spcPct val="150000"/>
+              </a:lnSpc>
+              <a:buAutoNum type="arabicPeriod"/>
+            </a:pPr>
+            <a:r>
+              <a:rPr lang="en-IN" sz="900" dirty="0">
+                <a:solidFill>
+                  <a:schemeClr val="tx1"/>
+                </a:solidFill>
+                <a:latin typeface="Cascadia Code" panose="020B0609020000020004" pitchFamily="49" charset="0"/>
+                <a:cs typeface="Cascadia Code" panose="020B0609020000020004" pitchFamily="49" charset="0"/>
+              </a:rPr>
+              <a:t>DDD Patterns (Aggregate, VO, etc.)</a:t>
+            </a:r>
+          </a:p>
+          <a:p>
+            <a:pPr marL="228600" indent="-228600">
+              <a:lnSpc>
+                <a:spcPct val="150000"/>
+              </a:lnSpc>
+              <a:buAutoNum type="arabicPeriod"/>
+            </a:pPr>
+            <a:r>
+              <a:rPr lang="en-IN" sz="900" dirty="0">
+                <a:solidFill>
+                  <a:schemeClr val="tx1"/>
+                </a:solidFill>
+                <a:latin typeface="Cascadia Code" panose="020B0609020000020004" pitchFamily="49" charset="0"/>
+                <a:cs typeface="Cascadia Code" panose="020B0609020000020004" pitchFamily="49" charset="0"/>
+              </a:rPr>
+              <a:t>Deferred Domain-event Dispatch Pattern</a:t>
+            </a:r>
+          </a:p>
+          <a:p>
+            <a:pPr marL="228600" indent="-228600">
+              <a:lnSpc>
+                <a:spcPct val="150000"/>
+              </a:lnSpc>
+              <a:buAutoNum type="arabicPeriod"/>
+            </a:pPr>
+            <a:r>
+              <a:rPr lang="en-IN" sz="900" dirty="0">
+                <a:solidFill>
+                  <a:schemeClr val="tx1"/>
+                </a:solidFill>
+                <a:latin typeface="Cascadia Code" panose="020B0609020000020004" pitchFamily="49" charset="0"/>
+                <a:cs typeface="Cascadia Code" panose="020B0609020000020004" pitchFamily="49" charset="0"/>
+              </a:rPr>
+              <a:t>Domain event </a:t>
+            </a:r>
+            <a:r>
+              <a:rPr lang="en-IN" sz="900" dirty="0">
+                <a:solidFill>
+                  <a:schemeClr val="tx1"/>
+                </a:solidFill>
+                <a:latin typeface="Cascadia Code" panose="020B0609020000020004" pitchFamily="49" charset="0"/>
+                <a:cs typeface="Cascadia Code" panose="020B0609020000020004" pitchFamily="49" charset="0"/>
+                <a:sym typeface="Wingdings" panose="05000000000000000000" pitchFamily="2" charset="2"/>
+              </a:rPr>
+              <a:t> Integration Event Pattern</a:t>
+            </a:r>
+            <a:endParaRPr lang="en-IN" sz="900" dirty="0">
+              <a:solidFill>
+                <a:schemeClr val="tx1"/>
+              </a:solidFill>
+              <a:latin typeface="Cascadia Code" panose="020B0609020000020004" pitchFamily="49" charset="0"/>
+              <a:cs typeface="Cascadia Code" panose="020B0609020000020004" pitchFamily="49" charset="0"/>
+            </a:endParaRPr>
+          </a:p>
+          <a:p>
+            <a:pPr marL="228600" indent="-228600">
+              <a:lnSpc>
+                <a:spcPct val="150000"/>
+              </a:lnSpc>
+              <a:buAutoNum type="arabicPeriod"/>
+            </a:pPr>
+            <a:r>
+              <a:rPr lang="en-IN" sz="900" dirty="0">
+                <a:solidFill>
+                  <a:schemeClr val="tx1"/>
+                </a:solidFill>
+                <a:latin typeface="Cascadia Code" panose="020B0609020000020004" pitchFamily="49" charset="0"/>
+                <a:cs typeface="Cascadia Code" panose="020B0609020000020004" pitchFamily="49" charset="0"/>
+              </a:rPr>
+              <a:t>Optimistic Concurrency Control Pattern</a:t>
+            </a:r>
+          </a:p>
+          <a:p>
+            <a:pPr marL="228600" indent="-228600">
+              <a:lnSpc>
+                <a:spcPct val="150000"/>
+              </a:lnSpc>
+              <a:buAutoNum type="arabicPeriod"/>
+            </a:pPr>
+            <a:r>
+              <a:rPr lang="en-IN" sz="900" dirty="0">
+                <a:solidFill>
+                  <a:schemeClr val="tx1"/>
+                </a:solidFill>
+                <a:latin typeface="Cascadia Code" panose="020B0609020000020004" pitchFamily="49" charset="0"/>
+                <a:cs typeface="Cascadia Code" panose="020B0609020000020004" pitchFamily="49" charset="0"/>
+              </a:rPr>
+              <a:t>Repository Pattern</a:t>
+            </a:r>
+          </a:p>
+          <a:p>
+            <a:pPr marL="228600" indent="-228600">
+              <a:lnSpc>
+                <a:spcPct val="150000"/>
+              </a:lnSpc>
+              <a:buAutoNum type="arabicPeriod"/>
+            </a:pPr>
+            <a:r>
+              <a:rPr lang="en-IN" sz="900" dirty="0">
+                <a:solidFill>
+                  <a:schemeClr val="tx1"/>
+                </a:solidFill>
+                <a:latin typeface="Cascadia Code" panose="020B0609020000020004" pitchFamily="49" charset="0"/>
+                <a:cs typeface="Cascadia Code" panose="020B0609020000020004" pitchFamily="49" charset="0"/>
+              </a:rPr>
+              <a:t>Unit of Work Pattern</a:t>
+            </a:r>
+          </a:p>
+          <a:p>
+            <a:pPr marL="228600" indent="-228600">
+              <a:lnSpc>
+                <a:spcPct val="150000"/>
+              </a:lnSpc>
+              <a:buAutoNum type="arabicPeriod"/>
+            </a:pPr>
+            <a:r>
+              <a:rPr lang="en-IN" sz="900" dirty="0">
+                <a:solidFill>
+                  <a:schemeClr val="tx1"/>
+                </a:solidFill>
+                <a:latin typeface="Cascadia Code" panose="020B0609020000020004" pitchFamily="49" charset="0"/>
+                <a:cs typeface="Cascadia Code" panose="020B0609020000020004" pitchFamily="49" charset="0"/>
+              </a:rPr>
+              <a:t>Correlation Identifier Pattern</a:t>
+            </a:r>
+          </a:p>
+          <a:p>
+            <a:pPr marL="228600" indent="-228600">
+              <a:lnSpc>
+                <a:spcPct val="150000"/>
+              </a:lnSpc>
+              <a:buAutoNum type="arabicPeriod"/>
+            </a:pPr>
+            <a:r>
+              <a:rPr lang="en-IN" sz="900" dirty="0">
+                <a:solidFill>
+                  <a:schemeClr val="tx1"/>
+                </a:solidFill>
+                <a:latin typeface="Cascadia Code" panose="020B0609020000020004" pitchFamily="49" charset="0"/>
+                <a:cs typeface="Cascadia Code" panose="020B0609020000020004" pitchFamily="49" charset="0"/>
+              </a:rPr>
+              <a:t>Surrogate Key + Business Key Pattern</a:t>
+            </a:r>
+          </a:p>
+          <a:p>
+            <a:pPr marL="228600" indent="-228600">
+              <a:lnSpc>
+                <a:spcPct val="150000"/>
+              </a:lnSpc>
+              <a:buAutoNum type="arabicPeriod"/>
+            </a:pPr>
+            <a:r>
+              <a:rPr lang="en-IN" sz="900" dirty="0">
+                <a:solidFill>
+                  <a:schemeClr val="tx1"/>
+                </a:solidFill>
+                <a:latin typeface="Cascadia Code" panose="020B0609020000020004" pitchFamily="49" charset="0"/>
+                <a:cs typeface="Cascadia Code" panose="020B0609020000020004" pitchFamily="49" charset="0"/>
+              </a:rPr>
+              <a:t>Policy-based Authorization Pattern</a:t>
+            </a:r>
+          </a:p>
+          <a:p>
+            <a:pPr marL="228600" indent="-228600">
+              <a:lnSpc>
+                <a:spcPct val="150000"/>
+              </a:lnSpc>
+              <a:buAutoNum type="arabicPeriod"/>
+            </a:pPr>
+            <a:endParaRPr lang="en-IN" sz="900" dirty="0">
+              <a:solidFill>
+                <a:schemeClr val="tx1"/>
+              </a:solidFill>
+              <a:latin typeface="Cascadia Code" panose="020B0609020000020004" pitchFamily="49" charset="0"/>
+              <a:cs typeface="Cascadia Code" panose="020B0609020000020004" pitchFamily="49" charset="0"/>
+            </a:endParaRPr>
+          </a:p>
+        </p:txBody>
+      </p:sp>
+      <p:sp>
+        <p:nvSpPr>
+          <p:cNvPr id="27" name="Rectangle: Rounded Corners 26">
+            <a:extLst>
+              <a:ext uri="{FF2B5EF4-FFF2-40B4-BE49-F238E27FC236}">
+                <a16:creationId xmlns:a16="http://schemas.microsoft.com/office/drawing/2014/main" id="{E34C1014-5A42-99E6-6AB6-AA0129D9C807}"/>
+              </a:ext>
+            </a:extLst>
+          </p:cNvPr>
+          <p:cNvSpPr/>
+          <p:nvPr/>
+        </p:nvSpPr>
+        <p:spPr>
+          <a:xfrm>
+            <a:off x="8953127" y="944633"/>
+            <a:ext cx="3012390" cy="1619250"/>
+          </a:xfrm>
+          <a:prstGeom prst="roundRect">
+            <a:avLst>
+              <a:gd name="adj" fmla="val 7957"/>
+            </a:avLst>
+          </a:prstGeom>
+          <a:solidFill>
+            <a:schemeClr val="accent6">
+              <a:lumMod val="20000"/>
+              <a:lumOff val="80000"/>
+            </a:schemeClr>
+          </a:solidFill>
+          <a:ln>
+            <a:noFill/>
+          </a:ln>
+          <a:effectLst>
+            <a:outerShdw blurRad="63500" sx="102000" sy="102000" algn="ctr" rotWithShape="0">
+              <a:prstClr val="black">
+                <a:alpha val="40000"/>
+              </a:prstClr>
+            </a:outerShdw>
+          </a:effectLst>
+        </p:spPr>
+        <p:style>
+          <a:lnRef idx="2">
+            <a:schemeClr val="accent3">
+              <a:shade val="15000"/>
+            </a:schemeClr>
+          </a:lnRef>
+          <a:fillRef idx="1">
+            <a:schemeClr val="accent3"/>
+          </a:fillRef>
+          <a:effectRef idx="0">
+            <a:schemeClr val="accent3"/>
+          </a:effectRef>
+          <a:fontRef idx="minor">
+            <a:schemeClr val="lt1"/>
+          </a:fontRef>
+        </p:style>
+        <p:txBody>
+          <a:bodyPr rtlCol="0" anchor="t"/>
+          <a:lstStyle/>
+          <a:p>
+            <a:pPr>
+              <a:lnSpc>
+                <a:spcPct val="150000"/>
+              </a:lnSpc>
+            </a:pPr>
+            <a:r>
+              <a:rPr lang="en-IN" sz="900" b="1" u="sng" dirty="0">
+                <a:solidFill>
+                  <a:schemeClr val="tx1"/>
+                </a:solidFill>
+                <a:latin typeface="Cascadia Code" panose="020B0609020000020004" pitchFamily="49" charset="0"/>
+                <a:cs typeface="Cascadia Code" panose="020B0609020000020004" pitchFamily="49" charset="0"/>
+              </a:rPr>
+              <a:t>Architectural Components</a:t>
+            </a:r>
+            <a:r>
+              <a:rPr lang="en-IN" sz="900" b="1" dirty="0">
+                <a:solidFill>
+                  <a:schemeClr val="tx1"/>
+                </a:solidFill>
+                <a:latin typeface="Cascadia Code" panose="020B0609020000020004" pitchFamily="49" charset="0"/>
+                <a:cs typeface="Cascadia Code" panose="020B0609020000020004" pitchFamily="49" charset="0"/>
+              </a:rPr>
+              <a:t>:</a:t>
+            </a:r>
+          </a:p>
+          <a:p>
+            <a:pPr>
+              <a:lnSpc>
+                <a:spcPct val="150000"/>
+              </a:lnSpc>
+            </a:pPr>
+            <a:endParaRPr lang="en-IN" sz="900" b="1" dirty="0">
+              <a:solidFill>
+                <a:schemeClr val="tx1"/>
+              </a:solidFill>
+              <a:latin typeface="Cascadia Code" panose="020B0609020000020004" pitchFamily="49" charset="0"/>
+              <a:cs typeface="Cascadia Code" panose="020B0609020000020004" pitchFamily="49" charset="0"/>
+            </a:endParaRPr>
+          </a:p>
+          <a:p>
+            <a:pPr marL="228600" indent="-228600">
+              <a:lnSpc>
+                <a:spcPct val="150000"/>
+              </a:lnSpc>
+              <a:buAutoNum type="arabicPeriod"/>
+            </a:pPr>
+            <a:r>
+              <a:rPr lang="en-IN" sz="900" dirty="0">
+                <a:solidFill>
+                  <a:schemeClr val="tx1"/>
+                </a:solidFill>
+                <a:latin typeface="Cascadia Code" panose="020B0609020000020004" pitchFamily="49" charset="0"/>
+                <a:cs typeface="Cascadia Code" panose="020B0609020000020004" pitchFamily="49" charset="0"/>
+              </a:rPr>
+              <a:t>Microservice API Controller</a:t>
+            </a:r>
+          </a:p>
+          <a:p>
+            <a:pPr marL="228600" indent="-228600">
+              <a:lnSpc>
+                <a:spcPct val="150000"/>
+              </a:lnSpc>
+              <a:buAutoNum type="arabicPeriod"/>
+            </a:pPr>
+            <a:r>
+              <a:rPr lang="en-IN" sz="900" dirty="0">
+                <a:solidFill>
+                  <a:schemeClr val="tx1"/>
+                </a:solidFill>
+                <a:latin typeface="Cascadia Code" panose="020B0609020000020004" pitchFamily="49" charset="0"/>
+                <a:cs typeface="Cascadia Code" panose="020B0609020000020004" pitchFamily="49" charset="0"/>
+              </a:rPr>
+              <a:t>Command Handler (CQRS)</a:t>
+            </a:r>
+          </a:p>
+          <a:p>
+            <a:pPr marL="228600" indent="-228600">
+              <a:lnSpc>
+                <a:spcPct val="150000"/>
+              </a:lnSpc>
+              <a:buAutoNum type="arabicPeriod"/>
+            </a:pPr>
+            <a:r>
+              <a:rPr lang="en-IN" sz="900" dirty="0">
+                <a:solidFill>
+                  <a:schemeClr val="tx1"/>
+                </a:solidFill>
+                <a:latin typeface="Cascadia Code" panose="020B0609020000020004" pitchFamily="49" charset="0"/>
+                <a:cs typeface="Cascadia Code" panose="020B0609020000020004" pitchFamily="49" charset="0"/>
+              </a:rPr>
+              <a:t>Aggregate (DDD)</a:t>
+            </a:r>
+          </a:p>
+          <a:p>
+            <a:pPr marL="228600" indent="-228600">
+              <a:lnSpc>
+                <a:spcPct val="150000"/>
+              </a:lnSpc>
+              <a:buAutoNum type="arabicPeriod"/>
+            </a:pPr>
+            <a:r>
+              <a:rPr lang="en-IN" sz="900" dirty="0">
+                <a:solidFill>
+                  <a:schemeClr val="tx1"/>
+                </a:solidFill>
+                <a:latin typeface="Cascadia Code" panose="020B0609020000020004" pitchFamily="49" charset="0"/>
+                <a:cs typeface="Cascadia Code" panose="020B0609020000020004" pitchFamily="49" charset="0"/>
+              </a:rPr>
+              <a:t>Repository (EF Core DbContext)</a:t>
+            </a:r>
+          </a:p>
+          <a:p>
+            <a:pPr marL="228600" indent="-228600">
+              <a:lnSpc>
+                <a:spcPct val="150000"/>
+              </a:lnSpc>
+              <a:buAutoNum type="arabicPeriod"/>
+            </a:pPr>
+            <a:r>
+              <a:rPr lang="en-IN" sz="900" dirty="0">
+                <a:solidFill>
+                  <a:schemeClr val="tx1"/>
+                </a:solidFill>
+                <a:latin typeface="Cascadia Code" panose="020B0609020000020004" pitchFamily="49" charset="0"/>
+                <a:cs typeface="Cascadia Code" panose="020B0609020000020004" pitchFamily="49" charset="0"/>
+              </a:rPr>
+              <a:t>Unit of Work (EF Core DbContext)</a:t>
+            </a:r>
+          </a:p>
+        </p:txBody>
+      </p:sp>
+      <p:sp>
+        <p:nvSpPr>
+          <p:cNvPr id="4" name="Title 24">
+            <a:extLst>
+              <a:ext uri="{FF2B5EF4-FFF2-40B4-BE49-F238E27FC236}">
+                <a16:creationId xmlns:a16="http://schemas.microsoft.com/office/drawing/2014/main" id="{49D412E9-A31E-2658-0D26-004FDD71D3E8}"/>
+              </a:ext>
+            </a:extLst>
+          </p:cNvPr>
+          <p:cNvSpPr>
+            <a:spLocks noGrp="1"/>
+          </p:cNvSpPr>
+          <p:nvPr>
+            <p:ph type="title"/>
+          </p:nvPr>
+        </p:nvSpPr>
+        <p:spPr>
+          <a:xfrm>
+            <a:off x="133350" y="131074"/>
+            <a:ext cx="11912600" cy="460968"/>
+          </a:xfrm>
+          <a:noFill/>
+          <a:ln>
+            <a:noFill/>
+          </a:ln>
+        </p:spPr>
+        <p:txBody>
+          <a:bodyPr lIns="36576" tIns="18288">
+            <a:noAutofit/>
+          </a:bodyPr>
+          <a:lstStyle/>
+          <a:p>
+            <a:r>
+              <a:rPr lang="en-IN" sz="2500" b="1" i="0" dirty="0">
+                <a:solidFill>
+                  <a:srgbClr val="162B4A"/>
+                </a:solidFill>
+                <a:effectLst>
+                  <a:outerShdw blurRad="38100" dist="38100" dir="2700000" algn="tl">
+                    <a:srgbClr val="000000">
+                      <a:alpha val="43137"/>
+                    </a:srgbClr>
+                  </a:outerShdw>
+                </a:effectLst>
+                <a:latin typeface="Aptos Display" panose="020F0302020204030204" pitchFamily="34" charset="0"/>
+                <a:ea typeface="Calibri Light" panose="020F0302020204030204" pitchFamily="34" charset="0"/>
+                <a:cs typeface="Calibri Light" panose="020F0302020204030204" pitchFamily="34" charset="0"/>
+              </a:rPr>
+              <a:t>Submitting OnboardingApplication, Outbox records to CO DB</a:t>
+            </a:r>
+          </a:p>
+        </p:txBody>
+      </p:sp>
+    </p:spTree>
+    <p:extLst>
+      <p:ext uri="{BB962C8B-B14F-4D97-AF65-F5344CB8AC3E}">
+        <p14:creationId xmlns:p14="http://schemas.microsoft.com/office/powerpoint/2010/main" val="345638259"/>
+      </p:ext>
+    </p:extLst>
+  </p:cSld>
+  <p:clrMapOvr>
+    <a:masterClrMapping/>
+  </p:clrMapOvr>
+</p:sld>
+</file>
+
+<file path=ppt/slides/slide5.xml><?xml version="1.0" encoding="utf-8"?>
+<p:sld xmlns:a="http://schemas.openxmlformats.org/drawingml/2006/main" xmlns:r="http://schemas.openxmlformats.org/officeDocument/2006/relationships" xmlns:p="http://schemas.openxmlformats.org/presentationml/2006/main">
+  <p:cSld>
+    <p:bg>
+      <p:bgPr>
+        <a:solidFill>
+          <a:srgbClr val="162B4A"/>
+        </a:solidFill>
+        <a:effectLst/>
+      </p:bgPr>
+    </p:bg>
+    <p:spTree>
+      <p:nvGrpSpPr>
+        <p:cNvPr id="1" name=""/>
+        <p:cNvGrpSpPr/>
+        <p:nvPr/>
+      </p:nvGrpSpPr>
+      <p:grpSpPr>
+        <a:xfrm>
+          <a:off x="0" y="0"/>
+          <a:ext cx="0" cy="0"/>
+          <a:chOff x="0" y="0"/>
+          <a:chExt cx="0" cy="0"/>
+        </a:xfrm>
+      </p:grpSpPr>
+      <p:sp>
+        <p:nvSpPr>
+          <p:cNvPr id="3" name="Title 2">
+            <a:extLst>
+              <a:ext uri="{FF2B5EF4-FFF2-40B4-BE49-F238E27FC236}">
+                <a16:creationId xmlns:a16="http://schemas.microsoft.com/office/drawing/2014/main" id="{DAC7C18F-E745-156E-262B-A3629FAD5BAE}"/>
+              </a:ext>
+            </a:extLst>
+          </p:cNvPr>
+          <p:cNvSpPr>
+            <a:spLocks noGrp="1"/>
+          </p:cNvSpPr>
+          <p:nvPr>
+            <p:ph type="title"/>
+          </p:nvPr>
+        </p:nvSpPr>
+        <p:spPr>
+          <a:noFill/>
+          <a:ln>
+            <a:noFill/>
+          </a:ln>
+        </p:spPr>
+        <p:txBody>
+          <a:bodyPr lIns="320040" anchor="ctr"/>
+          <a:lstStyle/>
+          <a:p>
+            <a:pPr algn="l"/>
+            <a:r>
+              <a:rPr lang="en-US" sz="3200" b="1" i="0" dirty="0">
+                <a:solidFill>
+                  <a:srgbClr val="FFFFFF"/>
+                </a:solidFill>
+                <a:latin typeface="Aptos Display"/>
+              </a:rPr>
+              <a:t>Relay → Kafka: publishing Customer Onboarding's Outbox</a:t>
+            </a:r>
+            <a:endParaRPr lang="en-IN" sz="3200" b="1" i="0" dirty="0">
+              <a:solidFill>
+                <a:srgbClr val="FFFFFF"/>
+              </a:solidFill>
+              <a:latin typeface="Aptos Display"/>
+            </a:endParaRPr>
+          </a:p>
+        </p:txBody>
+      </p:sp>
+    </p:spTree>
+    <p:extLst>
+      <p:ext uri="{BB962C8B-B14F-4D97-AF65-F5344CB8AC3E}">
+        <p14:creationId xmlns:p14="http://schemas.microsoft.com/office/powerpoint/2010/main" val="2896710529"/>
+      </p:ext>
+    </p:extLst>
+  </p:cSld>
+  <p:clrMapOvr>
+    <a:masterClrMapping/>
+  </p:clrMapOvr>
+</p:sld>
+</file>
+
+<file path=ppt/slides/slide6.xml><?xml version="1.0" encoding="utf-8"?>
+<p:sld xmlns:a="http://schemas.openxmlformats.org/drawingml/2006/main" xmlns:r="http://schemas.openxmlformats.org/officeDocument/2006/relationships" xmlns:p="http://schemas.openxmlformats.org/presentationml/2006/main">
+  <p:cSld>
+    <p:spTree>
+      <p:nvGrpSpPr>
+        <p:cNvPr id="1" name="">
+          <a:extLst>
+            <a:ext uri="{FF2B5EF4-FFF2-40B4-BE49-F238E27FC236}">
+              <a16:creationId xmlns:a16="http://schemas.microsoft.com/office/drawing/2014/main" id="{64ED7C26-042E-1CBD-978F-73E7649BFDAE}"/>
+            </a:ext>
+          </a:extLst>
+        </p:cNvPr>
+        <p:cNvGrpSpPr/>
+        <p:nvPr/>
+      </p:nvGrpSpPr>
+      <p:grpSpPr>
+        <a:xfrm>
+          <a:off x="0" y="0"/>
+          <a:ext cx="0" cy="0"/>
+          <a:chOff x="0" y="0"/>
+          <a:chExt cx="0" cy="0"/>
+        </a:xfrm>
+      </p:grpSpPr>
+      <p:sp>
+        <p:nvSpPr>
+          <p:cNvPr id="22" name="Rectangle: Rounded Corners 21">
+            <a:extLst>
+              <a:ext uri="{FF2B5EF4-FFF2-40B4-BE49-F238E27FC236}">
+                <a16:creationId xmlns:a16="http://schemas.microsoft.com/office/drawing/2014/main" id="{6EA73D49-D765-FA89-D225-56DC1956785B}"/>
+              </a:ext>
+            </a:extLst>
+          </p:cNvPr>
+          <p:cNvSpPr/>
+          <p:nvPr/>
+        </p:nvSpPr>
+        <p:spPr>
+          <a:xfrm>
+            <a:off x="192243" y="749299"/>
+            <a:ext cx="8392957" cy="5892801"/>
+          </a:xfrm>
+          <a:prstGeom prst="roundRect">
+            <a:avLst>
+              <a:gd name="adj" fmla="val 3483"/>
+            </a:avLst>
+          </a:prstGeom>
+          <a:solidFill>
+            <a:schemeClr val="accent6">
+              <a:lumMod val="20000"/>
+              <a:lumOff val="80000"/>
+            </a:schemeClr>
+          </a:solidFill>
+          <a:ln>
+            <a:noFill/>
+          </a:ln>
+          <a:effectLst>
+            <a:outerShdw blurRad="63500" sx="102000" sy="102000" algn="ctr" rotWithShape="0">
+              <a:prstClr val="black">
+                <a:alpha val="40000"/>
+              </a:prstClr>
+            </a:outerShdw>
+          </a:effectLst>
+        </p:spPr>
+        <p:style>
+          <a:lnRef idx="2">
+            <a:schemeClr val="accent3">
+              <a:shade val="15000"/>
+            </a:schemeClr>
+          </a:lnRef>
+          <a:fillRef idx="1">
+            <a:schemeClr val="accent3"/>
+          </a:fillRef>
+          <a:effectRef idx="0">
+            <a:schemeClr val="accent3"/>
+          </a:effectRef>
+          <a:fontRef idx="minor">
+            <a:schemeClr val="lt1"/>
+          </a:fontRef>
+        </p:style>
+        <p:txBody>
+          <a:bodyPr rtlCol="0" anchor="t"/>
+          <a:lstStyle/>
+          <a:p>
+            <a:pPr>
+              <a:lnSpc>
+                <a:spcPct val="150000"/>
+              </a:lnSpc>
+            </a:pPr>
+            <a:r>
+              <a:rPr lang="en-IN" sz="1100" b="1" dirty="0">
+                <a:solidFill>
+                  <a:schemeClr val="tx1"/>
+                </a:solidFill>
+                <a:latin typeface="Cascadia Code" panose="020B0609020000020004" pitchFamily="49" charset="0"/>
+                <a:cs typeface="Cascadia Code" panose="020B0609020000020004" pitchFamily="49" charset="0"/>
+              </a:rPr>
+              <a:t>Customer Outbox Publisher </a:t>
+            </a:r>
+            <a:r>
+              <a:rPr lang="en-IN" sz="1100" dirty="0">
+                <a:solidFill>
+                  <a:schemeClr val="tx1"/>
+                </a:solidFill>
+                <a:latin typeface="Cascadia Code" panose="020B0609020000020004" pitchFamily="49" charset="0"/>
+                <a:cs typeface="Cascadia Code" panose="020B0609020000020004" pitchFamily="49" charset="0"/>
+              </a:rPr>
+              <a:t>Worker Process – </a:t>
+            </a:r>
+            <a:r>
+              <a:rPr lang="en-US" sz="900" dirty="0">
+                <a:solidFill>
+                  <a:schemeClr val="tx1"/>
+                </a:solidFill>
+                <a:latin typeface="Cascadia Code" panose="020B0609020000020004" pitchFamily="49" charset="0"/>
+                <a:cs typeface="Cascadia Code" panose="020B0609020000020004" pitchFamily="49" charset="0"/>
+              </a:rPr>
+              <a:t>.NET Worker Service (console process / container), owned by CO</a:t>
+            </a:r>
+            <a:endParaRPr lang="en-IN" sz="900" dirty="0">
+              <a:solidFill>
+                <a:schemeClr val="tx1"/>
+              </a:solidFill>
+              <a:latin typeface="Cascadia Code" panose="020B0609020000020004" pitchFamily="49" charset="0"/>
+              <a:cs typeface="Cascadia Code" panose="020B0609020000020004" pitchFamily="49" charset="0"/>
+            </a:endParaRPr>
+          </a:p>
+          <a:p>
+            <a:pPr>
+              <a:lnSpc>
+                <a:spcPct val="150000"/>
+              </a:lnSpc>
+            </a:pPr>
+            <a:r>
+              <a:rPr lang="en-IN" sz="1000" b="1" dirty="0">
+                <a:solidFill>
+                  <a:schemeClr val="tx1"/>
+                </a:solidFill>
+                <a:effectLst>
+                  <a:outerShdw blurRad="38100" dist="38100" dir="2700000" algn="tl">
+                    <a:srgbClr val="000000">
+                      <a:alpha val="43137"/>
+                    </a:srgbClr>
+                  </a:outerShdw>
+                </a:effectLst>
+                <a:latin typeface="Cascadia Code" panose="020B0609020000020004" pitchFamily="49" charset="0"/>
+                <a:cs typeface="Cascadia Code" panose="020B0609020000020004" pitchFamily="49" charset="0"/>
+              </a:rPr>
+              <a:t>CustomerOutboxPublisher</a:t>
+            </a:r>
+            <a:r>
+              <a:rPr lang="en-IN" sz="800" dirty="0">
+                <a:solidFill>
+                  <a:schemeClr val="tx1"/>
+                </a:solidFill>
+                <a:latin typeface="Cascadia Code" panose="020B0609020000020004" pitchFamily="49" charset="0"/>
+                <a:cs typeface="Cascadia Code" panose="020B0609020000020004" pitchFamily="49" charset="0"/>
+              </a:rPr>
+              <a:t>.PublishPendingAsync()</a:t>
+            </a:r>
+            <a:endParaRPr lang="en-IN" sz="800" i="1" dirty="0">
+              <a:solidFill>
+                <a:schemeClr val="tx1"/>
+              </a:solidFill>
+              <a:latin typeface="Cascadia Code" panose="020B0609020000020004" pitchFamily="49" charset="0"/>
+              <a:cs typeface="Cascadia Code" panose="020B0609020000020004" pitchFamily="49" charset="0"/>
+            </a:endParaRPr>
+          </a:p>
+          <a:p>
+            <a:pPr marL="88900" indent="-88900">
+              <a:lnSpc>
+                <a:spcPct val="150000"/>
+              </a:lnSpc>
+              <a:buFont typeface="Arial" panose="020B0604020202020204" pitchFamily="34" charset="0"/>
+              <a:buChar char="•"/>
+            </a:pPr>
+            <a:r>
+              <a:rPr lang="en-US" sz="800" i="1" dirty="0">
+                <a:solidFill>
+                  <a:schemeClr val="tx1"/>
+                </a:solidFill>
+                <a:latin typeface="Cascadia Code" panose="020B0609020000020004" pitchFamily="49" charset="0"/>
+                <a:cs typeface="Cascadia Code" panose="020B0609020000020004" pitchFamily="49" charset="0"/>
+                <a:sym typeface="Wingdings" panose="05000000000000000000" pitchFamily="2" charset="2"/>
+              </a:rPr>
+              <a:t>Hosted service: CustomerOutboxPublisherHostedService (a loop) → CustomerOutboxPublisher.PublishPendingAsync() → PublishBatchAsync()</a:t>
+            </a:r>
+          </a:p>
+          <a:p>
+            <a:pPr marL="88900" indent="-88900">
+              <a:lnSpc>
+                <a:spcPct val="150000"/>
+              </a:lnSpc>
+              <a:buFont typeface="Arial" panose="020B0604020202020204" pitchFamily="34" charset="0"/>
+              <a:buChar char="•"/>
+            </a:pPr>
+            <a:r>
+              <a:rPr lang="en-US" sz="800" i="1" dirty="0">
+                <a:solidFill>
+                  <a:schemeClr val="tx1"/>
+                </a:solidFill>
+                <a:latin typeface="Cascadia Code" panose="020B0609020000020004" pitchFamily="49" charset="0"/>
+                <a:cs typeface="Cascadia Code" panose="020B0609020000020004" pitchFamily="49" charset="0"/>
+                <a:sym typeface="Wingdings" panose="05000000000000000000" pitchFamily="2" charset="2"/>
+              </a:rPr>
+              <a:t>Polls every 2 seconds, up to 10 batches per poll, so an event and its follow-up (Submitted, then StatusChanged) don't each wait a full poll</a:t>
+            </a:r>
+          </a:p>
+          <a:p>
+            <a:pPr marL="88900" indent="-88900">
+              <a:lnSpc>
+                <a:spcPct val="150000"/>
+              </a:lnSpc>
+              <a:buFont typeface="Arial" panose="020B0604020202020204" pitchFamily="34" charset="0"/>
+              <a:buChar char="•"/>
+            </a:pPr>
+            <a:r>
+              <a:rPr lang="en-US" sz="800" i="1" dirty="0">
+                <a:solidFill>
+                  <a:schemeClr val="tx1"/>
+                </a:solidFill>
+                <a:latin typeface="Cascadia Code" panose="020B0609020000020004" pitchFamily="49" charset="0"/>
+                <a:cs typeface="Cascadia Code" panose="020B0609020000020004" pitchFamily="49" charset="0"/>
+                <a:sym typeface="Wingdings" panose="05000000000000000000" pitchFamily="2" charset="2"/>
+              </a:rPr>
+              <a:t>Connects to EwpCustomerDb as ewp_customer_outbox_relay: it may only read and update outbox_messages, and cannot read customers</a:t>
+            </a:r>
+          </a:p>
+          <a:p>
+            <a:pPr marL="88900" indent="-88900">
+              <a:lnSpc>
+                <a:spcPct val="150000"/>
+              </a:lnSpc>
+              <a:buFont typeface="Arial" panose="020B0604020202020204" pitchFamily="34" charset="0"/>
+              <a:buChar char="•"/>
+            </a:pPr>
+            <a:r>
+              <a:rPr lang="en-US" sz="800" i="1" dirty="0">
+                <a:solidFill>
+                  <a:schemeClr val="tx1"/>
+                </a:solidFill>
+                <a:latin typeface="Cascadia Code" panose="020B0609020000020004" pitchFamily="49" charset="0"/>
+                <a:cs typeface="Cascadia Code" panose="020B0609020000020004" pitchFamily="49" charset="0"/>
+                <a:sym typeface="Wingdings" panose="05000000000000000000" pitchFamily="2" charset="2"/>
+              </a:rPr>
+              <a:t>Connects to Kafka as its own user, </a:t>
+            </a:r>
+            <a:r>
+              <a:rPr lang="en-US" sz="800" i="1" dirty="0" err="1">
+                <a:solidFill>
+                  <a:schemeClr val="tx1"/>
+                </a:solidFill>
+                <a:latin typeface="Cascadia Code" panose="020B0609020000020004" pitchFamily="49" charset="0"/>
+                <a:cs typeface="Cascadia Code" panose="020B0609020000020004" pitchFamily="49" charset="0"/>
+                <a:sym typeface="Wingdings" panose="05000000000000000000" pitchFamily="2" charset="2"/>
+              </a:rPr>
+              <a:t>ewp</a:t>
+            </a:r>
+            <a:r>
+              <a:rPr lang="en-US" sz="800" i="1" dirty="0">
+                <a:solidFill>
+                  <a:schemeClr val="tx1"/>
+                </a:solidFill>
+                <a:latin typeface="Cascadia Code" panose="020B0609020000020004" pitchFamily="49" charset="0"/>
+                <a:cs typeface="Cascadia Code" panose="020B0609020000020004" pitchFamily="49" charset="0"/>
+                <a:sym typeface="Wingdings" panose="05000000000000000000" pitchFamily="2" charset="2"/>
+              </a:rPr>
+              <a:t>-co-outbox-relay: it may only write Customer Onboarding's topics</a:t>
+            </a:r>
+          </a:p>
+          <a:p>
+            <a:pPr marL="88900" indent="-88900">
+              <a:lnSpc>
+                <a:spcPct val="150000"/>
+              </a:lnSpc>
+              <a:buFont typeface="Arial" panose="020B0604020202020204" pitchFamily="34" charset="0"/>
+              <a:buChar char="•"/>
+            </a:pPr>
+            <a:r>
+              <a:rPr lang="en-US" sz="800" b="1" i="1" dirty="0">
+                <a:solidFill>
+                  <a:schemeClr val="tx1"/>
+                </a:solidFill>
+                <a:latin typeface="Cascadia Code" panose="020B0609020000020004" pitchFamily="49" charset="0"/>
+                <a:cs typeface="Cascadia Code" panose="020B0609020000020004" pitchFamily="49" charset="0"/>
+                <a:sym typeface="Wingdings" panose="05000000000000000000" pitchFamily="2" charset="2"/>
+              </a:rPr>
+              <a:t>PublishBatchAsync()</a:t>
+            </a:r>
+            <a:r>
+              <a:rPr lang="en-US" sz="800" i="1" dirty="0">
+                <a:solidFill>
+                  <a:schemeClr val="tx1"/>
+                </a:solidFill>
+                <a:latin typeface="Cascadia Code" panose="020B0609020000020004" pitchFamily="49" charset="0"/>
+                <a:cs typeface="Cascadia Code" panose="020B0609020000020004" pitchFamily="49" charset="0"/>
+                <a:sym typeface="Wingdings" panose="05000000000000000000" pitchFamily="2" charset="2"/>
+              </a:rPr>
+              <a:t>: one batch, in </a:t>
+            </a:r>
+            <a:r>
+              <a:rPr lang="en-US" sz="800" b="1" i="1" dirty="0">
+                <a:solidFill>
+                  <a:schemeClr val="tx1"/>
+                </a:solidFill>
+                <a:latin typeface="Cascadia Code" panose="020B0609020000020004" pitchFamily="49" charset="0"/>
+                <a:cs typeface="Cascadia Code" panose="020B0609020000020004" pitchFamily="49" charset="0"/>
+                <a:sym typeface="Wingdings" panose="05000000000000000000" pitchFamily="2" charset="2"/>
+              </a:rPr>
+              <a:t>one database transaction</a:t>
+            </a:r>
+          </a:p>
+          <a:p>
+            <a:pPr marL="352425" lvl="1" indent="-171450">
+              <a:lnSpc>
+                <a:spcPct val="150000"/>
+              </a:lnSpc>
+              <a:buFont typeface="Courier New" panose="02070309020205020404" pitchFamily="49" charset="0"/>
+              <a:buChar char="o"/>
+            </a:pPr>
+            <a:r>
+              <a:rPr lang="en-US" sz="800" i="1" dirty="0">
+                <a:solidFill>
+                  <a:schemeClr val="tx1"/>
+                </a:solidFill>
+                <a:latin typeface="Cascadia Code" panose="020B0609020000020004" pitchFamily="49" charset="0"/>
+                <a:cs typeface="Cascadia Code" panose="020B0609020000020004" pitchFamily="49" charset="0"/>
+                <a:sym typeface="Wingdings" panose="05000000000000000000" pitchFamily="2" charset="2"/>
+              </a:rPr>
+              <a:t>Begin a transaction; Claim up to 50 rows (</a:t>
+            </a:r>
+            <a:r>
+              <a:rPr lang="en-US" sz="800" i="1" dirty="0" err="1">
+                <a:solidFill>
+                  <a:schemeClr val="tx1"/>
+                </a:solidFill>
+                <a:latin typeface="Cascadia Code" panose="020B0609020000020004" pitchFamily="49" charset="0"/>
+                <a:cs typeface="Cascadia Code" panose="020B0609020000020004" pitchFamily="49" charset="0"/>
+                <a:sym typeface="Wingdings" panose="05000000000000000000" pitchFamily="2" charset="2"/>
+              </a:rPr>
+              <a:t>BatchSize</a:t>
+            </a:r>
+            <a:r>
+              <a:rPr lang="en-US" sz="800" i="1" dirty="0">
+                <a:solidFill>
+                  <a:schemeClr val="tx1"/>
+                </a:solidFill>
+                <a:latin typeface="Cascadia Code" panose="020B0609020000020004" pitchFamily="49" charset="0"/>
+                <a:cs typeface="Cascadia Code" panose="020B0609020000020004" pitchFamily="49" charset="0"/>
+                <a:sym typeface="Wingdings" panose="05000000000000000000" pitchFamily="2" charset="2"/>
+              </a:rPr>
+              <a:t>) with one SQL query:</a:t>
+            </a:r>
+          </a:p>
+          <a:p>
+            <a:pPr marL="352425" lvl="1" indent="-171450">
+              <a:lnSpc>
+                <a:spcPct val="150000"/>
+              </a:lnSpc>
+              <a:buFont typeface="Courier New" panose="02070309020205020404" pitchFamily="49" charset="0"/>
+              <a:buChar char="o"/>
+            </a:pPr>
+            <a:r>
+              <a:rPr lang="en-US" sz="800" i="1" dirty="0">
+                <a:solidFill>
+                  <a:schemeClr val="tx1"/>
+                </a:solidFill>
+                <a:latin typeface="Cascadia Code" panose="020B0609020000020004" pitchFamily="49" charset="0"/>
+                <a:cs typeface="Cascadia Code" panose="020B0609020000020004" pitchFamily="49" charset="0"/>
+                <a:sym typeface="Wingdings" panose="05000000000000000000" pitchFamily="2" charset="2"/>
+              </a:rPr>
+              <a:t>not yet published (</a:t>
+            </a:r>
+            <a:r>
+              <a:rPr lang="en-US" sz="800" i="1" dirty="0" err="1">
+                <a:solidFill>
+                  <a:schemeClr val="tx1"/>
+                </a:solidFill>
+                <a:latin typeface="Cascadia Code" panose="020B0609020000020004" pitchFamily="49" charset="0"/>
+                <a:cs typeface="Cascadia Code" panose="020B0609020000020004" pitchFamily="49" charset="0"/>
+                <a:sym typeface="Wingdings" panose="05000000000000000000" pitchFamily="2" charset="2"/>
+              </a:rPr>
+              <a:t>published_at</a:t>
+            </a:r>
+            <a:r>
+              <a:rPr lang="en-US" sz="800" i="1" dirty="0">
+                <a:solidFill>
+                  <a:schemeClr val="tx1"/>
+                </a:solidFill>
+                <a:latin typeface="Cascadia Code" panose="020B0609020000020004" pitchFamily="49" charset="0"/>
+                <a:cs typeface="Cascadia Code" panose="020B0609020000020004" pitchFamily="49" charset="0"/>
+                <a:sym typeface="Wingdings" panose="05000000000000000000" pitchFamily="2" charset="2"/>
+              </a:rPr>
+              <a:t> IS NULL), of an event type the relay, publishes: </a:t>
+            </a:r>
+            <a:r>
+              <a:rPr lang="en-US" sz="800" i="1" dirty="0" err="1">
+                <a:solidFill>
+                  <a:schemeClr val="tx1"/>
+                </a:solidFill>
+                <a:latin typeface="Cascadia Code" panose="020B0609020000020004" pitchFamily="49" charset="0"/>
+                <a:cs typeface="Cascadia Code" panose="020B0609020000020004" pitchFamily="49" charset="0"/>
+                <a:sym typeface="Wingdings" panose="05000000000000000000" pitchFamily="2" charset="2"/>
+              </a:rPr>
+              <a:t>CustomerCreated</a:t>
+            </a:r>
+            <a:r>
+              <a:rPr lang="en-US" sz="800" i="1" dirty="0">
+                <a:solidFill>
+                  <a:schemeClr val="tx1"/>
+                </a:solidFill>
+                <a:latin typeface="Cascadia Code" panose="020B0609020000020004" pitchFamily="49" charset="0"/>
+                <a:cs typeface="Cascadia Code" panose="020B0609020000020004" pitchFamily="49" charset="0"/>
+                <a:sym typeface="Wingdings" panose="05000000000000000000" pitchFamily="2" charset="2"/>
+              </a:rPr>
+              <a:t>, OnboardingApplicationSubmitted, </a:t>
+            </a:r>
+            <a:r>
+              <a:rPr lang="en-US" sz="800" i="1" dirty="0" err="1">
+                <a:solidFill>
+                  <a:schemeClr val="tx1"/>
+                </a:solidFill>
+                <a:latin typeface="Cascadia Code" panose="020B0609020000020004" pitchFamily="49" charset="0"/>
+                <a:cs typeface="Cascadia Code" panose="020B0609020000020004" pitchFamily="49" charset="0"/>
+                <a:sym typeface="Wingdings" panose="05000000000000000000" pitchFamily="2" charset="2"/>
+              </a:rPr>
+              <a:t>OnboardingApplicationStatusChanged</a:t>
+            </a:r>
+            <a:r>
+              <a:rPr lang="en-US" sz="800" i="1" dirty="0">
+                <a:solidFill>
+                  <a:schemeClr val="tx1"/>
+                </a:solidFill>
+                <a:latin typeface="Cascadia Code" panose="020B0609020000020004" pitchFamily="49" charset="0"/>
+                <a:cs typeface="Cascadia Code" panose="020B0609020000020004" pitchFamily="49" charset="0"/>
+                <a:sym typeface="Wingdings" panose="05000000000000000000" pitchFamily="2" charset="2"/>
+              </a:rPr>
+              <a:t>, </a:t>
+            </a:r>
+            <a:r>
+              <a:rPr lang="en-US" sz="800" i="1" dirty="0" err="1">
+                <a:solidFill>
+                  <a:schemeClr val="tx1"/>
+                </a:solidFill>
+                <a:latin typeface="Cascadia Code" panose="020B0609020000020004" pitchFamily="49" charset="0"/>
+                <a:cs typeface="Cascadia Code" panose="020B0609020000020004" pitchFamily="49" charset="0"/>
+                <a:sym typeface="Wingdings" panose="05000000000000000000" pitchFamily="2" charset="2"/>
+              </a:rPr>
+              <a:t>OnboardingApplicationRejected</a:t>
+            </a:r>
+            <a:r>
+              <a:rPr lang="en-US" sz="800" i="1" dirty="0">
+                <a:solidFill>
+                  <a:schemeClr val="tx1"/>
+                </a:solidFill>
+                <a:latin typeface="Cascadia Code" panose="020B0609020000020004" pitchFamily="49" charset="0"/>
+                <a:cs typeface="Cascadia Code" panose="020B0609020000020004" pitchFamily="49" charset="0"/>
+                <a:sym typeface="Wingdings" panose="05000000000000000000" pitchFamily="2" charset="2"/>
+              </a:rPr>
+              <a:t>;</a:t>
+            </a:r>
+          </a:p>
+          <a:p>
+            <a:pPr marL="352425" lvl="1" indent="-171450">
+              <a:lnSpc>
+                <a:spcPct val="150000"/>
+              </a:lnSpc>
+              <a:buFont typeface="Courier New" panose="02070309020205020404" pitchFamily="49" charset="0"/>
+              <a:buChar char="o"/>
+            </a:pPr>
+            <a:r>
+              <a:rPr lang="en-US" sz="800" i="1" dirty="0">
+                <a:solidFill>
+                  <a:schemeClr val="tx1"/>
+                </a:solidFill>
+                <a:latin typeface="Cascadia Code" panose="020B0609020000020004" pitchFamily="49" charset="0"/>
+                <a:cs typeface="Cascadia Code" panose="020B0609020000020004" pitchFamily="49" charset="0"/>
+                <a:sym typeface="Wingdings" panose="05000000000000000000" pitchFamily="2" charset="2"/>
+              </a:rPr>
+              <a:t>not parked (fewer than 10 attempts, </a:t>
+            </a:r>
+            <a:r>
+              <a:rPr lang="en-US" sz="800" i="1" dirty="0" err="1">
+                <a:solidFill>
+                  <a:schemeClr val="tx1"/>
+                </a:solidFill>
+                <a:latin typeface="Cascadia Code" panose="020B0609020000020004" pitchFamily="49" charset="0"/>
+                <a:cs typeface="Cascadia Code" panose="020B0609020000020004" pitchFamily="49" charset="0"/>
+                <a:sym typeface="Wingdings" panose="05000000000000000000" pitchFamily="2" charset="2"/>
+              </a:rPr>
+              <a:t>MaxAttempts</a:t>
+            </a:r>
+            <a:r>
+              <a:rPr lang="en-US" sz="800" i="1" dirty="0">
+                <a:solidFill>
+                  <a:schemeClr val="tx1"/>
+                </a:solidFill>
+                <a:latin typeface="Cascadia Code" panose="020B0609020000020004" pitchFamily="49" charset="0"/>
+                <a:cs typeface="Cascadia Code" panose="020B0609020000020004" pitchFamily="49" charset="0"/>
+                <a:sym typeface="Wingdings" panose="05000000000000000000" pitchFamily="2" charset="2"/>
+              </a:rPr>
+              <a:t>); due again after a failure: back-off 5 s, doubling per attempt;</a:t>
+            </a:r>
+          </a:p>
+          <a:p>
+            <a:pPr marL="352425" lvl="1" indent="-171450">
+              <a:lnSpc>
+                <a:spcPct val="150000"/>
+              </a:lnSpc>
+              <a:buFont typeface="Courier New" panose="02070309020205020404" pitchFamily="49" charset="0"/>
+              <a:buChar char="o"/>
+            </a:pPr>
+            <a:r>
+              <a:rPr lang="en-US" sz="800" i="1" dirty="0">
+                <a:solidFill>
+                  <a:schemeClr val="tx1"/>
+                </a:solidFill>
+                <a:latin typeface="Cascadia Code" panose="020B0609020000020004" pitchFamily="49" charset="0"/>
+                <a:cs typeface="Cascadia Code" panose="020B0609020000020004" pitchFamily="49" charset="0"/>
+                <a:sym typeface="Wingdings" panose="05000000000000000000" pitchFamily="2" charset="2"/>
+              </a:rPr>
+              <a:t>the oldest unpublished row of its aggregate: a later event of the same customer or application waits until the earlier one is out (NOT EXISTS … </a:t>
+            </a:r>
+            <a:r>
+              <a:rPr lang="en-US" sz="800" i="1" dirty="0" err="1">
+                <a:solidFill>
+                  <a:schemeClr val="tx1"/>
+                </a:solidFill>
+                <a:latin typeface="Cascadia Code" panose="020B0609020000020004" pitchFamily="49" charset="0"/>
+                <a:cs typeface="Cascadia Code" panose="020B0609020000020004" pitchFamily="49" charset="0"/>
+                <a:sym typeface="Wingdings" panose="05000000000000000000" pitchFamily="2" charset="2"/>
+              </a:rPr>
+              <a:t>earlier.sequence</a:t>
+            </a:r>
+            <a:r>
+              <a:rPr lang="en-US" sz="800" i="1" dirty="0">
+                <a:solidFill>
+                  <a:schemeClr val="tx1"/>
+                </a:solidFill>
+                <a:latin typeface="Cascadia Code" panose="020B0609020000020004" pitchFamily="49" charset="0"/>
+                <a:cs typeface="Cascadia Code" panose="020B0609020000020004" pitchFamily="49" charset="0"/>
+                <a:sym typeface="Wingdings" panose="05000000000000000000" pitchFamily="2" charset="2"/>
+              </a:rPr>
+              <a:t> &lt; </a:t>
+            </a:r>
+            <a:r>
+              <a:rPr lang="en-US" sz="800" i="1" dirty="0" err="1">
+                <a:solidFill>
+                  <a:schemeClr val="tx1"/>
+                </a:solidFill>
+                <a:latin typeface="Cascadia Code" panose="020B0609020000020004" pitchFamily="49" charset="0"/>
+                <a:cs typeface="Cascadia Code" panose="020B0609020000020004" pitchFamily="49" charset="0"/>
+                <a:sym typeface="Wingdings" panose="05000000000000000000" pitchFamily="2" charset="2"/>
+              </a:rPr>
+              <a:t>o.sequence</a:t>
+            </a:r>
+            <a:r>
+              <a:rPr lang="en-US" sz="800" i="1" dirty="0">
+                <a:solidFill>
+                  <a:schemeClr val="tx1"/>
+                </a:solidFill>
+                <a:latin typeface="Cascadia Code" panose="020B0609020000020004" pitchFamily="49" charset="0"/>
+                <a:cs typeface="Cascadia Code" panose="020B0609020000020004" pitchFamily="49" charset="0"/>
+                <a:sym typeface="Wingdings" panose="05000000000000000000" pitchFamily="2" charset="2"/>
+              </a:rPr>
+              <a:t>);</a:t>
+            </a:r>
+          </a:p>
+          <a:p>
+            <a:pPr marL="352425" lvl="1" indent="-171450">
+              <a:lnSpc>
+                <a:spcPct val="150000"/>
+              </a:lnSpc>
+              <a:buFont typeface="Courier New" panose="02070309020205020404" pitchFamily="49" charset="0"/>
+              <a:buChar char="o"/>
+            </a:pPr>
+            <a:r>
+              <a:rPr lang="en-US" sz="800" i="1" dirty="0">
+                <a:solidFill>
+                  <a:schemeClr val="tx1"/>
+                </a:solidFill>
+                <a:latin typeface="Cascadia Code" panose="020B0609020000020004" pitchFamily="49" charset="0"/>
+                <a:cs typeface="Cascadia Code" panose="020B0609020000020004" pitchFamily="49" charset="0"/>
+                <a:sym typeface="Wingdings" panose="05000000000000000000" pitchFamily="2" charset="2"/>
+              </a:rPr>
+              <a:t>ORDER BY sequence; FOR UPDATE SKIP LOCKED: the rows are locked, and a second relay instance skips them instead of waiting, so each row goes to exactly one instance.</a:t>
+            </a:r>
+          </a:p>
+          <a:p>
+            <a:pPr marL="352425" lvl="1" indent="-171450">
+              <a:lnSpc>
+                <a:spcPct val="150000"/>
+              </a:lnSpc>
+              <a:buFont typeface="Courier New" panose="02070309020205020404" pitchFamily="49" charset="0"/>
+              <a:buChar char="o"/>
+            </a:pPr>
+            <a:r>
+              <a:rPr lang="en-US" sz="800" i="1" dirty="0">
+                <a:solidFill>
+                  <a:schemeClr val="tx1"/>
+                </a:solidFill>
+                <a:latin typeface="Cascadia Code" panose="020B0609020000020004" pitchFamily="49" charset="0"/>
+                <a:cs typeface="Cascadia Code" panose="020B0609020000020004" pitchFamily="49" charset="0"/>
+                <a:sym typeface="Wingdings" panose="05000000000000000000" pitchFamily="2" charset="2"/>
+              </a:rPr>
+              <a:t>For each row:</a:t>
+            </a:r>
+          </a:p>
+          <a:p>
+            <a:pPr marL="538163" lvl="2" indent="-79375">
+              <a:lnSpc>
+                <a:spcPct val="150000"/>
+              </a:lnSpc>
+              <a:buFont typeface="Cascadia Code" panose="020B0609020000020004" pitchFamily="49" charset="0"/>
+              <a:buChar char="−"/>
+            </a:pPr>
+            <a:r>
+              <a:rPr lang="en-US" sz="800" i="1" dirty="0">
+                <a:solidFill>
+                  <a:schemeClr val="tx1"/>
+                </a:solidFill>
+                <a:latin typeface="Cascadia Code" panose="020B0609020000020004" pitchFamily="49" charset="0"/>
+                <a:cs typeface="Cascadia Code" panose="020B0609020000020004" pitchFamily="49" charset="0"/>
+                <a:sym typeface="Wingdings" panose="05000000000000000000" pitchFamily="2" charset="2"/>
+              </a:rPr>
+              <a:t>topic chosen from the event type, e.g. OnboardingApplicationSubmitted → onboarding.application.submitted;</a:t>
+            </a:r>
+          </a:p>
+          <a:p>
+            <a:pPr marL="538163" lvl="2" indent="-79375">
+              <a:lnSpc>
+                <a:spcPct val="150000"/>
+              </a:lnSpc>
+              <a:buFont typeface="Cascadia Code" panose="020B0609020000020004" pitchFamily="49" charset="0"/>
+              <a:buChar char="−"/>
+            </a:pPr>
+            <a:r>
+              <a:rPr lang="en-US" sz="800" i="1" dirty="0">
+                <a:solidFill>
+                  <a:schemeClr val="tx1"/>
+                </a:solidFill>
+                <a:latin typeface="Cascadia Code" panose="020B0609020000020004" pitchFamily="49" charset="0"/>
+                <a:cs typeface="Cascadia Code" panose="020B0609020000020004" pitchFamily="49" charset="0"/>
+                <a:sym typeface="Wingdings" panose="05000000000000000000" pitchFamily="2" charset="2"/>
+              </a:rPr>
+              <a:t>publish span started, continuing the trace of the original HTTP request (traceparent stored on the row);</a:t>
+            </a:r>
+          </a:p>
+          <a:p>
+            <a:pPr marL="538163" lvl="2" indent="-79375">
+              <a:lnSpc>
+                <a:spcPct val="150000"/>
+              </a:lnSpc>
+              <a:buFont typeface="Cascadia Code" panose="020B0609020000020004" pitchFamily="49" charset="0"/>
+              <a:buChar char="−"/>
+            </a:pPr>
+            <a:r>
+              <a:rPr lang="en-US" sz="800" i="1" dirty="0">
+                <a:solidFill>
+                  <a:schemeClr val="tx1"/>
+                </a:solidFill>
+                <a:latin typeface="Cascadia Code" panose="020B0609020000020004" pitchFamily="49" charset="0"/>
+                <a:cs typeface="Cascadia Code" panose="020B0609020000020004" pitchFamily="49" charset="0"/>
+                <a:sym typeface="Wingdings" panose="05000000000000000000" pitchFamily="2" charset="2"/>
+              </a:rPr>
+              <a:t>produce to Kafka:</a:t>
+            </a:r>
+          </a:p>
+          <a:p>
+            <a:pPr marL="808038" lvl="3" indent="-171450">
+              <a:lnSpc>
+                <a:spcPct val="150000"/>
+              </a:lnSpc>
+              <a:buFont typeface="Wingdings" panose="05000000000000000000" pitchFamily="2" charset="2"/>
+              <a:buChar char="§"/>
+            </a:pPr>
+            <a:r>
+              <a:rPr lang="en-US" sz="800" i="1" dirty="0">
+                <a:solidFill>
+                  <a:schemeClr val="tx1"/>
+                </a:solidFill>
+                <a:latin typeface="Cascadia Code" panose="020B0609020000020004" pitchFamily="49" charset="0"/>
+                <a:cs typeface="Cascadia Code" panose="020B0609020000020004" pitchFamily="49" charset="0"/>
+                <a:sym typeface="Wingdings" panose="05000000000000000000" pitchFamily="2" charset="2"/>
+              </a:rPr>
+              <a:t>key = aggregate ID, so all events of one application land in one partition, in order;</a:t>
+            </a:r>
+          </a:p>
+          <a:p>
+            <a:pPr marL="808038" lvl="3" indent="-171450">
+              <a:lnSpc>
+                <a:spcPct val="150000"/>
+              </a:lnSpc>
+              <a:buFont typeface="Wingdings" panose="05000000000000000000" pitchFamily="2" charset="2"/>
+              <a:buChar char="§"/>
+            </a:pPr>
+            <a:r>
+              <a:rPr lang="en-US" sz="800" i="1" dirty="0">
+                <a:solidFill>
+                  <a:schemeClr val="tx1"/>
+                </a:solidFill>
+                <a:latin typeface="Cascadia Code" panose="020B0609020000020004" pitchFamily="49" charset="0"/>
+                <a:cs typeface="Cascadia Code" panose="020B0609020000020004" pitchFamily="49" charset="0"/>
+                <a:sym typeface="Wingdings" panose="05000000000000000000" pitchFamily="2" charset="2"/>
+              </a:rPr>
+              <a:t>value = the integration event (JSON payload stored on the row);</a:t>
+            </a:r>
+          </a:p>
+          <a:p>
+            <a:pPr marL="808038" lvl="3" indent="-171450">
+              <a:lnSpc>
+                <a:spcPct val="150000"/>
+              </a:lnSpc>
+              <a:buFont typeface="Wingdings" panose="05000000000000000000" pitchFamily="2" charset="2"/>
+              <a:buChar char="§"/>
+            </a:pPr>
+            <a:r>
+              <a:rPr lang="en-US" sz="800" i="1" dirty="0">
+                <a:solidFill>
+                  <a:schemeClr val="tx1"/>
+                </a:solidFill>
+                <a:latin typeface="Cascadia Code" panose="020B0609020000020004" pitchFamily="49" charset="0"/>
+                <a:cs typeface="Cascadia Code" panose="020B0609020000020004" pitchFamily="49" charset="0"/>
+                <a:sym typeface="Wingdings" panose="05000000000000000000" pitchFamily="2" charset="2"/>
+              </a:rPr>
+              <a:t>headers = traceparent, message ID, event type, workflow ID, correlation ID, causation ID;</a:t>
+            </a:r>
+          </a:p>
+          <a:p>
+            <a:pPr marL="808038" lvl="3" indent="-171450">
+              <a:lnSpc>
+                <a:spcPct val="150000"/>
+              </a:lnSpc>
+              <a:buFont typeface="Wingdings" panose="05000000000000000000" pitchFamily="2" charset="2"/>
+              <a:buChar char="§"/>
+            </a:pPr>
+            <a:r>
+              <a:rPr lang="en-US" sz="800" i="1" dirty="0">
+                <a:solidFill>
+                  <a:schemeClr val="tx1"/>
+                </a:solidFill>
+                <a:latin typeface="Cascadia Code" panose="020B0609020000020004" pitchFamily="49" charset="0"/>
+                <a:cs typeface="Cascadia Code" panose="020B0609020000020004" pitchFamily="49" charset="0"/>
+                <a:sym typeface="Wingdings" panose="05000000000000000000" pitchFamily="2" charset="2"/>
+              </a:rPr>
+              <a:t>producer: idempotent, acks=all, so the broker confirms only once every in-sync replica has it, and no duplicates appear from producer retries;</a:t>
+            </a:r>
+          </a:p>
+          <a:p>
+            <a:pPr marL="352425" lvl="1" indent="-171450">
+              <a:lnSpc>
+                <a:spcPct val="150000"/>
+              </a:lnSpc>
+              <a:buFont typeface="Courier New" panose="02070309020205020404" pitchFamily="49" charset="0"/>
+              <a:buChar char="o"/>
+            </a:pPr>
+            <a:r>
+              <a:rPr lang="en-US" sz="800" i="1" dirty="0">
+                <a:solidFill>
+                  <a:schemeClr val="tx1"/>
+                </a:solidFill>
+                <a:latin typeface="Cascadia Code" panose="020B0609020000020004" pitchFamily="49" charset="0"/>
+                <a:cs typeface="Cascadia Code" panose="020B0609020000020004" pitchFamily="49" charset="0"/>
+                <a:sym typeface="Wingdings" panose="05000000000000000000" pitchFamily="2" charset="2"/>
+              </a:rPr>
+              <a:t>success → </a:t>
+            </a:r>
+            <a:r>
+              <a:rPr lang="en-US" sz="800" i="1" dirty="0" err="1">
+                <a:solidFill>
+                  <a:schemeClr val="tx1"/>
+                </a:solidFill>
+                <a:latin typeface="Cascadia Code" panose="020B0609020000020004" pitchFamily="49" charset="0"/>
+                <a:cs typeface="Cascadia Code" panose="020B0609020000020004" pitchFamily="49" charset="0"/>
+                <a:sym typeface="Wingdings" panose="05000000000000000000" pitchFamily="2" charset="2"/>
+              </a:rPr>
+              <a:t>published_at</a:t>
+            </a:r>
+            <a:r>
+              <a:rPr lang="en-US" sz="800" i="1" dirty="0">
+                <a:solidFill>
+                  <a:schemeClr val="tx1"/>
+                </a:solidFill>
+                <a:latin typeface="Cascadia Code" panose="020B0609020000020004" pitchFamily="49" charset="0"/>
+                <a:cs typeface="Cascadia Code" panose="020B0609020000020004" pitchFamily="49" charset="0"/>
+                <a:sym typeface="Wingdings" panose="05000000000000000000" pitchFamily="2" charset="2"/>
+              </a:rPr>
+              <a:t> set, attempt counted, error cleared;</a:t>
+            </a:r>
+          </a:p>
+          <a:p>
+            <a:pPr marL="352425" lvl="1" indent="-171450">
+              <a:lnSpc>
+                <a:spcPct val="150000"/>
+              </a:lnSpc>
+              <a:buFont typeface="Courier New" panose="02070309020205020404" pitchFamily="49" charset="0"/>
+              <a:buChar char="o"/>
+            </a:pPr>
+            <a:r>
+              <a:rPr lang="en-US" sz="800" i="1" dirty="0">
+                <a:solidFill>
+                  <a:schemeClr val="tx1"/>
+                </a:solidFill>
+                <a:latin typeface="Cascadia Code" panose="020B0609020000020004" pitchFamily="49" charset="0"/>
+                <a:cs typeface="Cascadia Code" panose="020B0609020000020004" pitchFamily="49" charset="0"/>
+                <a:sym typeface="Wingdings" panose="05000000000000000000" pitchFamily="2" charset="2"/>
+              </a:rPr>
+              <a:t>failure → attempt counted, </a:t>
+            </a:r>
+            <a:r>
+              <a:rPr lang="en-US" sz="800" i="1" dirty="0" err="1">
+                <a:solidFill>
+                  <a:schemeClr val="tx1"/>
+                </a:solidFill>
+                <a:latin typeface="Cascadia Code" panose="020B0609020000020004" pitchFamily="49" charset="0"/>
+                <a:cs typeface="Cascadia Code" panose="020B0609020000020004" pitchFamily="49" charset="0"/>
+                <a:sym typeface="Wingdings" panose="05000000000000000000" pitchFamily="2" charset="2"/>
+              </a:rPr>
+              <a:t>last_attempt_at</a:t>
+            </a:r>
+            <a:r>
+              <a:rPr lang="en-US" sz="800" i="1" dirty="0">
+                <a:solidFill>
+                  <a:schemeClr val="tx1"/>
+                </a:solidFill>
+                <a:latin typeface="Cascadia Code" panose="020B0609020000020004" pitchFamily="49" charset="0"/>
+                <a:cs typeface="Cascadia Code" panose="020B0609020000020004" pitchFamily="49" charset="0"/>
+                <a:sym typeface="Wingdings" panose="05000000000000000000" pitchFamily="2" charset="2"/>
+              </a:rPr>
+              <a:t> and </a:t>
+            </a:r>
+            <a:r>
+              <a:rPr lang="en-US" sz="800" i="1" dirty="0" err="1">
+                <a:solidFill>
+                  <a:schemeClr val="tx1"/>
+                </a:solidFill>
+                <a:latin typeface="Cascadia Code" panose="020B0609020000020004" pitchFamily="49" charset="0"/>
+                <a:cs typeface="Cascadia Code" panose="020B0609020000020004" pitchFamily="49" charset="0"/>
+                <a:sym typeface="Wingdings" panose="05000000000000000000" pitchFamily="2" charset="2"/>
+              </a:rPr>
+              <a:t>last_error</a:t>
+            </a:r>
+            <a:r>
+              <a:rPr lang="en-US" sz="800" i="1" dirty="0">
+                <a:solidFill>
+                  <a:schemeClr val="tx1"/>
+                </a:solidFill>
+                <a:latin typeface="Cascadia Code" panose="020B0609020000020004" pitchFamily="49" charset="0"/>
+                <a:cs typeface="Cascadia Code" panose="020B0609020000020004" pitchFamily="49" charset="0"/>
+                <a:sym typeface="Wingdings" panose="05000000000000000000" pitchFamily="2" charset="2"/>
+              </a:rPr>
+              <a:t> recorded, the row waits its back-off. After 10 failures it's PARKED: no more retries, and later events of the same aggregate are held back (never published out of order). Logged as an error, and readiness turns Degraded.</a:t>
+            </a:r>
+          </a:p>
+          <a:p>
+            <a:pPr marL="352425" lvl="1" indent="-171450">
+              <a:lnSpc>
+                <a:spcPct val="150000"/>
+              </a:lnSpc>
+              <a:buFont typeface="Courier New" panose="02070309020205020404" pitchFamily="49" charset="0"/>
+              <a:buChar char="o"/>
+            </a:pPr>
+            <a:r>
+              <a:rPr lang="en-US" sz="800" i="1" dirty="0">
+                <a:solidFill>
+                  <a:schemeClr val="tx1"/>
+                </a:solidFill>
+                <a:latin typeface="Cascadia Code" panose="020B0609020000020004" pitchFamily="49" charset="0"/>
+                <a:cs typeface="Cascadia Code" panose="020B0609020000020004" pitchFamily="49" charset="0"/>
+                <a:sym typeface="Wingdings" panose="05000000000000000000" pitchFamily="2" charset="2"/>
+              </a:rPr>
+              <a:t>Save the row updates, then commit, which releases the locks.</a:t>
+            </a:r>
+          </a:p>
+          <a:p>
+            <a:pPr marL="352425" lvl="1" indent="-171450">
+              <a:lnSpc>
+                <a:spcPct val="150000"/>
+              </a:lnSpc>
+              <a:buFont typeface="Courier New" panose="02070309020205020404" pitchFamily="49" charset="0"/>
+              <a:buChar char="o"/>
+            </a:pPr>
+            <a:endParaRPr lang="en-US" sz="800" i="1" dirty="0">
+              <a:solidFill>
+                <a:schemeClr val="tx1"/>
+              </a:solidFill>
+              <a:latin typeface="Cascadia Code" panose="020B0609020000020004" pitchFamily="49" charset="0"/>
+              <a:cs typeface="Cascadia Code" panose="020B0609020000020004" pitchFamily="49" charset="0"/>
+              <a:sym typeface="Wingdings" panose="05000000000000000000" pitchFamily="2" charset="2"/>
+            </a:endParaRPr>
+          </a:p>
+          <a:p>
+            <a:pPr marL="88900" indent="-88900">
+              <a:lnSpc>
+                <a:spcPct val="150000"/>
+              </a:lnSpc>
+              <a:buFont typeface="Arial" panose="020B0604020202020204" pitchFamily="34" charset="0"/>
+              <a:buChar char="•"/>
+            </a:pPr>
+            <a:endParaRPr lang="en-IN" sz="800" i="1" dirty="0">
+              <a:solidFill>
+                <a:schemeClr val="tx1"/>
+              </a:solidFill>
+              <a:latin typeface="Cascadia Code" panose="020B0609020000020004" pitchFamily="49" charset="0"/>
+              <a:cs typeface="Cascadia Code" panose="020B0609020000020004" pitchFamily="49" charset="0"/>
+              <a:sym typeface="Wingdings" panose="05000000000000000000" pitchFamily="2" charset="2"/>
+            </a:endParaRPr>
+          </a:p>
+          <a:p>
+            <a:pPr marL="88900" indent="-88900">
+              <a:lnSpc>
+                <a:spcPct val="150000"/>
+              </a:lnSpc>
+              <a:buFont typeface="Arial" panose="020B0604020202020204" pitchFamily="34" charset="0"/>
+              <a:buChar char="•"/>
+            </a:pPr>
+            <a:endParaRPr lang="en-IN" sz="800" i="1" dirty="0">
+              <a:solidFill>
+                <a:schemeClr val="tx1"/>
+              </a:solidFill>
+              <a:latin typeface="Cascadia Code" panose="020B0609020000020004" pitchFamily="49" charset="0"/>
+              <a:cs typeface="Cascadia Code" panose="020B0609020000020004" pitchFamily="49" charset="0"/>
+            </a:endParaRPr>
+          </a:p>
+          <a:p>
+            <a:pPr>
+              <a:lnSpc>
+                <a:spcPct val="150000"/>
+              </a:lnSpc>
+            </a:pPr>
+            <a:endParaRPr lang="en-IN" sz="800" dirty="0">
+              <a:solidFill>
+                <a:schemeClr val="tx1"/>
+              </a:solidFill>
+              <a:latin typeface="Cascadia Code" panose="020B0609020000020004" pitchFamily="49" charset="0"/>
+              <a:cs typeface="Cascadia Code" panose="020B0609020000020004" pitchFamily="49" charset="0"/>
+            </a:endParaRPr>
+          </a:p>
+          <a:p>
+            <a:pPr>
+              <a:lnSpc>
+                <a:spcPct val="150000"/>
+              </a:lnSpc>
+            </a:pPr>
+            <a:endParaRPr lang="en-IN" sz="800" dirty="0">
+              <a:solidFill>
+                <a:schemeClr val="tx1"/>
+              </a:solidFill>
+              <a:latin typeface="Cascadia Code" panose="020B0609020000020004" pitchFamily="49" charset="0"/>
+              <a:cs typeface="Cascadia Code" panose="020B0609020000020004" pitchFamily="49" charset="0"/>
+            </a:endParaRPr>
+          </a:p>
+          <a:p>
+            <a:pPr>
+              <a:lnSpc>
+                <a:spcPct val="150000"/>
+              </a:lnSpc>
+            </a:pPr>
+            <a:endParaRPr lang="en-IN" sz="800" dirty="0">
+              <a:solidFill>
+                <a:schemeClr val="tx1"/>
+              </a:solidFill>
+              <a:latin typeface="Cascadia Code" panose="020B0609020000020004" pitchFamily="49" charset="0"/>
+              <a:cs typeface="Cascadia Code" panose="020B0609020000020004" pitchFamily="49" charset="0"/>
+            </a:endParaRPr>
+          </a:p>
+          <a:p>
+            <a:pPr>
+              <a:lnSpc>
+                <a:spcPct val="150000"/>
+              </a:lnSpc>
+            </a:pPr>
+            <a:endParaRPr lang="en-IN" sz="800" dirty="0">
+              <a:solidFill>
+                <a:schemeClr val="tx1"/>
+              </a:solidFill>
+              <a:latin typeface="Cascadia Code" panose="020B0609020000020004" pitchFamily="49" charset="0"/>
+              <a:cs typeface="Cascadia Code" panose="020B0609020000020004" pitchFamily="49" charset="0"/>
+            </a:endParaRPr>
+          </a:p>
+          <a:p>
+            <a:pPr>
+              <a:lnSpc>
+                <a:spcPct val="150000"/>
+              </a:lnSpc>
+            </a:pPr>
+            <a:endParaRPr lang="en-IN" sz="800" dirty="0">
+              <a:solidFill>
+                <a:schemeClr val="tx1"/>
+              </a:solidFill>
+              <a:latin typeface="Cascadia Code" panose="020B0609020000020004" pitchFamily="49" charset="0"/>
+              <a:cs typeface="Cascadia Code" panose="020B0609020000020004" pitchFamily="49" charset="0"/>
+            </a:endParaRPr>
+          </a:p>
+          <a:p>
+            <a:pPr>
+              <a:lnSpc>
+                <a:spcPct val="150000"/>
+              </a:lnSpc>
+            </a:pPr>
+            <a:endParaRPr lang="en-IN" sz="800" dirty="0">
+              <a:solidFill>
+                <a:schemeClr val="tx1"/>
+              </a:solidFill>
+              <a:latin typeface="Cascadia Code" panose="020B0609020000020004" pitchFamily="49" charset="0"/>
+              <a:cs typeface="Cascadia Code" panose="020B0609020000020004" pitchFamily="49" charset="0"/>
+            </a:endParaRPr>
+          </a:p>
+          <a:p>
+            <a:pPr>
+              <a:lnSpc>
+                <a:spcPct val="150000"/>
+              </a:lnSpc>
+            </a:pPr>
+            <a:endParaRPr lang="en-IN" sz="800" dirty="0">
+              <a:solidFill>
+                <a:schemeClr val="tx1"/>
+              </a:solidFill>
+              <a:latin typeface="Cascadia Code" panose="020B0609020000020004" pitchFamily="49" charset="0"/>
+              <a:cs typeface="Cascadia Code" panose="020B0609020000020004" pitchFamily="49" charset="0"/>
+            </a:endParaRPr>
+          </a:p>
+          <a:p>
+            <a:pPr>
+              <a:lnSpc>
+                <a:spcPct val="150000"/>
+              </a:lnSpc>
+            </a:pPr>
+            <a:endParaRPr lang="en-IN" sz="800" dirty="0">
+              <a:solidFill>
+                <a:schemeClr val="tx1"/>
+              </a:solidFill>
+              <a:latin typeface="Cascadia Code" panose="020B0609020000020004" pitchFamily="49" charset="0"/>
+              <a:cs typeface="Cascadia Code" panose="020B0609020000020004" pitchFamily="49" charset="0"/>
+            </a:endParaRPr>
+          </a:p>
+          <a:p>
+            <a:pPr>
+              <a:lnSpc>
+                <a:spcPct val="150000"/>
+              </a:lnSpc>
+            </a:pPr>
+            <a:endParaRPr lang="en-IN" sz="800" dirty="0">
+              <a:solidFill>
+                <a:schemeClr val="tx1"/>
+              </a:solidFill>
+              <a:latin typeface="Cascadia Code" panose="020B0609020000020004" pitchFamily="49" charset="0"/>
+              <a:cs typeface="Cascadia Code" panose="020B0609020000020004" pitchFamily="49" charset="0"/>
+            </a:endParaRPr>
+          </a:p>
+          <a:p>
+            <a:pPr>
+              <a:lnSpc>
+                <a:spcPct val="150000"/>
+              </a:lnSpc>
+            </a:pPr>
+            <a:endParaRPr lang="en-IN" sz="800" dirty="0">
+              <a:solidFill>
+                <a:schemeClr val="tx1"/>
+              </a:solidFill>
+              <a:latin typeface="Cascadia Code" panose="020B0609020000020004" pitchFamily="49" charset="0"/>
+              <a:cs typeface="Cascadia Code" panose="020B0609020000020004" pitchFamily="49" charset="0"/>
+            </a:endParaRPr>
+          </a:p>
+          <a:p>
+            <a:pPr>
+              <a:lnSpc>
+                <a:spcPct val="150000"/>
+              </a:lnSpc>
+            </a:pPr>
+            <a:endParaRPr lang="en-IN" sz="800" dirty="0">
+              <a:solidFill>
+                <a:schemeClr val="tx1"/>
+              </a:solidFill>
+              <a:latin typeface="Cascadia Code" panose="020B0609020000020004" pitchFamily="49" charset="0"/>
+              <a:cs typeface="Cascadia Code" panose="020B0609020000020004" pitchFamily="49" charset="0"/>
+            </a:endParaRPr>
+          </a:p>
+          <a:p>
+            <a:pPr>
+              <a:lnSpc>
+                <a:spcPct val="150000"/>
+              </a:lnSpc>
+            </a:pPr>
+            <a:endParaRPr lang="en-IN" sz="800" dirty="0">
+              <a:solidFill>
+                <a:schemeClr val="tx1"/>
+              </a:solidFill>
+              <a:latin typeface="Cascadia Code" panose="020B0609020000020004" pitchFamily="49" charset="0"/>
+              <a:cs typeface="Cascadia Code" panose="020B0609020000020004" pitchFamily="49" charset="0"/>
+            </a:endParaRPr>
+          </a:p>
+          <a:p>
+            <a:pPr>
+              <a:lnSpc>
+                <a:spcPct val="150000"/>
+              </a:lnSpc>
+            </a:pPr>
+            <a:endParaRPr lang="en-IN" sz="800" dirty="0">
+              <a:solidFill>
+                <a:schemeClr val="tx1"/>
+              </a:solidFill>
+              <a:latin typeface="Cascadia Code" panose="020B0609020000020004" pitchFamily="49" charset="0"/>
+              <a:cs typeface="Cascadia Code" panose="020B0609020000020004" pitchFamily="49" charset="0"/>
+            </a:endParaRPr>
+          </a:p>
+          <a:p>
+            <a:pPr>
+              <a:lnSpc>
+                <a:spcPct val="150000"/>
+              </a:lnSpc>
+            </a:pPr>
+            <a:endParaRPr lang="en-IN" sz="800" dirty="0">
+              <a:solidFill>
+                <a:schemeClr val="tx1"/>
+              </a:solidFill>
+              <a:latin typeface="Cascadia Code" panose="020B0609020000020004" pitchFamily="49" charset="0"/>
+              <a:cs typeface="Cascadia Code" panose="020B0609020000020004" pitchFamily="49" charset="0"/>
+            </a:endParaRPr>
+          </a:p>
+          <a:p>
+            <a:pPr>
+              <a:lnSpc>
+                <a:spcPct val="150000"/>
+              </a:lnSpc>
+            </a:pPr>
+            <a:endParaRPr lang="en-IN" sz="800" dirty="0">
+              <a:solidFill>
+                <a:schemeClr val="tx1"/>
+              </a:solidFill>
+              <a:latin typeface="Cascadia Code" panose="020B0609020000020004" pitchFamily="49" charset="0"/>
+              <a:cs typeface="Cascadia Code" panose="020B0609020000020004" pitchFamily="49" charset="0"/>
+            </a:endParaRPr>
+          </a:p>
+          <a:p>
+            <a:pPr>
+              <a:lnSpc>
+                <a:spcPct val="150000"/>
+              </a:lnSpc>
+            </a:pPr>
+            <a:endParaRPr lang="en-IN" sz="800" dirty="0">
+              <a:solidFill>
+                <a:schemeClr val="tx1"/>
+              </a:solidFill>
+              <a:latin typeface="Cascadia Code" panose="020B0609020000020004" pitchFamily="49" charset="0"/>
+              <a:cs typeface="Cascadia Code" panose="020B0609020000020004" pitchFamily="49" charset="0"/>
+            </a:endParaRPr>
+          </a:p>
+          <a:p>
+            <a:pPr>
+              <a:lnSpc>
+                <a:spcPct val="150000"/>
+              </a:lnSpc>
+            </a:pPr>
+            <a:endParaRPr lang="en-IN" sz="800" dirty="0">
+              <a:solidFill>
+                <a:schemeClr val="tx1"/>
+              </a:solidFill>
+              <a:latin typeface="Cascadia Code" panose="020B0609020000020004" pitchFamily="49" charset="0"/>
+              <a:cs typeface="Cascadia Code" panose="020B0609020000020004" pitchFamily="49" charset="0"/>
+            </a:endParaRPr>
+          </a:p>
+          <a:p>
+            <a:pPr>
+              <a:lnSpc>
+                <a:spcPct val="150000"/>
+              </a:lnSpc>
+            </a:pPr>
+            <a:endParaRPr lang="en-IN" sz="800" dirty="0">
+              <a:solidFill>
+                <a:schemeClr val="tx1"/>
+              </a:solidFill>
+              <a:latin typeface="Cascadia Code" panose="020B0609020000020004" pitchFamily="49" charset="0"/>
+              <a:cs typeface="Cascadia Code" panose="020B0609020000020004" pitchFamily="49" charset="0"/>
+            </a:endParaRPr>
+          </a:p>
+          <a:p>
+            <a:pPr>
+              <a:lnSpc>
+                <a:spcPct val="150000"/>
+              </a:lnSpc>
+            </a:pPr>
+            <a:endParaRPr lang="en-IN" sz="800" dirty="0">
+              <a:solidFill>
+                <a:schemeClr val="tx1"/>
+              </a:solidFill>
+              <a:latin typeface="Cascadia Code" panose="020B0609020000020004" pitchFamily="49" charset="0"/>
+              <a:cs typeface="Cascadia Code" panose="020B0609020000020004" pitchFamily="49" charset="0"/>
+            </a:endParaRPr>
+          </a:p>
+          <a:p>
+            <a:pPr>
+              <a:lnSpc>
+                <a:spcPct val="150000"/>
+              </a:lnSpc>
+            </a:pPr>
+            <a:endParaRPr lang="en-IN" sz="800" dirty="0">
+              <a:solidFill>
+                <a:schemeClr val="tx1"/>
+              </a:solidFill>
+              <a:latin typeface="Cascadia Code" panose="020B0609020000020004" pitchFamily="49" charset="0"/>
+              <a:cs typeface="Cascadia Code" panose="020B0609020000020004" pitchFamily="49" charset="0"/>
+            </a:endParaRPr>
+          </a:p>
+          <a:p>
+            <a:pPr>
+              <a:lnSpc>
+                <a:spcPct val="150000"/>
+              </a:lnSpc>
+            </a:pPr>
+            <a:endParaRPr lang="en-IN" sz="800" dirty="0">
+              <a:solidFill>
+                <a:schemeClr val="tx1"/>
+              </a:solidFill>
+              <a:latin typeface="Cascadia Code" panose="020B0609020000020004" pitchFamily="49" charset="0"/>
+              <a:cs typeface="Cascadia Code" panose="020B0609020000020004" pitchFamily="49" charset="0"/>
+            </a:endParaRPr>
+          </a:p>
+          <a:p>
+            <a:pPr>
+              <a:lnSpc>
+                <a:spcPct val="150000"/>
+              </a:lnSpc>
+            </a:pPr>
+            <a:endParaRPr lang="en-IN" sz="800" dirty="0">
+              <a:solidFill>
+                <a:schemeClr val="tx1"/>
+              </a:solidFill>
+              <a:latin typeface="Cascadia Code" panose="020B0609020000020004" pitchFamily="49" charset="0"/>
+              <a:cs typeface="Cascadia Code" panose="020B0609020000020004" pitchFamily="49" charset="0"/>
+            </a:endParaRPr>
+          </a:p>
+          <a:p>
+            <a:pPr>
+              <a:lnSpc>
+                <a:spcPct val="150000"/>
+              </a:lnSpc>
+            </a:pPr>
+            <a:endParaRPr lang="en-IN" sz="800" dirty="0">
+              <a:solidFill>
+                <a:schemeClr val="tx1"/>
+              </a:solidFill>
+              <a:latin typeface="Cascadia Code" panose="020B0609020000020004" pitchFamily="49" charset="0"/>
+              <a:cs typeface="Cascadia Code" panose="020B0609020000020004" pitchFamily="49" charset="0"/>
+            </a:endParaRPr>
+          </a:p>
+          <a:p>
+            <a:pPr marL="88900" indent="-88900">
+              <a:lnSpc>
+                <a:spcPct val="150000"/>
+              </a:lnSpc>
+              <a:buFont typeface="Arial" panose="020B0604020202020204" pitchFamily="34" charset="0"/>
+              <a:buChar char="•"/>
+            </a:pPr>
+            <a:r>
+              <a:rPr lang="en-IN" sz="800" i="1" dirty="0">
+                <a:solidFill>
+                  <a:schemeClr val="tx1"/>
+                </a:solidFill>
+                <a:latin typeface="Cascadia Code" panose="020B0609020000020004" pitchFamily="49" charset="0"/>
+                <a:cs typeface="Cascadia Code" panose="020B0609020000020004" pitchFamily="49" charset="0"/>
+              </a:rPr>
+              <a:t>Return </a:t>
+            </a:r>
+            <a:r>
+              <a:rPr lang="en-IN" sz="800" b="1" i="1" dirty="0">
+                <a:solidFill>
+                  <a:schemeClr val="tx1"/>
+                </a:solidFill>
+                <a:latin typeface="Cascadia Code" panose="020B0609020000020004" pitchFamily="49" charset="0"/>
+                <a:cs typeface="Cascadia Code" panose="020B0609020000020004" pitchFamily="49" charset="0"/>
+              </a:rPr>
+              <a:t>204 – No Content</a:t>
+            </a:r>
+            <a:endParaRPr lang="en-IN" sz="1100" dirty="0">
+              <a:solidFill>
+                <a:schemeClr val="tx1"/>
+              </a:solidFill>
+            </a:endParaRPr>
+          </a:p>
+        </p:txBody>
+      </p:sp>
+      <p:sp>
+        <p:nvSpPr>
+          <p:cNvPr id="26" name="Rectangle: Rounded Corners 25">
+            <a:extLst>
+              <a:ext uri="{FF2B5EF4-FFF2-40B4-BE49-F238E27FC236}">
+                <a16:creationId xmlns:a16="http://schemas.microsoft.com/office/drawing/2014/main" id="{72BB6961-B599-69D9-4367-34A20FBD771F}"/>
+              </a:ext>
+            </a:extLst>
+          </p:cNvPr>
+          <p:cNvSpPr/>
+          <p:nvPr/>
+        </p:nvSpPr>
+        <p:spPr>
+          <a:xfrm>
+            <a:off x="8743950" y="2557557"/>
+            <a:ext cx="3221567" cy="4084543"/>
+          </a:xfrm>
+          <a:prstGeom prst="roundRect">
+            <a:avLst>
+              <a:gd name="adj" fmla="val 4865"/>
+            </a:avLst>
+          </a:prstGeom>
+          <a:solidFill>
+            <a:schemeClr val="accent6">
+              <a:lumMod val="20000"/>
+              <a:lumOff val="80000"/>
+            </a:schemeClr>
+          </a:solidFill>
+          <a:ln>
+            <a:noFill/>
+          </a:ln>
+          <a:effectLst>
+            <a:outerShdw blurRad="63500" sx="102000" sy="102000" algn="ctr" rotWithShape="0">
+              <a:prstClr val="black">
+                <a:alpha val="40000"/>
+              </a:prstClr>
+            </a:outerShdw>
+          </a:effectLst>
+        </p:spPr>
+        <p:style>
+          <a:lnRef idx="2">
+            <a:schemeClr val="accent3">
+              <a:shade val="15000"/>
+            </a:schemeClr>
+          </a:lnRef>
+          <a:fillRef idx="1">
+            <a:schemeClr val="accent3"/>
+          </a:fillRef>
+          <a:effectRef idx="0">
+            <a:schemeClr val="accent3"/>
+          </a:effectRef>
+          <a:fontRef idx="minor">
+            <a:schemeClr val="lt1"/>
+          </a:fontRef>
+        </p:style>
+        <p:txBody>
+          <a:bodyPr rtlCol="0" anchor="t"/>
+          <a:lstStyle/>
+          <a:p>
+            <a:pPr>
+              <a:lnSpc>
+                <a:spcPct val="150000"/>
+              </a:lnSpc>
+            </a:pPr>
+            <a:r>
+              <a:rPr lang="en-IN" sz="900" b="1" u="sng" dirty="0">
+                <a:solidFill>
+                  <a:schemeClr val="tx1"/>
+                </a:solidFill>
+                <a:latin typeface="Cascadia Code" panose="020B0609020000020004" pitchFamily="49" charset="0"/>
+                <a:cs typeface="Cascadia Code" panose="020B0609020000020004" pitchFamily="49" charset="0"/>
+              </a:rPr>
+              <a:t>Architectural Patterns</a:t>
+            </a:r>
+            <a:r>
+              <a:rPr lang="en-IN" sz="900" b="1" dirty="0">
+                <a:solidFill>
+                  <a:schemeClr val="tx1"/>
+                </a:solidFill>
+                <a:latin typeface="Cascadia Code" panose="020B0609020000020004" pitchFamily="49" charset="0"/>
+                <a:cs typeface="Cascadia Code" panose="020B0609020000020004" pitchFamily="49" charset="0"/>
+              </a:rPr>
+              <a:t>:</a:t>
+            </a:r>
+          </a:p>
+          <a:p>
+            <a:pPr>
+              <a:lnSpc>
+                <a:spcPct val="150000"/>
+              </a:lnSpc>
+            </a:pPr>
+            <a:endParaRPr lang="en-IN" sz="900" b="1" dirty="0">
+              <a:solidFill>
+                <a:schemeClr val="tx1"/>
+              </a:solidFill>
+              <a:latin typeface="Cascadia Code" panose="020B0609020000020004" pitchFamily="49" charset="0"/>
+              <a:cs typeface="Cascadia Code" panose="020B0609020000020004" pitchFamily="49" charset="0"/>
+            </a:endParaRPr>
+          </a:p>
+          <a:p>
+            <a:pPr marL="228600" indent="-228600">
+              <a:lnSpc>
+                <a:spcPct val="150000"/>
+              </a:lnSpc>
+              <a:buAutoNum type="arabicPeriod"/>
+            </a:pPr>
+            <a:r>
+              <a:rPr lang="en-US" sz="900" dirty="0">
+                <a:solidFill>
+                  <a:schemeClr val="tx1"/>
+                </a:solidFill>
+                <a:latin typeface="Cascadia Code" panose="020B0609020000020004" pitchFamily="49" charset="0"/>
+                <a:cs typeface="Cascadia Code" panose="020B0609020000020004" pitchFamily="49" charset="0"/>
+              </a:rPr>
+              <a:t>Transactional Outbox: Polling Publisher (Message Relay)</a:t>
+            </a:r>
+          </a:p>
+          <a:p>
+            <a:pPr marL="228600" indent="-228600">
+              <a:lnSpc>
+                <a:spcPct val="150000"/>
+              </a:lnSpc>
+              <a:buAutoNum type="arabicPeriod"/>
+            </a:pPr>
+            <a:r>
+              <a:rPr lang="en-US" sz="900" dirty="0">
+                <a:solidFill>
+                  <a:schemeClr val="tx1"/>
+                </a:solidFill>
+                <a:latin typeface="Cascadia Code" panose="020B0609020000020004" pitchFamily="49" charset="0"/>
+                <a:cs typeface="Cascadia Code" panose="020B0609020000020004" pitchFamily="49" charset="0"/>
+              </a:rPr>
+              <a:t>Competing Consumers on the Outbox table (FOR UPDATE SKIP LOCKED)</a:t>
+            </a:r>
+          </a:p>
+          <a:p>
+            <a:pPr marL="228600" indent="-228600">
+              <a:lnSpc>
+                <a:spcPct val="150000"/>
+              </a:lnSpc>
+              <a:buAutoNum type="arabicPeriod"/>
+            </a:pPr>
+            <a:r>
+              <a:rPr lang="en-US" sz="900" dirty="0">
+                <a:solidFill>
+                  <a:schemeClr val="tx1"/>
+                </a:solidFill>
+                <a:latin typeface="Cascadia Code" panose="020B0609020000020004" pitchFamily="49" charset="0"/>
+                <a:cs typeface="Cascadia Code" panose="020B0609020000020004" pitchFamily="49" charset="0"/>
+              </a:rPr>
+              <a:t>Per-aggregate ordering (sequence + partition key = aggregate ID)</a:t>
+            </a:r>
+          </a:p>
+          <a:p>
+            <a:pPr marL="228600" indent="-228600">
+              <a:lnSpc>
+                <a:spcPct val="150000"/>
+              </a:lnSpc>
+              <a:buAutoNum type="arabicPeriod"/>
+            </a:pPr>
+            <a:r>
+              <a:rPr lang="en-US" sz="900" dirty="0">
+                <a:solidFill>
+                  <a:schemeClr val="tx1"/>
+                </a:solidFill>
+                <a:latin typeface="Cascadia Code" panose="020B0609020000020004" pitchFamily="49" charset="0"/>
+                <a:cs typeface="Cascadia Code" panose="020B0609020000020004" pitchFamily="49" charset="0"/>
+              </a:rPr>
+              <a:t>At-least-once delivery, made safe by the consumer's Idempotent Receiver / Inbox</a:t>
+            </a:r>
+          </a:p>
+          <a:p>
+            <a:pPr marL="228600" indent="-228600">
+              <a:lnSpc>
+                <a:spcPct val="150000"/>
+              </a:lnSpc>
+              <a:buAutoNum type="arabicPeriod"/>
+            </a:pPr>
+            <a:r>
+              <a:rPr lang="en-US" sz="900" dirty="0">
+                <a:solidFill>
+                  <a:schemeClr val="tx1"/>
+                </a:solidFill>
+                <a:latin typeface="Cascadia Code" panose="020B0609020000020004" pitchFamily="49" charset="0"/>
+                <a:cs typeface="Cascadia Code" panose="020B0609020000020004" pitchFamily="49" charset="0"/>
+              </a:rPr>
+              <a:t>Retry with exponential back-off</a:t>
+            </a:r>
+          </a:p>
+          <a:p>
+            <a:pPr marL="228600" indent="-228600">
+              <a:lnSpc>
+                <a:spcPct val="150000"/>
+              </a:lnSpc>
+              <a:buAutoNum type="arabicPeriod"/>
+            </a:pPr>
+            <a:r>
+              <a:rPr lang="en-US" sz="900" dirty="0">
+                <a:solidFill>
+                  <a:schemeClr val="tx1"/>
+                </a:solidFill>
+                <a:latin typeface="Cascadia Code" panose="020B0609020000020004" pitchFamily="49" charset="0"/>
+                <a:cs typeface="Cascadia Code" panose="020B0609020000020004" pitchFamily="49" charset="0"/>
+              </a:rPr>
+              <a:t>Parking a poison message (kept in the Outbox for an operator; later events of the aggregate held back)</a:t>
+            </a:r>
+          </a:p>
+          <a:p>
+            <a:pPr marL="228600" indent="-228600">
+              <a:lnSpc>
+                <a:spcPct val="150000"/>
+              </a:lnSpc>
+              <a:buAutoNum type="arabicPeriod"/>
+            </a:pPr>
+            <a:r>
+              <a:rPr lang="en-US" sz="900" dirty="0">
+                <a:solidFill>
+                  <a:schemeClr val="tx1"/>
+                </a:solidFill>
+                <a:latin typeface="Cascadia Code" panose="020B0609020000020004" pitchFamily="49" charset="0"/>
+                <a:cs typeface="Cascadia Code" panose="020B0609020000020004" pitchFamily="49" charset="0"/>
+              </a:rPr>
+              <a:t>Correlation and causation IDs</a:t>
+            </a:r>
+          </a:p>
+          <a:p>
+            <a:pPr marL="228600" indent="-228600">
+              <a:lnSpc>
+                <a:spcPct val="150000"/>
+              </a:lnSpc>
+              <a:buAutoNum type="arabicPeriod"/>
+            </a:pPr>
+            <a:r>
+              <a:rPr lang="en-US" sz="900" dirty="0">
+                <a:solidFill>
+                  <a:schemeClr val="tx1"/>
+                </a:solidFill>
+                <a:latin typeface="Cascadia Code" panose="020B0609020000020004" pitchFamily="49" charset="0"/>
+                <a:cs typeface="Cascadia Code" panose="020B0609020000020004" pitchFamily="49" charset="0"/>
+              </a:rPr>
+              <a:t>Distributed tracing (W3C trace context carried across the queue)</a:t>
+            </a:r>
+          </a:p>
+          <a:p>
+            <a:pPr marL="228600" indent="-228600">
+              <a:lnSpc>
+                <a:spcPct val="150000"/>
+              </a:lnSpc>
+              <a:buAutoNum type="arabicPeriod"/>
+            </a:pPr>
+            <a:r>
+              <a:rPr lang="en-US" sz="900" dirty="0">
+                <a:solidFill>
+                  <a:schemeClr val="tx1"/>
+                </a:solidFill>
+                <a:latin typeface="Cascadia Code" panose="020B0609020000020004" pitchFamily="49" charset="0"/>
+                <a:cs typeface="Cascadia Code" panose="020B0609020000020004" pitchFamily="49" charset="0"/>
+              </a:rPr>
+              <a:t>Least privilege (the database user and Kafka user can do only this job)</a:t>
+            </a:r>
+          </a:p>
+        </p:txBody>
+      </p:sp>
+      <p:sp>
+        <p:nvSpPr>
+          <p:cNvPr id="27" name="Rectangle: Rounded Corners 26">
+            <a:extLst>
+              <a:ext uri="{FF2B5EF4-FFF2-40B4-BE49-F238E27FC236}">
+                <a16:creationId xmlns:a16="http://schemas.microsoft.com/office/drawing/2014/main" id="{E34C1014-5A42-99E6-6AB6-AA0129D9C807}"/>
+              </a:ext>
+            </a:extLst>
+          </p:cNvPr>
+          <p:cNvSpPr/>
+          <p:nvPr/>
+        </p:nvSpPr>
+        <p:spPr>
+          <a:xfrm>
+            <a:off x="8743950" y="749299"/>
+            <a:ext cx="3221567" cy="1651001"/>
+          </a:xfrm>
+          <a:prstGeom prst="roundRect">
+            <a:avLst>
+              <a:gd name="adj" fmla="val 7957"/>
+            </a:avLst>
+          </a:prstGeom>
+          <a:solidFill>
+            <a:schemeClr val="accent6">
+              <a:lumMod val="20000"/>
+              <a:lumOff val="80000"/>
+            </a:schemeClr>
+          </a:solidFill>
+          <a:ln>
+            <a:noFill/>
+          </a:ln>
+          <a:effectLst>
+            <a:outerShdw blurRad="63500" sx="102000" sy="102000" algn="ctr" rotWithShape="0">
+              <a:prstClr val="black">
+                <a:alpha val="40000"/>
+              </a:prstClr>
+            </a:outerShdw>
+          </a:effectLst>
+        </p:spPr>
+        <p:style>
+          <a:lnRef idx="2">
+            <a:schemeClr val="accent3">
+              <a:shade val="15000"/>
+            </a:schemeClr>
+          </a:lnRef>
+          <a:fillRef idx="1">
+            <a:schemeClr val="accent3"/>
+          </a:fillRef>
+          <a:effectRef idx="0">
+            <a:schemeClr val="accent3"/>
+          </a:effectRef>
+          <a:fontRef idx="minor">
+            <a:schemeClr val="lt1"/>
+          </a:fontRef>
+        </p:style>
+        <p:txBody>
+          <a:bodyPr rtlCol="0" anchor="t"/>
+          <a:lstStyle/>
+          <a:p>
+            <a:pPr>
+              <a:lnSpc>
+                <a:spcPct val="150000"/>
+              </a:lnSpc>
+            </a:pPr>
+            <a:r>
+              <a:rPr lang="en-IN" sz="900" b="1" u="sng" dirty="0">
+                <a:solidFill>
+                  <a:schemeClr val="tx1"/>
+                </a:solidFill>
+                <a:latin typeface="Cascadia Code" panose="020B0609020000020004" pitchFamily="49" charset="0"/>
+                <a:cs typeface="Cascadia Code" panose="020B0609020000020004" pitchFamily="49" charset="0"/>
+              </a:rPr>
+              <a:t>Architectural Components</a:t>
+            </a:r>
+            <a:r>
+              <a:rPr lang="en-IN" sz="900" b="1" dirty="0">
+                <a:solidFill>
+                  <a:schemeClr val="tx1"/>
+                </a:solidFill>
+                <a:latin typeface="Cascadia Code" panose="020B0609020000020004" pitchFamily="49" charset="0"/>
+                <a:cs typeface="Cascadia Code" panose="020B0609020000020004" pitchFamily="49" charset="0"/>
+              </a:rPr>
+              <a:t>:</a:t>
+            </a:r>
+          </a:p>
+          <a:p>
+            <a:pPr>
+              <a:lnSpc>
+                <a:spcPct val="150000"/>
+              </a:lnSpc>
+            </a:pPr>
+            <a:endParaRPr lang="en-IN" sz="900" b="1" dirty="0">
+              <a:solidFill>
+                <a:schemeClr val="tx1"/>
+              </a:solidFill>
+              <a:latin typeface="Cascadia Code" panose="020B0609020000020004" pitchFamily="49" charset="0"/>
+              <a:cs typeface="Cascadia Code" panose="020B0609020000020004" pitchFamily="49" charset="0"/>
+            </a:endParaRPr>
+          </a:p>
+          <a:p>
+            <a:pPr marL="228600" indent="-228600">
+              <a:lnSpc>
+                <a:spcPct val="150000"/>
+              </a:lnSpc>
+              <a:buAutoNum type="arabicPeriod"/>
+            </a:pPr>
+            <a:r>
+              <a:rPr lang="en-IN" sz="900" dirty="0">
+                <a:solidFill>
+                  <a:schemeClr val="tx1"/>
+                </a:solidFill>
+                <a:latin typeface="Cascadia Code" panose="020B0609020000020004" pitchFamily="49" charset="0"/>
+                <a:cs typeface="Cascadia Code" panose="020B0609020000020004" pitchFamily="49" charset="0"/>
+              </a:rPr>
+              <a:t>Background worker (.NET hosted service)</a:t>
+            </a:r>
+          </a:p>
+          <a:p>
+            <a:pPr marL="228600" indent="-228600">
+              <a:lnSpc>
+                <a:spcPct val="150000"/>
+              </a:lnSpc>
+              <a:buAutoNum type="arabicPeriod"/>
+            </a:pPr>
+            <a:r>
+              <a:rPr lang="en-IN" sz="900" dirty="0">
+                <a:solidFill>
+                  <a:schemeClr val="tx1"/>
+                </a:solidFill>
+                <a:latin typeface="Cascadia Code" panose="020B0609020000020004" pitchFamily="49" charset="0"/>
+                <a:cs typeface="Cascadia Code" panose="020B0609020000020004" pitchFamily="49" charset="0"/>
+              </a:rPr>
+              <a:t>Outbox table (outbox_messages)</a:t>
+            </a:r>
+          </a:p>
+          <a:p>
+            <a:pPr marL="228600" indent="-228600">
+              <a:lnSpc>
+                <a:spcPct val="150000"/>
+              </a:lnSpc>
+              <a:buAutoNum type="arabicPeriod"/>
+            </a:pPr>
+            <a:r>
+              <a:rPr lang="en-IN" sz="900" dirty="0">
+                <a:solidFill>
+                  <a:schemeClr val="tx1"/>
+                </a:solidFill>
+                <a:latin typeface="Cascadia Code" panose="020B0609020000020004" pitchFamily="49" charset="0"/>
+                <a:cs typeface="Cascadia Code" panose="020B0609020000020004" pitchFamily="49" charset="0"/>
+              </a:rPr>
+              <a:t>Kafka producer (idempotent)</a:t>
+            </a:r>
+          </a:p>
+          <a:p>
+            <a:pPr marL="228600" indent="-228600">
+              <a:lnSpc>
+                <a:spcPct val="150000"/>
+              </a:lnSpc>
+              <a:buAutoNum type="arabicPeriod"/>
+            </a:pPr>
+            <a:r>
+              <a:rPr lang="en-IN" sz="900" dirty="0">
+                <a:solidFill>
+                  <a:schemeClr val="tx1"/>
+                </a:solidFill>
+                <a:latin typeface="Cascadia Code" panose="020B0609020000020004" pitchFamily="49" charset="0"/>
+                <a:cs typeface="Cascadia Code" panose="020B0609020000020004" pitchFamily="49" charset="0"/>
+              </a:rPr>
+              <a:t>Kafka topics (one per event type)</a:t>
+            </a:r>
+            <a:br>
+              <a:rPr lang="en-IN" sz="900" dirty="0">
+                <a:solidFill>
+                  <a:schemeClr val="tx1"/>
+                </a:solidFill>
+                <a:latin typeface="Cascadia Code" panose="020B0609020000020004" pitchFamily="49" charset="0"/>
+                <a:cs typeface="Cascadia Code" panose="020B0609020000020004" pitchFamily="49" charset="0"/>
+              </a:rPr>
+            </a:br>
+            <a:endParaRPr lang="en-IN" sz="900" dirty="0">
+              <a:solidFill>
+                <a:schemeClr val="tx1"/>
+              </a:solidFill>
+              <a:latin typeface="Cascadia Code" panose="020B0609020000020004" pitchFamily="49" charset="0"/>
+              <a:cs typeface="Cascadia Code" panose="020B0609020000020004" pitchFamily="49" charset="0"/>
+            </a:endParaRPr>
+          </a:p>
+        </p:txBody>
+      </p:sp>
+      <p:sp>
+        <p:nvSpPr>
+          <p:cNvPr id="4" name="Title 24">
+            <a:extLst>
+              <a:ext uri="{FF2B5EF4-FFF2-40B4-BE49-F238E27FC236}">
+                <a16:creationId xmlns:a16="http://schemas.microsoft.com/office/drawing/2014/main" id="{49D412E9-A31E-2658-0D26-004FDD71D3E8}"/>
+              </a:ext>
+            </a:extLst>
+          </p:cNvPr>
+          <p:cNvSpPr>
+            <a:spLocks noGrp="1"/>
+          </p:cNvSpPr>
+          <p:nvPr>
+            <p:ph type="title"/>
+          </p:nvPr>
+        </p:nvSpPr>
+        <p:spPr>
+          <a:xfrm>
+            <a:off x="133350" y="131074"/>
+            <a:ext cx="11912600" cy="460968"/>
+          </a:xfrm>
+          <a:noFill/>
+          <a:ln>
+            <a:noFill/>
+          </a:ln>
+        </p:spPr>
+        <p:txBody>
+          <a:bodyPr lIns="36576" tIns="18288">
+            <a:noAutofit/>
+          </a:bodyPr>
+          <a:lstStyle/>
+          <a:p>
+            <a:r>
+              <a:rPr lang="en-US" sz="2500" b="1" i="0" dirty="0">
+                <a:solidFill>
+                  <a:srgbClr val="162B4A"/>
+                </a:solidFill>
+                <a:effectLst>
+                  <a:outerShdw blurRad="38100" dist="38100" dir="2700000" algn="tl">
+                    <a:srgbClr val="000000">
+                      <a:alpha val="43137"/>
+                    </a:srgbClr>
+                  </a:outerShdw>
+                </a:effectLst>
+                <a:latin typeface="Aptos Display" panose="020F0302020204030204" pitchFamily="34" charset="0"/>
+                <a:ea typeface="Calibri Light" panose="020F0302020204030204" pitchFamily="34" charset="0"/>
+                <a:cs typeface="Calibri Light" panose="020F0302020204030204" pitchFamily="34" charset="0"/>
+              </a:rPr>
+              <a:t>Relay → Kafka: publishing the Customer Onboarding Outbox</a:t>
+            </a:r>
+            <a:endParaRPr lang="en-IN" sz="2500" b="1" i="0" dirty="0">
+              <a:solidFill>
+                <a:srgbClr val="162B4A"/>
+              </a:solidFill>
+              <a:effectLst>
+                <a:outerShdw blurRad="38100" dist="38100" dir="2700000" algn="tl">
+                  <a:srgbClr val="000000">
+                    <a:alpha val="43137"/>
+                  </a:srgbClr>
+                </a:outerShdw>
+              </a:effectLst>
+              <a:latin typeface="Aptos Display" panose="020F0302020204030204" pitchFamily="34" charset="0"/>
+              <a:ea typeface="Calibri Light" panose="020F0302020204030204" pitchFamily="34" charset="0"/>
+              <a:cs typeface="Calibri Light" panose="020F0302020204030204" pitchFamily="34" charset="0"/>
+            </a:endParaRPr>
+          </a:p>
+        </p:txBody>
+      </p:sp>
+    </p:spTree>
+    <p:extLst>
+      <p:ext uri="{BB962C8B-B14F-4D97-AF65-F5344CB8AC3E}">
+        <p14:creationId xmlns:p14="http://schemas.microsoft.com/office/powerpoint/2010/main" val="3303075571"/>
+      </p:ext>
+    </p:extLst>
+  </p:cSld>
+  <p:clrMapOvr>
+    <a:masterClrMapping/>
+  </p:clrMapOvr>
+</p:sld>
+</file>
+
+<file path=ppt/slides/slide7.xml><?xml version="1.0" encoding="utf-8"?>
+<p:sld xmlns:a="http://schemas.openxmlformats.org/drawingml/2006/main" xmlns:r="http://schemas.openxmlformats.org/officeDocument/2006/relationships" xmlns:p="http://schemas.openxmlformats.org/presentationml/2006/main">
+  <p:cSld>
+    <p:bg>
+      <p:bgPr>
+        <a:solidFill>
+          <a:srgbClr val="162B4A"/>
+        </a:solidFill>
+        <a:effectLst/>
+      </p:bgPr>
+    </p:bg>
+    <p:spTree>
+      <p:nvGrpSpPr>
+        <p:cNvPr id="1" name=""/>
+        <p:cNvGrpSpPr/>
+        <p:nvPr/>
+      </p:nvGrpSpPr>
+      <p:grpSpPr>
+        <a:xfrm>
+          <a:off x="0" y="0"/>
+          <a:ext cx="0" cy="0"/>
+          <a:chOff x="0" y="0"/>
+          <a:chExt cx="0" cy="0"/>
+        </a:xfrm>
+      </p:grpSpPr>
+      <p:sp>
+        <p:nvSpPr>
+          <p:cNvPr id="3" name="Title 2">
+            <a:extLst>
+              <a:ext uri="{FF2B5EF4-FFF2-40B4-BE49-F238E27FC236}">
+                <a16:creationId xmlns:a16="http://schemas.microsoft.com/office/drawing/2014/main" id="{DAC7C18F-E745-156E-262B-A3629FAD5BAE}"/>
+              </a:ext>
+            </a:extLst>
+          </p:cNvPr>
+          <p:cNvSpPr>
+            <a:spLocks noGrp="1"/>
+          </p:cNvSpPr>
+          <p:nvPr>
+            <p:ph type="title"/>
+          </p:nvPr>
+        </p:nvSpPr>
+        <p:spPr>
+          <a:noFill/>
+          <a:ln>
+            <a:noFill/>
+          </a:ln>
+        </p:spPr>
+        <p:txBody>
+          <a:bodyPr lIns="320040" anchor="ctr"/>
+          <a:lstStyle/>
+          <a:p>
+            <a:pPr algn="l"/>
+            <a:r>
+              <a:rPr lang="en-US" sz="3200" b="1" i="0" dirty="0">
+                <a:solidFill>
+                  <a:srgbClr val="FFFFFF"/>
+                </a:solidFill>
+                <a:latin typeface="Aptos Display"/>
+              </a:rPr>
+              <a:t>Kafka → Subscriber → KYC API: opening the KYC case</a:t>
+            </a:r>
+          </a:p>
+        </p:txBody>
+      </p:sp>
+    </p:spTree>
+    <p:extLst>
+      <p:ext uri="{BB962C8B-B14F-4D97-AF65-F5344CB8AC3E}">
+        <p14:creationId xmlns:p14="http://schemas.microsoft.com/office/powerpoint/2010/main" val="3181065903"/>
+      </p:ext>
+    </p:extLst>
+  </p:cSld>
+  <p:clrMapOvr>
+    <a:masterClrMapping/>
+  </p:clrMapOvr>
+</p:sld>
+</file>
+
+<file path=ppt/slides/slide8.xml><?xml version="1.0" encoding="utf-8"?>
+<p:sld xmlns:a="http://schemas.openxmlformats.org/drawingml/2006/main" xmlns:r="http://schemas.openxmlformats.org/officeDocument/2006/relationships" xmlns:p="http://schemas.openxmlformats.org/presentationml/2006/main">
+  <p:cSld>
+    <p:spTree>
+      <p:nvGrpSpPr>
+        <p:cNvPr id="1" name="">
+          <a:extLst>
+            <a:ext uri="{FF2B5EF4-FFF2-40B4-BE49-F238E27FC236}">
+              <a16:creationId xmlns:a16="http://schemas.microsoft.com/office/drawing/2014/main" id="{64ED7C26-042E-1CBD-978F-73E7649BFDAE}"/>
+            </a:ext>
+          </a:extLst>
+        </p:cNvPr>
+        <p:cNvGrpSpPr/>
+        <p:nvPr/>
+      </p:nvGrpSpPr>
+      <p:grpSpPr>
+        <a:xfrm>
+          <a:off x="0" y="0"/>
+          <a:ext cx="0" cy="0"/>
+          <a:chOff x="0" y="0"/>
+          <a:chExt cx="0" cy="0"/>
+        </a:xfrm>
+      </p:grpSpPr>
+      <p:sp>
+        <p:nvSpPr>
+          <p:cNvPr id="22" name="Rectangle: Rounded Corners 21">
+            <a:extLst>
+              <a:ext uri="{FF2B5EF4-FFF2-40B4-BE49-F238E27FC236}">
+                <a16:creationId xmlns:a16="http://schemas.microsoft.com/office/drawing/2014/main" id="{6EA73D49-D765-FA89-D225-56DC1956785B}"/>
+              </a:ext>
+            </a:extLst>
+          </p:cNvPr>
+          <p:cNvSpPr/>
+          <p:nvPr/>
+        </p:nvSpPr>
+        <p:spPr>
+          <a:xfrm>
+            <a:off x="192243" y="973666"/>
+            <a:ext cx="11707657" cy="4343401"/>
+          </a:xfrm>
+          <a:prstGeom prst="roundRect">
+            <a:avLst>
+              <a:gd name="adj" fmla="val 3483"/>
+            </a:avLst>
+          </a:prstGeom>
+          <a:solidFill>
+            <a:schemeClr val="accent6">
+              <a:lumMod val="20000"/>
+              <a:lumOff val="80000"/>
+            </a:schemeClr>
+          </a:solidFill>
+          <a:ln>
+            <a:noFill/>
+          </a:ln>
+          <a:effectLst>
+            <a:outerShdw blurRad="63500" sx="102000" sy="102000" algn="ctr" rotWithShape="0">
+              <a:prstClr val="black">
+                <a:alpha val="40000"/>
+              </a:prstClr>
+            </a:outerShdw>
+          </a:effectLst>
+        </p:spPr>
+        <p:style>
+          <a:lnRef idx="2">
+            <a:schemeClr val="accent3">
+              <a:shade val="15000"/>
+            </a:schemeClr>
+          </a:lnRef>
+          <a:fillRef idx="1">
+            <a:schemeClr val="accent3"/>
+          </a:fillRef>
+          <a:effectRef idx="0">
+            <a:schemeClr val="accent3"/>
+          </a:effectRef>
+          <a:fontRef idx="minor">
+            <a:schemeClr val="lt1"/>
+          </a:fontRef>
+        </p:style>
+        <p:txBody>
+          <a:bodyPr rtlCol="0" anchor="t"/>
+          <a:lstStyle/>
+          <a:p>
+            <a:pPr>
+              <a:lnSpc>
+                <a:spcPct val="150000"/>
+              </a:lnSpc>
+            </a:pPr>
+            <a:r>
+              <a:rPr lang="en-IN" sz="1100" b="1" dirty="0">
+                <a:solidFill>
+                  <a:schemeClr val="tx1"/>
+                </a:solidFill>
+                <a:latin typeface="Cascadia Code" panose="020B0609020000020004" pitchFamily="49" charset="0"/>
+                <a:cs typeface="Cascadia Code" panose="020B0609020000020004" pitchFamily="49" charset="0"/>
+              </a:rPr>
+              <a:t>KYC Case Opening Subscriber </a:t>
+            </a:r>
+            <a:r>
+              <a:rPr lang="en-IN" sz="1100" dirty="0">
+                <a:solidFill>
+                  <a:schemeClr val="tx1"/>
+                </a:solidFill>
+                <a:latin typeface="Cascadia Code" panose="020B0609020000020004" pitchFamily="49" charset="0"/>
+                <a:cs typeface="Cascadia Code" panose="020B0609020000020004" pitchFamily="49" charset="0"/>
+              </a:rPr>
+              <a:t>Worker Process</a:t>
+            </a:r>
+            <a:r>
+              <a:rPr lang="en-IN" sz="900" dirty="0">
+                <a:solidFill>
+                  <a:schemeClr val="tx1"/>
+                </a:solidFill>
+                <a:latin typeface="Cascadia Code" panose="020B0609020000020004" pitchFamily="49" charset="0"/>
+                <a:cs typeface="Cascadia Code" panose="020B0609020000020004" pitchFamily="49" charset="0"/>
+              </a:rPr>
+              <a:t> – </a:t>
+            </a:r>
+            <a:r>
+              <a:rPr lang="en-US" sz="900" dirty="0">
+                <a:solidFill>
+                  <a:schemeClr val="tx1"/>
+                </a:solidFill>
+                <a:latin typeface="Cascadia Code" panose="020B0609020000020004" pitchFamily="49" charset="0"/>
+                <a:cs typeface="Cascadia Code" panose="020B0609020000020004" pitchFamily="49" charset="0"/>
+              </a:rPr>
+              <a:t>.NET Worker Service (console process / container), owned by KYC</a:t>
+            </a:r>
+            <a:endParaRPr lang="en-IN" sz="900" dirty="0">
+              <a:solidFill>
+                <a:schemeClr val="tx1"/>
+              </a:solidFill>
+              <a:latin typeface="Cascadia Code" panose="020B0609020000020004" pitchFamily="49" charset="0"/>
+              <a:cs typeface="Cascadia Code" panose="020B0609020000020004" pitchFamily="49" charset="0"/>
+            </a:endParaRPr>
+          </a:p>
+          <a:p>
+            <a:pPr>
+              <a:lnSpc>
+                <a:spcPct val="150000"/>
+              </a:lnSpc>
+            </a:pPr>
+            <a:r>
+              <a:rPr lang="en-IN" sz="1000" b="1" dirty="0">
+                <a:solidFill>
+                  <a:schemeClr val="tx1"/>
+                </a:solidFill>
+                <a:effectLst>
+                  <a:outerShdw blurRad="38100" dist="38100" dir="2700000" algn="tl">
+                    <a:srgbClr val="000000">
+                      <a:alpha val="43137"/>
+                    </a:srgbClr>
+                  </a:outerShdw>
+                </a:effectLst>
+                <a:latin typeface="Cascadia Code" panose="020B0609020000020004" pitchFamily="49" charset="0"/>
+                <a:cs typeface="Cascadia Code" panose="020B0609020000020004" pitchFamily="49" charset="0"/>
+              </a:rPr>
+              <a:t>Kafka topic: “onboarding.application.submitted”</a:t>
+            </a:r>
+          </a:p>
+          <a:p>
+            <a:pPr marL="177800" indent="-88900">
+              <a:lnSpc>
+                <a:spcPct val="150000"/>
+              </a:lnSpc>
+              <a:buFont typeface="Arial" panose="020B0604020202020204" pitchFamily="34" charset="0"/>
+              <a:buChar char="•"/>
+              <a:defRPr/>
+            </a:pPr>
+            <a:r>
+              <a:rPr lang="en-US" sz="800" i="1" dirty="0">
+                <a:solidFill>
+                  <a:schemeClr val="tx1"/>
+                </a:solidFill>
+                <a:latin typeface="Cascadia Code" panose="020B0609020000020004" pitchFamily="49" charset="0"/>
+                <a:cs typeface="Cascadia Code" panose="020B0609020000020004" pitchFamily="49" charset="0"/>
+              </a:rPr>
+              <a:t>Read as its own Kafka user </a:t>
+            </a:r>
+            <a:r>
+              <a:rPr lang="en-US" sz="800" b="1" dirty="0">
+                <a:solidFill>
+                  <a:schemeClr val="tx1"/>
+                </a:solidFill>
+                <a:latin typeface="Cascadia Code" panose="020B0609020000020004" pitchFamily="49" charset="0"/>
+                <a:cs typeface="Cascadia Code" panose="020B0609020000020004" pitchFamily="49" charset="0"/>
+              </a:rPr>
+              <a:t>ewp-</a:t>
+            </a:r>
+            <a:r>
+              <a:rPr lang="en-US" sz="800" b="1" dirty="0" err="1">
+                <a:solidFill>
+                  <a:schemeClr val="tx1"/>
+                </a:solidFill>
+                <a:latin typeface="Cascadia Code" panose="020B0609020000020004" pitchFamily="49" charset="0"/>
+                <a:cs typeface="Cascadia Code" panose="020B0609020000020004" pitchFamily="49" charset="0"/>
+              </a:rPr>
+              <a:t>kyc</a:t>
+            </a:r>
+            <a:r>
+              <a:rPr lang="en-US" sz="800" b="1" dirty="0">
+                <a:solidFill>
+                  <a:schemeClr val="tx1"/>
+                </a:solidFill>
+                <a:latin typeface="Cascadia Code" panose="020B0609020000020004" pitchFamily="49" charset="0"/>
+                <a:cs typeface="Cascadia Code" panose="020B0609020000020004" pitchFamily="49" charset="0"/>
+              </a:rPr>
+              <a:t>-case-opening-subscriber</a:t>
+            </a:r>
+            <a:r>
+              <a:rPr lang="en-US" sz="800" i="1" dirty="0">
+                <a:solidFill>
+                  <a:schemeClr val="tx1"/>
+                </a:solidFill>
+                <a:latin typeface="Cascadia Code" panose="020B0609020000020004" pitchFamily="49" charset="0"/>
+                <a:cs typeface="Cascadia Code" panose="020B0609020000020004" pitchFamily="49" charset="0"/>
+              </a:rPr>
+              <a:t> (ACLs: read this topic, use its own consumer group, write only its dead-letter topic). Only the </a:t>
+            </a:r>
+            <a:r>
+              <a:rPr lang="en-US" sz="800" b="1" dirty="0">
+                <a:solidFill>
+                  <a:schemeClr val="tx1"/>
+                </a:solidFill>
+                <a:latin typeface="Cascadia Code" panose="020B0609020000020004" pitchFamily="49" charset="0"/>
+                <a:cs typeface="Cascadia Code" panose="020B0609020000020004" pitchFamily="49" charset="0"/>
+              </a:rPr>
+              <a:t>Customer Onboarding relay</a:t>
+            </a:r>
+            <a:r>
+              <a:rPr lang="en-US" sz="800" i="1" dirty="0">
+                <a:solidFill>
+                  <a:schemeClr val="tx1"/>
+                </a:solidFill>
+                <a:latin typeface="Cascadia Code" panose="020B0609020000020004" pitchFamily="49" charset="0"/>
+                <a:cs typeface="Cascadia Code" panose="020B0609020000020004" pitchFamily="49" charset="0"/>
+              </a:rPr>
+              <a:t> may write to this topic.</a:t>
+            </a:r>
+            <a:endParaRPr lang="en-IN" sz="800" i="1" dirty="0">
+              <a:solidFill>
+                <a:prstClr val="black"/>
+              </a:solidFill>
+              <a:latin typeface="Cascadia Code" panose="020B0609020000020004" pitchFamily="49" charset="0"/>
+              <a:cs typeface="Cascadia Code" panose="020B0609020000020004" pitchFamily="49" charset="0"/>
+            </a:endParaRPr>
+          </a:p>
+          <a:p>
+            <a:pPr marL="0" marR="0" lvl="0" indent="0" algn="l" defTabSz="914400" rtl="0" eaLnBrk="1" fontAlgn="auto" latinLnBrk="0" hangingPunct="1">
+              <a:lnSpc>
+                <a:spcPct val="100000"/>
+              </a:lnSpc>
+              <a:spcBef>
+                <a:spcPts val="0"/>
+              </a:spcBef>
+              <a:spcAft>
+                <a:spcPts val="0"/>
+              </a:spcAft>
+              <a:buClrTx/>
+              <a:buSzTx/>
+              <a:buFontTx/>
+              <a:buNone/>
+              <a:tabLst/>
+              <a:defRPr/>
+            </a:pPr>
+            <a:r>
+              <a:rPr kumimoji="0" lang="en-IN" sz="1000" b="1" i="0" u="none" strike="noStrike" kern="1200" cap="none" spc="0" normalizeH="0" baseline="0" noProof="0" dirty="0">
+                <a:ln>
+                  <a:noFill/>
+                </a:ln>
+                <a:solidFill>
+                  <a:prstClr val="black"/>
+                </a:solidFill>
+                <a:effectLst>
+                  <a:outerShdw blurRad="38100" dist="38100" dir="2700000" algn="tl">
+                    <a:srgbClr val="000000">
+                      <a:alpha val="43137"/>
+                    </a:srgbClr>
+                  </a:outerShdw>
+                </a:effectLst>
+                <a:uLnTx/>
+                <a:uFillTx/>
+                <a:latin typeface="Cascadia Code" panose="020B0609020000020004" pitchFamily="49" charset="0"/>
+                <a:ea typeface="+mn-ea"/>
+                <a:cs typeface="Cascadia Code" panose="020B0609020000020004" pitchFamily="49" charset="0"/>
+              </a:rPr>
+              <a:t>KycCaseOpeningSubscriber</a:t>
+            </a:r>
+            <a:r>
+              <a:rPr kumimoji="0" lang="en-IN" sz="800" b="0" i="0" u="none" strike="noStrike" kern="1200" cap="none" spc="0" normalizeH="0" baseline="0" noProof="0" dirty="0">
+                <a:ln>
+                  <a:noFill/>
+                </a:ln>
+                <a:solidFill>
+                  <a:prstClr val="black"/>
+                </a:solidFill>
+                <a:effectLst/>
+                <a:uLnTx/>
+                <a:uFillTx/>
+                <a:latin typeface="Cascadia Code" panose="020B0609020000020004" pitchFamily="49" charset="0"/>
+                <a:ea typeface="+mn-ea"/>
+                <a:cs typeface="Cascadia Code" panose="020B0609020000020004" pitchFamily="49" charset="0"/>
+              </a:rPr>
+              <a:t> worker process, via </a:t>
+            </a:r>
+            <a:r>
+              <a:rPr kumimoji="0" lang="en-IN" sz="800" b="1" i="0" strike="noStrike" kern="1200" cap="none" spc="0" normalizeH="0" baseline="0" noProof="0" dirty="0">
+                <a:ln>
+                  <a:noFill/>
+                </a:ln>
+                <a:solidFill>
+                  <a:prstClr val="black"/>
+                </a:solidFill>
+                <a:effectLst>
+                  <a:outerShdw blurRad="38100" dist="38100" dir="2700000" algn="tl">
+                    <a:srgbClr val="000000">
+                      <a:alpha val="43137"/>
+                    </a:srgbClr>
+                  </a:outerShdw>
+                </a:effectLst>
+                <a:uLnTx/>
+                <a:uFillTx/>
+                <a:latin typeface="Cascadia Code" panose="020B0609020000020004" pitchFamily="49" charset="0"/>
+                <a:ea typeface="+mn-ea"/>
+                <a:cs typeface="Cascadia Code" panose="020B0609020000020004" pitchFamily="49" charset="0"/>
+              </a:rPr>
+              <a:t>KafkaSubscriberHostedService</a:t>
+            </a:r>
+            <a:r>
+              <a:rPr kumimoji="0" lang="en-IN" sz="800" b="0" i="0" u="none" strike="noStrike" kern="1200" cap="none" spc="0" normalizeH="0" baseline="0" noProof="0" dirty="0">
+                <a:ln>
+                  <a:noFill/>
+                </a:ln>
+                <a:solidFill>
+                  <a:prstClr val="black"/>
+                </a:solidFill>
+                <a:effectLst/>
+                <a:uLnTx/>
+                <a:uFillTx/>
+                <a:latin typeface="Cascadia Code" panose="020B0609020000020004" pitchFamily="49" charset="0"/>
+                <a:ea typeface="+mn-ea"/>
+                <a:cs typeface="Cascadia Code" panose="020B0609020000020004" pitchFamily="49" charset="0"/>
+              </a:rPr>
+              <a:t>.ConsumeLoopAsync()</a:t>
+            </a:r>
+            <a:endParaRPr kumimoji="0" lang="en-IN" sz="1000" b="1" i="0" u="none" strike="noStrike" kern="1200" cap="none" spc="0" normalizeH="0" baseline="0" noProof="0" dirty="0">
+              <a:ln>
+                <a:noFill/>
+              </a:ln>
+              <a:solidFill>
+                <a:prstClr val="black"/>
+              </a:solidFill>
+              <a:effectLst>
+                <a:outerShdw blurRad="38100" dist="38100" dir="2700000" algn="tl">
+                  <a:srgbClr val="000000">
+                    <a:alpha val="43137"/>
+                  </a:srgbClr>
+                </a:outerShdw>
+              </a:effectLst>
+              <a:uLnTx/>
+              <a:uFillTx/>
+              <a:latin typeface="Cascadia Code" panose="020B0609020000020004" pitchFamily="49" charset="0"/>
+              <a:ea typeface="+mn-ea"/>
+              <a:cs typeface="Cascadia Code" panose="020B0609020000020004" pitchFamily="49" charset="0"/>
+            </a:endParaRPr>
+          </a:p>
+          <a:p>
+            <a:pPr marL="177800" marR="0" lvl="0" indent="-88900" algn="l" defTabSz="914400" rtl="0" eaLnBrk="1" fontAlgn="auto" latinLnBrk="0" hangingPunct="1">
+              <a:lnSpc>
+                <a:spcPct val="150000"/>
+              </a:lnSpc>
+              <a:spcBef>
+                <a:spcPts val="0"/>
+              </a:spcBef>
+              <a:spcAft>
+                <a:spcPts val="0"/>
+              </a:spcAft>
+              <a:buClrTx/>
+              <a:buSzTx/>
+              <a:buFont typeface="Arial" panose="020B0604020202020204" pitchFamily="34" charset="0"/>
+              <a:buChar char="•"/>
+              <a:tabLst/>
+              <a:defRPr/>
+            </a:pPr>
+            <a:r>
+              <a:rPr kumimoji="0" lang="en-US" sz="800" b="1" u="none" strike="noStrike" kern="1200" cap="none" spc="0" normalizeH="0" baseline="0" noProof="0" dirty="0">
+                <a:ln>
+                  <a:noFill/>
+                </a:ln>
+                <a:solidFill>
+                  <a:prstClr val="black"/>
+                </a:solidFill>
+                <a:effectLst/>
+                <a:uLnTx/>
+                <a:uFillTx/>
+                <a:latin typeface="Cascadia Code" panose="020B0609020000020004" pitchFamily="49" charset="0"/>
+                <a:ea typeface="+mn-ea"/>
+                <a:cs typeface="Cascadia Code" panose="020B0609020000020004" pitchFamily="49" charset="0"/>
+                <a:sym typeface="Wingdings" panose="05000000000000000000" pitchFamily="2" charset="2"/>
+              </a:rPr>
+              <a:t>consumer.Consume()</a:t>
+            </a:r>
+            <a:r>
+              <a:rPr kumimoji="0" lang="en-US" sz="800" b="0" i="1" u="none" strike="noStrike" kern="1200" cap="none" spc="0" normalizeH="0" baseline="0" noProof="0" dirty="0">
+                <a:ln>
+                  <a:noFill/>
+                </a:ln>
+                <a:solidFill>
+                  <a:prstClr val="black"/>
+                </a:solidFill>
+                <a:effectLst/>
+                <a:uLnTx/>
+                <a:uFillTx/>
+                <a:latin typeface="Cascadia Code" panose="020B0609020000020004" pitchFamily="49" charset="0"/>
+                <a:ea typeface="+mn-ea"/>
+                <a:cs typeface="Cascadia Code" panose="020B0609020000020004" pitchFamily="49" charset="0"/>
+                <a:sym typeface="Wingdings" panose="05000000000000000000" pitchFamily="2" charset="2"/>
+              </a:rPr>
+              <a:t> reads the next message of </a:t>
+            </a:r>
+            <a:r>
+              <a:rPr kumimoji="0" lang="en-US" sz="800" b="1" u="none" strike="noStrike" kern="1200" cap="none" spc="0" normalizeH="0" baseline="0" noProof="0" dirty="0">
+                <a:ln>
+                  <a:noFill/>
+                </a:ln>
+                <a:solidFill>
+                  <a:prstClr val="black"/>
+                </a:solidFill>
+                <a:effectLst/>
+                <a:uLnTx/>
+                <a:uFillTx/>
+                <a:latin typeface="Cascadia Code" panose="020B0609020000020004" pitchFamily="49" charset="0"/>
+                <a:ea typeface="+mn-ea"/>
+                <a:cs typeface="Cascadia Code" panose="020B0609020000020004" pitchFamily="49" charset="0"/>
+                <a:sym typeface="Wingdings" panose="05000000000000000000" pitchFamily="2" charset="2"/>
+              </a:rPr>
+              <a:t>onboarding.application.submitted</a:t>
+            </a:r>
+            <a:r>
+              <a:rPr kumimoji="0" lang="en-US" sz="800" b="0" i="1" u="none" strike="noStrike" kern="1200" cap="none" spc="0" normalizeH="0" baseline="0" noProof="0" dirty="0">
+                <a:ln>
+                  <a:noFill/>
+                </a:ln>
+                <a:solidFill>
+                  <a:prstClr val="black"/>
+                </a:solidFill>
+                <a:effectLst/>
+                <a:uLnTx/>
+                <a:uFillTx/>
+                <a:latin typeface="Cascadia Code" panose="020B0609020000020004" pitchFamily="49" charset="0"/>
+                <a:ea typeface="+mn-ea"/>
+                <a:cs typeface="Cascadia Code" panose="020B0609020000020004" pitchFamily="49" charset="0"/>
+                <a:sym typeface="Wingdings" panose="05000000000000000000" pitchFamily="2" charset="2"/>
+              </a:rPr>
+              <a:t>, consumer group </a:t>
+            </a:r>
+            <a:r>
+              <a:rPr kumimoji="0" lang="en-US" sz="800" b="1" u="none" strike="noStrike" kern="1200" cap="none" spc="0" normalizeH="0" baseline="0" noProof="0" dirty="0">
+                <a:ln>
+                  <a:noFill/>
+                </a:ln>
+                <a:solidFill>
+                  <a:prstClr val="black"/>
+                </a:solidFill>
+                <a:effectLst/>
+                <a:uLnTx/>
+                <a:uFillTx/>
+                <a:latin typeface="Cascadia Code" panose="020B0609020000020004" pitchFamily="49" charset="0"/>
+                <a:ea typeface="+mn-ea"/>
+                <a:cs typeface="Cascadia Code" panose="020B0609020000020004" pitchFamily="49" charset="0"/>
+                <a:sym typeface="Wingdings" panose="05000000000000000000" pitchFamily="2" charset="2"/>
+              </a:rPr>
+              <a:t>customer-kyc.case-opening-subscriber</a:t>
+            </a:r>
+          </a:p>
+          <a:p>
+            <a:pPr marL="177800" marR="0" lvl="0" indent="-88900" algn="l" defTabSz="914400" rtl="0" eaLnBrk="1" fontAlgn="auto" latinLnBrk="0" hangingPunct="1">
+              <a:lnSpc>
+                <a:spcPct val="150000"/>
+              </a:lnSpc>
+              <a:spcBef>
+                <a:spcPts val="0"/>
+              </a:spcBef>
+              <a:spcAft>
+                <a:spcPts val="0"/>
+              </a:spcAft>
+              <a:buClrTx/>
+              <a:buSzTx/>
+              <a:buFont typeface="Arial" panose="020B0604020202020204" pitchFamily="34" charset="0"/>
+              <a:buChar char="•"/>
+              <a:tabLst/>
+              <a:defRPr/>
+            </a:pPr>
+            <a:r>
+              <a:rPr kumimoji="0" lang="en-US" sz="800" b="1" u="none" strike="noStrike" kern="1200" cap="none" spc="0" normalizeH="0" baseline="0" noProof="0" dirty="0">
+                <a:ln>
+                  <a:noFill/>
+                </a:ln>
+                <a:solidFill>
+                  <a:prstClr val="black"/>
+                </a:solidFill>
+                <a:effectLst/>
+                <a:uLnTx/>
+                <a:uFillTx/>
+                <a:latin typeface="Cascadia Code" panose="020B0609020000020004" pitchFamily="49" charset="0"/>
+                <a:ea typeface="+mn-ea"/>
+                <a:cs typeface="Cascadia Code" panose="020B0609020000020004" pitchFamily="49" charset="0"/>
+                <a:sym typeface="Wingdings" panose="05000000000000000000" pitchFamily="2" charset="2"/>
+              </a:rPr>
+              <a:t>Auto-commit</a:t>
+            </a:r>
+            <a:r>
+              <a:rPr kumimoji="0" lang="en-US" sz="800" b="0" i="1" u="none" strike="noStrike" kern="1200" cap="none" spc="0" normalizeH="0" baseline="0" noProof="0" dirty="0">
+                <a:ln>
+                  <a:noFill/>
+                </a:ln>
+                <a:solidFill>
+                  <a:prstClr val="black"/>
+                </a:solidFill>
+                <a:effectLst/>
+                <a:uLnTx/>
+                <a:uFillTx/>
+                <a:latin typeface="Cascadia Code" panose="020B0609020000020004" pitchFamily="49" charset="0"/>
+                <a:ea typeface="+mn-ea"/>
+                <a:cs typeface="Cascadia Code" panose="020B0609020000020004" pitchFamily="49" charset="0"/>
+                <a:sym typeface="Wingdings" panose="05000000000000000000" pitchFamily="2" charset="2"/>
+              </a:rPr>
+              <a:t> is </a:t>
+            </a:r>
+            <a:r>
+              <a:rPr kumimoji="0" lang="en-US" sz="800" b="1" u="none" strike="noStrike" kern="1200" cap="none" spc="0" normalizeH="0" baseline="0" noProof="0" dirty="0">
+                <a:ln>
+                  <a:noFill/>
+                </a:ln>
+                <a:solidFill>
+                  <a:prstClr val="black"/>
+                </a:solidFill>
+                <a:effectLst>
+                  <a:outerShdw blurRad="38100" dist="38100" dir="2700000" algn="tl">
+                    <a:srgbClr val="000000">
+                      <a:alpha val="43137"/>
+                    </a:srgbClr>
+                  </a:outerShdw>
+                </a:effectLst>
+                <a:uLnTx/>
+                <a:uFillTx/>
+                <a:latin typeface="Cascadia Code" panose="020B0609020000020004" pitchFamily="49" charset="0"/>
+                <a:ea typeface="+mn-ea"/>
+                <a:cs typeface="Cascadia Code" panose="020B0609020000020004" pitchFamily="49" charset="0"/>
+                <a:sym typeface="Wingdings" panose="05000000000000000000" pitchFamily="2" charset="2"/>
+              </a:rPr>
+              <a:t>OFF</a:t>
+            </a:r>
+            <a:r>
+              <a:rPr kumimoji="0" lang="en-US" sz="800" b="0" i="1" u="none" strike="noStrike" kern="1200" cap="none" spc="0" normalizeH="0" baseline="0" noProof="0" dirty="0">
+                <a:ln>
+                  <a:noFill/>
+                </a:ln>
+                <a:solidFill>
+                  <a:prstClr val="black"/>
+                </a:solidFill>
+                <a:effectLst/>
+                <a:uLnTx/>
+                <a:uFillTx/>
+                <a:latin typeface="Cascadia Code" panose="020B0609020000020004" pitchFamily="49" charset="0"/>
+                <a:ea typeface="+mn-ea"/>
+                <a:cs typeface="Cascadia Code" panose="020B0609020000020004" pitchFamily="49" charset="0"/>
+                <a:sym typeface="Wingdings" panose="05000000000000000000" pitchFamily="2" charset="2"/>
+              </a:rPr>
+              <a:t>: the offset is committed only after the </a:t>
+            </a:r>
+            <a:r>
+              <a:rPr kumimoji="0" lang="en-US" sz="800" b="1" i="1" u="none" strike="noStrike" kern="1200" cap="none" spc="0" normalizeH="0" baseline="0" noProof="0" dirty="0">
+                <a:ln>
+                  <a:noFill/>
+                </a:ln>
+                <a:solidFill>
+                  <a:prstClr val="black"/>
+                </a:solidFill>
+                <a:effectLst>
+                  <a:outerShdw blurRad="38100" dist="38100" dir="2700000" algn="tl">
+                    <a:srgbClr val="000000">
+                      <a:alpha val="43137"/>
+                    </a:srgbClr>
+                  </a:outerShdw>
+                </a:effectLst>
+                <a:uLnTx/>
+                <a:uFillTx/>
+                <a:latin typeface="Cascadia Code" panose="020B0609020000020004" pitchFamily="49" charset="0"/>
+                <a:ea typeface="+mn-ea"/>
+                <a:cs typeface="Cascadia Code" panose="020B0609020000020004" pitchFamily="49" charset="0"/>
+                <a:sym typeface="Wingdings" panose="05000000000000000000" pitchFamily="2" charset="2"/>
+              </a:rPr>
+              <a:t>message is handled</a:t>
+            </a:r>
+          </a:p>
+          <a:p>
+            <a:pPr marL="177800" marR="0" lvl="0" indent="-88900" algn="l" defTabSz="914400" rtl="0" eaLnBrk="1" fontAlgn="auto" latinLnBrk="0" hangingPunct="1">
+              <a:lnSpc>
+                <a:spcPct val="150000"/>
+              </a:lnSpc>
+              <a:spcBef>
+                <a:spcPts val="0"/>
+              </a:spcBef>
+              <a:spcAft>
+                <a:spcPts val="0"/>
+              </a:spcAft>
+              <a:buClrTx/>
+              <a:buSzTx/>
+              <a:buFont typeface="Arial" panose="020B0604020202020204" pitchFamily="34" charset="0"/>
+              <a:buChar char="•"/>
+              <a:tabLst/>
+              <a:defRPr/>
+            </a:pPr>
+            <a:r>
+              <a:rPr kumimoji="0" lang="en-US" sz="800" b="0" i="1" u="none" strike="noStrike" kern="1200" cap="none" spc="0" normalizeH="0" baseline="0" noProof="0" dirty="0">
+                <a:ln>
+                  <a:noFill/>
+                </a:ln>
+                <a:solidFill>
+                  <a:prstClr val="black"/>
+                </a:solidFill>
+                <a:effectLst/>
+                <a:uLnTx/>
+                <a:uFillTx/>
+                <a:latin typeface="Cascadia Code" panose="020B0609020000020004" pitchFamily="49" charset="0"/>
+                <a:ea typeface="+mn-ea"/>
+                <a:cs typeface="Cascadia Code" panose="020B0609020000020004" pitchFamily="49" charset="0"/>
+                <a:sym typeface="Wingdings" panose="05000000000000000000" pitchFamily="2" charset="2"/>
+              </a:rPr>
+              <a:t>Starts a process span that continues the trace from the Kafka traceparent header</a:t>
+            </a:r>
+          </a:p>
+          <a:p>
+            <a:pPr>
+              <a:lnSpc>
+                <a:spcPct val="150000"/>
+              </a:lnSpc>
+              <a:defRPr/>
+            </a:pPr>
+            <a:r>
+              <a:rPr lang="en-IN" sz="1000" b="1" dirty="0">
+                <a:solidFill>
+                  <a:prstClr val="black"/>
+                </a:solidFill>
+                <a:effectLst>
+                  <a:outerShdw blurRad="38100" dist="38100" dir="2700000" algn="tl">
+                    <a:srgbClr val="000000">
+                      <a:alpha val="43137"/>
+                    </a:srgbClr>
+                  </a:outerShdw>
+                </a:effectLst>
+                <a:latin typeface="Cascadia Code" panose="020B0609020000020004" pitchFamily="49" charset="0"/>
+                <a:cs typeface="Cascadia Code" panose="020B0609020000020004" pitchFamily="49" charset="0"/>
+              </a:rPr>
+              <a:t>KycCaseOpeningProcessor</a:t>
+            </a:r>
+            <a:r>
+              <a:rPr lang="en-IN" sz="800" dirty="0">
+                <a:solidFill>
+                  <a:schemeClr val="tx1"/>
+                </a:solidFill>
+                <a:latin typeface="Cascadia Code" panose="020B0609020000020004" pitchFamily="49" charset="0"/>
+                <a:cs typeface="Cascadia Code" panose="020B0609020000020004" pitchFamily="49" charset="0"/>
+              </a:rPr>
+              <a:t>.ProcessAsync()</a:t>
+            </a:r>
+          </a:p>
+          <a:p>
+            <a:pPr marL="177800" indent="-88900">
+              <a:lnSpc>
+                <a:spcPct val="150000"/>
+              </a:lnSpc>
+              <a:buFont typeface="Arial" panose="020B0604020202020204" pitchFamily="34" charset="0"/>
+              <a:buChar char="•"/>
+              <a:defRPr/>
+            </a:pPr>
+            <a:r>
+              <a:rPr lang="en-US" sz="800" b="1" dirty="0">
+                <a:solidFill>
+                  <a:prstClr val="black"/>
+                </a:solidFill>
+                <a:effectLst>
+                  <a:outerShdw blurRad="38100" dist="38100" dir="2700000" algn="tl">
+                    <a:srgbClr val="000000">
+                      <a:alpha val="43137"/>
+                    </a:srgbClr>
+                  </a:outerShdw>
+                </a:effectLst>
+                <a:latin typeface="Cascadia Code" panose="020B0609020000020004" pitchFamily="49" charset="0"/>
+                <a:cs typeface="Cascadia Code" panose="020B0609020000020004" pitchFamily="49" charset="0"/>
+                <a:sym typeface="Wingdings" panose="05000000000000000000" pitchFamily="2" charset="2"/>
+              </a:rPr>
+              <a:t>Parse the envelope</a:t>
+            </a:r>
+            <a:r>
+              <a:rPr lang="en-US" sz="800" i="1" dirty="0">
+                <a:solidFill>
+                  <a:prstClr val="black"/>
+                </a:solidFill>
+                <a:latin typeface="Cascadia Code" panose="020B0609020000020004" pitchFamily="49" charset="0"/>
+                <a:cs typeface="Cascadia Code" panose="020B0609020000020004" pitchFamily="49" charset="0"/>
+                <a:sym typeface="Wingdings" panose="05000000000000000000" pitchFamily="2" charset="2"/>
+              </a:rPr>
+              <a:t>: message ID present; event type = </a:t>
+            </a:r>
+            <a:r>
+              <a:rPr lang="en-US" sz="800" b="1" dirty="0">
+                <a:solidFill>
+                  <a:prstClr val="black"/>
+                </a:solidFill>
+                <a:latin typeface="Cascadia Code" panose="020B0609020000020004" pitchFamily="49" charset="0"/>
+                <a:cs typeface="Cascadia Code" panose="020B0609020000020004" pitchFamily="49" charset="0"/>
+                <a:sym typeface="Wingdings" panose="05000000000000000000" pitchFamily="2" charset="2"/>
+              </a:rPr>
+              <a:t>OnboardingApplicationSubmitted</a:t>
+            </a:r>
+            <a:r>
+              <a:rPr lang="en-US" sz="800" i="1" dirty="0">
+                <a:solidFill>
+                  <a:prstClr val="black"/>
+                </a:solidFill>
+                <a:latin typeface="Cascadia Code" panose="020B0609020000020004" pitchFamily="49" charset="0"/>
+                <a:cs typeface="Cascadia Code" panose="020B0609020000020004" pitchFamily="49" charset="0"/>
+                <a:sym typeface="Wingdings" panose="05000000000000000000" pitchFamily="2" charset="2"/>
+              </a:rPr>
+              <a:t>; application ref, number, customer number and branch present. Otherwise → dead-letter with the reason.</a:t>
+            </a:r>
+          </a:p>
+          <a:p>
+            <a:pPr marL="177800" indent="-88900">
+              <a:lnSpc>
+                <a:spcPct val="150000"/>
+              </a:lnSpc>
+              <a:buFont typeface="Arial" panose="020B0604020202020204" pitchFamily="34" charset="0"/>
+              <a:buChar char="•"/>
+              <a:defRPr/>
+            </a:pPr>
+            <a:r>
+              <a:rPr lang="en-US" sz="800" b="1" dirty="0">
+                <a:solidFill>
+                  <a:prstClr val="black"/>
+                </a:solidFill>
+                <a:effectLst>
+                  <a:outerShdw blurRad="38100" dist="38100" dir="2700000" algn="tl">
+                    <a:srgbClr val="000000">
+                      <a:alpha val="43137"/>
+                    </a:srgbClr>
+                  </a:outerShdw>
+                </a:effectLst>
+                <a:latin typeface="Cascadia Code" panose="020B0609020000020004" pitchFamily="49" charset="0"/>
+                <a:cs typeface="Cascadia Code" panose="020B0609020000020004" pitchFamily="49" charset="0"/>
+                <a:sym typeface="Wingdings" panose="05000000000000000000" pitchFamily="2" charset="2"/>
+              </a:rPr>
+              <a:t>Initiator</a:t>
+            </a:r>
+            <a:r>
+              <a:rPr lang="en-US" sz="800" i="1" dirty="0">
+                <a:solidFill>
+                  <a:prstClr val="black"/>
+                </a:solidFill>
+                <a:latin typeface="Cascadia Code" panose="020B0609020000020004" pitchFamily="49" charset="0"/>
+                <a:cs typeface="Cascadia Code" panose="020B0609020000020004" pitchFamily="49" charset="0"/>
+                <a:sym typeface="Wingdings" panose="05000000000000000000" pitchFamily="2" charset="2"/>
+              </a:rPr>
+              <a:t> (InitiatedByUserId) </a:t>
+            </a:r>
+            <a:r>
+              <a:rPr lang="en-US" sz="800" b="1" dirty="0">
+                <a:solidFill>
+                  <a:prstClr val="black"/>
+                </a:solidFill>
+                <a:latin typeface="Cascadia Code" panose="020B0609020000020004" pitchFamily="49" charset="0"/>
+                <a:cs typeface="Cascadia Code" panose="020B0609020000020004" pitchFamily="49" charset="0"/>
+                <a:sym typeface="Wingdings" panose="05000000000000000000" pitchFamily="2" charset="2"/>
+              </a:rPr>
+              <a:t>missing</a:t>
+            </a:r>
+            <a:r>
+              <a:rPr lang="en-US" sz="800" i="1" dirty="0">
+                <a:solidFill>
+                  <a:prstClr val="black"/>
+                </a:solidFill>
+                <a:latin typeface="Cascadia Code" panose="020B0609020000020004" pitchFamily="49" charset="0"/>
+                <a:cs typeface="Cascadia Code" panose="020B0609020000020004" pitchFamily="49" charset="0"/>
+                <a:sym typeface="Wingdings" panose="05000000000000000000" pitchFamily="2" charset="2"/>
+              </a:rPr>
+              <a:t> → logged as a warning. The case still opens, but separation of duties will deny every decision on it (it fails closed).</a:t>
+            </a:r>
+          </a:p>
+          <a:p>
+            <a:pPr marL="177800" indent="-88900">
+              <a:lnSpc>
+                <a:spcPct val="150000"/>
+              </a:lnSpc>
+              <a:buFont typeface="Arial" panose="020B0604020202020204" pitchFamily="34" charset="0"/>
+              <a:buChar char="•"/>
+              <a:defRPr/>
+            </a:pPr>
+            <a:r>
+              <a:rPr lang="en-US" sz="800" b="1" dirty="0">
+                <a:solidFill>
+                  <a:prstClr val="black"/>
+                </a:solidFill>
+                <a:effectLst>
+                  <a:outerShdw blurRad="38100" dist="38100" dir="2700000" algn="tl">
+                    <a:srgbClr val="000000">
+                      <a:alpha val="43137"/>
+                    </a:srgbClr>
+                  </a:outerShdw>
+                </a:effectLst>
+                <a:latin typeface="Cascadia Code" panose="020B0609020000020004" pitchFamily="49" charset="0"/>
+                <a:cs typeface="Cascadia Code" panose="020B0609020000020004" pitchFamily="49" charset="0"/>
+                <a:sym typeface="Wingdings" panose="05000000000000000000" pitchFamily="2" charset="2"/>
+              </a:rPr>
+              <a:t>M2M token</a:t>
+            </a:r>
+            <a:r>
+              <a:rPr lang="en-US" sz="800" i="1" dirty="0">
+                <a:solidFill>
+                  <a:prstClr val="black"/>
+                </a:solidFill>
+                <a:latin typeface="Cascadia Code" panose="020B0609020000020004" pitchFamily="49" charset="0"/>
+                <a:cs typeface="Cascadia Code" panose="020B0609020000020004" pitchFamily="49" charset="0"/>
+                <a:sym typeface="Wingdings" panose="05000000000000000000" pitchFamily="2" charset="2"/>
+              </a:rPr>
+              <a:t>: </a:t>
+            </a:r>
+            <a:r>
+              <a:rPr lang="en-US" sz="800" b="1" dirty="0">
+                <a:solidFill>
+                  <a:prstClr val="black"/>
+                </a:solidFill>
+                <a:latin typeface="Cascadia Code" panose="020B0609020000020004" pitchFamily="49" charset="0"/>
+                <a:cs typeface="Cascadia Code" panose="020B0609020000020004" pitchFamily="49" charset="0"/>
+                <a:sym typeface="Wingdings" panose="05000000000000000000" pitchFamily="2" charset="2"/>
+              </a:rPr>
+              <a:t>CachedM2MTokenClient.GetAccessTokenAsync()</a:t>
+            </a:r>
+            <a:r>
+              <a:rPr lang="en-US" sz="800" i="1" dirty="0">
+                <a:solidFill>
+                  <a:prstClr val="black"/>
+                </a:solidFill>
+                <a:latin typeface="Cascadia Code" panose="020B0609020000020004" pitchFamily="49" charset="0"/>
+                <a:cs typeface="Cascadia Code" panose="020B0609020000020004" pitchFamily="49" charset="0"/>
+                <a:sym typeface="Wingdings" panose="05000000000000000000" pitchFamily="2" charset="2"/>
+              </a:rPr>
+              <a:t> (client credentials, cached until shortly before expiry)</a:t>
+            </a:r>
+          </a:p>
+          <a:p>
+            <a:pPr marL="177800" lvl="1" indent="-88900">
+              <a:lnSpc>
+                <a:spcPct val="150000"/>
+              </a:lnSpc>
+              <a:buFont typeface="Arial" panose="020B0604020202020204" pitchFamily="34" charset="0"/>
+              <a:buChar char="•"/>
+              <a:defRPr/>
+            </a:pPr>
+            <a:r>
+              <a:rPr lang="en-US" sz="800" b="1" dirty="0" err="1">
+                <a:solidFill>
+                  <a:prstClr val="black"/>
+                </a:solidFill>
+                <a:effectLst>
+                  <a:outerShdw blurRad="38100" dist="38100" dir="2700000" algn="tl">
+                    <a:srgbClr val="000000">
+                      <a:alpha val="43137"/>
+                    </a:srgbClr>
+                  </a:outerShdw>
+                </a:effectLst>
+                <a:latin typeface="Cascadia Code" panose="020B0609020000020004" pitchFamily="49" charset="0"/>
+                <a:cs typeface="Cascadia Code" panose="020B0609020000020004" pitchFamily="49" charset="0"/>
+                <a:sym typeface="Wingdings" panose="05000000000000000000" pitchFamily="2" charset="2"/>
+              </a:rPr>
+              <a:t>SendAsync</a:t>
+            </a:r>
+            <a:r>
+              <a:rPr lang="en-US" sz="800" b="1" dirty="0">
+                <a:solidFill>
+                  <a:prstClr val="black"/>
+                </a:solidFill>
+                <a:effectLst>
+                  <a:outerShdw blurRad="38100" dist="38100" dir="2700000" algn="tl">
+                    <a:srgbClr val="000000">
+                      <a:alpha val="43137"/>
+                    </a:srgbClr>
+                  </a:outerShdw>
+                </a:effectLst>
+                <a:latin typeface="Cascadia Code" panose="020B0609020000020004" pitchFamily="49" charset="0"/>
+                <a:cs typeface="Cascadia Code" panose="020B0609020000020004" pitchFamily="49" charset="0"/>
+                <a:sym typeface="Wingdings" panose="05000000000000000000" pitchFamily="2" charset="2"/>
+              </a:rPr>
+              <a:t>()</a:t>
+            </a:r>
+            <a:r>
+              <a:rPr lang="en-US" sz="800" i="1" dirty="0">
+                <a:solidFill>
+                  <a:prstClr val="black"/>
+                </a:solidFill>
+                <a:latin typeface="Cascadia Code" panose="020B0609020000020004" pitchFamily="49" charset="0"/>
+                <a:cs typeface="Cascadia Code" panose="020B0609020000020004" pitchFamily="49" charset="0"/>
+                <a:sym typeface="Wingdings" panose="05000000000000000000" pitchFamily="2" charset="2"/>
+              </a:rPr>
+              <a:t>: POST https://kyc-api…/internal/v1/kyc/cases/from-application-submitted - this is the KYC API (coming up in next slide)</a:t>
+            </a:r>
+          </a:p>
+          <a:p>
+            <a:pPr marL="449263" lvl="1" indent="-171450">
+              <a:lnSpc>
+                <a:spcPct val="150000"/>
+              </a:lnSpc>
+              <a:buFont typeface="Courier New" panose="02070309020205020404" pitchFamily="49" charset="0"/>
+              <a:buChar char="o"/>
+              <a:defRPr/>
+            </a:pPr>
+            <a:r>
+              <a:rPr lang="en-US" sz="800" i="1" dirty="0">
+                <a:solidFill>
+                  <a:prstClr val="black"/>
+                </a:solidFill>
+                <a:latin typeface="Cascadia Code" panose="020B0609020000020004" pitchFamily="49" charset="0"/>
+                <a:cs typeface="Cascadia Code" panose="020B0609020000020004" pitchFamily="49" charset="0"/>
+                <a:sym typeface="Wingdings" panose="05000000000000000000" pitchFamily="2" charset="2"/>
+              </a:rPr>
+              <a:t>Authorization: Bearer &lt;machine-2-machine token&gt;</a:t>
+            </a:r>
+            <a:endParaRPr lang="en-US" sz="800" i="1" dirty="0">
+              <a:solidFill>
+                <a:schemeClr val="tx1"/>
+              </a:solidFill>
+              <a:latin typeface="Cascadia Code" panose="020B0609020000020004" pitchFamily="49" charset="0"/>
+              <a:cs typeface="Cascadia Code" panose="020B0609020000020004" pitchFamily="49" charset="0"/>
+              <a:sym typeface="Wingdings" panose="05000000000000000000" pitchFamily="2" charset="2"/>
+            </a:endParaRPr>
+          </a:p>
+          <a:p>
+            <a:pPr marL="449263" lvl="1" indent="-171450">
+              <a:lnSpc>
+                <a:spcPct val="150000"/>
+              </a:lnSpc>
+              <a:buFont typeface="Courier New" panose="02070309020205020404" pitchFamily="49" charset="0"/>
+              <a:buChar char="o"/>
+              <a:defRPr/>
+            </a:pPr>
+            <a:r>
+              <a:rPr lang="en-US" sz="800" i="1" dirty="0">
+                <a:solidFill>
+                  <a:schemeClr val="tx1"/>
+                </a:solidFill>
+                <a:latin typeface="Cascadia Code" panose="020B0609020000020004" pitchFamily="49" charset="0"/>
+                <a:cs typeface="Cascadia Code" panose="020B0609020000020004" pitchFamily="49" charset="0"/>
+                <a:sym typeface="Wingdings" panose="05000000000000000000" pitchFamily="2" charset="2"/>
+              </a:rPr>
+              <a:t>body = the application's facts, causationId = this message's ID (the Inbox key) and the workflow and correlation IDs</a:t>
+            </a:r>
+          </a:p>
+          <a:p>
+            <a:pPr marL="449263" lvl="1" indent="-171450">
+              <a:lnSpc>
+                <a:spcPct val="150000"/>
+              </a:lnSpc>
+              <a:buFont typeface="Courier New" panose="02070309020205020404" pitchFamily="49" charset="0"/>
+              <a:buChar char="o"/>
+              <a:defRPr/>
+            </a:pPr>
+            <a:r>
+              <a:rPr lang="en-US" sz="800" i="1" dirty="0">
+                <a:solidFill>
+                  <a:schemeClr val="tx1"/>
+                </a:solidFill>
+                <a:latin typeface="Cascadia Code" panose="020B0609020000020004" pitchFamily="49" charset="0"/>
+                <a:cs typeface="Cascadia Code" panose="020B0609020000020004" pitchFamily="49" charset="0"/>
+                <a:sym typeface="Wingdings" panose="05000000000000000000" pitchFamily="2" charset="2"/>
+              </a:rPr>
+              <a:t>through the resilience pipeline: 10 s per attempt, retries with back-off and jitter, a circuit breaker, a 60 s total budget</a:t>
+            </a:r>
+          </a:p>
+          <a:p>
+            <a:pPr marL="449263" lvl="1" indent="-171450">
+              <a:lnSpc>
+                <a:spcPct val="150000"/>
+              </a:lnSpc>
+              <a:buFont typeface="Courier New" panose="02070309020205020404" pitchFamily="49" charset="0"/>
+              <a:buChar char="o"/>
+              <a:defRPr/>
+            </a:pPr>
+            <a:r>
+              <a:rPr lang="en-US" sz="800" i="1" dirty="0">
+                <a:solidFill>
+                  <a:schemeClr val="tx1"/>
+                </a:solidFill>
+                <a:latin typeface="Cascadia Code" panose="020B0609020000020004" pitchFamily="49" charset="0"/>
+                <a:cs typeface="Cascadia Code" panose="020B0609020000020004" pitchFamily="49" charset="0"/>
+                <a:sym typeface="Wingdings" panose="05000000000000000000" pitchFamily="2" charset="2"/>
+              </a:rPr>
+              <a:t>401 → token invalidated, one retry with a fresh token</a:t>
+            </a:r>
+          </a:p>
+          <a:p>
+            <a:pPr marL="177800" indent="-88900">
+              <a:lnSpc>
+                <a:spcPct val="150000"/>
+              </a:lnSpc>
+              <a:buFont typeface="Arial" panose="020B0604020202020204" pitchFamily="34" charset="0"/>
+              <a:buChar char="•"/>
+              <a:defRPr/>
+            </a:pPr>
+            <a:r>
+              <a:rPr lang="en-US" sz="800" b="1" dirty="0">
+                <a:solidFill>
+                  <a:prstClr val="black"/>
+                </a:solidFill>
+                <a:effectLst>
+                  <a:outerShdw blurRad="38100" dist="38100" dir="2700000" algn="tl">
+                    <a:srgbClr val="000000">
+                      <a:alpha val="43137"/>
+                    </a:srgbClr>
+                  </a:outerShdw>
+                </a:effectLst>
+                <a:latin typeface="Cascadia Code" panose="020B0609020000020004" pitchFamily="49" charset="0"/>
+                <a:cs typeface="Cascadia Code" panose="020B0609020000020004" pitchFamily="49" charset="0"/>
+                <a:sym typeface="Wingdings" panose="05000000000000000000" pitchFamily="2" charset="2"/>
+              </a:rPr>
+              <a:t>Three outcomes</a:t>
+            </a:r>
+            <a:r>
+              <a:rPr lang="en-US" sz="800" i="1" dirty="0">
+                <a:solidFill>
+                  <a:prstClr val="black"/>
+                </a:solidFill>
+                <a:latin typeface="Cascadia Code" panose="020B0609020000020004" pitchFamily="49" charset="0"/>
+                <a:cs typeface="Cascadia Code" panose="020B0609020000020004" pitchFamily="49" charset="0"/>
+                <a:sym typeface="Wingdings" panose="05000000000000000000" pitchFamily="2" charset="2"/>
+              </a:rPr>
+              <a:t> – this decides the process’s committing offset to Kafka (</a:t>
+            </a:r>
+            <a:r>
+              <a:rPr lang="en-US" sz="800" b="1" dirty="0">
+                <a:solidFill>
+                  <a:prstClr val="black"/>
+                </a:solidFill>
+                <a:latin typeface="Cascadia Code" panose="020B0609020000020004" pitchFamily="49" charset="0"/>
+                <a:cs typeface="Cascadia Code" panose="020B0609020000020004" pitchFamily="49" charset="0"/>
+                <a:sym typeface="Wingdings" panose="05000000000000000000" pitchFamily="2" charset="2"/>
+              </a:rPr>
+              <a:t>Processed</a:t>
+            </a:r>
+            <a:r>
+              <a:rPr lang="en-US" sz="800" i="1" dirty="0">
+                <a:solidFill>
+                  <a:prstClr val="black"/>
+                </a:solidFill>
+                <a:latin typeface="Cascadia Code" panose="020B0609020000020004" pitchFamily="49" charset="0"/>
+                <a:cs typeface="Cascadia Code" panose="020B0609020000020004" pitchFamily="49" charset="0"/>
+                <a:sym typeface="Wingdings" panose="05000000000000000000" pitchFamily="2" charset="2"/>
+              </a:rPr>
+              <a:t>, </a:t>
+            </a:r>
+            <a:r>
+              <a:rPr lang="en-US" sz="800" b="1" dirty="0">
+                <a:solidFill>
+                  <a:prstClr val="black"/>
+                </a:solidFill>
+                <a:latin typeface="Cascadia Code" panose="020B0609020000020004" pitchFamily="49" charset="0"/>
+                <a:cs typeface="Cascadia Code" panose="020B0609020000020004" pitchFamily="49" charset="0"/>
+                <a:sym typeface="Wingdings" panose="05000000000000000000" pitchFamily="2" charset="2"/>
+              </a:rPr>
+              <a:t>Dead-letter</a:t>
+            </a:r>
+            <a:r>
+              <a:rPr lang="en-US" sz="800" i="1" dirty="0">
+                <a:solidFill>
+                  <a:prstClr val="black"/>
+                </a:solidFill>
+                <a:latin typeface="Cascadia Code" panose="020B0609020000020004" pitchFamily="49" charset="0"/>
+                <a:cs typeface="Cascadia Code" panose="020B0609020000020004" pitchFamily="49" charset="0"/>
+                <a:sym typeface="Wingdings" panose="05000000000000000000" pitchFamily="2" charset="2"/>
+              </a:rPr>
+              <a:t>, </a:t>
+            </a:r>
+            <a:r>
+              <a:rPr lang="en-US" sz="800" b="1" dirty="0">
+                <a:solidFill>
+                  <a:prstClr val="black"/>
+                </a:solidFill>
+                <a:latin typeface="Cascadia Code" panose="020B0609020000020004" pitchFamily="49" charset="0"/>
+                <a:cs typeface="Cascadia Code" panose="020B0609020000020004" pitchFamily="49" charset="0"/>
+                <a:sym typeface="Wingdings" panose="05000000000000000000" pitchFamily="2" charset="2"/>
+              </a:rPr>
+              <a:t>Transient</a:t>
+            </a:r>
+            <a:r>
+              <a:rPr lang="en-US" sz="800" i="1" dirty="0">
+                <a:solidFill>
+                  <a:prstClr val="black"/>
+                </a:solidFill>
+                <a:latin typeface="Cascadia Code" panose="020B0609020000020004" pitchFamily="49" charset="0"/>
+                <a:cs typeface="Cascadia Code" panose="020B0609020000020004" pitchFamily="49" charset="0"/>
+                <a:sym typeface="Wingdings" panose="05000000000000000000" pitchFamily="2" charset="2"/>
+              </a:rPr>
+              <a:t>):</a:t>
+            </a:r>
+          </a:p>
+          <a:p>
+            <a:pPr marL="449263" lvl="1" indent="-171450">
+              <a:lnSpc>
+                <a:spcPct val="150000"/>
+              </a:lnSpc>
+              <a:buFont typeface="Courier New" panose="02070309020205020404" pitchFamily="49" charset="0"/>
+              <a:buChar char="o"/>
+              <a:defRPr/>
+            </a:pPr>
+            <a:r>
+              <a:rPr lang="en-US" sz="800" i="1" dirty="0">
+                <a:solidFill>
+                  <a:prstClr val="black"/>
+                </a:solidFill>
+                <a:latin typeface="Cascadia Code" panose="020B0609020000020004" pitchFamily="49" charset="0"/>
+                <a:cs typeface="Cascadia Code" panose="020B0609020000020004" pitchFamily="49" charset="0"/>
+                <a:sym typeface="Wingdings" panose="05000000000000000000" pitchFamily="2" charset="2"/>
+              </a:rPr>
+              <a:t>2xx → Processed; just commit the offset to Kafka.</a:t>
+            </a:r>
+            <a:endParaRPr lang="en-US" sz="800" i="1" dirty="0">
+              <a:solidFill>
+                <a:schemeClr val="tx1"/>
+              </a:solidFill>
+              <a:latin typeface="Cascadia Code" panose="020B0609020000020004" pitchFamily="49" charset="0"/>
+              <a:cs typeface="Cascadia Code" panose="020B0609020000020004" pitchFamily="49" charset="0"/>
+              <a:sym typeface="Wingdings" panose="05000000000000000000" pitchFamily="2" charset="2"/>
+            </a:endParaRPr>
+          </a:p>
+          <a:p>
+            <a:pPr marL="449263" lvl="1" indent="-171450">
+              <a:lnSpc>
+                <a:spcPct val="150000"/>
+              </a:lnSpc>
+              <a:buFont typeface="Courier New" panose="02070309020205020404" pitchFamily="49" charset="0"/>
+              <a:buChar char="o"/>
+              <a:defRPr/>
+            </a:pPr>
+            <a:r>
+              <a:rPr lang="en-US" sz="800" i="1" dirty="0">
+                <a:solidFill>
+                  <a:schemeClr val="tx1"/>
+                </a:solidFill>
+                <a:latin typeface="Cascadia Code" panose="020B0609020000020004" pitchFamily="49" charset="0"/>
+                <a:cs typeface="Cascadia Code" panose="020B0609020000020004" pitchFamily="49" charset="0"/>
+                <a:sym typeface="Wingdings" panose="05000000000000000000" pitchFamily="2" charset="2"/>
+              </a:rPr>
+              <a:t>401 / 403 / 408 / 429 / 5xx → Transient (TransientProcessingException) - commit nothing: seek back to the same message and retry after a back-off. Nothing is skipped.</a:t>
+            </a:r>
+          </a:p>
+          <a:p>
+            <a:pPr marL="457200" lvl="2" indent="-171450">
+              <a:lnSpc>
+                <a:spcPct val="150000"/>
+              </a:lnSpc>
+              <a:buFont typeface="Courier New" panose="02070309020205020404" pitchFamily="49" charset="0"/>
+              <a:buChar char="o"/>
+              <a:defRPr/>
+            </a:pPr>
+            <a:r>
+              <a:rPr lang="en-US" sz="800" i="1" dirty="0">
+                <a:solidFill>
+                  <a:prstClr val="black"/>
+                </a:solidFill>
+                <a:latin typeface="Cascadia Code" panose="020B0609020000020004" pitchFamily="49" charset="0"/>
+                <a:cs typeface="Cascadia Code" panose="020B0609020000020004" pitchFamily="49" charset="0"/>
+                <a:sym typeface="Wingdings" panose="05000000000000000000" pitchFamily="2" charset="2"/>
+              </a:rPr>
+              <a:t>any other 4xx → Dead-letter - first write a copy to its dead-letter topic, then commit the offset;</a:t>
+            </a:r>
+          </a:p>
+        </p:txBody>
+      </p:sp>
+      <p:sp>
+        <p:nvSpPr>
+          <p:cNvPr id="4" name="Title 24">
+            <a:extLst>
+              <a:ext uri="{FF2B5EF4-FFF2-40B4-BE49-F238E27FC236}">
+                <a16:creationId xmlns:a16="http://schemas.microsoft.com/office/drawing/2014/main" id="{49D412E9-A31E-2658-0D26-004FDD71D3E8}"/>
+              </a:ext>
+            </a:extLst>
+          </p:cNvPr>
+          <p:cNvSpPr>
+            <a:spLocks noGrp="1"/>
+          </p:cNvSpPr>
+          <p:nvPr>
+            <p:ph type="title"/>
+          </p:nvPr>
+        </p:nvSpPr>
+        <p:spPr>
+          <a:xfrm>
+            <a:off x="133350" y="131074"/>
+            <a:ext cx="11912600" cy="460968"/>
+          </a:xfrm>
+          <a:noFill/>
+          <a:ln>
+            <a:noFill/>
+          </a:ln>
+        </p:spPr>
+        <p:txBody>
+          <a:bodyPr lIns="36576" tIns="18288">
+            <a:noAutofit/>
+          </a:bodyPr>
+          <a:lstStyle/>
+          <a:p>
+            <a:r>
+              <a:rPr lang="en-US" sz="2500" b="1" i="0" dirty="0">
+                <a:solidFill>
+                  <a:srgbClr val="162B4A"/>
+                </a:solidFill>
+                <a:effectLst>
+                  <a:outerShdw blurRad="38100" dist="38100" dir="2700000" algn="tl">
+                    <a:srgbClr val="000000">
+                      <a:alpha val="43137"/>
+                    </a:srgbClr>
+                  </a:outerShdw>
+                </a:effectLst>
+                <a:latin typeface="Aptos Display" panose="020F0302020204030204" pitchFamily="34" charset="0"/>
+                <a:ea typeface="Calibri Light" panose="020F0302020204030204" pitchFamily="34" charset="0"/>
+                <a:cs typeface="Calibri Light" panose="020F0302020204030204" pitchFamily="34" charset="0"/>
+              </a:rPr>
+              <a:t>Kafka → Subscriber → KYC API: opening the KYC case</a:t>
+            </a:r>
+            <a:endParaRPr lang="en-IN" sz="2500" b="1" i="0" dirty="0">
+              <a:solidFill>
+                <a:srgbClr val="162B4A"/>
+              </a:solidFill>
+              <a:effectLst>
+                <a:outerShdw blurRad="38100" dist="38100" dir="2700000" algn="tl">
+                  <a:srgbClr val="000000">
+                    <a:alpha val="43137"/>
+                  </a:srgbClr>
+                </a:outerShdw>
+              </a:effectLst>
+              <a:latin typeface="Aptos Display" panose="020F0302020204030204" pitchFamily="34" charset="0"/>
+              <a:ea typeface="Calibri Light" panose="020F0302020204030204" pitchFamily="34" charset="0"/>
+              <a:cs typeface="Calibri Light" panose="020F0302020204030204" pitchFamily="34" charset="0"/>
+            </a:endParaRPr>
+          </a:p>
+        </p:txBody>
+      </p:sp>
+      <p:sp>
+        <p:nvSpPr>
+          <p:cNvPr id="2" name="Rectangle: Rounded Corners 1">
+            <a:extLst>
+              <a:ext uri="{FF2B5EF4-FFF2-40B4-BE49-F238E27FC236}">
+                <a16:creationId xmlns:a16="http://schemas.microsoft.com/office/drawing/2014/main" id="{D5867405-B01C-A7C3-20D2-1F477BBE25E5}"/>
+              </a:ext>
+            </a:extLst>
+          </p:cNvPr>
+          <p:cNvSpPr/>
+          <p:nvPr/>
+        </p:nvSpPr>
+        <p:spPr>
+          <a:xfrm>
+            <a:off x="192243" y="5571068"/>
+            <a:ext cx="11707657" cy="584824"/>
+          </a:xfrm>
+          <a:prstGeom prst="roundRect">
+            <a:avLst>
+              <a:gd name="adj" fmla="val 21432"/>
+            </a:avLst>
+          </a:prstGeom>
+          <a:solidFill>
+            <a:schemeClr val="accent6">
+              <a:lumMod val="20000"/>
+              <a:lumOff val="80000"/>
+            </a:schemeClr>
+          </a:solidFill>
+          <a:ln>
+            <a:noFill/>
+          </a:ln>
+          <a:effectLst>
+            <a:outerShdw blurRad="63500" sx="102000" sy="102000" algn="ctr" rotWithShape="0">
+              <a:prstClr val="black">
+                <a:alpha val="40000"/>
+              </a:prstClr>
+            </a:outerShdw>
+          </a:effectLst>
+        </p:spPr>
+        <p:style>
+          <a:lnRef idx="2">
+            <a:schemeClr val="accent3">
+              <a:shade val="15000"/>
+            </a:schemeClr>
+          </a:lnRef>
+          <a:fillRef idx="1">
+            <a:schemeClr val="accent3"/>
+          </a:fillRef>
+          <a:effectRef idx="0">
+            <a:schemeClr val="accent3"/>
+          </a:effectRef>
+          <a:fontRef idx="minor">
+            <a:schemeClr val="lt1"/>
+          </a:fontRef>
+        </p:style>
+        <p:txBody>
+          <a:bodyPr rtlCol="0" anchor="t"/>
+          <a:lstStyle/>
+          <a:p>
+            <a:pPr marL="88900" marR="0" lvl="0" algn="l" defTabSz="914400" rtl="0" eaLnBrk="1" fontAlgn="auto" latinLnBrk="0" hangingPunct="1">
+              <a:lnSpc>
+                <a:spcPct val="150000"/>
+              </a:lnSpc>
+              <a:spcBef>
+                <a:spcPts val="0"/>
+              </a:spcBef>
+              <a:spcAft>
+                <a:spcPts val="0"/>
+              </a:spcAft>
+              <a:buClrTx/>
+              <a:buSzTx/>
+              <a:tabLst/>
+              <a:defRPr/>
+            </a:pPr>
+            <a:r>
+              <a:rPr kumimoji="0" lang="en-US" sz="800" b="1" i="1" u="sng" strike="noStrike" kern="1200" cap="none" spc="0" normalizeH="0" baseline="0" noProof="0" dirty="0">
+                <a:ln>
+                  <a:noFill/>
+                </a:ln>
+                <a:solidFill>
+                  <a:prstClr val="black"/>
+                </a:solidFill>
+                <a:effectLst/>
+                <a:uLnTx/>
+                <a:uFillTx/>
+                <a:latin typeface="Cascadia Code" panose="020B0609020000020004" pitchFamily="49" charset="0"/>
+                <a:ea typeface="+mn-ea"/>
+                <a:cs typeface="Cascadia Code" panose="020B0609020000020004" pitchFamily="49" charset="0"/>
+                <a:sym typeface="Wingdings" panose="05000000000000000000" pitchFamily="2" charset="2"/>
+              </a:rPr>
+              <a:t>Note</a:t>
+            </a:r>
+            <a:r>
+              <a:rPr kumimoji="0" lang="en-US" sz="800" i="1" strike="noStrike" kern="1200" cap="none" spc="0" normalizeH="0" baseline="0" noProof="0" dirty="0">
+                <a:ln>
+                  <a:noFill/>
+                </a:ln>
+                <a:solidFill>
+                  <a:prstClr val="black"/>
+                </a:solidFill>
+                <a:effectLst/>
+                <a:uLnTx/>
+                <a:uFillTx/>
+                <a:latin typeface="Cascadia Code" panose="020B0609020000020004" pitchFamily="49" charset="0"/>
+                <a:ea typeface="+mn-ea"/>
+                <a:cs typeface="Cascadia Code" panose="020B0609020000020004" pitchFamily="49" charset="0"/>
+                <a:sym typeface="Wingdings" panose="05000000000000000000" pitchFamily="2" charset="2"/>
+              </a:rPr>
+              <a:t>: Once the KYC Case Opening Subscriber’s intended task is complete, it only logs, commits its offset to Kafka and, for a permanent failure, writes a copy to its dead-letter topic. No database at all; its machine token is cached in memory only.</a:t>
+            </a:r>
+            <a:endParaRPr lang="en-US" sz="800" b="1" i="1" u="sng" dirty="0">
+              <a:solidFill>
+                <a:schemeClr val="tx1"/>
+              </a:solidFill>
+              <a:latin typeface="Cascadia Code" panose="020B0609020000020004" pitchFamily="49" charset="0"/>
+              <a:cs typeface="Cascadia Code" panose="020B0609020000020004" pitchFamily="49" charset="0"/>
+              <a:sym typeface="Wingdings" panose="05000000000000000000" pitchFamily="2" charset="2"/>
+            </a:endParaRPr>
+          </a:p>
+        </p:txBody>
+      </p:sp>
+    </p:spTree>
+    <p:extLst>
+      <p:ext uri="{BB962C8B-B14F-4D97-AF65-F5344CB8AC3E}">
+        <p14:creationId xmlns:p14="http://schemas.microsoft.com/office/powerpoint/2010/main" val="2732910939"/>
+      </p:ext>
+    </p:extLst>
+  </p:cSld>
+  <p:clrMapOvr>
+    <a:masterClrMapping/>
+  </p:clrMapOvr>
+</p:sld>
+</file>
+
+<file path=ppt/slides/slide9.xml><?xml version="1.0" encoding="utf-8"?>
+<p:sld xmlns:a="http://schemas.openxmlformats.org/drawingml/2006/main" xmlns:r="http://schemas.openxmlformats.org/officeDocument/2006/relationships" xmlns:p="http://schemas.openxmlformats.org/presentationml/2006/main">
+  <p:cSld>
+    <p:spTree>
+      <p:nvGrpSpPr>
+        <p:cNvPr id="1" name="">
+          <a:extLst>
+            <a:ext uri="{FF2B5EF4-FFF2-40B4-BE49-F238E27FC236}">
+              <a16:creationId xmlns:a16="http://schemas.microsoft.com/office/drawing/2014/main" id="{64ED7C26-042E-1CBD-978F-73E7649BFDAE}"/>
+            </a:ext>
+          </a:extLst>
+        </p:cNvPr>
+        <p:cNvGrpSpPr/>
+        <p:nvPr/>
+      </p:nvGrpSpPr>
+      <p:grpSpPr>
+        <a:xfrm>
+          <a:off x="0" y="0"/>
+          <a:ext cx="0" cy="0"/>
+          <a:chOff x="0" y="0"/>
+          <a:chExt cx="0" cy="0"/>
+        </a:xfrm>
+      </p:grpSpPr>
+      <p:sp>
+        <p:nvSpPr>
+          <p:cNvPr id="26" name="Rectangle: Rounded Corners 25">
+            <a:extLst>
+              <a:ext uri="{FF2B5EF4-FFF2-40B4-BE49-F238E27FC236}">
+                <a16:creationId xmlns:a16="http://schemas.microsoft.com/office/drawing/2014/main" id="{72BB6961-B599-69D9-4367-34A20FBD771F}"/>
+              </a:ext>
+            </a:extLst>
+          </p:cNvPr>
+          <p:cNvSpPr/>
+          <p:nvPr/>
+        </p:nvSpPr>
+        <p:spPr>
+          <a:xfrm>
+            <a:off x="1115484" y="3187859"/>
+            <a:ext cx="9920816" cy="2861110"/>
+          </a:xfrm>
+          <a:prstGeom prst="roundRect">
+            <a:avLst>
+              <a:gd name="adj" fmla="val 4865"/>
+            </a:avLst>
+          </a:prstGeom>
+          <a:solidFill>
+            <a:schemeClr val="accent6">
+              <a:lumMod val="20000"/>
+              <a:lumOff val="80000"/>
+            </a:schemeClr>
+          </a:solidFill>
+          <a:ln>
+            <a:noFill/>
+          </a:ln>
+          <a:effectLst>
+            <a:outerShdw blurRad="63500" sx="102000" sy="102000" algn="ctr" rotWithShape="0">
+              <a:prstClr val="black">
+                <a:alpha val="40000"/>
+              </a:prstClr>
+            </a:outerShdw>
+          </a:effectLst>
+        </p:spPr>
+        <p:style>
+          <a:lnRef idx="2">
+            <a:schemeClr val="accent3">
+              <a:shade val="15000"/>
+            </a:schemeClr>
+          </a:lnRef>
+          <a:fillRef idx="1">
+            <a:schemeClr val="accent3"/>
+          </a:fillRef>
+          <a:effectRef idx="0">
+            <a:schemeClr val="accent3"/>
+          </a:effectRef>
+          <a:fontRef idx="minor">
+            <a:schemeClr val="lt1"/>
+          </a:fontRef>
+        </p:style>
+        <p:txBody>
+          <a:bodyPr rtlCol="0" anchor="t"/>
+          <a:lstStyle/>
+          <a:p>
+            <a:pPr>
+              <a:lnSpc>
+                <a:spcPct val="150000"/>
+              </a:lnSpc>
+            </a:pPr>
+            <a:r>
+              <a:rPr lang="en-IN" sz="900" b="1" u="sng" dirty="0">
+                <a:solidFill>
+                  <a:schemeClr val="tx1"/>
+                </a:solidFill>
+                <a:latin typeface="Cascadia Code" panose="020B0609020000020004" pitchFamily="49" charset="0"/>
+                <a:cs typeface="Cascadia Code" panose="020B0609020000020004" pitchFamily="49" charset="0"/>
+              </a:rPr>
+              <a:t>Architectural Patterns</a:t>
+            </a:r>
+            <a:r>
+              <a:rPr lang="en-IN" sz="900" b="1" dirty="0">
+                <a:solidFill>
+                  <a:schemeClr val="tx1"/>
+                </a:solidFill>
+                <a:latin typeface="Cascadia Code" panose="020B0609020000020004" pitchFamily="49" charset="0"/>
+                <a:cs typeface="Cascadia Code" panose="020B0609020000020004" pitchFamily="49" charset="0"/>
+              </a:rPr>
+              <a:t>:</a:t>
+            </a:r>
+          </a:p>
+          <a:p>
+            <a:pPr>
+              <a:lnSpc>
+                <a:spcPct val="150000"/>
+              </a:lnSpc>
+            </a:pPr>
+            <a:endParaRPr lang="en-IN" sz="900" b="1" dirty="0">
+              <a:solidFill>
+                <a:schemeClr val="tx1"/>
+              </a:solidFill>
+              <a:latin typeface="Cascadia Code" panose="020B0609020000020004" pitchFamily="49" charset="0"/>
+              <a:cs typeface="Cascadia Code" panose="020B0609020000020004" pitchFamily="49" charset="0"/>
+            </a:endParaRPr>
+          </a:p>
+          <a:p>
+            <a:pPr marL="228600" indent="-228600">
+              <a:lnSpc>
+                <a:spcPct val="150000"/>
+              </a:lnSpc>
+              <a:buAutoNum type="arabicPeriod"/>
+            </a:pPr>
+            <a:r>
+              <a:rPr lang="en-US" sz="900" b="1" dirty="0">
+                <a:solidFill>
+                  <a:schemeClr val="tx1"/>
+                </a:solidFill>
+                <a:latin typeface="Cascadia Code" panose="020B0609020000020004" pitchFamily="49" charset="0"/>
+                <a:cs typeface="Cascadia Code" panose="020B0609020000020004" pitchFamily="49" charset="0"/>
+              </a:rPr>
+              <a:t>Competing Consumers / consumer groups</a:t>
+            </a:r>
+            <a:r>
+              <a:rPr lang="en-US" sz="900" dirty="0">
+                <a:solidFill>
+                  <a:schemeClr val="tx1"/>
+                </a:solidFill>
+                <a:latin typeface="Cascadia Code" panose="020B0609020000020004" pitchFamily="49" charset="0"/>
+                <a:cs typeface="Cascadia Code" panose="020B0609020000020004" pitchFamily="49" charset="0"/>
+              </a:rPr>
+              <a:t>: instances of the subscriber share the topic's partitions; each partition goes to one instance</a:t>
+            </a:r>
+          </a:p>
+          <a:p>
+            <a:pPr marL="228600" indent="-228600">
+              <a:lnSpc>
+                <a:spcPct val="150000"/>
+              </a:lnSpc>
+              <a:buAutoNum type="arabicPeriod"/>
+            </a:pPr>
+            <a:r>
+              <a:rPr lang="en-US" sz="900" b="1" dirty="0">
+                <a:solidFill>
+                  <a:schemeClr val="tx1"/>
+                </a:solidFill>
+                <a:latin typeface="Cascadia Code" panose="020B0609020000020004" pitchFamily="49" charset="0"/>
+                <a:cs typeface="Cascadia Code" panose="020B0609020000020004" pitchFamily="49" charset="0"/>
+              </a:rPr>
+              <a:t>Manual offset commit</a:t>
+            </a:r>
+            <a:r>
+              <a:rPr lang="en-US" sz="900" dirty="0">
+                <a:solidFill>
+                  <a:schemeClr val="tx1"/>
+                </a:solidFill>
+                <a:latin typeface="Cascadia Code" panose="020B0609020000020004" pitchFamily="49" charset="0"/>
+                <a:cs typeface="Cascadia Code" panose="020B0609020000020004" pitchFamily="49" charset="0"/>
+              </a:rPr>
+              <a:t>: commit only after the message is handled (at-least-once delivery)</a:t>
+            </a:r>
+          </a:p>
+          <a:p>
+            <a:pPr marL="228600" indent="-228600">
+              <a:lnSpc>
+                <a:spcPct val="150000"/>
+              </a:lnSpc>
+              <a:buAutoNum type="arabicPeriod"/>
+            </a:pPr>
+            <a:r>
+              <a:rPr lang="en-US" sz="900" b="1" dirty="0">
+                <a:solidFill>
+                  <a:schemeClr val="tx1"/>
+                </a:solidFill>
+                <a:latin typeface="Cascadia Code" panose="020B0609020000020004" pitchFamily="49" charset="0"/>
+                <a:cs typeface="Cascadia Code" panose="020B0609020000020004" pitchFamily="49" charset="0"/>
+              </a:rPr>
+              <a:t>Dead Letter Channel</a:t>
+            </a:r>
+            <a:r>
+              <a:rPr lang="en-US" sz="900" dirty="0">
+                <a:solidFill>
+                  <a:schemeClr val="tx1"/>
+                </a:solidFill>
+                <a:latin typeface="Cascadia Code" panose="020B0609020000020004" pitchFamily="49" charset="0"/>
+                <a:cs typeface="Cascadia Code" panose="020B0609020000020004" pitchFamily="49" charset="0"/>
+              </a:rPr>
+              <a:t>: for permanent failures only, with the reason in headers</a:t>
+            </a:r>
+          </a:p>
+          <a:p>
+            <a:pPr marL="228600" indent="-228600">
+              <a:lnSpc>
+                <a:spcPct val="150000"/>
+              </a:lnSpc>
+              <a:buAutoNum type="arabicPeriod"/>
+            </a:pPr>
+            <a:r>
+              <a:rPr lang="en-US" sz="900" b="1" dirty="0">
+                <a:solidFill>
+                  <a:schemeClr val="tx1"/>
+                </a:solidFill>
+                <a:latin typeface="Cascadia Code" panose="020B0609020000020004" pitchFamily="49" charset="0"/>
+                <a:cs typeface="Cascadia Code" panose="020B0609020000020004" pitchFamily="49" charset="0"/>
+              </a:rPr>
+              <a:t>Retry in place with exponential back-off (Seek back)</a:t>
+            </a:r>
+            <a:r>
+              <a:rPr lang="en-US" sz="900" dirty="0">
+                <a:solidFill>
+                  <a:schemeClr val="tx1"/>
+                </a:solidFill>
+                <a:latin typeface="Cascadia Code" panose="020B0609020000020004" pitchFamily="49" charset="0"/>
+                <a:cs typeface="Cascadia Code" panose="020B0609020000020004" pitchFamily="49" charset="0"/>
+              </a:rPr>
+              <a:t>: transient failures, order preserved</a:t>
+            </a:r>
+          </a:p>
+          <a:p>
+            <a:pPr marL="228600" indent="-228600">
+              <a:lnSpc>
+                <a:spcPct val="150000"/>
+              </a:lnSpc>
+              <a:buAutoNum type="arabicPeriod"/>
+            </a:pPr>
+            <a:r>
+              <a:rPr lang="en-US" sz="900" b="1" dirty="0">
+                <a:solidFill>
+                  <a:schemeClr val="tx1"/>
+                </a:solidFill>
+                <a:latin typeface="Cascadia Code" panose="020B0609020000020004" pitchFamily="49" charset="0"/>
+                <a:cs typeface="Cascadia Code" panose="020B0609020000020004" pitchFamily="49" charset="0"/>
+              </a:rPr>
+              <a:t>Circuit Breaker + timeouts + bounded retries</a:t>
+            </a:r>
+            <a:r>
+              <a:rPr lang="en-US" sz="900" dirty="0">
+                <a:solidFill>
+                  <a:schemeClr val="tx1"/>
+                </a:solidFill>
+                <a:latin typeface="Cascadia Code" panose="020B0609020000020004" pitchFamily="49" charset="0"/>
+                <a:cs typeface="Cascadia Code" panose="020B0609020000020004" pitchFamily="49" charset="0"/>
+              </a:rPr>
+              <a:t>: the resilience pipeline on the API call</a:t>
+            </a:r>
+          </a:p>
+          <a:p>
+            <a:pPr marL="228600" indent="-228600">
+              <a:lnSpc>
+                <a:spcPct val="150000"/>
+              </a:lnSpc>
+              <a:buAutoNum type="arabicPeriod"/>
+            </a:pPr>
+            <a:r>
+              <a:rPr lang="en-US" sz="900" b="1" dirty="0">
+                <a:solidFill>
+                  <a:schemeClr val="tx1"/>
+                </a:solidFill>
+                <a:latin typeface="Cascadia Code" panose="020B0609020000020004" pitchFamily="49" charset="0"/>
+                <a:cs typeface="Cascadia Code" panose="020B0609020000020004" pitchFamily="49" charset="0"/>
+              </a:rPr>
+              <a:t>Message Translator / Anti-Corruption Layer</a:t>
+            </a:r>
+            <a:r>
+              <a:rPr lang="en-US" sz="900" dirty="0">
+                <a:solidFill>
+                  <a:schemeClr val="tx1"/>
+                </a:solidFill>
+                <a:latin typeface="Cascadia Code" panose="020B0609020000020004" pitchFamily="49" charset="0"/>
+                <a:cs typeface="Cascadia Code" panose="020B0609020000020004" pitchFamily="49" charset="0"/>
+              </a:rPr>
+              <a:t>: event envelope → API request contract</a:t>
+            </a:r>
+          </a:p>
+          <a:p>
+            <a:pPr marL="228600" indent="-228600">
+              <a:lnSpc>
+                <a:spcPct val="150000"/>
+              </a:lnSpc>
+              <a:buAutoNum type="arabicPeriod"/>
+            </a:pPr>
+            <a:r>
+              <a:rPr lang="en-US" sz="900" b="1" dirty="0">
+                <a:solidFill>
+                  <a:schemeClr val="tx1"/>
+                </a:solidFill>
+                <a:latin typeface="Cascadia Code" panose="020B0609020000020004" pitchFamily="49" charset="0"/>
+                <a:cs typeface="Cascadia Code" panose="020B0609020000020004" pitchFamily="49" charset="0"/>
+              </a:rPr>
+              <a:t>Client Credentials (M2M) + client pinning</a:t>
+            </a:r>
+            <a:r>
+              <a:rPr lang="en-US" sz="900" dirty="0">
+                <a:solidFill>
+                  <a:schemeClr val="tx1"/>
+                </a:solidFill>
+                <a:latin typeface="Cascadia Code" panose="020B0609020000020004" pitchFamily="49" charset="0"/>
+                <a:cs typeface="Cascadia Code" panose="020B0609020000020004" pitchFamily="49" charset="0"/>
+              </a:rPr>
+              <a:t>: its own identity, one scope, accepted only from this client</a:t>
+            </a:r>
+          </a:p>
+          <a:p>
+            <a:pPr marL="228600" indent="-228600">
+              <a:lnSpc>
+                <a:spcPct val="150000"/>
+              </a:lnSpc>
+              <a:buAutoNum type="arabicPeriod"/>
+            </a:pPr>
+            <a:r>
+              <a:rPr lang="en-US" sz="900" b="1" dirty="0">
+                <a:solidFill>
+                  <a:schemeClr val="tx1"/>
+                </a:solidFill>
+                <a:latin typeface="Cascadia Code" panose="020B0609020000020004" pitchFamily="49" charset="0"/>
+                <a:cs typeface="Cascadia Code" panose="020B0609020000020004" pitchFamily="49" charset="0"/>
+              </a:rPr>
+              <a:t>Correlation Identifier</a:t>
+            </a:r>
+            <a:r>
+              <a:rPr lang="en-US" sz="900" dirty="0">
+                <a:solidFill>
+                  <a:schemeClr val="tx1"/>
+                </a:solidFill>
+                <a:latin typeface="Cascadia Code" panose="020B0609020000020004" pitchFamily="49" charset="0"/>
+                <a:cs typeface="Cascadia Code" panose="020B0609020000020004" pitchFamily="49" charset="0"/>
+              </a:rPr>
+              <a:t>: workflow, correlation and causation IDs carried on</a:t>
+            </a:r>
+          </a:p>
+          <a:p>
+            <a:pPr marL="228600" indent="-228600">
+              <a:lnSpc>
+                <a:spcPct val="150000"/>
+              </a:lnSpc>
+              <a:buAutoNum type="arabicPeriod"/>
+            </a:pPr>
+            <a:r>
+              <a:rPr lang="en-US" sz="900" b="1" dirty="0">
+                <a:solidFill>
+                  <a:schemeClr val="tx1"/>
+                </a:solidFill>
+                <a:latin typeface="Cascadia Code" panose="020B0609020000020004" pitchFamily="49" charset="0"/>
+                <a:cs typeface="Cascadia Code" panose="020B0609020000020004" pitchFamily="49" charset="0"/>
+              </a:rPr>
+              <a:t>Distributed tracing</a:t>
+            </a:r>
+            <a:r>
+              <a:rPr lang="en-US" sz="900" dirty="0">
+                <a:solidFill>
+                  <a:schemeClr val="tx1"/>
+                </a:solidFill>
+                <a:latin typeface="Cascadia Code" panose="020B0609020000020004" pitchFamily="49" charset="0"/>
+                <a:cs typeface="Cascadia Code" panose="020B0609020000020004" pitchFamily="49" charset="0"/>
+              </a:rPr>
+              <a:t>: the process span continues the trace from the traceparent header</a:t>
+            </a:r>
+          </a:p>
+          <a:p>
+            <a:pPr marL="228600" indent="-228600">
+              <a:lnSpc>
+                <a:spcPct val="150000"/>
+              </a:lnSpc>
+              <a:buAutoNum type="arabicPeriod"/>
+            </a:pPr>
+            <a:r>
+              <a:rPr lang="en-US" sz="900" b="1" dirty="0">
+                <a:solidFill>
+                  <a:schemeClr val="tx1"/>
+                </a:solidFill>
+                <a:latin typeface="Cascadia Code" panose="020B0609020000020004" pitchFamily="49" charset="0"/>
+                <a:cs typeface="Cascadia Code" panose="020B0609020000020004" pitchFamily="49" charset="0"/>
+              </a:rPr>
+              <a:t>Stateless worker</a:t>
+            </a:r>
+            <a:r>
+              <a:rPr lang="en-US" sz="900" dirty="0">
+                <a:solidFill>
+                  <a:schemeClr val="tx1"/>
+                </a:solidFill>
+                <a:latin typeface="Cascadia Code" panose="020B0609020000020004" pitchFamily="49" charset="0"/>
+                <a:cs typeface="Cascadia Code" panose="020B0609020000020004" pitchFamily="49" charset="0"/>
+              </a:rPr>
+              <a:t>: no database; its only durable state is Kafka's offset</a:t>
+            </a:r>
+          </a:p>
+          <a:p>
+            <a:pPr marL="228600" indent="-228600">
+              <a:lnSpc>
+                <a:spcPct val="150000"/>
+              </a:lnSpc>
+              <a:buAutoNum type="arabicPeriod"/>
+            </a:pPr>
+            <a:r>
+              <a:rPr lang="en-US" sz="900" b="1" dirty="0">
+                <a:solidFill>
+                  <a:schemeClr val="tx1"/>
+                </a:solidFill>
+                <a:latin typeface="Cascadia Code" panose="020B0609020000020004" pitchFamily="49" charset="0"/>
+                <a:cs typeface="Cascadia Code" panose="020B0609020000020004" pitchFamily="49" charset="0"/>
+              </a:rPr>
+              <a:t>Least privilege</a:t>
+            </a:r>
+            <a:r>
+              <a:rPr lang="en-US" sz="900" dirty="0">
+                <a:solidFill>
+                  <a:schemeClr val="tx1"/>
+                </a:solidFill>
+                <a:latin typeface="Cascadia Code" panose="020B0609020000020004" pitchFamily="49" charset="0"/>
+                <a:cs typeface="Cascadia Code" panose="020B0609020000020004" pitchFamily="49" charset="0"/>
+              </a:rPr>
+              <a:t>: Kafka ACLs (read its topic, its group, write only its DLQ) and one OAuth scope</a:t>
+            </a:r>
+          </a:p>
+        </p:txBody>
+      </p:sp>
+      <p:sp>
+        <p:nvSpPr>
+          <p:cNvPr id="27" name="Rectangle: Rounded Corners 26">
+            <a:extLst>
+              <a:ext uri="{FF2B5EF4-FFF2-40B4-BE49-F238E27FC236}">
+                <a16:creationId xmlns:a16="http://schemas.microsoft.com/office/drawing/2014/main" id="{E34C1014-5A42-99E6-6AB6-AA0129D9C807}"/>
+              </a:ext>
+            </a:extLst>
+          </p:cNvPr>
+          <p:cNvSpPr/>
+          <p:nvPr/>
+        </p:nvSpPr>
+        <p:spPr>
+          <a:xfrm>
+            <a:off x="1115485" y="1070567"/>
+            <a:ext cx="9920816" cy="1871134"/>
+          </a:xfrm>
+          <a:prstGeom prst="roundRect">
+            <a:avLst>
+              <a:gd name="adj" fmla="val 7957"/>
+            </a:avLst>
+          </a:prstGeom>
+          <a:solidFill>
+            <a:schemeClr val="accent6">
+              <a:lumMod val="20000"/>
+              <a:lumOff val="80000"/>
+            </a:schemeClr>
+          </a:solidFill>
+          <a:ln>
+            <a:noFill/>
+          </a:ln>
+          <a:effectLst>
+            <a:outerShdw blurRad="63500" sx="102000" sy="102000" algn="ctr" rotWithShape="0">
+              <a:prstClr val="black">
+                <a:alpha val="40000"/>
+              </a:prstClr>
+            </a:outerShdw>
+          </a:effectLst>
+        </p:spPr>
+        <p:style>
+          <a:lnRef idx="2">
+            <a:schemeClr val="accent3">
+              <a:shade val="15000"/>
+            </a:schemeClr>
+          </a:lnRef>
+          <a:fillRef idx="1">
+            <a:schemeClr val="accent3"/>
+          </a:fillRef>
+          <a:effectRef idx="0">
+            <a:schemeClr val="accent3"/>
+          </a:effectRef>
+          <a:fontRef idx="minor">
+            <a:schemeClr val="lt1"/>
+          </a:fontRef>
+        </p:style>
+        <p:txBody>
+          <a:bodyPr rtlCol="0" anchor="t"/>
+          <a:lstStyle/>
+          <a:p>
+            <a:pPr>
+              <a:lnSpc>
+                <a:spcPct val="150000"/>
+              </a:lnSpc>
+            </a:pPr>
+            <a:r>
+              <a:rPr lang="en-IN" sz="800" b="1" u="sng" dirty="0">
+                <a:solidFill>
+                  <a:schemeClr val="tx1"/>
+                </a:solidFill>
+                <a:latin typeface="Cascadia Code" panose="020B0609020000020004" pitchFamily="49" charset="0"/>
+                <a:cs typeface="Cascadia Code" panose="020B0609020000020004" pitchFamily="49" charset="0"/>
+              </a:rPr>
+              <a:t>Architectural Components</a:t>
+            </a:r>
+            <a:r>
+              <a:rPr lang="en-IN" sz="800" b="1" dirty="0">
+                <a:solidFill>
+                  <a:schemeClr val="tx1"/>
+                </a:solidFill>
+                <a:latin typeface="Cascadia Code" panose="020B0609020000020004" pitchFamily="49" charset="0"/>
+                <a:cs typeface="Cascadia Code" panose="020B0609020000020004" pitchFamily="49" charset="0"/>
+              </a:rPr>
+              <a:t>:</a:t>
+            </a:r>
+          </a:p>
+          <a:p>
+            <a:pPr>
+              <a:lnSpc>
+                <a:spcPct val="150000"/>
+              </a:lnSpc>
+            </a:pPr>
+            <a:endParaRPr lang="en-IN" sz="800" b="1" dirty="0">
+              <a:solidFill>
+                <a:schemeClr val="tx1"/>
+              </a:solidFill>
+              <a:latin typeface="Cascadia Code" panose="020B0609020000020004" pitchFamily="49" charset="0"/>
+              <a:cs typeface="Cascadia Code" panose="020B0609020000020004" pitchFamily="49" charset="0"/>
+            </a:endParaRPr>
+          </a:p>
+          <a:p>
+            <a:pPr marL="228600" indent="-228600">
+              <a:lnSpc>
+                <a:spcPct val="150000"/>
+              </a:lnSpc>
+              <a:buAutoNum type="arabicPeriod"/>
+            </a:pPr>
+            <a:r>
+              <a:rPr lang="en-IN" sz="800" b="1" dirty="0">
+                <a:solidFill>
+                  <a:schemeClr val="tx1"/>
+                </a:solidFill>
+                <a:latin typeface="Cascadia Code" panose="020B0609020000020004" pitchFamily="49" charset="0"/>
+                <a:cs typeface="Cascadia Code" panose="020B0609020000020004" pitchFamily="49" charset="0"/>
+              </a:rPr>
+              <a:t>Background worker</a:t>
+            </a:r>
+            <a:r>
+              <a:rPr lang="en-IN" sz="800" dirty="0">
+                <a:solidFill>
+                  <a:schemeClr val="tx1"/>
+                </a:solidFill>
+                <a:latin typeface="Cascadia Code" panose="020B0609020000020004" pitchFamily="49" charset="0"/>
+                <a:cs typeface="Cascadia Code" panose="020B0609020000020004" pitchFamily="49" charset="0"/>
+              </a:rPr>
+              <a:t> (.NET Worker Service, a hosted service)</a:t>
+            </a:r>
+          </a:p>
+          <a:p>
+            <a:pPr marL="228600" indent="-228600">
+              <a:lnSpc>
+                <a:spcPct val="150000"/>
+              </a:lnSpc>
+              <a:buAutoNum type="arabicPeriod"/>
+            </a:pPr>
+            <a:r>
+              <a:rPr lang="en-IN" sz="800" b="1" dirty="0">
+                <a:solidFill>
+                  <a:schemeClr val="tx1"/>
+                </a:solidFill>
+                <a:latin typeface="Cascadia Code" panose="020B0609020000020004" pitchFamily="49" charset="0"/>
+                <a:cs typeface="Cascadia Code" panose="020B0609020000020004" pitchFamily="49" charset="0"/>
+              </a:rPr>
+              <a:t>Kafka consumer</a:t>
+            </a:r>
+            <a:r>
+              <a:rPr lang="en-IN" sz="800" dirty="0">
+                <a:solidFill>
+                  <a:schemeClr val="tx1"/>
+                </a:solidFill>
+                <a:latin typeface="Cascadia Code" panose="020B0609020000020004" pitchFamily="49" charset="0"/>
+                <a:cs typeface="Cascadia Code" panose="020B0609020000020004" pitchFamily="49" charset="0"/>
+              </a:rPr>
+              <a:t>, in a consumer group (customer-</a:t>
+            </a:r>
+            <a:r>
+              <a:rPr lang="en-IN" sz="800" dirty="0" err="1">
+                <a:solidFill>
+                  <a:schemeClr val="tx1"/>
+                </a:solidFill>
+                <a:latin typeface="Cascadia Code" panose="020B0609020000020004" pitchFamily="49" charset="0"/>
+                <a:cs typeface="Cascadia Code" panose="020B0609020000020004" pitchFamily="49" charset="0"/>
+              </a:rPr>
+              <a:t>kyc.case</a:t>
+            </a:r>
+            <a:r>
+              <a:rPr lang="en-IN" sz="800" dirty="0">
+                <a:solidFill>
+                  <a:schemeClr val="tx1"/>
+                </a:solidFill>
+                <a:latin typeface="Cascadia Code" panose="020B0609020000020004" pitchFamily="49" charset="0"/>
+                <a:cs typeface="Cascadia Code" panose="020B0609020000020004" pitchFamily="49" charset="0"/>
+              </a:rPr>
+              <a:t>-opening-subscriber)</a:t>
+            </a:r>
+          </a:p>
+          <a:p>
+            <a:pPr marL="228600" indent="-228600">
+              <a:lnSpc>
+                <a:spcPct val="150000"/>
+              </a:lnSpc>
+              <a:buAutoNum type="arabicPeriod"/>
+            </a:pPr>
+            <a:r>
+              <a:rPr lang="en-IN" sz="800" b="1" dirty="0">
+                <a:solidFill>
+                  <a:schemeClr val="tx1"/>
+                </a:solidFill>
+                <a:latin typeface="Cascadia Code" panose="020B0609020000020004" pitchFamily="49" charset="0"/>
+                <a:cs typeface="Cascadia Code" panose="020B0609020000020004" pitchFamily="49" charset="0"/>
+              </a:rPr>
+              <a:t>Shared consume loop</a:t>
+            </a:r>
+            <a:r>
+              <a:rPr lang="en-IN" sz="800" dirty="0">
+                <a:solidFill>
+                  <a:schemeClr val="tx1"/>
+                </a:solidFill>
+                <a:latin typeface="Cascadia Code" panose="020B0609020000020004" pitchFamily="49" charset="0"/>
+                <a:cs typeface="Cascadia Code" panose="020B0609020000020004" pitchFamily="49" charset="0"/>
+              </a:rPr>
+              <a:t> (</a:t>
+            </a:r>
+            <a:r>
+              <a:rPr lang="en-IN" sz="800" dirty="0" err="1">
+                <a:solidFill>
+                  <a:schemeClr val="tx1"/>
+                </a:solidFill>
+                <a:latin typeface="Cascadia Code" panose="020B0609020000020004" pitchFamily="49" charset="0"/>
+                <a:cs typeface="Cascadia Code" panose="020B0609020000020004" pitchFamily="49" charset="0"/>
+              </a:rPr>
+              <a:t>KafkaSubscriberHostedService</a:t>
+            </a:r>
+            <a:r>
+              <a:rPr lang="en-IN" sz="800" dirty="0">
+                <a:solidFill>
+                  <a:schemeClr val="tx1"/>
+                </a:solidFill>
+                <a:latin typeface="Cascadia Code" panose="020B0609020000020004" pitchFamily="49" charset="0"/>
+                <a:cs typeface="Cascadia Code" panose="020B0609020000020004" pitchFamily="49" charset="0"/>
+              </a:rPr>
+              <a:t>)</a:t>
+            </a:r>
+          </a:p>
+          <a:p>
+            <a:pPr marL="228600" indent="-228600">
+              <a:lnSpc>
+                <a:spcPct val="150000"/>
+              </a:lnSpc>
+              <a:buAutoNum type="arabicPeriod"/>
+            </a:pPr>
+            <a:r>
+              <a:rPr lang="en-IN" sz="800" b="1" dirty="0">
+                <a:solidFill>
+                  <a:schemeClr val="tx1"/>
+                </a:solidFill>
+                <a:latin typeface="Cascadia Code" panose="020B0609020000020004" pitchFamily="49" charset="0"/>
+                <a:cs typeface="Cascadia Code" panose="020B0609020000020004" pitchFamily="49" charset="0"/>
+              </a:rPr>
+              <a:t>Message processor</a:t>
+            </a:r>
+            <a:r>
+              <a:rPr lang="en-IN" sz="800" dirty="0">
+                <a:solidFill>
+                  <a:schemeClr val="tx1"/>
+                </a:solidFill>
+                <a:latin typeface="Cascadia Code" panose="020B0609020000020004" pitchFamily="49" charset="0"/>
+                <a:cs typeface="Cascadia Code" panose="020B0609020000020004" pitchFamily="49" charset="0"/>
+              </a:rPr>
+              <a:t> (</a:t>
+            </a:r>
+            <a:r>
+              <a:rPr lang="en-IN" sz="800" dirty="0" err="1">
+                <a:solidFill>
+                  <a:schemeClr val="tx1"/>
+                </a:solidFill>
+                <a:latin typeface="Cascadia Code" panose="020B0609020000020004" pitchFamily="49" charset="0"/>
+                <a:cs typeface="Cascadia Code" panose="020B0609020000020004" pitchFamily="49" charset="0"/>
+              </a:rPr>
+              <a:t>KycCaseOpeningProcessor</a:t>
+            </a:r>
+            <a:r>
+              <a:rPr lang="en-IN" sz="800" dirty="0">
+                <a:solidFill>
+                  <a:schemeClr val="tx1"/>
+                </a:solidFill>
+                <a:latin typeface="Cascadia Code" panose="020B0609020000020004" pitchFamily="49" charset="0"/>
+                <a:cs typeface="Cascadia Code" panose="020B0609020000020004" pitchFamily="49" charset="0"/>
+              </a:rPr>
+              <a:t>)</a:t>
+            </a:r>
+          </a:p>
+          <a:p>
+            <a:pPr marL="228600" indent="-228600">
+              <a:lnSpc>
+                <a:spcPct val="150000"/>
+              </a:lnSpc>
+              <a:buAutoNum type="arabicPeriod"/>
+            </a:pPr>
+            <a:r>
+              <a:rPr lang="en-IN" sz="800" b="1" dirty="0">
+                <a:solidFill>
+                  <a:schemeClr val="tx1"/>
+                </a:solidFill>
+                <a:latin typeface="Cascadia Code" panose="020B0609020000020004" pitchFamily="49" charset="0"/>
+                <a:cs typeface="Cascadia Code" panose="020B0609020000020004" pitchFamily="49" charset="0"/>
+              </a:rPr>
+              <a:t>M2M token client</a:t>
+            </a:r>
+            <a:r>
+              <a:rPr lang="en-IN" sz="800" dirty="0">
+                <a:solidFill>
+                  <a:schemeClr val="tx1"/>
+                </a:solidFill>
+                <a:latin typeface="Cascadia Code" panose="020B0609020000020004" pitchFamily="49" charset="0"/>
+                <a:cs typeface="Cascadia Code" panose="020B0609020000020004" pitchFamily="49" charset="0"/>
+              </a:rPr>
+              <a:t> (CachedM2MTokenClient, OAuth 2.0 client credentials)</a:t>
+            </a:r>
+          </a:p>
+          <a:p>
+            <a:pPr marL="228600" indent="-228600">
+              <a:lnSpc>
+                <a:spcPct val="150000"/>
+              </a:lnSpc>
+              <a:buAutoNum type="arabicPeriod"/>
+            </a:pPr>
+            <a:r>
+              <a:rPr lang="en-IN" sz="800" b="1" dirty="0">
+                <a:solidFill>
+                  <a:schemeClr val="tx1"/>
+                </a:solidFill>
+                <a:latin typeface="Cascadia Code" panose="020B0609020000020004" pitchFamily="49" charset="0"/>
+                <a:cs typeface="Cascadia Code" panose="020B0609020000020004" pitchFamily="49" charset="0"/>
+              </a:rPr>
+              <a:t>HTTP client with a resilience pipeline</a:t>
+            </a:r>
+            <a:r>
+              <a:rPr lang="en-IN" sz="800" dirty="0">
+                <a:solidFill>
+                  <a:schemeClr val="tx1"/>
+                </a:solidFill>
+                <a:latin typeface="Cascadia Code" panose="020B0609020000020004" pitchFamily="49" charset="0"/>
+                <a:cs typeface="Cascadia Code" panose="020B0609020000020004" pitchFamily="49" charset="0"/>
+              </a:rPr>
+              <a:t> (Polly, via </a:t>
+            </a:r>
+            <a:r>
+              <a:rPr lang="en-IN" sz="800" dirty="0" err="1">
+                <a:solidFill>
+                  <a:schemeClr val="tx1"/>
+                </a:solidFill>
+                <a:latin typeface="Cascadia Code" panose="020B0609020000020004" pitchFamily="49" charset="0"/>
+                <a:cs typeface="Cascadia Code" panose="020B0609020000020004" pitchFamily="49" charset="0"/>
+              </a:rPr>
+              <a:t>AddStandardResilienceHandler</a:t>
+            </a:r>
+            <a:r>
+              <a:rPr lang="en-IN" sz="800" dirty="0">
+                <a:solidFill>
+                  <a:schemeClr val="tx1"/>
+                </a:solidFill>
+                <a:latin typeface="Cascadia Code" panose="020B0609020000020004" pitchFamily="49" charset="0"/>
+                <a:cs typeface="Cascadia Code" panose="020B0609020000020004" pitchFamily="49" charset="0"/>
+              </a:rPr>
+              <a:t>)</a:t>
+            </a:r>
+          </a:p>
+          <a:p>
+            <a:pPr marL="228600" indent="-228600">
+              <a:lnSpc>
+                <a:spcPct val="150000"/>
+              </a:lnSpc>
+              <a:buAutoNum type="arabicPeriod"/>
+            </a:pPr>
+            <a:r>
+              <a:rPr lang="en-IN" sz="800" b="1" dirty="0">
+                <a:solidFill>
+                  <a:schemeClr val="tx1"/>
+                </a:solidFill>
+                <a:latin typeface="Cascadia Code" panose="020B0609020000020004" pitchFamily="49" charset="0"/>
+                <a:cs typeface="Cascadia Code" panose="020B0609020000020004" pitchFamily="49" charset="0"/>
+              </a:rPr>
+              <a:t>Dead-letter topic</a:t>
+            </a:r>
+            <a:r>
+              <a:rPr lang="en-IN" sz="800" dirty="0">
+                <a:solidFill>
+                  <a:schemeClr val="tx1"/>
+                </a:solidFill>
+                <a:latin typeface="Cascadia Code" panose="020B0609020000020004" pitchFamily="49" charset="0"/>
+                <a:cs typeface="Cascadia Code" panose="020B0609020000020004" pitchFamily="49" charset="0"/>
+              </a:rPr>
+              <a:t> (customer-</a:t>
+            </a:r>
+            <a:r>
+              <a:rPr lang="en-IN" sz="800" dirty="0" err="1">
+                <a:solidFill>
+                  <a:schemeClr val="tx1"/>
+                </a:solidFill>
+                <a:latin typeface="Cascadia Code" panose="020B0609020000020004" pitchFamily="49" charset="0"/>
+                <a:cs typeface="Cascadia Code" panose="020B0609020000020004" pitchFamily="49" charset="0"/>
+              </a:rPr>
+              <a:t>kyc.case</a:t>
+            </a:r>
+            <a:r>
+              <a:rPr lang="en-IN" sz="800" dirty="0">
+                <a:solidFill>
+                  <a:schemeClr val="tx1"/>
+                </a:solidFill>
+                <a:latin typeface="Cascadia Code" panose="020B0609020000020004" pitchFamily="49" charset="0"/>
+                <a:cs typeface="Cascadia Code" panose="020B0609020000020004" pitchFamily="49" charset="0"/>
+              </a:rPr>
+              <a:t>-opening-</a:t>
+            </a:r>
+            <a:r>
+              <a:rPr lang="en-IN" sz="800" dirty="0" err="1">
+                <a:solidFill>
+                  <a:schemeClr val="tx1"/>
+                </a:solidFill>
+                <a:latin typeface="Cascadia Code" panose="020B0609020000020004" pitchFamily="49" charset="0"/>
+                <a:cs typeface="Cascadia Code" panose="020B0609020000020004" pitchFamily="49" charset="0"/>
+              </a:rPr>
+              <a:t>subscriber.dlq</a:t>
+            </a:r>
+            <a:r>
+              <a:rPr lang="en-IN" sz="800" dirty="0">
+                <a:solidFill>
+                  <a:schemeClr val="tx1"/>
+                </a:solidFill>
+                <a:latin typeface="Cascadia Code" panose="020B0609020000020004" pitchFamily="49" charset="0"/>
+                <a:cs typeface="Cascadia Code" panose="020B0609020000020004" pitchFamily="49" charset="0"/>
+              </a:rPr>
+              <a:t>)</a:t>
+            </a:r>
+            <a:br>
+              <a:rPr lang="en-IN" sz="800" dirty="0">
+                <a:solidFill>
+                  <a:schemeClr val="tx1"/>
+                </a:solidFill>
+                <a:latin typeface="Cascadia Code" panose="020B0609020000020004" pitchFamily="49" charset="0"/>
+                <a:cs typeface="Cascadia Code" panose="020B0609020000020004" pitchFamily="49" charset="0"/>
+              </a:rPr>
+            </a:br>
+            <a:endParaRPr lang="en-IN" sz="800" dirty="0">
+              <a:solidFill>
+                <a:schemeClr val="tx1"/>
+              </a:solidFill>
+              <a:latin typeface="Cascadia Code" panose="020B0609020000020004" pitchFamily="49" charset="0"/>
+              <a:cs typeface="Cascadia Code" panose="020B0609020000020004" pitchFamily="49" charset="0"/>
+            </a:endParaRPr>
+          </a:p>
+        </p:txBody>
+      </p:sp>
+      <p:sp>
+        <p:nvSpPr>
+          <p:cNvPr id="4" name="Title 24">
+            <a:extLst>
+              <a:ext uri="{FF2B5EF4-FFF2-40B4-BE49-F238E27FC236}">
+                <a16:creationId xmlns:a16="http://schemas.microsoft.com/office/drawing/2014/main" id="{49D412E9-A31E-2658-0D26-004FDD71D3E8}"/>
+              </a:ext>
+            </a:extLst>
+          </p:cNvPr>
+          <p:cNvSpPr>
+            <a:spLocks noGrp="1"/>
+          </p:cNvSpPr>
+          <p:nvPr>
+            <p:ph type="title"/>
+          </p:nvPr>
+        </p:nvSpPr>
+        <p:spPr>
+          <a:xfrm>
+            <a:off x="133350" y="131074"/>
+            <a:ext cx="11912600" cy="460968"/>
+          </a:xfrm>
+          <a:noFill/>
+          <a:ln>
+            <a:noFill/>
+          </a:ln>
+        </p:spPr>
+        <p:txBody>
+          <a:bodyPr lIns="36576" tIns="18288">
+            <a:noAutofit/>
+          </a:bodyPr>
+          <a:lstStyle/>
+          <a:p>
+            <a:r>
+              <a:rPr lang="en-US" sz="2500" b="1" i="0" dirty="0">
+                <a:solidFill>
+                  <a:srgbClr val="162B4A"/>
+                </a:solidFill>
+                <a:effectLst>
+                  <a:outerShdw blurRad="38100" dist="38100" dir="2700000" algn="tl">
+                    <a:srgbClr val="000000">
+                      <a:alpha val="43137"/>
+                    </a:srgbClr>
+                  </a:outerShdw>
+                </a:effectLst>
+                <a:latin typeface="Aptos Display" panose="020F0302020204030204" pitchFamily="34" charset="0"/>
+                <a:ea typeface="Calibri Light" panose="020F0302020204030204" pitchFamily="34" charset="0"/>
+                <a:cs typeface="Calibri Light" panose="020F0302020204030204" pitchFamily="34" charset="0"/>
+              </a:rPr>
+              <a:t>Kafka → Subscriber → KYC API: opening the KYC case</a:t>
+            </a:r>
+            <a:endParaRPr lang="en-IN" sz="2500" b="1" i="0" dirty="0">
+              <a:solidFill>
+                <a:srgbClr val="162B4A"/>
+              </a:solidFill>
+              <a:effectLst>
+                <a:outerShdw blurRad="38100" dist="38100" dir="2700000" algn="tl">
+                  <a:srgbClr val="000000">
+                    <a:alpha val="43137"/>
+                  </a:srgbClr>
+                </a:outerShdw>
+              </a:effectLst>
+              <a:latin typeface="Aptos Display" panose="020F0302020204030204" pitchFamily="34" charset="0"/>
+              <a:ea typeface="Calibri Light" panose="020F0302020204030204" pitchFamily="34" charset="0"/>
+              <a:cs typeface="Calibri Light" panose="020F0302020204030204" pitchFamily="34" charset="0"/>
+            </a:endParaRPr>
+          </a:p>
+        </p:txBody>
+      </p:sp>
+    </p:spTree>
+    <p:extLst>
+      <p:ext uri="{BB962C8B-B14F-4D97-AF65-F5344CB8AC3E}">
+        <p14:creationId xmlns:p14="http://schemas.microsoft.com/office/powerpoint/2010/main" val="1563681465"/>
       </p:ext>
     </p:extLst>
   </p:cSld>
